--- a/screen.pptx
+++ b/screen.pptx
@@ -6,6 +6,7 @@
   </p:sldMasterIdLst>
   <p:sldIdLst>
     <p:sldId id="256" r:id="rId2"/>
+    <p:sldId id="257" r:id="rId3"/>
   </p:sldIdLst>
   <p:sldSz cx="12192000" cy="6858000"/>
   <p:notesSz cx="6858000" cy="9144000"/>
@@ -104,6 +105,11 @@
       </a:defRPr>
     </a:lvl9pPr>
   </p:defaultTextStyle>
+  <p:extLst>
+    <p:ext uri="{EFAFB233-063F-42B5-8137-9DF3F51BA10A}">
+      <p15:sldGuideLst xmlns:p15="http://schemas.microsoft.com/office/powerpoint/2012/main"/>
+    </p:ext>
+  </p:extLst>
 </p:presentation>
 </file>
 
@@ -254,7 +260,7 @@
           <a:p>
             <a:fld id="{F2AE2E2B-653B-4E97-8FB5-068137AA788A}" type="datetimeFigureOut">
               <a:rPr lang="ru-RU" smtClean="0"/>
-              <a:t>13.09.2026</a:t>
+              <a:t>16.09.2026</a:t>
             </a:fld>
             <a:endParaRPr lang="ru-RU"/>
           </a:p>
@@ -452,7 +458,7 @@
           <a:p>
             <a:fld id="{F2AE2E2B-653B-4E97-8FB5-068137AA788A}" type="datetimeFigureOut">
               <a:rPr lang="ru-RU" smtClean="0"/>
-              <a:t>13.09.2026</a:t>
+              <a:t>16.09.2026</a:t>
             </a:fld>
             <a:endParaRPr lang="ru-RU"/>
           </a:p>
@@ -660,7 +666,7 @@
           <a:p>
             <a:fld id="{F2AE2E2B-653B-4E97-8FB5-068137AA788A}" type="datetimeFigureOut">
               <a:rPr lang="ru-RU" smtClean="0"/>
-              <a:t>13.09.2026</a:t>
+              <a:t>16.09.2026</a:t>
             </a:fld>
             <a:endParaRPr lang="ru-RU"/>
           </a:p>
@@ -858,7 +864,7 @@
           <a:p>
             <a:fld id="{F2AE2E2B-653B-4E97-8FB5-068137AA788A}" type="datetimeFigureOut">
               <a:rPr lang="ru-RU" smtClean="0"/>
-              <a:t>13.09.2026</a:t>
+              <a:t>16.09.2026</a:t>
             </a:fld>
             <a:endParaRPr lang="ru-RU"/>
           </a:p>
@@ -1133,7 +1139,7 @@
           <a:p>
             <a:fld id="{F2AE2E2B-653B-4E97-8FB5-068137AA788A}" type="datetimeFigureOut">
               <a:rPr lang="ru-RU" smtClean="0"/>
-              <a:t>13.09.2026</a:t>
+              <a:t>16.09.2026</a:t>
             </a:fld>
             <a:endParaRPr lang="ru-RU"/>
           </a:p>
@@ -1398,7 +1404,7 @@
           <a:p>
             <a:fld id="{F2AE2E2B-653B-4E97-8FB5-068137AA788A}" type="datetimeFigureOut">
               <a:rPr lang="ru-RU" smtClean="0"/>
-              <a:t>13.09.2026</a:t>
+              <a:t>16.09.2026</a:t>
             </a:fld>
             <a:endParaRPr lang="ru-RU"/>
           </a:p>
@@ -1810,7 +1816,7 @@
           <a:p>
             <a:fld id="{F2AE2E2B-653B-4E97-8FB5-068137AA788A}" type="datetimeFigureOut">
               <a:rPr lang="ru-RU" smtClean="0"/>
-              <a:t>13.09.2026</a:t>
+              <a:t>16.09.2026</a:t>
             </a:fld>
             <a:endParaRPr lang="ru-RU"/>
           </a:p>
@@ -1951,7 +1957,7 @@
           <a:p>
             <a:fld id="{F2AE2E2B-653B-4E97-8FB5-068137AA788A}" type="datetimeFigureOut">
               <a:rPr lang="ru-RU" smtClean="0"/>
-              <a:t>13.09.2026</a:t>
+              <a:t>16.09.2026</a:t>
             </a:fld>
             <a:endParaRPr lang="ru-RU"/>
           </a:p>
@@ -2064,7 +2070,7 @@
           <a:p>
             <a:fld id="{F2AE2E2B-653B-4E97-8FB5-068137AA788A}" type="datetimeFigureOut">
               <a:rPr lang="ru-RU" smtClean="0"/>
-              <a:t>13.09.2026</a:t>
+              <a:t>16.09.2026</a:t>
             </a:fld>
             <a:endParaRPr lang="ru-RU"/>
           </a:p>
@@ -2375,7 +2381,7 @@
           <a:p>
             <a:fld id="{F2AE2E2B-653B-4E97-8FB5-068137AA788A}" type="datetimeFigureOut">
               <a:rPr lang="ru-RU" smtClean="0"/>
-              <a:t>13.09.2026</a:t>
+              <a:t>16.09.2026</a:t>
             </a:fld>
             <a:endParaRPr lang="ru-RU"/>
           </a:p>
@@ -2663,7 +2669,7 @@
           <a:p>
             <a:fld id="{F2AE2E2B-653B-4E97-8FB5-068137AA788A}" type="datetimeFigureOut">
               <a:rPr lang="ru-RU" smtClean="0"/>
-              <a:t>13.09.2026</a:t>
+              <a:t>16.09.2026</a:t>
             </a:fld>
             <a:endParaRPr lang="ru-RU"/>
           </a:p>
@@ -2904,7 +2910,7 @@
           <a:p>
             <a:fld id="{F2AE2E2B-653B-4E97-8FB5-068137AA788A}" type="datetimeFigureOut">
               <a:rPr lang="ru-RU" smtClean="0"/>
-              <a:t>13.09.2026</a:t>
+              <a:t>16.09.2026</a:t>
             </a:fld>
             <a:endParaRPr lang="ru-RU"/>
           </a:p>
@@ -3343,7 +3349,7 @@
         </p:nvSpPr>
         <p:spPr>
           <a:xfrm>
-            <a:off x="344470" y="179045"/>
+            <a:off x="586957" y="426813"/>
             <a:ext cx="1988045" cy="338554"/>
           </a:xfrm>
           <a:prstGeom prst="rect">
@@ -3393,7 +3399,7 @@
         </p:nvSpPr>
         <p:spPr>
           <a:xfrm>
-            <a:off x="334592" y="559463"/>
+            <a:off x="586957" y="765367"/>
             <a:ext cx="2294218" cy="400110"/>
           </a:xfrm>
           <a:prstGeom prst="rect">
@@ -3443,7 +3449,7 @@
         </p:nvSpPr>
         <p:spPr>
           <a:xfrm>
-            <a:off x="2754572" y="701977"/>
+            <a:off x="311814" y="865061"/>
             <a:ext cx="180000" cy="180000"/>
           </a:xfrm>
           <a:prstGeom prst="ellipse">
@@ -3497,7 +3503,7 @@
         </p:nvGrpSpPr>
         <p:grpSpPr>
           <a:xfrm>
-            <a:off x="4918623" y="2163185"/>
+            <a:off x="593206" y="1193150"/>
             <a:ext cx="2220031" cy="677108"/>
             <a:chOff x="1613042" y="4339696"/>
             <a:chExt cx="2220031" cy="677108"/>
@@ -3677,7 +3683,7 @@
               <a:lstStyle/>
               <a:p>
                 <a:pPr algn="ctr"/>
-                <a:endParaRPr lang="ru-RU"/>
+                <a:endParaRPr lang="ru-RU" dirty="0"/>
               </a:p>
             </p:txBody>
           </p:sp>
@@ -4306,7 +4312,7 @@
         </p:nvGrpSpPr>
         <p:grpSpPr>
           <a:xfrm>
-            <a:off x="4918623" y="3129251"/>
+            <a:off x="3113531" y="844884"/>
             <a:ext cx="2170921" cy="1015662"/>
             <a:chOff x="1787320" y="5101202"/>
             <a:chExt cx="2170921" cy="1015662"/>
@@ -5520,10 +5526,10 @@
         </p:nvGrpSpPr>
         <p:grpSpPr>
           <a:xfrm>
-            <a:off x="228943" y="1136290"/>
-            <a:ext cx="2968436" cy="2674991"/>
+            <a:off x="586957" y="2083821"/>
+            <a:ext cx="2968436" cy="3754049"/>
             <a:chOff x="476052" y="3334900"/>
-            <a:chExt cx="2968436" cy="2039526"/>
+            <a:chExt cx="2968436" cy="2862245"/>
           </a:xfrm>
         </p:grpSpPr>
         <p:sp>
@@ -5541,7 +5547,7 @@
           <p:spPr>
             <a:xfrm>
               <a:off x="476052" y="3334900"/>
-              <a:ext cx="2968436" cy="2039526"/>
+              <a:ext cx="2968436" cy="2862245"/>
             </a:xfrm>
             <a:prstGeom prst="roundRect">
               <a:avLst>
@@ -5578,7 +5584,7 @@
             <a:lstStyle/>
             <a:p>
               <a:pPr algn="ctr"/>
-              <a:endParaRPr lang="ru-RU"/>
+              <a:endParaRPr lang="ru-RU" dirty="0"/>
             </a:p>
           </p:txBody>
         </p:sp>
@@ -6381,174 +6387,86 @@
           </p:txBody>
         </p:sp>
       </p:grpSp>
-      <p:grpSp>
-        <p:nvGrpSpPr>
-          <p:cNvPr id="192" name="Группа 191">
+      <p:sp>
+        <p:nvSpPr>
+          <p:cNvPr id="114" name="TextBox 113">
             <a:extLst>
               <a:ext uri="{FF2B5EF4-FFF2-40B4-BE49-F238E27FC236}">
-                <a16:creationId xmlns:a16="http://schemas.microsoft.com/office/drawing/2014/main" id="{168CFE59-6233-2A23-FFEA-28553CF3770E}"/>
+                <a16:creationId xmlns:a16="http://schemas.microsoft.com/office/drawing/2014/main" id="{91B53A70-3BB4-C1A1-68CE-D6D2467FF533}"/>
               </a:ext>
             </a:extLst>
           </p:cNvPr>
-          <p:cNvGrpSpPr/>
+          <p:cNvSpPr txBox="1"/>
           <p:nvPr/>
-        </p:nvGrpSpPr>
-        <p:grpSpPr>
+        </p:nvSpPr>
+        <p:spPr>
           <a:xfrm>
-            <a:off x="8994621" y="176468"/>
-            <a:ext cx="2968436" cy="1690459"/>
-            <a:chOff x="4306382" y="3334899"/>
-            <a:chExt cx="2968436" cy="1690459"/>
+            <a:off x="5603341" y="487959"/>
+            <a:ext cx="1266693" cy="338554"/>
           </a:xfrm>
-        </p:grpSpPr>
-        <p:sp>
-          <p:nvSpPr>
-            <p:cNvPr id="112" name="Прямоугольник: скругленные углы 111">
-              <a:extLst>
-                <a:ext uri="{FF2B5EF4-FFF2-40B4-BE49-F238E27FC236}">
-                  <a16:creationId xmlns:a16="http://schemas.microsoft.com/office/drawing/2014/main" id="{5F7F6D48-B3BB-1254-B5BA-70F5DCE70AFB}"/>
-                </a:ext>
-              </a:extLst>
-            </p:cNvPr>
-            <p:cNvSpPr/>
-            <p:nvPr/>
-          </p:nvSpPr>
-          <p:spPr>
-            <a:xfrm>
-              <a:off x="4306382" y="3334899"/>
-              <a:ext cx="2968436" cy="1690459"/>
-            </a:xfrm>
-            <a:prstGeom prst="roundRect">
-              <a:avLst>
-                <a:gd name="adj" fmla="val 7999"/>
-              </a:avLst>
-            </a:prstGeom>
-            <a:noFill/>
-            <a:ln w="19050">
-              <a:solidFill>
-                <a:schemeClr val="accent3">
-                  <a:lumMod val="75000"/>
-                </a:schemeClr>
-              </a:solidFill>
-            </a:ln>
-          </p:spPr>
-          <p:style>
-            <a:lnRef idx="2">
-              <a:schemeClr val="accent1">
-                <a:shade val="15000"/>
-              </a:schemeClr>
-            </a:lnRef>
-            <a:fillRef idx="1">
-              <a:schemeClr val="accent1"/>
-            </a:fillRef>
-            <a:effectRef idx="0">
-              <a:schemeClr val="accent1"/>
-            </a:effectRef>
-            <a:fontRef idx="minor">
-              <a:schemeClr val="lt1"/>
-            </a:fontRef>
-          </p:style>
-          <p:txBody>
-            <a:bodyPr rtlCol="0" anchor="ctr"/>
-            <a:lstStyle/>
-            <a:p>
-              <a:pPr algn="ctr"/>
-              <a:endParaRPr lang="ru-RU"/>
-            </a:p>
-          </p:txBody>
-        </p:sp>
-        <p:sp>
-          <p:nvSpPr>
-            <p:cNvPr id="114" name="TextBox 113">
-              <a:extLst>
-                <a:ext uri="{FF2B5EF4-FFF2-40B4-BE49-F238E27FC236}">
-                  <a16:creationId xmlns:a16="http://schemas.microsoft.com/office/drawing/2014/main" id="{91B53A70-3BB4-C1A1-68CE-D6D2467FF533}"/>
-                </a:ext>
-              </a:extLst>
-            </p:cNvPr>
-            <p:cNvSpPr txBox="1"/>
-            <p:nvPr/>
-          </p:nvSpPr>
-          <p:spPr>
-            <a:xfrm>
-              <a:off x="4402290" y="3423729"/>
-              <a:ext cx="1266693" cy="338554"/>
-            </a:xfrm>
-            <a:prstGeom prst="rect">
-              <a:avLst/>
-            </a:prstGeom>
-            <a:noFill/>
-          </p:spPr>
-          <p:txBody>
-            <a:bodyPr wrap="none" rtlCol="0">
-              <a:spAutoFit/>
-            </a:bodyPr>
-            <a:lstStyle/>
-            <a:p>
-              <a:r>
-                <a:rPr lang="en-US" sz="1600" dirty="0">
-                  <a:solidFill>
-                    <a:schemeClr val="bg1"/>
-                  </a:solidFill>
-                  <a:latin typeface="Cascadia Mono" panose="020B0609020000020004" pitchFamily="49" charset="0"/>
-                  <a:ea typeface="Cascadia Mono" panose="020B0609020000020004" pitchFamily="49" charset="0"/>
-                  <a:cs typeface="Cascadia Mono" panose="020B0609020000020004" pitchFamily="49" charset="0"/>
-                </a:rPr>
-                <a:t>Converter</a:t>
-              </a:r>
-              <a:endParaRPr lang="ru-RU" sz="1600" dirty="0">
+          <a:prstGeom prst="rect">
+            <a:avLst/>
+          </a:prstGeom>
+          <a:noFill/>
+        </p:spPr>
+        <p:txBody>
+          <a:bodyPr wrap="none" rtlCol="0">
+            <a:spAutoFit/>
+          </a:bodyPr>
+          <a:lstStyle/>
+          <a:p>
+            <a:r>
+              <a:rPr lang="en-US" sz="1600" dirty="0">
                 <a:solidFill>
                   <a:schemeClr val="bg1"/>
                 </a:solidFill>
                 <a:latin typeface="Cascadia Mono" panose="020B0609020000020004" pitchFamily="49" charset="0"/>
                 <a:ea typeface="Cascadia Mono" panose="020B0609020000020004" pitchFamily="49" charset="0"/>
                 <a:cs typeface="Cascadia Mono" panose="020B0609020000020004" pitchFamily="49" charset="0"/>
-              </a:endParaRPr>
-            </a:p>
-          </p:txBody>
-        </p:sp>
-        <p:sp>
-          <p:nvSpPr>
-            <p:cNvPr id="118" name="TextBox 117">
-              <a:extLst>
-                <a:ext uri="{FF2B5EF4-FFF2-40B4-BE49-F238E27FC236}">
-                  <a16:creationId xmlns:a16="http://schemas.microsoft.com/office/drawing/2014/main" id="{EACBCD6F-3CF3-5BF9-9D1E-364ED45A771F}"/>
-                </a:ext>
-              </a:extLst>
-            </p:cNvPr>
-            <p:cNvSpPr txBox="1"/>
-            <p:nvPr/>
-          </p:nvSpPr>
-          <p:spPr>
-            <a:xfrm>
-              <a:off x="4402290" y="3779294"/>
-              <a:ext cx="1773217" cy="338554"/>
-            </a:xfrm>
-            <a:prstGeom prst="rect">
-              <a:avLst/>
-            </a:prstGeom>
-            <a:noFill/>
-          </p:spPr>
-          <p:txBody>
-            <a:bodyPr wrap="square" rtlCol="0">
-              <a:spAutoFit/>
-            </a:bodyPr>
-            <a:lstStyle/>
-            <a:p>
-              <a:r>
-                <a:rPr lang="en-US" sz="1600" dirty="0">
-                  <a:solidFill>
-                    <a:schemeClr val="bg1">
-                      <a:lumMod val="85000"/>
-                    </a:schemeClr>
-                  </a:solidFill>
-                  <a:latin typeface="Cascadia Mono" panose="020B0609020000020004" pitchFamily="49" charset="0"/>
-                  <a:ea typeface="Cascadia Mono" panose="020B0609020000020004" pitchFamily="49" charset="0"/>
-                  <a:cs typeface="Cascadia Mono" panose="020B0609020000020004" pitchFamily="49" charset="0"/>
-                </a:rPr>
-                <a:t>Mode: Charge </a:t>
-              </a:r>
-              <a:endParaRPr lang="ru-RU" sz="1600" dirty="0">
+              </a:rPr>
+              <a:t>Converter</a:t>
+            </a:r>
+            <a:endParaRPr lang="ru-RU" sz="1600" dirty="0">
+              <a:solidFill>
+                <a:schemeClr val="bg1"/>
+              </a:solidFill>
+              <a:latin typeface="Cascadia Mono" panose="020B0609020000020004" pitchFamily="49" charset="0"/>
+              <a:ea typeface="Cascadia Mono" panose="020B0609020000020004" pitchFamily="49" charset="0"/>
+              <a:cs typeface="Cascadia Mono" panose="020B0609020000020004" pitchFamily="49" charset="0"/>
+            </a:endParaRPr>
+          </a:p>
+        </p:txBody>
+      </p:sp>
+      <p:sp>
+        <p:nvSpPr>
+          <p:cNvPr id="118" name="TextBox 117">
+            <a:extLst>
+              <a:ext uri="{FF2B5EF4-FFF2-40B4-BE49-F238E27FC236}">
+                <a16:creationId xmlns:a16="http://schemas.microsoft.com/office/drawing/2014/main" id="{EACBCD6F-3CF3-5BF9-9D1E-364ED45A771F}"/>
+              </a:ext>
+            </a:extLst>
+          </p:cNvPr>
+          <p:cNvSpPr txBox="1"/>
+          <p:nvPr/>
+        </p:nvSpPr>
+        <p:spPr>
+          <a:xfrm>
+            <a:off x="5603341" y="843524"/>
+            <a:ext cx="1773217" cy="338554"/>
+          </a:xfrm>
+          <a:prstGeom prst="rect">
+            <a:avLst/>
+          </a:prstGeom>
+          <a:noFill/>
+        </p:spPr>
+        <p:txBody>
+          <a:bodyPr wrap="square" rtlCol="0">
+            <a:spAutoFit/>
+          </a:bodyPr>
+          <a:lstStyle/>
+          <a:p>
+            <a:r>
+              <a:rPr lang="en-US" sz="1600" dirty="0">
                 <a:solidFill>
                   <a:schemeClr val="bg1">
                     <a:lumMod val="85000"/>
@@ -6557,52 +6475,52 @@
                 <a:latin typeface="Cascadia Mono" panose="020B0609020000020004" pitchFamily="49" charset="0"/>
                 <a:ea typeface="Cascadia Mono" panose="020B0609020000020004" pitchFamily="49" charset="0"/>
                 <a:cs typeface="Cascadia Mono" panose="020B0609020000020004" pitchFamily="49" charset="0"/>
-              </a:endParaRPr>
-            </a:p>
-          </p:txBody>
-        </p:sp>
-        <p:sp>
-          <p:nvSpPr>
-            <p:cNvPr id="154" name="TextBox 153">
-              <a:extLst>
-                <a:ext uri="{FF2B5EF4-FFF2-40B4-BE49-F238E27FC236}">
-                  <a16:creationId xmlns:a16="http://schemas.microsoft.com/office/drawing/2014/main" id="{06874E1F-6B00-ABC9-05E7-7022A274C1DA}"/>
-                </a:ext>
-              </a:extLst>
-            </p:cNvPr>
-            <p:cNvSpPr txBox="1"/>
-            <p:nvPr/>
-          </p:nvSpPr>
-          <p:spPr>
-            <a:xfrm>
-              <a:off x="4402290" y="4134859"/>
-              <a:ext cx="1146468" cy="338554"/>
-            </a:xfrm>
-            <a:prstGeom prst="rect">
-              <a:avLst/>
-            </a:prstGeom>
-            <a:noFill/>
-          </p:spPr>
-          <p:txBody>
-            <a:bodyPr wrap="none" rtlCol="0">
-              <a:spAutoFit/>
-            </a:bodyPr>
-            <a:lstStyle/>
-            <a:p>
-              <a:r>
-                <a:rPr lang="en-US" sz="1600" dirty="0">
-                  <a:solidFill>
-                    <a:schemeClr val="bg1">
-                      <a:lumMod val="85000"/>
-                    </a:schemeClr>
-                  </a:solidFill>
-                  <a:latin typeface="Cascadia Mono" panose="020B0609020000020004" pitchFamily="49" charset="0"/>
-                  <a:ea typeface="Cascadia Mono" panose="020B0609020000020004" pitchFamily="49" charset="0"/>
-                  <a:cs typeface="Cascadia Mono" panose="020B0609020000020004" pitchFamily="49" charset="0"/>
-                </a:rPr>
-                <a:t>U1: 700V</a:t>
-              </a:r>
-              <a:endParaRPr lang="ru-RU" sz="1600" dirty="0">
+              </a:rPr>
+              <a:t>Mode: Charge </a:t>
+            </a:r>
+            <a:endParaRPr lang="ru-RU" sz="1600" dirty="0">
+              <a:solidFill>
+                <a:schemeClr val="bg1">
+                  <a:lumMod val="85000"/>
+                </a:schemeClr>
+              </a:solidFill>
+              <a:latin typeface="Cascadia Mono" panose="020B0609020000020004" pitchFamily="49" charset="0"/>
+              <a:ea typeface="Cascadia Mono" panose="020B0609020000020004" pitchFamily="49" charset="0"/>
+              <a:cs typeface="Cascadia Mono" panose="020B0609020000020004" pitchFamily="49" charset="0"/>
+            </a:endParaRPr>
+          </a:p>
+        </p:txBody>
+      </p:sp>
+      <p:sp>
+        <p:nvSpPr>
+          <p:cNvPr id="154" name="TextBox 153">
+            <a:extLst>
+              <a:ext uri="{FF2B5EF4-FFF2-40B4-BE49-F238E27FC236}">
+                <a16:creationId xmlns:a16="http://schemas.microsoft.com/office/drawing/2014/main" id="{06874E1F-6B00-ABC9-05E7-7022A274C1DA}"/>
+              </a:ext>
+            </a:extLst>
+          </p:cNvPr>
+          <p:cNvSpPr txBox="1"/>
+          <p:nvPr/>
+        </p:nvSpPr>
+        <p:spPr>
+          <a:xfrm>
+            <a:off x="5603341" y="1199089"/>
+            <a:ext cx="1146468" cy="338554"/>
+          </a:xfrm>
+          <a:prstGeom prst="rect">
+            <a:avLst/>
+          </a:prstGeom>
+          <a:noFill/>
+        </p:spPr>
+        <p:txBody>
+          <a:bodyPr wrap="none" rtlCol="0">
+            <a:spAutoFit/>
+          </a:bodyPr>
+          <a:lstStyle/>
+          <a:p>
+            <a:r>
+              <a:rPr lang="en-US" sz="1600" dirty="0">
                 <a:solidFill>
                   <a:schemeClr val="bg1">
                     <a:lumMod val="85000"/>
@@ -6611,52 +6529,52 @@
                 <a:latin typeface="Cascadia Mono" panose="020B0609020000020004" pitchFamily="49" charset="0"/>
                 <a:ea typeface="Cascadia Mono" panose="020B0609020000020004" pitchFamily="49" charset="0"/>
                 <a:cs typeface="Cascadia Mono" panose="020B0609020000020004" pitchFamily="49" charset="0"/>
-              </a:endParaRPr>
-            </a:p>
-          </p:txBody>
-        </p:sp>
-        <p:sp>
-          <p:nvSpPr>
-            <p:cNvPr id="183" name="TextBox 182">
-              <a:extLst>
-                <a:ext uri="{FF2B5EF4-FFF2-40B4-BE49-F238E27FC236}">
-                  <a16:creationId xmlns:a16="http://schemas.microsoft.com/office/drawing/2014/main" id="{AF65A1E6-BAD0-3186-BCDF-345C2E5CAE7A}"/>
-                </a:ext>
-              </a:extLst>
-            </p:cNvPr>
-            <p:cNvSpPr txBox="1"/>
-            <p:nvPr/>
-          </p:nvSpPr>
-          <p:spPr>
-            <a:xfrm>
-              <a:off x="5964390" y="4134859"/>
-              <a:ext cx="1146468" cy="338554"/>
-            </a:xfrm>
-            <a:prstGeom prst="rect">
-              <a:avLst/>
-            </a:prstGeom>
-            <a:noFill/>
-          </p:spPr>
-          <p:txBody>
-            <a:bodyPr wrap="none" rtlCol="0">
-              <a:spAutoFit/>
-            </a:bodyPr>
-            <a:lstStyle/>
-            <a:p>
-              <a:r>
-                <a:rPr lang="en-US" sz="1600" dirty="0">
-                  <a:solidFill>
-                    <a:schemeClr val="bg1">
-                      <a:lumMod val="85000"/>
-                    </a:schemeClr>
-                  </a:solidFill>
-                  <a:latin typeface="Cascadia Mono" panose="020B0609020000020004" pitchFamily="49" charset="0"/>
-                  <a:ea typeface="Cascadia Mono" panose="020B0609020000020004" pitchFamily="49" charset="0"/>
-                  <a:cs typeface="Cascadia Mono" panose="020B0609020000020004" pitchFamily="49" charset="0"/>
-                </a:rPr>
-                <a:t>U2: 600V</a:t>
-              </a:r>
-              <a:endParaRPr lang="ru-RU" sz="1600" dirty="0">
+              </a:rPr>
+              <a:t>U1: 700V</a:t>
+            </a:r>
+            <a:endParaRPr lang="ru-RU" sz="1600" dirty="0">
+              <a:solidFill>
+                <a:schemeClr val="bg1">
+                  <a:lumMod val="85000"/>
+                </a:schemeClr>
+              </a:solidFill>
+              <a:latin typeface="Cascadia Mono" panose="020B0609020000020004" pitchFamily="49" charset="0"/>
+              <a:ea typeface="Cascadia Mono" panose="020B0609020000020004" pitchFamily="49" charset="0"/>
+              <a:cs typeface="Cascadia Mono" panose="020B0609020000020004" pitchFamily="49" charset="0"/>
+            </a:endParaRPr>
+          </a:p>
+        </p:txBody>
+      </p:sp>
+      <p:sp>
+        <p:nvSpPr>
+          <p:cNvPr id="183" name="TextBox 182">
+            <a:extLst>
+              <a:ext uri="{FF2B5EF4-FFF2-40B4-BE49-F238E27FC236}">
+                <a16:creationId xmlns:a16="http://schemas.microsoft.com/office/drawing/2014/main" id="{AF65A1E6-BAD0-3186-BCDF-345C2E5CAE7A}"/>
+              </a:ext>
+            </a:extLst>
+          </p:cNvPr>
+          <p:cNvSpPr txBox="1"/>
+          <p:nvPr/>
+        </p:nvSpPr>
+        <p:spPr>
+          <a:xfrm>
+            <a:off x="7165441" y="1199089"/>
+            <a:ext cx="1146468" cy="338554"/>
+          </a:xfrm>
+          <a:prstGeom prst="rect">
+            <a:avLst/>
+          </a:prstGeom>
+          <a:noFill/>
+        </p:spPr>
+        <p:txBody>
+          <a:bodyPr wrap="none" rtlCol="0">
+            <a:spAutoFit/>
+          </a:bodyPr>
+          <a:lstStyle/>
+          <a:p>
+            <a:r>
+              <a:rPr lang="en-US" sz="1600" dirty="0">
                 <a:solidFill>
                   <a:schemeClr val="bg1">
                     <a:lumMod val="85000"/>
@@ -6665,52 +6583,52 @@
                 <a:latin typeface="Cascadia Mono" panose="020B0609020000020004" pitchFamily="49" charset="0"/>
                 <a:ea typeface="Cascadia Mono" panose="020B0609020000020004" pitchFamily="49" charset="0"/>
                 <a:cs typeface="Cascadia Mono" panose="020B0609020000020004" pitchFamily="49" charset="0"/>
-              </a:endParaRPr>
-            </a:p>
-          </p:txBody>
-        </p:sp>
-        <p:sp>
-          <p:nvSpPr>
-            <p:cNvPr id="185" name="TextBox 184">
-              <a:extLst>
-                <a:ext uri="{FF2B5EF4-FFF2-40B4-BE49-F238E27FC236}">
-                  <a16:creationId xmlns:a16="http://schemas.microsoft.com/office/drawing/2014/main" id="{819A3ADE-A1D6-667D-C89D-ACF464FBCDC0}"/>
-                </a:ext>
-              </a:extLst>
-            </p:cNvPr>
-            <p:cNvSpPr txBox="1"/>
-            <p:nvPr/>
-          </p:nvSpPr>
-          <p:spPr>
-            <a:xfrm>
-              <a:off x="5604128" y="4134859"/>
-              <a:ext cx="304892" cy="338554"/>
-            </a:xfrm>
-            <a:prstGeom prst="rect">
-              <a:avLst/>
-            </a:prstGeom>
-            <a:noFill/>
-          </p:spPr>
-          <p:txBody>
-            <a:bodyPr wrap="none" rtlCol="0">
-              <a:spAutoFit/>
-            </a:bodyPr>
-            <a:lstStyle/>
-            <a:p>
-              <a:r>
-                <a:rPr lang="en-US" sz="1600" dirty="0">
-                  <a:solidFill>
-                    <a:schemeClr val="bg1">
-                      <a:lumMod val="85000"/>
-                    </a:schemeClr>
-                  </a:solidFill>
-                  <a:latin typeface="Cascadia Mono" panose="020B0609020000020004" pitchFamily="49" charset="0"/>
-                  <a:ea typeface="Cascadia Mono" panose="020B0609020000020004" pitchFamily="49" charset="0"/>
-                  <a:cs typeface="Cascadia Mono" panose="020B0609020000020004" pitchFamily="49" charset="0"/>
-                </a:rPr>
-                <a:t>&gt;</a:t>
-              </a:r>
-              <a:endParaRPr lang="ru-RU" sz="1600" dirty="0">
+              </a:rPr>
+              <a:t>U2: 600V</a:t>
+            </a:r>
+            <a:endParaRPr lang="ru-RU" sz="1600" dirty="0">
+              <a:solidFill>
+                <a:schemeClr val="bg1">
+                  <a:lumMod val="85000"/>
+                </a:schemeClr>
+              </a:solidFill>
+              <a:latin typeface="Cascadia Mono" panose="020B0609020000020004" pitchFamily="49" charset="0"/>
+              <a:ea typeface="Cascadia Mono" panose="020B0609020000020004" pitchFamily="49" charset="0"/>
+              <a:cs typeface="Cascadia Mono" panose="020B0609020000020004" pitchFamily="49" charset="0"/>
+            </a:endParaRPr>
+          </a:p>
+        </p:txBody>
+      </p:sp>
+      <p:sp>
+        <p:nvSpPr>
+          <p:cNvPr id="185" name="TextBox 184">
+            <a:extLst>
+              <a:ext uri="{FF2B5EF4-FFF2-40B4-BE49-F238E27FC236}">
+                <a16:creationId xmlns:a16="http://schemas.microsoft.com/office/drawing/2014/main" id="{819A3ADE-A1D6-667D-C89D-ACF464FBCDC0}"/>
+              </a:ext>
+            </a:extLst>
+          </p:cNvPr>
+          <p:cNvSpPr txBox="1"/>
+          <p:nvPr/>
+        </p:nvSpPr>
+        <p:spPr>
+          <a:xfrm>
+            <a:off x="6805179" y="1199089"/>
+            <a:ext cx="304892" cy="338554"/>
+          </a:xfrm>
+          <a:prstGeom prst="rect">
+            <a:avLst/>
+          </a:prstGeom>
+          <a:noFill/>
+        </p:spPr>
+        <p:txBody>
+          <a:bodyPr wrap="none" rtlCol="0">
+            <a:spAutoFit/>
+          </a:bodyPr>
+          <a:lstStyle/>
+          <a:p>
+            <a:r>
+              <a:rPr lang="en-US" sz="1600" dirty="0">
                 <a:solidFill>
                   <a:schemeClr val="bg1">
                     <a:lumMod val="85000"/>
@@ -6719,52 +6637,52 @@
                 <a:latin typeface="Cascadia Mono" panose="020B0609020000020004" pitchFamily="49" charset="0"/>
                 <a:ea typeface="Cascadia Mono" panose="020B0609020000020004" pitchFamily="49" charset="0"/>
                 <a:cs typeface="Cascadia Mono" panose="020B0609020000020004" pitchFamily="49" charset="0"/>
-              </a:endParaRPr>
-            </a:p>
-          </p:txBody>
-        </p:sp>
-        <p:sp>
-          <p:nvSpPr>
-            <p:cNvPr id="187" name="TextBox 186">
-              <a:extLst>
-                <a:ext uri="{FF2B5EF4-FFF2-40B4-BE49-F238E27FC236}">
-                  <a16:creationId xmlns:a16="http://schemas.microsoft.com/office/drawing/2014/main" id="{C17F22FB-EBE8-6D2C-00E5-0CB0130E1853}"/>
-                </a:ext>
-              </a:extLst>
-            </p:cNvPr>
-            <p:cNvSpPr txBox="1"/>
-            <p:nvPr/>
-          </p:nvSpPr>
-          <p:spPr>
-            <a:xfrm>
-              <a:off x="4402290" y="4498812"/>
-              <a:ext cx="1146468" cy="338554"/>
-            </a:xfrm>
-            <a:prstGeom prst="rect">
-              <a:avLst/>
-            </a:prstGeom>
-            <a:noFill/>
-          </p:spPr>
-          <p:txBody>
-            <a:bodyPr wrap="none" rtlCol="0">
-              <a:spAutoFit/>
-            </a:bodyPr>
-            <a:lstStyle/>
-            <a:p>
-              <a:r>
-                <a:rPr lang="en-US" sz="1600" dirty="0">
-                  <a:solidFill>
-                    <a:schemeClr val="bg1">
-                      <a:lumMod val="85000"/>
-                    </a:schemeClr>
-                  </a:solidFill>
-                  <a:latin typeface="Cascadia Mono" panose="020B0609020000020004" pitchFamily="49" charset="0"/>
-                  <a:ea typeface="Cascadia Mono" panose="020B0609020000020004" pitchFamily="49" charset="0"/>
-                  <a:cs typeface="Cascadia Mono" panose="020B0609020000020004" pitchFamily="49" charset="0"/>
-                </a:rPr>
-                <a:t>I1: 700A</a:t>
-              </a:r>
-              <a:endParaRPr lang="ru-RU" sz="1600" dirty="0">
+              </a:rPr>
+              <a:t>&gt;</a:t>
+            </a:r>
+            <a:endParaRPr lang="ru-RU" sz="1600" dirty="0">
+              <a:solidFill>
+                <a:schemeClr val="bg1">
+                  <a:lumMod val="85000"/>
+                </a:schemeClr>
+              </a:solidFill>
+              <a:latin typeface="Cascadia Mono" panose="020B0609020000020004" pitchFamily="49" charset="0"/>
+              <a:ea typeface="Cascadia Mono" panose="020B0609020000020004" pitchFamily="49" charset="0"/>
+              <a:cs typeface="Cascadia Mono" panose="020B0609020000020004" pitchFamily="49" charset="0"/>
+            </a:endParaRPr>
+          </a:p>
+        </p:txBody>
+      </p:sp>
+      <p:sp>
+        <p:nvSpPr>
+          <p:cNvPr id="187" name="TextBox 186">
+            <a:extLst>
+              <a:ext uri="{FF2B5EF4-FFF2-40B4-BE49-F238E27FC236}">
+                <a16:creationId xmlns:a16="http://schemas.microsoft.com/office/drawing/2014/main" id="{C17F22FB-EBE8-6D2C-00E5-0CB0130E1853}"/>
+              </a:ext>
+            </a:extLst>
+          </p:cNvPr>
+          <p:cNvSpPr txBox="1"/>
+          <p:nvPr/>
+        </p:nvSpPr>
+        <p:spPr>
+          <a:xfrm>
+            <a:off x="5603341" y="1563042"/>
+            <a:ext cx="1146468" cy="338554"/>
+          </a:xfrm>
+          <a:prstGeom prst="rect">
+            <a:avLst/>
+          </a:prstGeom>
+          <a:noFill/>
+        </p:spPr>
+        <p:txBody>
+          <a:bodyPr wrap="none" rtlCol="0">
+            <a:spAutoFit/>
+          </a:bodyPr>
+          <a:lstStyle/>
+          <a:p>
+            <a:r>
+              <a:rPr lang="en-US" sz="1600" dirty="0">
                 <a:solidFill>
                   <a:schemeClr val="bg1">
                     <a:lumMod val="85000"/>
@@ -6773,52 +6691,52 @@
                 <a:latin typeface="Cascadia Mono" panose="020B0609020000020004" pitchFamily="49" charset="0"/>
                 <a:ea typeface="Cascadia Mono" panose="020B0609020000020004" pitchFamily="49" charset="0"/>
                 <a:cs typeface="Cascadia Mono" panose="020B0609020000020004" pitchFamily="49" charset="0"/>
-              </a:endParaRPr>
-            </a:p>
-          </p:txBody>
-        </p:sp>
-        <p:sp>
-          <p:nvSpPr>
-            <p:cNvPr id="189" name="TextBox 188">
-              <a:extLst>
-                <a:ext uri="{FF2B5EF4-FFF2-40B4-BE49-F238E27FC236}">
-                  <a16:creationId xmlns:a16="http://schemas.microsoft.com/office/drawing/2014/main" id="{D3AB7712-ABA8-F3AD-D09E-BB1F4B79F0EE}"/>
-                </a:ext>
-              </a:extLst>
-            </p:cNvPr>
-            <p:cNvSpPr txBox="1"/>
-            <p:nvPr/>
-          </p:nvSpPr>
-          <p:spPr>
-            <a:xfrm>
-              <a:off x="5964390" y="4498812"/>
-              <a:ext cx="1146468" cy="338554"/>
-            </a:xfrm>
-            <a:prstGeom prst="rect">
-              <a:avLst/>
-            </a:prstGeom>
-            <a:noFill/>
-          </p:spPr>
-          <p:txBody>
-            <a:bodyPr wrap="none" rtlCol="0">
-              <a:spAutoFit/>
-            </a:bodyPr>
-            <a:lstStyle/>
-            <a:p>
-              <a:r>
-                <a:rPr lang="en-US" sz="1600" dirty="0">
-                  <a:solidFill>
-                    <a:schemeClr val="bg1">
-                      <a:lumMod val="85000"/>
-                    </a:schemeClr>
-                  </a:solidFill>
-                  <a:latin typeface="Cascadia Mono" panose="020B0609020000020004" pitchFamily="49" charset="0"/>
-                  <a:ea typeface="Cascadia Mono" panose="020B0609020000020004" pitchFamily="49" charset="0"/>
-                  <a:cs typeface="Cascadia Mono" panose="020B0609020000020004" pitchFamily="49" charset="0"/>
-                </a:rPr>
-                <a:t>I2: 600A</a:t>
-              </a:r>
-              <a:endParaRPr lang="ru-RU" sz="1600" dirty="0">
+              </a:rPr>
+              <a:t>I1: 700A</a:t>
+            </a:r>
+            <a:endParaRPr lang="ru-RU" sz="1600" dirty="0">
+              <a:solidFill>
+                <a:schemeClr val="bg1">
+                  <a:lumMod val="85000"/>
+                </a:schemeClr>
+              </a:solidFill>
+              <a:latin typeface="Cascadia Mono" panose="020B0609020000020004" pitchFamily="49" charset="0"/>
+              <a:ea typeface="Cascadia Mono" panose="020B0609020000020004" pitchFamily="49" charset="0"/>
+              <a:cs typeface="Cascadia Mono" panose="020B0609020000020004" pitchFamily="49" charset="0"/>
+            </a:endParaRPr>
+          </a:p>
+        </p:txBody>
+      </p:sp>
+      <p:sp>
+        <p:nvSpPr>
+          <p:cNvPr id="189" name="TextBox 188">
+            <a:extLst>
+              <a:ext uri="{FF2B5EF4-FFF2-40B4-BE49-F238E27FC236}">
+                <a16:creationId xmlns:a16="http://schemas.microsoft.com/office/drawing/2014/main" id="{D3AB7712-ABA8-F3AD-D09E-BB1F4B79F0EE}"/>
+              </a:ext>
+            </a:extLst>
+          </p:cNvPr>
+          <p:cNvSpPr txBox="1"/>
+          <p:nvPr/>
+        </p:nvSpPr>
+        <p:spPr>
+          <a:xfrm>
+            <a:off x="7165441" y="1563042"/>
+            <a:ext cx="1146468" cy="338554"/>
+          </a:xfrm>
+          <a:prstGeom prst="rect">
+            <a:avLst/>
+          </a:prstGeom>
+          <a:noFill/>
+        </p:spPr>
+        <p:txBody>
+          <a:bodyPr wrap="none" rtlCol="0">
+            <a:spAutoFit/>
+          </a:bodyPr>
+          <a:lstStyle/>
+          <a:p>
+            <a:r>
+              <a:rPr lang="en-US" sz="1600" dirty="0">
                 <a:solidFill>
                   <a:schemeClr val="bg1">
                     <a:lumMod val="85000"/>
@@ -6827,52 +6745,52 @@
                 <a:latin typeface="Cascadia Mono" panose="020B0609020000020004" pitchFamily="49" charset="0"/>
                 <a:ea typeface="Cascadia Mono" panose="020B0609020000020004" pitchFamily="49" charset="0"/>
                 <a:cs typeface="Cascadia Mono" panose="020B0609020000020004" pitchFamily="49" charset="0"/>
-              </a:endParaRPr>
-            </a:p>
-          </p:txBody>
-        </p:sp>
-        <p:sp>
-          <p:nvSpPr>
-            <p:cNvPr id="191" name="TextBox 190">
-              <a:extLst>
-                <a:ext uri="{FF2B5EF4-FFF2-40B4-BE49-F238E27FC236}">
-                  <a16:creationId xmlns:a16="http://schemas.microsoft.com/office/drawing/2014/main" id="{AA726153-8F1D-26B3-BF0C-F1029E515A5B}"/>
-                </a:ext>
-              </a:extLst>
-            </p:cNvPr>
-            <p:cNvSpPr txBox="1"/>
-            <p:nvPr/>
-          </p:nvSpPr>
-          <p:spPr>
-            <a:xfrm>
-              <a:off x="5539274" y="4498812"/>
-              <a:ext cx="425116" cy="338554"/>
-            </a:xfrm>
-            <a:prstGeom prst="rect">
-              <a:avLst/>
-            </a:prstGeom>
-            <a:noFill/>
-          </p:spPr>
-          <p:txBody>
-            <a:bodyPr wrap="none" rtlCol="0">
-              <a:spAutoFit/>
-            </a:bodyPr>
-            <a:lstStyle/>
-            <a:p>
-              <a:r>
-                <a:rPr lang="en-US" sz="1600" dirty="0">
-                  <a:solidFill>
-                    <a:schemeClr val="bg1">
-                      <a:lumMod val="85000"/>
-                    </a:schemeClr>
-                  </a:solidFill>
-                  <a:latin typeface="Cascadia Mono" panose="020B0609020000020004" pitchFamily="49" charset="0"/>
-                  <a:ea typeface="Cascadia Mono" panose="020B0609020000020004" pitchFamily="49" charset="0"/>
-                  <a:cs typeface="Cascadia Mono" panose="020B0609020000020004" pitchFamily="49" charset="0"/>
-                </a:rPr>
-                <a:t>-&gt;</a:t>
-              </a:r>
-              <a:endParaRPr lang="ru-RU" sz="1600" dirty="0">
+              </a:rPr>
+              <a:t>I2: 600A</a:t>
+            </a:r>
+            <a:endParaRPr lang="ru-RU" sz="1600" dirty="0">
+              <a:solidFill>
+                <a:schemeClr val="bg1">
+                  <a:lumMod val="85000"/>
+                </a:schemeClr>
+              </a:solidFill>
+              <a:latin typeface="Cascadia Mono" panose="020B0609020000020004" pitchFamily="49" charset="0"/>
+              <a:ea typeface="Cascadia Mono" panose="020B0609020000020004" pitchFamily="49" charset="0"/>
+              <a:cs typeface="Cascadia Mono" panose="020B0609020000020004" pitchFamily="49" charset="0"/>
+            </a:endParaRPr>
+          </a:p>
+        </p:txBody>
+      </p:sp>
+      <p:sp>
+        <p:nvSpPr>
+          <p:cNvPr id="191" name="TextBox 190">
+            <a:extLst>
+              <a:ext uri="{FF2B5EF4-FFF2-40B4-BE49-F238E27FC236}">
+                <a16:creationId xmlns:a16="http://schemas.microsoft.com/office/drawing/2014/main" id="{AA726153-8F1D-26B3-BF0C-F1029E515A5B}"/>
+              </a:ext>
+            </a:extLst>
+          </p:cNvPr>
+          <p:cNvSpPr txBox="1"/>
+          <p:nvPr/>
+        </p:nvSpPr>
+        <p:spPr>
+          <a:xfrm>
+            <a:off x="6740325" y="1563042"/>
+            <a:ext cx="425116" cy="338554"/>
+          </a:xfrm>
+          <a:prstGeom prst="rect">
+            <a:avLst/>
+          </a:prstGeom>
+          <a:noFill/>
+        </p:spPr>
+        <p:txBody>
+          <a:bodyPr wrap="none" rtlCol="0">
+            <a:spAutoFit/>
+          </a:bodyPr>
+          <a:lstStyle/>
+          <a:p>
+            <a:r>
+              <a:rPr lang="en-US" sz="1600" dirty="0">
                 <a:solidFill>
                   <a:schemeClr val="bg1">
                     <a:lumMod val="85000"/>
@@ -6881,192 +6799,102 @@
                 <a:latin typeface="Cascadia Mono" panose="020B0609020000020004" pitchFamily="49" charset="0"/>
                 <a:ea typeface="Cascadia Mono" panose="020B0609020000020004" pitchFamily="49" charset="0"/>
                 <a:cs typeface="Cascadia Mono" panose="020B0609020000020004" pitchFamily="49" charset="0"/>
-              </a:endParaRPr>
-            </a:p>
-          </p:txBody>
-        </p:sp>
-      </p:grpSp>
-      <p:grpSp>
-        <p:nvGrpSpPr>
-          <p:cNvPr id="262" name="Группа 261">
+              </a:rPr>
+              <a:t>-&gt;</a:t>
+            </a:r>
+            <a:endParaRPr lang="ru-RU" sz="1600" dirty="0">
+              <a:solidFill>
+                <a:schemeClr val="bg1">
+                  <a:lumMod val="85000"/>
+                </a:schemeClr>
+              </a:solidFill>
+              <a:latin typeface="Cascadia Mono" panose="020B0609020000020004" pitchFamily="49" charset="0"/>
+              <a:ea typeface="Cascadia Mono" panose="020B0609020000020004" pitchFamily="49" charset="0"/>
+              <a:cs typeface="Cascadia Mono" panose="020B0609020000020004" pitchFamily="49" charset="0"/>
+            </a:endParaRPr>
+          </a:p>
+        </p:txBody>
+      </p:sp>
+      <p:sp>
+        <p:nvSpPr>
+          <p:cNvPr id="212" name="TextBox 211">
             <a:extLst>
               <a:ext uri="{FF2B5EF4-FFF2-40B4-BE49-F238E27FC236}">
-                <a16:creationId xmlns:a16="http://schemas.microsoft.com/office/drawing/2014/main" id="{5A62DA45-5AD8-3087-F337-8CE97F67E446}"/>
+                <a16:creationId xmlns:a16="http://schemas.microsoft.com/office/drawing/2014/main" id="{BF4FBB32-DA43-AD70-841D-3D47E4DFB974}"/>
               </a:ext>
             </a:extLst>
           </p:cNvPr>
-          <p:cNvGrpSpPr/>
+          <p:cNvSpPr txBox="1"/>
           <p:nvPr/>
-        </p:nvGrpSpPr>
-        <p:grpSpPr>
+        </p:nvSpPr>
+        <p:spPr>
           <a:xfrm>
-            <a:off x="3395389" y="5401233"/>
-            <a:ext cx="5392746" cy="1187198"/>
-            <a:chOff x="3397788" y="3474089"/>
-            <a:chExt cx="5392746" cy="1187198"/>
+            <a:off x="5686423" y="2792347"/>
+            <a:ext cx="1146468" cy="338554"/>
           </a:xfrm>
-        </p:grpSpPr>
-        <p:sp>
-          <p:nvSpPr>
-            <p:cNvPr id="195" name="Прямоугольник: скругленные углы 194">
-              <a:extLst>
-                <a:ext uri="{FF2B5EF4-FFF2-40B4-BE49-F238E27FC236}">
-                  <a16:creationId xmlns:a16="http://schemas.microsoft.com/office/drawing/2014/main" id="{43D5836A-7F3B-BAF6-051F-D45D25965032}"/>
-                </a:ext>
-              </a:extLst>
-            </p:cNvPr>
-            <p:cNvSpPr/>
-            <p:nvPr/>
-          </p:nvSpPr>
-          <p:spPr>
-            <a:xfrm>
-              <a:off x="3397788" y="3474089"/>
-              <a:ext cx="5392746" cy="1187198"/>
-            </a:xfrm>
-            <a:prstGeom prst="roundRect">
-              <a:avLst>
-                <a:gd name="adj" fmla="val 7999"/>
-              </a:avLst>
-            </a:prstGeom>
-            <a:noFill/>
-            <a:ln w="19050">
-              <a:solidFill>
-                <a:schemeClr val="accent3">
-                  <a:lumMod val="75000"/>
-                </a:schemeClr>
-              </a:solidFill>
-            </a:ln>
-          </p:spPr>
-          <p:style>
-            <a:lnRef idx="2">
-              <a:schemeClr val="accent1">
-                <a:shade val="15000"/>
-              </a:schemeClr>
-            </a:lnRef>
-            <a:fillRef idx="1">
-              <a:schemeClr val="accent1"/>
-            </a:fillRef>
-            <a:effectRef idx="0">
-              <a:schemeClr val="accent1"/>
-            </a:effectRef>
-            <a:fontRef idx="minor">
-              <a:schemeClr val="lt1"/>
-            </a:fontRef>
-          </p:style>
-          <p:txBody>
-            <a:bodyPr rtlCol="0" anchor="ctr"/>
-            <a:lstStyle/>
-            <a:p>
-              <a:pPr algn="ctr"/>
-              <a:endParaRPr lang="ru-RU"/>
-            </a:p>
-          </p:txBody>
-        </p:sp>
-        <p:sp>
-          <p:nvSpPr>
-            <p:cNvPr id="196" name="TextBox 195">
-              <a:extLst>
-                <a:ext uri="{FF2B5EF4-FFF2-40B4-BE49-F238E27FC236}">
-                  <a16:creationId xmlns:a16="http://schemas.microsoft.com/office/drawing/2014/main" id="{20068BE2-B759-CD16-77ED-5979BCC93421}"/>
-                </a:ext>
-              </a:extLst>
-            </p:cNvPr>
-            <p:cNvSpPr txBox="1"/>
-            <p:nvPr/>
-          </p:nvSpPr>
-          <p:spPr>
-            <a:xfrm>
-              <a:off x="3526334" y="3546096"/>
-              <a:ext cx="785793" cy="338554"/>
-            </a:xfrm>
-            <a:prstGeom prst="rect">
-              <a:avLst/>
-            </a:prstGeom>
-            <a:noFill/>
-          </p:spPr>
-          <p:txBody>
-            <a:bodyPr wrap="none" rtlCol="0">
-              <a:spAutoFit/>
-            </a:bodyPr>
-            <a:lstStyle/>
-            <a:p>
-              <a:r>
-                <a:rPr lang="en-US" sz="1600" dirty="0">
-                  <a:solidFill>
-                    <a:schemeClr val="bg1"/>
-                  </a:solidFill>
-                  <a:latin typeface="Cascadia Mono" panose="020B0609020000020004" pitchFamily="49" charset="0"/>
-                  <a:ea typeface="Cascadia Mono" panose="020B0609020000020004" pitchFamily="49" charset="0"/>
-                  <a:cs typeface="Cascadia Mono" panose="020B0609020000020004" pitchFamily="49" charset="0"/>
-                </a:rPr>
-                <a:t>Cells</a:t>
-              </a:r>
-              <a:endParaRPr lang="ru-RU" sz="1600" dirty="0">
+          <a:prstGeom prst="rect">
+            <a:avLst/>
+          </a:prstGeom>
+          <a:noFill/>
+        </p:spPr>
+        <p:txBody>
+          <a:bodyPr wrap="square" rtlCol="0">
+            <a:spAutoFit/>
+          </a:bodyPr>
+          <a:lstStyle/>
+          <a:p>
+            <a:r>
+              <a:rPr lang="en-US" sz="1600" dirty="0">
                 <a:solidFill>
                   <a:schemeClr val="bg1"/>
                 </a:solidFill>
                 <a:latin typeface="Cascadia Mono" panose="020B0609020000020004" pitchFamily="49" charset="0"/>
                 <a:ea typeface="Cascadia Mono" panose="020B0609020000020004" pitchFamily="49" charset="0"/>
                 <a:cs typeface="Cascadia Mono" panose="020B0609020000020004" pitchFamily="49" charset="0"/>
-              </a:endParaRPr>
-            </a:p>
-          </p:txBody>
-        </p:sp>
-        <p:sp>
-          <p:nvSpPr>
-            <p:cNvPr id="198" name="TextBox 197">
-              <a:extLst>
-                <a:ext uri="{FF2B5EF4-FFF2-40B4-BE49-F238E27FC236}">
-                  <a16:creationId xmlns:a16="http://schemas.microsoft.com/office/drawing/2014/main" id="{CC1EEC3C-727F-A176-47AE-7976C1980F39}"/>
-                </a:ext>
-              </a:extLst>
-            </p:cNvPr>
-            <p:cNvSpPr txBox="1"/>
-            <p:nvPr/>
-          </p:nvSpPr>
-          <p:spPr>
-            <a:xfrm>
-              <a:off x="3526334" y="3884650"/>
-              <a:ext cx="1266693" cy="338554"/>
-            </a:xfrm>
-            <a:prstGeom prst="rect">
-              <a:avLst/>
-            </a:prstGeom>
-            <a:noFill/>
-          </p:spPr>
-          <p:txBody>
-            <a:bodyPr wrap="none" rtlCol="0">
-              <a:spAutoFit/>
-            </a:bodyPr>
-            <a:lstStyle/>
-            <a:p>
-              <a:r>
-                <a:rPr lang="en-US" sz="1600" dirty="0" err="1">
-                  <a:solidFill>
-                    <a:schemeClr val="bg1">
-                      <a:lumMod val="85000"/>
-                    </a:schemeClr>
-                  </a:solidFill>
-                  <a:latin typeface="Cascadia Mono" panose="020B0609020000020004" pitchFamily="49" charset="0"/>
-                  <a:ea typeface="Cascadia Mono" panose="020B0609020000020004" pitchFamily="49" charset="0"/>
-                  <a:cs typeface="Cascadia Mono" panose="020B0609020000020004" pitchFamily="49" charset="0"/>
-                </a:rPr>
-                <a:t>Vmin</a:t>
-              </a:r>
-              <a:r>
-                <a:rPr lang="en-US" sz="1600" dirty="0">
-                  <a:solidFill>
-                    <a:schemeClr val="bg1">
-                      <a:lumMod val="85000"/>
-                    </a:schemeClr>
-                  </a:solidFill>
-                  <a:latin typeface="Cascadia Mono" panose="020B0609020000020004" pitchFamily="49" charset="0"/>
-                  <a:ea typeface="Cascadia Mono" panose="020B0609020000020004" pitchFamily="49" charset="0"/>
-                  <a:cs typeface="Cascadia Mono" panose="020B0609020000020004" pitchFamily="49" charset="0"/>
-                </a:rPr>
-                <a:t>: 20V</a:t>
-              </a:r>
-              <a:endParaRPr lang="ru-RU" sz="1600" dirty="0">
+              </a:rPr>
+              <a:t>Colling</a:t>
+            </a:r>
+            <a:endParaRPr lang="ru-RU" sz="1600" dirty="0">
+              <a:solidFill>
+                <a:schemeClr val="bg1"/>
+              </a:solidFill>
+              <a:latin typeface="Cascadia Mono" panose="020B0609020000020004" pitchFamily="49" charset="0"/>
+              <a:ea typeface="Cascadia Mono" panose="020B0609020000020004" pitchFamily="49" charset="0"/>
+              <a:cs typeface="Cascadia Mono" panose="020B0609020000020004" pitchFamily="49" charset="0"/>
+            </a:endParaRPr>
+          </a:p>
+        </p:txBody>
+      </p:sp>
+      <p:sp>
+        <p:nvSpPr>
+          <p:cNvPr id="213" name="TextBox 212">
+            <a:extLst>
+              <a:ext uri="{FF2B5EF4-FFF2-40B4-BE49-F238E27FC236}">
+                <a16:creationId xmlns:a16="http://schemas.microsoft.com/office/drawing/2014/main" id="{93D5BD3C-90B7-7CBC-E4F3-15E918A7E33E}"/>
+              </a:ext>
+            </a:extLst>
+          </p:cNvPr>
+          <p:cNvSpPr txBox="1"/>
+          <p:nvPr/>
+        </p:nvSpPr>
+        <p:spPr>
+          <a:xfrm>
+            <a:off x="5687672" y="3112965"/>
+            <a:ext cx="1884295" cy="338554"/>
+          </a:xfrm>
+          <a:prstGeom prst="rect">
+            <a:avLst/>
+          </a:prstGeom>
+          <a:noFill/>
+        </p:spPr>
+        <p:txBody>
+          <a:bodyPr wrap="square" rtlCol="0">
+            <a:spAutoFit/>
+          </a:bodyPr>
+          <a:lstStyle/>
+          <a:p>
+            <a:r>
+              <a:rPr lang="en-US" sz="1600" dirty="0">
                 <a:solidFill>
                   <a:schemeClr val="bg1">
                     <a:lumMod val="85000"/>
@@ -7075,52 +6903,52 @@
                 <a:latin typeface="Cascadia Mono" panose="020B0609020000020004" pitchFamily="49" charset="0"/>
                 <a:ea typeface="Cascadia Mono" panose="020B0609020000020004" pitchFamily="49" charset="0"/>
                 <a:cs typeface="Cascadia Mono" panose="020B0609020000020004" pitchFamily="49" charset="0"/>
-              </a:endParaRPr>
-            </a:p>
-          </p:txBody>
-        </p:sp>
-        <p:sp>
-          <p:nvSpPr>
-            <p:cNvPr id="199" name="TextBox 198">
-              <a:extLst>
-                <a:ext uri="{FF2B5EF4-FFF2-40B4-BE49-F238E27FC236}">
-                  <a16:creationId xmlns:a16="http://schemas.microsoft.com/office/drawing/2014/main" id="{5073CB49-34F0-0DB2-65F2-3F831DB0A951}"/>
-                </a:ext>
-              </a:extLst>
-            </p:cNvPr>
-            <p:cNvSpPr txBox="1"/>
-            <p:nvPr/>
-          </p:nvSpPr>
-          <p:spPr>
-            <a:xfrm>
-              <a:off x="4921573" y="3882564"/>
-              <a:ext cx="1266693" cy="338554"/>
-            </a:xfrm>
-            <a:prstGeom prst="rect">
-              <a:avLst/>
-            </a:prstGeom>
-            <a:noFill/>
-          </p:spPr>
-          <p:txBody>
-            <a:bodyPr wrap="none" rtlCol="0">
-              <a:spAutoFit/>
-            </a:bodyPr>
-            <a:lstStyle/>
-            <a:p>
-              <a:r>
-                <a:rPr lang="en-US" sz="1600" dirty="0">
-                  <a:solidFill>
-                    <a:schemeClr val="bg1">
-                      <a:lumMod val="85000"/>
-                    </a:schemeClr>
-                  </a:solidFill>
-                  <a:latin typeface="Cascadia Mono" panose="020B0609020000020004" pitchFamily="49" charset="0"/>
-                  <a:ea typeface="Cascadia Mono" panose="020B0609020000020004" pitchFamily="49" charset="0"/>
-                  <a:cs typeface="Cascadia Mono" panose="020B0609020000020004" pitchFamily="49" charset="0"/>
-                </a:rPr>
-                <a:t>Vmax: 25V</a:t>
-              </a:r>
-              <a:endParaRPr lang="ru-RU" sz="1600" dirty="0">
+              </a:rPr>
+              <a:t>Fan 1: 100 rpm</a:t>
+            </a:r>
+            <a:endParaRPr lang="ru-RU" sz="1600" dirty="0">
+              <a:solidFill>
+                <a:schemeClr val="bg1">
+                  <a:lumMod val="85000"/>
+                </a:schemeClr>
+              </a:solidFill>
+              <a:latin typeface="Cascadia Mono" panose="020B0609020000020004" pitchFamily="49" charset="0"/>
+              <a:ea typeface="Cascadia Mono" panose="020B0609020000020004" pitchFamily="49" charset="0"/>
+              <a:cs typeface="Cascadia Mono" panose="020B0609020000020004" pitchFamily="49" charset="0"/>
+            </a:endParaRPr>
+          </a:p>
+        </p:txBody>
+      </p:sp>
+      <p:sp>
+        <p:nvSpPr>
+          <p:cNvPr id="215" name="TextBox 214">
+            <a:extLst>
+              <a:ext uri="{FF2B5EF4-FFF2-40B4-BE49-F238E27FC236}">
+                <a16:creationId xmlns:a16="http://schemas.microsoft.com/office/drawing/2014/main" id="{5327E2D4-EC97-7305-5EAF-21A2C42E1318}"/>
+              </a:ext>
+            </a:extLst>
+          </p:cNvPr>
+          <p:cNvSpPr txBox="1"/>
+          <p:nvPr/>
+        </p:nvSpPr>
+        <p:spPr>
+          <a:xfrm>
+            <a:off x="7691958" y="3361905"/>
+            <a:ext cx="1631971" cy="338554"/>
+          </a:xfrm>
+          <a:prstGeom prst="rect">
+            <a:avLst/>
+          </a:prstGeom>
+          <a:noFill/>
+        </p:spPr>
+        <p:txBody>
+          <a:bodyPr wrap="square" rtlCol="0">
+            <a:spAutoFit/>
+          </a:bodyPr>
+          <a:lstStyle/>
+          <a:p>
+            <a:r>
+              <a:rPr lang="en-US" sz="1600" dirty="0">
                 <a:solidFill>
                   <a:schemeClr val="bg1">
                     <a:lumMod val="85000"/>
@@ -7129,52 +6957,52 @@
                 <a:latin typeface="Cascadia Mono" panose="020B0609020000020004" pitchFamily="49" charset="0"/>
                 <a:ea typeface="Cascadia Mono" panose="020B0609020000020004" pitchFamily="49" charset="0"/>
                 <a:cs typeface="Cascadia Mono" panose="020B0609020000020004" pitchFamily="49" charset="0"/>
-              </a:endParaRPr>
-            </a:p>
-          </p:txBody>
-        </p:sp>
-        <p:sp>
-          <p:nvSpPr>
-            <p:cNvPr id="201" name="TextBox 200">
-              <a:extLst>
-                <a:ext uri="{FF2B5EF4-FFF2-40B4-BE49-F238E27FC236}">
-                  <a16:creationId xmlns:a16="http://schemas.microsoft.com/office/drawing/2014/main" id="{5B368BA0-765A-913D-73D8-506DBC059F03}"/>
-                </a:ext>
-              </a:extLst>
-            </p:cNvPr>
-            <p:cNvSpPr txBox="1"/>
-            <p:nvPr/>
-          </p:nvSpPr>
-          <p:spPr>
-            <a:xfrm>
-              <a:off x="6347567" y="3896857"/>
-              <a:ext cx="1988045" cy="338554"/>
-            </a:xfrm>
-            <a:prstGeom prst="rect">
-              <a:avLst/>
-            </a:prstGeom>
-            <a:noFill/>
-          </p:spPr>
-          <p:txBody>
-            <a:bodyPr wrap="none" rtlCol="0">
-              <a:spAutoFit/>
-            </a:bodyPr>
-            <a:lstStyle/>
-            <a:p>
-              <a:r>
-                <a:rPr lang="en-US" sz="1600" dirty="0">
-                  <a:solidFill>
-                    <a:schemeClr val="bg1">
-                      <a:lumMod val="85000"/>
-                    </a:schemeClr>
-                  </a:solidFill>
-                  <a:latin typeface="Cascadia Mono" panose="020B0609020000020004" pitchFamily="49" charset="0"/>
-                  <a:ea typeface="Cascadia Mono" panose="020B0609020000020004" pitchFamily="49" charset="0"/>
-                  <a:cs typeface="Cascadia Mono" panose="020B0609020000020004" pitchFamily="49" charset="0"/>
-                </a:rPr>
-                <a:t>Disbalance: 24%</a:t>
-              </a:r>
-              <a:endParaRPr lang="ru-RU" sz="1600" dirty="0">
+              </a:rPr>
+              <a:t>Gate 1: Open</a:t>
+            </a:r>
+            <a:endParaRPr lang="ru-RU" sz="1600" dirty="0">
+              <a:solidFill>
+                <a:schemeClr val="bg1">
+                  <a:lumMod val="85000"/>
+                </a:schemeClr>
+              </a:solidFill>
+              <a:latin typeface="Cascadia Mono" panose="020B0609020000020004" pitchFamily="49" charset="0"/>
+              <a:ea typeface="Cascadia Mono" panose="020B0609020000020004" pitchFamily="49" charset="0"/>
+              <a:cs typeface="Cascadia Mono" panose="020B0609020000020004" pitchFamily="49" charset="0"/>
+            </a:endParaRPr>
+          </a:p>
+        </p:txBody>
+      </p:sp>
+      <p:sp>
+        <p:nvSpPr>
+          <p:cNvPr id="218" name="TextBox 217">
+            <a:extLst>
+              <a:ext uri="{FF2B5EF4-FFF2-40B4-BE49-F238E27FC236}">
+                <a16:creationId xmlns:a16="http://schemas.microsoft.com/office/drawing/2014/main" id="{6083B95F-A0A9-12D1-FE4C-2A4FD972476C}"/>
+              </a:ext>
+            </a:extLst>
+          </p:cNvPr>
+          <p:cNvSpPr txBox="1"/>
+          <p:nvPr/>
+        </p:nvSpPr>
+        <p:spPr>
+          <a:xfrm>
+            <a:off x="7691958" y="3112965"/>
+            <a:ext cx="1631968" cy="338554"/>
+          </a:xfrm>
+          <a:prstGeom prst="rect">
+            <a:avLst/>
+          </a:prstGeom>
+          <a:noFill/>
+        </p:spPr>
+        <p:txBody>
+          <a:bodyPr wrap="square" rtlCol="0">
+            <a:spAutoFit/>
+          </a:bodyPr>
+          <a:lstStyle/>
+          <a:p>
+            <a:r>
+              <a:rPr lang="en-US" sz="1600" dirty="0">
                 <a:solidFill>
                   <a:schemeClr val="bg1">
                     <a:lumMod val="85000"/>
@@ -7183,65 +7011,52 @@
                 <a:latin typeface="Cascadia Mono" panose="020B0609020000020004" pitchFamily="49" charset="0"/>
                 <a:ea typeface="Cascadia Mono" panose="020B0609020000020004" pitchFamily="49" charset="0"/>
                 <a:cs typeface="Cascadia Mono" panose="020B0609020000020004" pitchFamily="49" charset="0"/>
-              </a:endParaRPr>
-            </a:p>
-          </p:txBody>
-        </p:sp>
-        <p:sp>
-          <p:nvSpPr>
-            <p:cNvPr id="207" name="TextBox 206">
-              <a:extLst>
-                <a:ext uri="{FF2B5EF4-FFF2-40B4-BE49-F238E27FC236}">
-                  <a16:creationId xmlns:a16="http://schemas.microsoft.com/office/drawing/2014/main" id="{9149BD8D-90D1-592F-B6F2-3C216B571FF8}"/>
-                </a:ext>
-              </a:extLst>
-            </p:cNvPr>
-            <p:cNvSpPr txBox="1"/>
-            <p:nvPr/>
-          </p:nvSpPr>
-          <p:spPr>
-            <a:xfrm>
-              <a:off x="3505779" y="4235411"/>
-              <a:ext cx="1266693" cy="338554"/>
-            </a:xfrm>
-            <a:prstGeom prst="rect">
-              <a:avLst/>
-            </a:prstGeom>
-            <a:noFill/>
-          </p:spPr>
-          <p:txBody>
-            <a:bodyPr wrap="none" rtlCol="0">
-              <a:spAutoFit/>
-            </a:bodyPr>
-            <a:lstStyle/>
-            <a:p>
-              <a:r>
-                <a:rPr lang="en-US" sz="1600" dirty="0" err="1">
-                  <a:solidFill>
-                    <a:schemeClr val="bg1">
-                      <a:lumMod val="85000"/>
-                    </a:schemeClr>
-                  </a:solidFill>
-                  <a:latin typeface="Cascadia Mono" panose="020B0609020000020004" pitchFamily="49" charset="0"/>
-                  <a:ea typeface="Cascadia Mono" panose="020B0609020000020004" pitchFamily="49" charset="0"/>
-                  <a:cs typeface="Cascadia Mono" panose="020B0609020000020004" pitchFamily="49" charset="0"/>
-                </a:rPr>
-                <a:t>Tmin</a:t>
-              </a:r>
-              <a:r>
-                <a:rPr lang="en-US" sz="1600" dirty="0">
-                  <a:solidFill>
-                    <a:schemeClr val="bg1">
-                      <a:lumMod val="85000"/>
-                    </a:schemeClr>
-                  </a:solidFill>
-                  <a:latin typeface="Cascadia Mono" panose="020B0609020000020004" pitchFamily="49" charset="0"/>
-                  <a:ea typeface="Cascadia Mono" panose="020B0609020000020004" pitchFamily="49" charset="0"/>
-                  <a:cs typeface="Cascadia Mono" panose="020B0609020000020004" pitchFamily="49" charset="0"/>
-                </a:rPr>
-                <a:t>: 30C</a:t>
-              </a:r>
-              <a:endParaRPr lang="ru-RU" sz="1600" dirty="0">
+              </a:rPr>
+              <a:t>Gate 2: Open</a:t>
+            </a:r>
+            <a:endParaRPr lang="ru-RU" sz="1600" dirty="0">
+              <a:solidFill>
+                <a:schemeClr val="bg1">
+                  <a:lumMod val="85000"/>
+                </a:schemeClr>
+              </a:solidFill>
+              <a:latin typeface="Cascadia Mono" panose="020B0609020000020004" pitchFamily="49" charset="0"/>
+              <a:ea typeface="Cascadia Mono" panose="020B0609020000020004" pitchFamily="49" charset="0"/>
+              <a:cs typeface="Cascadia Mono" panose="020B0609020000020004" pitchFamily="49" charset="0"/>
+            </a:endParaRPr>
+          </a:p>
+        </p:txBody>
+      </p:sp>
+      <p:sp>
+        <p:nvSpPr>
+          <p:cNvPr id="220" name="TextBox 219">
+            <a:extLst>
+              <a:ext uri="{FF2B5EF4-FFF2-40B4-BE49-F238E27FC236}">
+                <a16:creationId xmlns:a16="http://schemas.microsoft.com/office/drawing/2014/main" id="{A8A63FAF-B16C-0FC7-7043-1EF8F17D70CC}"/>
+              </a:ext>
+            </a:extLst>
+          </p:cNvPr>
+          <p:cNvSpPr txBox="1"/>
+          <p:nvPr/>
+        </p:nvSpPr>
+        <p:spPr>
+          <a:xfrm>
+            <a:off x="5686423" y="3325577"/>
+            <a:ext cx="1885544" cy="338554"/>
+          </a:xfrm>
+          <a:prstGeom prst="rect">
+            <a:avLst/>
+          </a:prstGeom>
+          <a:noFill/>
+        </p:spPr>
+        <p:txBody>
+          <a:bodyPr wrap="square" rtlCol="0">
+            <a:spAutoFit/>
+          </a:bodyPr>
+          <a:lstStyle/>
+          <a:p>
+            <a:r>
+              <a:rPr lang="en-US" sz="1600" dirty="0">
                 <a:solidFill>
                   <a:schemeClr val="bg1">
                     <a:lumMod val="85000"/>
@@ -7250,421 +7065,22 @@
                 <a:latin typeface="Cascadia Mono" panose="020B0609020000020004" pitchFamily="49" charset="0"/>
                 <a:ea typeface="Cascadia Mono" panose="020B0609020000020004" pitchFamily="49" charset="0"/>
                 <a:cs typeface="Cascadia Mono" panose="020B0609020000020004" pitchFamily="49" charset="0"/>
-              </a:endParaRPr>
-            </a:p>
-          </p:txBody>
-        </p:sp>
-        <p:sp>
-          <p:nvSpPr>
-            <p:cNvPr id="209" name="TextBox 208">
-              <a:extLst>
-                <a:ext uri="{FF2B5EF4-FFF2-40B4-BE49-F238E27FC236}">
-                  <a16:creationId xmlns:a16="http://schemas.microsoft.com/office/drawing/2014/main" id="{3C9F7DA6-3A88-7743-7973-380286F8ED2E}"/>
-                </a:ext>
-              </a:extLst>
-            </p:cNvPr>
-            <p:cNvSpPr txBox="1"/>
-            <p:nvPr/>
-          </p:nvSpPr>
-          <p:spPr>
-            <a:xfrm>
-              <a:off x="4951643" y="4250131"/>
-              <a:ext cx="1266693" cy="338554"/>
-            </a:xfrm>
-            <a:prstGeom prst="rect">
-              <a:avLst/>
-            </a:prstGeom>
-            <a:noFill/>
-          </p:spPr>
-          <p:txBody>
-            <a:bodyPr wrap="none" rtlCol="0">
-              <a:spAutoFit/>
-            </a:bodyPr>
-            <a:lstStyle/>
-            <a:p>
-              <a:r>
-                <a:rPr lang="en-US" sz="1600" dirty="0" err="1">
-                  <a:solidFill>
-                    <a:schemeClr val="bg1">
-                      <a:lumMod val="85000"/>
-                    </a:schemeClr>
-                  </a:solidFill>
-                  <a:latin typeface="Cascadia Mono" panose="020B0609020000020004" pitchFamily="49" charset="0"/>
-                  <a:ea typeface="Cascadia Mono" panose="020B0609020000020004" pitchFamily="49" charset="0"/>
-                  <a:cs typeface="Cascadia Mono" panose="020B0609020000020004" pitchFamily="49" charset="0"/>
-                </a:rPr>
-                <a:t>Tmax</a:t>
-              </a:r>
-              <a:r>
-                <a:rPr lang="en-US" sz="1600" dirty="0">
-                  <a:solidFill>
-                    <a:schemeClr val="bg1">
-                      <a:lumMod val="85000"/>
-                    </a:schemeClr>
-                  </a:solidFill>
-                  <a:latin typeface="Cascadia Mono" panose="020B0609020000020004" pitchFamily="49" charset="0"/>
-                  <a:ea typeface="Cascadia Mono" panose="020B0609020000020004" pitchFamily="49" charset="0"/>
-                  <a:cs typeface="Cascadia Mono" panose="020B0609020000020004" pitchFamily="49" charset="0"/>
-                </a:rPr>
-                <a:t>: 40C</a:t>
-              </a:r>
-              <a:endParaRPr lang="ru-RU" sz="1600" dirty="0">
-                <a:solidFill>
-                  <a:schemeClr val="bg1">
-                    <a:lumMod val="85000"/>
-                  </a:schemeClr>
-                </a:solidFill>
-                <a:latin typeface="Cascadia Mono" panose="020B0609020000020004" pitchFamily="49" charset="0"/>
-                <a:ea typeface="Cascadia Mono" panose="020B0609020000020004" pitchFamily="49" charset="0"/>
-                <a:cs typeface="Cascadia Mono" panose="020B0609020000020004" pitchFamily="49" charset="0"/>
-              </a:endParaRPr>
-            </a:p>
-          </p:txBody>
-        </p:sp>
-      </p:grpSp>
-      <p:grpSp>
-        <p:nvGrpSpPr>
-          <p:cNvPr id="221" name="Группа 220">
-            <a:extLst>
-              <a:ext uri="{FF2B5EF4-FFF2-40B4-BE49-F238E27FC236}">
-                <a16:creationId xmlns:a16="http://schemas.microsoft.com/office/drawing/2014/main" id="{229F645E-BAA9-4950-E732-FD7BA192913F}"/>
-              </a:ext>
-            </a:extLst>
-          </p:cNvPr>
-          <p:cNvGrpSpPr/>
-          <p:nvPr/>
-        </p:nvGrpSpPr>
-        <p:grpSpPr>
-          <a:xfrm>
-            <a:off x="8994621" y="4902243"/>
-            <a:ext cx="2968436" cy="1690459"/>
-            <a:chOff x="6890556" y="1135453"/>
-            <a:chExt cx="2145868" cy="1690459"/>
-          </a:xfrm>
-        </p:grpSpPr>
-        <p:sp>
-          <p:nvSpPr>
-            <p:cNvPr id="211" name="Прямоугольник: скругленные углы 210">
-              <a:extLst>
-                <a:ext uri="{FF2B5EF4-FFF2-40B4-BE49-F238E27FC236}">
-                  <a16:creationId xmlns:a16="http://schemas.microsoft.com/office/drawing/2014/main" id="{D5C0949C-011E-8C47-B856-20ABCB256827}"/>
-                </a:ext>
-              </a:extLst>
-            </p:cNvPr>
-            <p:cNvSpPr/>
-            <p:nvPr/>
-          </p:nvSpPr>
-          <p:spPr>
-            <a:xfrm>
-              <a:off x="6890556" y="1135453"/>
-              <a:ext cx="2145868" cy="1690459"/>
-            </a:xfrm>
-            <a:prstGeom prst="roundRect">
-              <a:avLst>
-                <a:gd name="adj" fmla="val 7999"/>
-              </a:avLst>
-            </a:prstGeom>
-            <a:noFill/>
-            <a:ln w="19050">
+              </a:rPr>
+              <a:t>Fan 2: 100 rpm</a:t>
+            </a:r>
+            <a:endParaRPr lang="ru-RU" sz="1600" dirty="0">
               <a:solidFill>
-                <a:schemeClr val="accent3">
-                  <a:lumMod val="75000"/>
+                <a:schemeClr val="bg1">
+                  <a:lumMod val="85000"/>
                 </a:schemeClr>
               </a:solidFill>
-            </a:ln>
-          </p:spPr>
-          <p:style>
-            <a:lnRef idx="2">
-              <a:schemeClr val="accent1">
-                <a:shade val="15000"/>
-              </a:schemeClr>
-            </a:lnRef>
-            <a:fillRef idx="1">
-              <a:schemeClr val="accent1"/>
-            </a:fillRef>
-            <a:effectRef idx="0">
-              <a:schemeClr val="accent1"/>
-            </a:effectRef>
-            <a:fontRef idx="minor">
-              <a:schemeClr val="lt1"/>
-            </a:fontRef>
-          </p:style>
-          <p:txBody>
-            <a:bodyPr rtlCol="0" anchor="ctr"/>
-            <a:lstStyle/>
-            <a:p>
-              <a:pPr algn="ctr"/>
-              <a:endParaRPr lang="ru-RU" dirty="0"/>
-            </a:p>
-          </p:txBody>
-        </p:sp>
-        <p:sp>
-          <p:nvSpPr>
-            <p:cNvPr id="212" name="TextBox 211">
-              <a:extLst>
-                <a:ext uri="{FF2B5EF4-FFF2-40B4-BE49-F238E27FC236}">
-                  <a16:creationId xmlns:a16="http://schemas.microsoft.com/office/drawing/2014/main" id="{BF4FBB32-DA43-AD70-841D-3D47E4DFB974}"/>
-                </a:ext>
-              </a:extLst>
-            </p:cNvPr>
-            <p:cNvSpPr txBox="1"/>
-            <p:nvPr/>
-          </p:nvSpPr>
-          <p:spPr>
-            <a:xfrm>
-              <a:off x="6986464" y="1224283"/>
-              <a:ext cx="1026243" cy="338554"/>
-            </a:xfrm>
-            <a:prstGeom prst="rect">
-              <a:avLst/>
-            </a:prstGeom>
-            <a:noFill/>
-          </p:spPr>
-          <p:txBody>
-            <a:bodyPr wrap="none" rtlCol="0">
-              <a:spAutoFit/>
-            </a:bodyPr>
-            <a:lstStyle/>
-            <a:p>
-              <a:r>
-                <a:rPr lang="en-US" sz="1600" dirty="0">
-                  <a:solidFill>
-                    <a:schemeClr val="bg1"/>
-                  </a:solidFill>
-                  <a:latin typeface="Cascadia Mono" panose="020B0609020000020004" pitchFamily="49" charset="0"/>
-                  <a:ea typeface="Cascadia Mono" panose="020B0609020000020004" pitchFamily="49" charset="0"/>
-                  <a:cs typeface="Cascadia Mono" panose="020B0609020000020004" pitchFamily="49" charset="0"/>
-                </a:rPr>
-                <a:t>Colling</a:t>
-              </a:r>
-              <a:endParaRPr lang="ru-RU" sz="1600" dirty="0">
-                <a:solidFill>
-                  <a:schemeClr val="bg1"/>
-                </a:solidFill>
-                <a:latin typeface="Cascadia Mono" panose="020B0609020000020004" pitchFamily="49" charset="0"/>
-                <a:ea typeface="Cascadia Mono" panose="020B0609020000020004" pitchFamily="49" charset="0"/>
-                <a:cs typeface="Cascadia Mono" panose="020B0609020000020004" pitchFamily="49" charset="0"/>
-              </a:endParaRPr>
-            </a:p>
-          </p:txBody>
-        </p:sp>
-        <p:sp>
-          <p:nvSpPr>
-            <p:cNvPr id="213" name="TextBox 212">
-              <a:extLst>
-                <a:ext uri="{FF2B5EF4-FFF2-40B4-BE49-F238E27FC236}">
-                  <a16:creationId xmlns:a16="http://schemas.microsoft.com/office/drawing/2014/main" id="{93D5BD3C-90B7-7CBC-E4F3-15E918A7E33E}"/>
-                </a:ext>
-              </a:extLst>
-            </p:cNvPr>
-            <p:cNvSpPr txBox="1"/>
-            <p:nvPr/>
-          </p:nvSpPr>
-          <p:spPr>
-            <a:xfrm>
-              <a:off x="7010399" y="1578696"/>
-              <a:ext cx="1867819" cy="338554"/>
-            </a:xfrm>
-            <a:prstGeom prst="rect">
-              <a:avLst/>
-            </a:prstGeom>
-            <a:noFill/>
-          </p:spPr>
-          <p:txBody>
-            <a:bodyPr wrap="none" rtlCol="0">
-              <a:spAutoFit/>
-            </a:bodyPr>
-            <a:lstStyle/>
-            <a:p>
-              <a:r>
-                <a:rPr lang="en-US" sz="1600" dirty="0">
-                  <a:solidFill>
-                    <a:schemeClr val="bg1">
-                      <a:lumMod val="85000"/>
-                    </a:schemeClr>
-                  </a:solidFill>
-                  <a:latin typeface="Cascadia Mono" panose="020B0609020000020004" pitchFamily="49" charset="0"/>
-                  <a:ea typeface="Cascadia Mono" panose="020B0609020000020004" pitchFamily="49" charset="0"/>
-                  <a:cs typeface="Cascadia Mono" panose="020B0609020000020004" pitchFamily="49" charset="0"/>
-                </a:rPr>
-                <a:t>Fan 1: 100 rpm</a:t>
-              </a:r>
-              <a:endParaRPr lang="ru-RU" sz="1600" dirty="0">
-                <a:solidFill>
-                  <a:schemeClr val="bg1">
-                    <a:lumMod val="85000"/>
-                  </a:schemeClr>
-                </a:solidFill>
-                <a:latin typeface="Cascadia Mono" panose="020B0609020000020004" pitchFamily="49" charset="0"/>
-                <a:ea typeface="Cascadia Mono" panose="020B0609020000020004" pitchFamily="49" charset="0"/>
-                <a:cs typeface="Cascadia Mono" panose="020B0609020000020004" pitchFamily="49" charset="0"/>
-              </a:endParaRPr>
-            </a:p>
-          </p:txBody>
-        </p:sp>
-        <p:sp>
-          <p:nvSpPr>
-            <p:cNvPr id="215" name="TextBox 214">
-              <a:extLst>
-                <a:ext uri="{FF2B5EF4-FFF2-40B4-BE49-F238E27FC236}">
-                  <a16:creationId xmlns:a16="http://schemas.microsoft.com/office/drawing/2014/main" id="{5327E2D4-EC97-7305-5EAF-21A2C42E1318}"/>
-                </a:ext>
-              </a:extLst>
-            </p:cNvPr>
-            <p:cNvSpPr txBox="1"/>
-            <p:nvPr/>
-          </p:nvSpPr>
-          <p:spPr>
-            <a:xfrm>
-              <a:off x="7009942" y="2046145"/>
-              <a:ext cx="1627369" cy="338554"/>
-            </a:xfrm>
-            <a:prstGeom prst="rect">
-              <a:avLst/>
-            </a:prstGeom>
-            <a:noFill/>
-          </p:spPr>
-          <p:txBody>
-            <a:bodyPr wrap="none" rtlCol="0">
-              <a:spAutoFit/>
-            </a:bodyPr>
-            <a:lstStyle/>
-            <a:p>
-              <a:r>
-                <a:rPr lang="en-US" sz="1600" dirty="0">
-                  <a:solidFill>
-                    <a:schemeClr val="bg1">
-                      <a:lumMod val="85000"/>
-                    </a:schemeClr>
-                  </a:solidFill>
-                  <a:latin typeface="Cascadia Mono" panose="020B0609020000020004" pitchFamily="49" charset="0"/>
-                  <a:ea typeface="Cascadia Mono" panose="020B0609020000020004" pitchFamily="49" charset="0"/>
-                  <a:cs typeface="Cascadia Mono" panose="020B0609020000020004" pitchFamily="49" charset="0"/>
-                </a:rPr>
-                <a:t>Gate 1: Open</a:t>
-              </a:r>
-              <a:endParaRPr lang="ru-RU" sz="1600" dirty="0">
-                <a:solidFill>
-                  <a:schemeClr val="bg1">
-                    <a:lumMod val="85000"/>
-                  </a:schemeClr>
-                </a:solidFill>
-                <a:latin typeface="Cascadia Mono" panose="020B0609020000020004" pitchFamily="49" charset="0"/>
-                <a:ea typeface="Cascadia Mono" panose="020B0609020000020004" pitchFamily="49" charset="0"/>
-                <a:cs typeface="Cascadia Mono" panose="020B0609020000020004" pitchFamily="49" charset="0"/>
-              </a:endParaRPr>
-            </a:p>
-          </p:txBody>
-        </p:sp>
-        <p:sp>
-          <p:nvSpPr>
-            <p:cNvPr id="218" name="TextBox 217">
-              <a:extLst>
-                <a:ext uri="{FF2B5EF4-FFF2-40B4-BE49-F238E27FC236}">
-                  <a16:creationId xmlns:a16="http://schemas.microsoft.com/office/drawing/2014/main" id="{6083B95F-A0A9-12D1-FE4C-2A4FD972476C}"/>
-                </a:ext>
-              </a:extLst>
-            </p:cNvPr>
-            <p:cNvSpPr txBox="1"/>
-            <p:nvPr/>
-          </p:nvSpPr>
-          <p:spPr>
-            <a:xfrm>
-              <a:off x="7009943" y="2315089"/>
-              <a:ext cx="1627369" cy="338554"/>
-            </a:xfrm>
-            <a:prstGeom prst="rect">
-              <a:avLst/>
-            </a:prstGeom>
-            <a:noFill/>
-          </p:spPr>
-          <p:txBody>
-            <a:bodyPr wrap="none" rtlCol="0">
-              <a:spAutoFit/>
-            </a:bodyPr>
-            <a:lstStyle/>
-            <a:p>
-              <a:r>
-                <a:rPr lang="en-US" sz="1600" dirty="0">
-                  <a:solidFill>
-                    <a:schemeClr val="bg1">
-                      <a:lumMod val="85000"/>
-                    </a:schemeClr>
-                  </a:solidFill>
-                  <a:latin typeface="Cascadia Mono" panose="020B0609020000020004" pitchFamily="49" charset="0"/>
-                  <a:ea typeface="Cascadia Mono" panose="020B0609020000020004" pitchFamily="49" charset="0"/>
-                  <a:cs typeface="Cascadia Mono" panose="020B0609020000020004" pitchFamily="49" charset="0"/>
-                </a:rPr>
-                <a:t>Gate 2: Open</a:t>
-              </a:r>
-              <a:endParaRPr lang="ru-RU" sz="1600" dirty="0">
-                <a:solidFill>
-                  <a:schemeClr val="bg1">
-                    <a:lumMod val="85000"/>
-                  </a:schemeClr>
-                </a:solidFill>
-                <a:latin typeface="Cascadia Mono" panose="020B0609020000020004" pitchFamily="49" charset="0"/>
-                <a:ea typeface="Cascadia Mono" panose="020B0609020000020004" pitchFamily="49" charset="0"/>
-                <a:cs typeface="Cascadia Mono" panose="020B0609020000020004" pitchFamily="49" charset="0"/>
-              </a:endParaRPr>
-            </a:p>
-          </p:txBody>
-        </p:sp>
-        <p:sp>
-          <p:nvSpPr>
-            <p:cNvPr id="220" name="TextBox 219">
-              <a:extLst>
-                <a:ext uri="{FF2B5EF4-FFF2-40B4-BE49-F238E27FC236}">
-                  <a16:creationId xmlns:a16="http://schemas.microsoft.com/office/drawing/2014/main" id="{A8A63FAF-B16C-0FC7-7043-1EF8F17D70CC}"/>
-                </a:ext>
-              </a:extLst>
-            </p:cNvPr>
-            <p:cNvSpPr txBox="1"/>
-            <p:nvPr/>
-          </p:nvSpPr>
-          <p:spPr>
-            <a:xfrm>
-              <a:off x="7009942" y="1807258"/>
-              <a:ext cx="1867819" cy="338554"/>
-            </a:xfrm>
-            <a:prstGeom prst="rect">
-              <a:avLst/>
-            </a:prstGeom>
-            <a:noFill/>
-          </p:spPr>
-          <p:txBody>
-            <a:bodyPr wrap="none" rtlCol="0">
-              <a:spAutoFit/>
-            </a:bodyPr>
-            <a:lstStyle/>
-            <a:p>
-              <a:r>
-                <a:rPr lang="en-US" sz="1600" dirty="0">
-                  <a:solidFill>
-                    <a:schemeClr val="bg1">
-                      <a:lumMod val="85000"/>
-                    </a:schemeClr>
-                  </a:solidFill>
-                  <a:latin typeface="Cascadia Mono" panose="020B0609020000020004" pitchFamily="49" charset="0"/>
-                  <a:ea typeface="Cascadia Mono" panose="020B0609020000020004" pitchFamily="49" charset="0"/>
-                  <a:cs typeface="Cascadia Mono" panose="020B0609020000020004" pitchFamily="49" charset="0"/>
-                </a:rPr>
-                <a:t>Fan 2: 100 rpm</a:t>
-              </a:r>
-              <a:endParaRPr lang="ru-RU" sz="1600" dirty="0">
-                <a:solidFill>
-                  <a:schemeClr val="bg1">
-                    <a:lumMod val="85000"/>
-                  </a:schemeClr>
-                </a:solidFill>
-                <a:latin typeface="Cascadia Mono" panose="020B0609020000020004" pitchFamily="49" charset="0"/>
-                <a:ea typeface="Cascadia Mono" panose="020B0609020000020004" pitchFamily="49" charset="0"/>
-                <a:cs typeface="Cascadia Mono" panose="020B0609020000020004" pitchFamily="49" charset="0"/>
-              </a:endParaRPr>
-            </a:p>
-          </p:txBody>
-        </p:sp>
-      </p:grpSp>
+              <a:latin typeface="Cascadia Mono" panose="020B0609020000020004" pitchFamily="49" charset="0"/>
+              <a:ea typeface="Cascadia Mono" panose="020B0609020000020004" pitchFamily="49" charset="0"/>
+              <a:cs typeface="Cascadia Mono" panose="020B0609020000020004" pitchFamily="49" charset="0"/>
+            </a:endParaRPr>
+          </a:p>
+        </p:txBody>
+      </p:sp>
       <p:grpSp>
         <p:nvGrpSpPr>
           <p:cNvPr id="261" name="Группа 260">
@@ -7679,7 +7095,7 @@
         </p:nvGrpSpPr>
         <p:grpSpPr>
           <a:xfrm>
-            <a:off x="224705" y="5994832"/>
+            <a:off x="592246" y="5987148"/>
             <a:ext cx="2968436" cy="588724"/>
             <a:chOff x="8994621" y="6031966"/>
             <a:chExt cx="2968436" cy="588724"/>
@@ -7796,12 +7212,308 @@
           </p:txBody>
         </p:sp>
       </p:grpSp>
+      <p:sp>
+        <p:nvSpPr>
+          <p:cNvPr id="237" name="TextBox 236">
+            <a:extLst>
+              <a:ext uri="{FF2B5EF4-FFF2-40B4-BE49-F238E27FC236}">
+                <a16:creationId xmlns:a16="http://schemas.microsoft.com/office/drawing/2014/main" id="{8B60AF02-1EC8-A58F-ADF7-272673B873EE}"/>
+              </a:ext>
+            </a:extLst>
+          </p:cNvPr>
+          <p:cNvSpPr txBox="1"/>
+          <p:nvPr/>
+        </p:nvSpPr>
+        <p:spPr>
+          <a:xfrm>
+            <a:off x="10365143" y="597303"/>
+            <a:ext cx="1627369" cy="584775"/>
+          </a:xfrm>
+          <a:prstGeom prst="rect">
+            <a:avLst/>
+          </a:prstGeom>
+          <a:noFill/>
+        </p:spPr>
+        <p:txBody>
+          <a:bodyPr wrap="none" rtlCol="0">
+            <a:spAutoFit/>
+          </a:bodyPr>
+          <a:lstStyle/>
+          <a:p>
+            <a:r>
+              <a:rPr lang="en-US" sz="1600" dirty="0">
+                <a:solidFill>
+                  <a:schemeClr val="bg1">
+                    <a:lumMod val="85000"/>
+                  </a:schemeClr>
+                </a:solidFill>
+                <a:latin typeface="Cascadia Mono" panose="020B0609020000020004" pitchFamily="49" charset="0"/>
+                <a:ea typeface="Cascadia Mono" panose="020B0609020000020004" pitchFamily="49" charset="0"/>
+                <a:cs typeface="Cascadia Mono" panose="020B0609020000020004" pitchFamily="49" charset="0"/>
+              </a:rPr>
+              <a:t>Contactor 1:</a:t>
+            </a:r>
+          </a:p>
+          <a:p>
+            <a:r>
+              <a:rPr lang="en-US" sz="1600" dirty="0">
+                <a:solidFill>
+                  <a:schemeClr val="bg1">
+                    <a:lumMod val="85000"/>
+                  </a:schemeClr>
+                </a:solidFill>
+                <a:latin typeface="Cascadia Mono" panose="020B0609020000020004" pitchFamily="49" charset="0"/>
+                <a:ea typeface="Cascadia Mono" panose="020B0609020000020004" pitchFamily="49" charset="0"/>
+                <a:cs typeface="Cascadia Mono" panose="020B0609020000020004" pitchFamily="49" charset="0"/>
+              </a:rPr>
+              <a:t>Closed</a:t>
+            </a:r>
+            <a:endParaRPr lang="ru-RU" sz="1600" dirty="0">
+              <a:solidFill>
+                <a:schemeClr val="bg1">
+                  <a:lumMod val="85000"/>
+                </a:schemeClr>
+              </a:solidFill>
+              <a:latin typeface="Cascadia Mono" panose="020B0609020000020004" pitchFamily="49" charset="0"/>
+              <a:ea typeface="Cascadia Mono" panose="020B0609020000020004" pitchFamily="49" charset="0"/>
+              <a:cs typeface="Cascadia Mono" panose="020B0609020000020004" pitchFamily="49" charset="0"/>
+            </a:endParaRPr>
+          </a:p>
+        </p:txBody>
+      </p:sp>
+      <p:sp>
+        <p:nvSpPr>
+          <p:cNvPr id="238" name="TextBox 237">
+            <a:extLst>
+              <a:ext uri="{FF2B5EF4-FFF2-40B4-BE49-F238E27FC236}">
+                <a16:creationId xmlns:a16="http://schemas.microsoft.com/office/drawing/2014/main" id="{DBC1DA25-8B6E-CC30-3235-2224CB89E98D}"/>
+              </a:ext>
+            </a:extLst>
+          </p:cNvPr>
+          <p:cNvSpPr txBox="1"/>
+          <p:nvPr/>
+        </p:nvSpPr>
+        <p:spPr>
+          <a:xfrm>
+            <a:off x="10365143" y="1270654"/>
+            <a:ext cx="1627369" cy="584775"/>
+          </a:xfrm>
+          <a:prstGeom prst="rect">
+            <a:avLst/>
+          </a:prstGeom>
+          <a:noFill/>
+        </p:spPr>
+        <p:txBody>
+          <a:bodyPr wrap="none" rtlCol="0">
+            <a:spAutoFit/>
+          </a:bodyPr>
+          <a:lstStyle/>
+          <a:p>
+            <a:r>
+              <a:rPr lang="en-US" sz="1600" dirty="0">
+                <a:solidFill>
+                  <a:schemeClr val="bg1">
+                    <a:lumMod val="85000"/>
+                  </a:schemeClr>
+                </a:solidFill>
+                <a:latin typeface="Cascadia Mono" panose="020B0609020000020004" pitchFamily="49" charset="0"/>
+                <a:ea typeface="Cascadia Mono" panose="020B0609020000020004" pitchFamily="49" charset="0"/>
+                <a:cs typeface="Cascadia Mono" panose="020B0609020000020004" pitchFamily="49" charset="0"/>
+              </a:rPr>
+              <a:t>Contactor 2:</a:t>
+            </a:r>
+          </a:p>
+          <a:p>
+            <a:r>
+              <a:rPr lang="en-US" sz="1600" dirty="0">
+                <a:solidFill>
+                  <a:schemeClr val="bg1">
+                    <a:lumMod val="85000"/>
+                  </a:schemeClr>
+                </a:solidFill>
+                <a:latin typeface="Cascadia Mono" panose="020B0609020000020004" pitchFamily="49" charset="0"/>
+                <a:ea typeface="Cascadia Mono" panose="020B0609020000020004" pitchFamily="49" charset="0"/>
+                <a:cs typeface="Cascadia Mono" panose="020B0609020000020004" pitchFamily="49" charset="0"/>
+              </a:rPr>
+              <a:t>Closed</a:t>
+            </a:r>
+            <a:endParaRPr lang="ru-RU" sz="1600" dirty="0">
+              <a:solidFill>
+                <a:schemeClr val="bg1">
+                  <a:lumMod val="85000"/>
+                </a:schemeClr>
+              </a:solidFill>
+              <a:latin typeface="Cascadia Mono" panose="020B0609020000020004" pitchFamily="49" charset="0"/>
+              <a:ea typeface="Cascadia Mono" panose="020B0609020000020004" pitchFamily="49" charset="0"/>
+              <a:cs typeface="Cascadia Mono" panose="020B0609020000020004" pitchFamily="49" charset="0"/>
+            </a:endParaRPr>
+          </a:p>
+        </p:txBody>
+      </p:sp>
+      <p:sp>
+        <p:nvSpPr>
+          <p:cNvPr id="258" name="TextBox 257">
+            <a:extLst>
+              <a:ext uri="{FF2B5EF4-FFF2-40B4-BE49-F238E27FC236}">
+                <a16:creationId xmlns:a16="http://schemas.microsoft.com/office/drawing/2014/main" id="{7672330D-298F-368E-1DA1-51F5F58FA00F}"/>
+              </a:ext>
+            </a:extLst>
+          </p:cNvPr>
+          <p:cNvSpPr txBox="1"/>
+          <p:nvPr/>
+        </p:nvSpPr>
+        <p:spPr>
+          <a:xfrm>
+            <a:off x="8367487" y="547380"/>
+            <a:ext cx="1266693" cy="338554"/>
+          </a:xfrm>
+          <a:prstGeom prst="rect">
+            <a:avLst/>
+          </a:prstGeom>
+          <a:noFill/>
+        </p:spPr>
+        <p:txBody>
+          <a:bodyPr wrap="none" rtlCol="0">
+            <a:spAutoFit/>
+          </a:bodyPr>
+          <a:lstStyle/>
+          <a:p>
+            <a:r>
+              <a:rPr lang="en-US" sz="1600" dirty="0">
+                <a:solidFill>
+                  <a:schemeClr val="bg1"/>
+                </a:solidFill>
+                <a:latin typeface="Cascadia Mono" panose="020B0609020000020004" pitchFamily="49" charset="0"/>
+                <a:ea typeface="Cascadia Mono" panose="020B0609020000020004" pitchFamily="49" charset="0"/>
+                <a:cs typeface="Cascadia Mono" panose="020B0609020000020004" pitchFamily="49" charset="0"/>
+              </a:rPr>
+              <a:t>Isolation</a:t>
+            </a:r>
+            <a:endParaRPr lang="ru-RU" sz="1600" dirty="0">
+              <a:solidFill>
+                <a:schemeClr val="bg1"/>
+              </a:solidFill>
+              <a:latin typeface="Cascadia Mono" panose="020B0609020000020004" pitchFamily="49" charset="0"/>
+              <a:ea typeface="Cascadia Mono" panose="020B0609020000020004" pitchFamily="49" charset="0"/>
+              <a:cs typeface="Cascadia Mono" panose="020B0609020000020004" pitchFamily="49" charset="0"/>
+            </a:endParaRPr>
+          </a:p>
+        </p:txBody>
+      </p:sp>
+      <p:sp>
+        <p:nvSpPr>
+          <p:cNvPr id="259" name="TextBox 258">
+            <a:extLst>
+              <a:ext uri="{FF2B5EF4-FFF2-40B4-BE49-F238E27FC236}">
+                <a16:creationId xmlns:a16="http://schemas.microsoft.com/office/drawing/2014/main" id="{A2BC51F3-1349-51C2-8D2C-4588BF828CCE}"/>
+              </a:ext>
+            </a:extLst>
+          </p:cNvPr>
+          <p:cNvSpPr txBox="1"/>
+          <p:nvPr/>
+        </p:nvSpPr>
+        <p:spPr>
+          <a:xfrm>
+            <a:off x="8367487" y="888770"/>
+            <a:ext cx="1627369" cy="338554"/>
+          </a:xfrm>
+          <a:prstGeom prst="rect">
+            <a:avLst/>
+          </a:prstGeom>
+          <a:noFill/>
+        </p:spPr>
+        <p:txBody>
+          <a:bodyPr wrap="none" rtlCol="0">
+            <a:spAutoFit/>
+          </a:bodyPr>
+          <a:lstStyle/>
+          <a:p>
+            <a:r>
+              <a:rPr lang="en-US" sz="1600" dirty="0">
+                <a:solidFill>
+                  <a:schemeClr val="bg1">
+                    <a:lumMod val="85000"/>
+                  </a:schemeClr>
+                </a:solidFill>
+                <a:latin typeface="Cascadia Mono" panose="020B0609020000020004" pitchFamily="49" charset="0"/>
+                <a:ea typeface="Cascadia Mono" panose="020B0609020000020004" pitchFamily="49" charset="0"/>
+                <a:cs typeface="Cascadia Mono" panose="020B0609020000020004" pitchFamily="49" charset="0"/>
+              </a:rPr>
+              <a:t>Res+: 500MOm</a:t>
+            </a:r>
+            <a:endParaRPr lang="ru-RU" sz="1600" dirty="0">
+              <a:solidFill>
+                <a:schemeClr val="bg1">
+                  <a:lumMod val="85000"/>
+                </a:schemeClr>
+              </a:solidFill>
+              <a:latin typeface="Cascadia Mono" panose="020B0609020000020004" pitchFamily="49" charset="0"/>
+              <a:ea typeface="Cascadia Mono" panose="020B0609020000020004" pitchFamily="49" charset="0"/>
+              <a:cs typeface="Cascadia Mono" panose="020B0609020000020004" pitchFamily="49" charset="0"/>
+            </a:endParaRPr>
+          </a:p>
+        </p:txBody>
+      </p:sp>
+      <p:sp>
+        <p:nvSpPr>
+          <p:cNvPr id="260" name="TextBox 259">
+            <a:extLst>
+              <a:ext uri="{FF2B5EF4-FFF2-40B4-BE49-F238E27FC236}">
+                <a16:creationId xmlns:a16="http://schemas.microsoft.com/office/drawing/2014/main" id="{AEA994AF-73B7-4FC4-8548-28A1C531BC9F}"/>
+              </a:ext>
+            </a:extLst>
+          </p:cNvPr>
+          <p:cNvSpPr txBox="1"/>
+          <p:nvPr/>
+        </p:nvSpPr>
+        <p:spPr>
+          <a:xfrm>
+            <a:off x="8367487" y="1227324"/>
+            <a:ext cx="1627369" cy="338554"/>
+          </a:xfrm>
+          <a:prstGeom prst="rect">
+            <a:avLst/>
+          </a:prstGeom>
+          <a:noFill/>
+        </p:spPr>
+        <p:txBody>
+          <a:bodyPr wrap="none" rtlCol="0">
+            <a:spAutoFit/>
+          </a:bodyPr>
+          <a:lstStyle/>
+          <a:p>
+            <a:r>
+              <a:rPr lang="en-US" sz="1600" dirty="0">
+                <a:solidFill>
+                  <a:schemeClr val="bg1">
+                    <a:lumMod val="85000"/>
+                  </a:schemeClr>
+                </a:solidFill>
+                <a:latin typeface="Cascadia Mono" panose="020B0609020000020004" pitchFamily="49" charset="0"/>
+                <a:ea typeface="Cascadia Mono" panose="020B0609020000020004" pitchFamily="49" charset="0"/>
+                <a:cs typeface="Cascadia Mono" panose="020B0609020000020004" pitchFamily="49" charset="0"/>
+              </a:rPr>
+              <a:t>Res-: 500MOm</a:t>
+            </a:r>
+            <a:endParaRPr lang="ru-RU" sz="1600" dirty="0">
+              <a:solidFill>
+                <a:schemeClr val="bg1">
+                  <a:lumMod val="85000"/>
+                </a:schemeClr>
+              </a:solidFill>
+              <a:latin typeface="Cascadia Mono" panose="020B0609020000020004" pitchFamily="49" charset="0"/>
+              <a:ea typeface="Cascadia Mono" panose="020B0609020000020004" pitchFamily="49" charset="0"/>
+              <a:cs typeface="Cascadia Mono" panose="020B0609020000020004" pitchFamily="49" charset="0"/>
+            </a:endParaRPr>
+          </a:p>
+        </p:txBody>
+      </p:sp>
       <p:grpSp>
         <p:nvGrpSpPr>
-          <p:cNvPr id="234" name="Группа 233">
+          <p:cNvPr id="428" name="Группа 427">
             <a:extLst>
               <a:ext uri="{FF2B5EF4-FFF2-40B4-BE49-F238E27FC236}">
-                <a16:creationId xmlns:a16="http://schemas.microsoft.com/office/drawing/2014/main" id="{6A62BC8E-0A68-3927-1F0A-7213514993D6}"/>
+                <a16:creationId xmlns:a16="http://schemas.microsoft.com/office/drawing/2014/main" id="{BE23ACCD-4B93-CCE0-5643-C648126B8F4E}"/>
               </a:ext>
             </a:extLst>
           </p:cNvPr>
@@ -7810,74 +7522,18 @@
         </p:nvGrpSpPr>
         <p:grpSpPr>
           <a:xfrm>
-            <a:off x="8994621" y="2032967"/>
-            <a:ext cx="2968436" cy="1225562"/>
-            <a:chOff x="4824550" y="848663"/>
-            <a:chExt cx="2968436" cy="1225562"/>
+            <a:off x="5777628" y="4273831"/>
+            <a:ext cx="5876692" cy="2309725"/>
+            <a:chOff x="6819461" y="3997940"/>
+            <a:chExt cx="5028661" cy="2589587"/>
           </a:xfrm>
         </p:grpSpPr>
         <p:sp>
           <p:nvSpPr>
-            <p:cNvPr id="235" name="Прямоугольник: скругленные углы 234">
+            <p:cNvPr id="204" name="TextBox 203">
               <a:extLst>
                 <a:ext uri="{FF2B5EF4-FFF2-40B4-BE49-F238E27FC236}">
-                  <a16:creationId xmlns:a16="http://schemas.microsoft.com/office/drawing/2014/main" id="{1CAE0F2E-FABA-75E1-2463-8D258855F0E2}"/>
-                </a:ext>
-              </a:extLst>
-            </p:cNvPr>
-            <p:cNvSpPr/>
-            <p:nvPr/>
-          </p:nvSpPr>
-          <p:spPr>
-            <a:xfrm>
-              <a:off x="4824550" y="848663"/>
-              <a:ext cx="2968436" cy="1225562"/>
-            </a:xfrm>
-            <a:prstGeom prst="roundRect">
-              <a:avLst>
-                <a:gd name="adj" fmla="val 7999"/>
-              </a:avLst>
-            </a:prstGeom>
-            <a:noFill/>
-            <a:ln w="19050">
-              <a:solidFill>
-                <a:schemeClr val="accent3">
-                  <a:lumMod val="75000"/>
-                </a:schemeClr>
-              </a:solidFill>
-            </a:ln>
-          </p:spPr>
-          <p:style>
-            <a:lnRef idx="2">
-              <a:schemeClr val="accent1">
-                <a:shade val="15000"/>
-              </a:schemeClr>
-            </a:lnRef>
-            <a:fillRef idx="1">
-              <a:schemeClr val="accent1"/>
-            </a:fillRef>
-            <a:effectRef idx="0">
-              <a:schemeClr val="accent1"/>
-            </a:effectRef>
-            <a:fontRef idx="minor">
-              <a:schemeClr val="lt1"/>
-            </a:fontRef>
-          </p:style>
-          <p:txBody>
-            <a:bodyPr rtlCol="0" anchor="ctr"/>
-            <a:lstStyle/>
-            <a:p>
-              <a:pPr algn="ctr"/>
-              <a:endParaRPr lang="ru-RU"/>
-            </a:p>
-          </p:txBody>
-        </p:sp>
-        <p:sp>
-          <p:nvSpPr>
-            <p:cNvPr id="236" name="TextBox 235">
-              <a:extLst>
-                <a:ext uri="{FF2B5EF4-FFF2-40B4-BE49-F238E27FC236}">
-                  <a16:creationId xmlns:a16="http://schemas.microsoft.com/office/drawing/2014/main" id="{E22A3011-DC72-D6B8-5DF9-56F820F2BFEC}"/>
+                  <a16:creationId xmlns:a16="http://schemas.microsoft.com/office/drawing/2014/main" id="{42641320-34AB-FC67-2DB2-071322368DA3}"/>
                 </a:ext>
               </a:extLst>
             </p:cNvPr>
@@ -7886,13 +7542,17 @@
           </p:nvSpPr>
           <p:spPr>
             <a:xfrm>
-              <a:off x="4920458" y="937492"/>
-              <a:ext cx="1386918" cy="338554"/>
+              <a:off x="6819461" y="3997944"/>
+              <a:ext cx="425116" cy="338554"/>
             </a:xfrm>
             <a:prstGeom prst="rect">
               <a:avLst/>
             </a:prstGeom>
-            <a:noFill/>
+            <a:solidFill>
+              <a:schemeClr val="accent6">
+                <a:lumMod val="50000"/>
+              </a:schemeClr>
+            </a:solidFill>
           </p:spPr>
           <p:txBody>
             <a:bodyPr wrap="none" rtlCol="0">
@@ -7901,7 +7561,7 @@
             <a:lstStyle/>
             <a:p>
               <a:r>
-                <a:rPr lang="en-US" sz="1600" dirty="0">
+                <a:rPr lang="ru-RU" sz="1600" dirty="0">
                   <a:solidFill>
                     <a:schemeClr val="bg1"/>
                   </a:solidFill>
@@ -7909,25 +7569,17 @@
                   <a:ea typeface="Cascadia Mono" panose="020B0609020000020004" pitchFamily="49" charset="0"/>
                   <a:cs typeface="Cascadia Mono" panose="020B0609020000020004" pitchFamily="49" charset="0"/>
                 </a:rPr>
-                <a:t>Contactors</a:t>
+                <a:t>01</a:t>
               </a:r>
-              <a:endParaRPr lang="ru-RU" sz="1600" dirty="0">
-                <a:solidFill>
-                  <a:schemeClr val="bg1"/>
-                </a:solidFill>
-                <a:latin typeface="Cascadia Mono" panose="020B0609020000020004" pitchFamily="49" charset="0"/>
-                <a:ea typeface="Cascadia Mono" panose="020B0609020000020004" pitchFamily="49" charset="0"/>
-                <a:cs typeface="Cascadia Mono" panose="020B0609020000020004" pitchFamily="49" charset="0"/>
-              </a:endParaRPr>
             </a:p>
           </p:txBody>
         </p:sp>
         <p:sp>
           <p:nvSpPr>
-            <p:cNvPr id="237" name="TextBox 236">
+            <p:cNvPr id="252" name="TextBox 251">
               <a:extLst>
                 <a:ext uri="{FF2B5EF4-FFF2-40B4-BE49-F238E27FC236}">
-                  <a16:creationId xmlns:a16="http://schemas.microsoft.com/office/drawing/2014/main" id="{8B60AF02-1EC8-A58F-ADF7-272673B873EE}"/>
+                  <a16:creationId xmlns:a16="http://schemas.microsoft.com/office/drawing/2014/main" id="{C8A3B616-42B7-4E47-739E-B6DD739C33F6}"/>
                 </a:ext>
               </a:extLst>
             </p:cNvPr>
@@ -7936,13 +7588,17 @@
           </p:nvSpPr>
           <p:spPr>
             <a:xfrm>
-              <a:off x="4920458" y="1278882"/>
-              <a:ext cx="2468946" cy="338554"/>
+              <a:off x="7330966" y="3997943"/>
+              <a:ext cx="425116" cy="338554"/>
             </a:xfrm>
             <a:prstGeom prst="rect">
               <a:avLst/>
             </a:prstGeom>
-            <a:noFill/>
+            <a:solidFill>
+              <a:schemeClr val="accent6">
+                <a:lumMod val="50000"/>
+              </a:schemeClr>
+            </a:solidFill>
           </p:spPr>
           <p:txBody>
             <a:bodyPr wrap="none" rtlCol="0">
@@ -7951,19 +7607,2534 @@
             <a:lstStyle/>
             <a:p>
               <a:r>
-                <a:rPr lang="en-US" sz="1600" dirty="0">
+                <a:rPr lang="ru-RU" sz="1600" dirty="0">
                   <a:solidFill>
-                    <a:schemeClr val="bg1">
-                      <a:lumMod val="85000"/>
-                    </a:schemeClr>
+                    <a:schemeClr val="bg1"/>
                   </a:solidFill>
                   <a:latin typeface="Cascadia Mono" panose="020B0609020000020004" pitchFamily="49" charset="0"/>
                   <a:ea typeface="Cascadia Mono" panose="020B0609020000020004" pitchFamily="49" charset="0"/>
                   <a:cs typeface="Cascadia Mono" panose="020B0609020000020004" pitchFamily="49" charset="0"/>
                 </a:rPr>
-                <a:t>Contactor 1: Closed</a:t>
+                <a:t>01</a:t>
               </a:r>
-              <a:endParaRPr lang="ru-RU" sz="1600" dirty="0">
+            </a:p>
+          </p:txBody>
+        </p:sp>
+        <p:sp>
+          <p:nvSpPr>
+            <p:cNvPr id="254" name="TextBox 253">
+              <a:extLst>
+                <a:ext uri="{FF2B5EF4-FFF2-40B4-BE49-F238E27FC236}">
+                  <a16:creationId xmlns:a16="http://schemas.microsoft.com/office/drawing/2014/main" id="{74F3643C-09DB-FE5C-7AC3-108A570E5916}"/>
+                </a:ext>
+              </a:extLst>
+            </p:cNvPr>
+            <p:cNvSpPr txBox="1"/>
+            <p:nvPr/>
+          </p:nvSpPr>
+          <p:spPr>
+            <a:xfrm>
+              <a:off x="7842471" y="3997942"/>
+              <a:ext cx="425116" cy="338554"/>
+            </a:xfrm>
+            <a:prstGeom prst="rect">
+              <a:avLst/>
+            </a:prstGeom>
+            <a:solidFill>
+              <a:schemeClr val="accent6">
+                <a:lumMod val="50000"/>
+              </a:schemeClr>
+            </a:solidFill>
+          </p:spPr>
+          <p:txBody>
+            <a:bodyPr wrap="none" rtlCol="0">
+              <a:spAutoFit/>
+            </a:bodyPr>
+            <a:lstStyle/>
+            <a:p>
+              <a:r>
+                <a:rPr lang="ru-RU" sz="1600" dirty="0">
+                  <a:solidFill>
+                    <a:schemeClr val="bg1"/>
+                  </a:solidFill>
+                  <a:latin typeface="Cascadia Mono" panose="020B0609020000020004" pitchFamily="49" charset="0"/>
+                  <a:ea typeface="Cascadia Mono" panose="020B0609020000020004" pitchFamily="49" charset="0"/>
+                  <a:cs typeface="Cascadia Mono" panose="020B0609020000020004" pitchFamily="49" charset="0"/>
+                </a:rPr>
+                <a:t>01</a:t>
+              </a:r>
+            </a:p>
+          </p:txBody>
+        </p:sp>
+        <p:sp>
+          <p:nvSpPr>
+            <p:cNvPr id="263" name="TextBox 262">
+              <a:extLst>
+                <a:ext uri="{FF2B5EF4-FFF2-40B4-BE49-F238E27FC236}">
+                  <a16:creationId xmlns:a16="http://schemas.microsoft.com/office/drawing/2014/main" id="{B619791F-C2B0-45CB-71D0-0E2CED2F674D}"/>
+                </a:ext>
+              </a:extLst>
+            </p:cNvPr>
+            <p:cNvSpPr txBox="1"/>
+            <p:nvPr/>
+          </p:nvSpPr>
+          <p:spPr>
+            <a:xfrm>
+              <a:off x="8353976" y="3997941"/>
+              <a:ext cx="425116" cy="338554"/>
+            </a:xfrm>
+            <a:prstGeom prst="rect">
+              <a:avLst/>
+            </a:prstGeom>
+            <a:solidFill>
+              <a:schemeClr val="accent6">
+                <a:lumMod val="50000"/>
+              </a:schemeClr>
+            </a:solidFill>
+          </p:spPr>
+          <p:txBody>
+            <a:bodyPr wrap="none" rtlCol="0">
+              <a:spAutoFit/>
+            </a:bodyPr>
+            <a:lstStyle/>
+            <a:p>
+              <a:r>
+                <a:rPr lang="ru-RU" sz="1600" dirty="0">
+                  <a:solidFill>
+                    <a:schemeClr val="bg1"/>
+                  </a:solidFill>
+                  <a:latin typeface="Cascadia Mono" panose="020B0609020000020004" pitchFamily="49" charset="0"/>
+                  <a:ea typeface="Cascadia Mono" panose="020B0609020000020004" pitchFamily="49" charset="0"/>
+                  <a:cs typeface="Cascadia Mono" panose="020B0609020000020004" pitchFamily="49" charset="0"/>
+                </a:rPr>
+                <a:t>01</a:t>
+              </a:r>
+            </a:p>
+          </p:txBody>
+        </p:sp>
+        <p:sp>
+          <p:nvSpPr>
+            <p:cNvPr id="265" name="TextBox 264">
+              <a:extLst>
+                <a:ext uri="{FF2B5EF4-FFF2-40B4-BE49-F238E27FC236}">
+                  <a16:creationId xmlns:a16="http://schemas.microsoft.com/office/drawing/2014/main" id="{CCC8AC87-E099-E9E9-6D09-492FFA06AA64}"/>
+                </a:ext>
+              </a:extLst>
+            </p:cNvPr>
+            <p:cNvSpPr txBox="1"/>
+            <p:nvPr/>
+          </p:nvSpPr>
+          <p:spPr>
+            <a:xfrm>
+              <a:off x="8865481" y="3997940"/>
+              <a:ext cx="425116" cy="338554"/>
+            </a:xfrm>
+            <a:prstGeom prst="rect">
+              <a:avLst/>
+            </a:prstGeom>
+            <a:solidFill>
+              <a:schemeClr val="accent6">
+                <a:lumMod val="50000"/>
+              </a:schemeClr>
+            </a:solidFill>
+          </p:spPr>
+          <p:txBody>
+            <a:bodyPr wrap="none" rtlCol="0">
+              <a:spAutoFit/>
+            </a:bodyPr>
+            <a:lstStyle/>
+            <a:p>
+              <a:r>
+                <a:rPr lang="ru-RU" sz="1600" dirty="0">
+                  <a:solidFill>
+                    <a:schemeClr val="bg1"/>
+                  </a:solidFill>
+                  <a:latin typeface="Cascadia Mono" panose="020B0609020000020004" pitchFamily="49" charset="0"/>
+                  <a:ea typeface="Cascadia Mono" panose="020B0609020000020004" pitchFamily="49" charset="0"/>
+                  <a:cs typeface="Cascadia Mono" panose="020B0609020000020004" pitchFamily="49" charset="0"/>
+                </a:rPr>
+                <a:t>01</a:t>
+              </a:r>
+            </a:p>
+          </p:txBody>
+        </p:sp>
+        <p:sp>
+          <p:nvSpPr>
+            <p:cNvPr id="267" name="TextBox 266">
+              <a:extLst>
+                <a:ext uri="{FF2B5EF4-FFF2-40B4-BE49-F238E27FC236}">
+                  <a16:creationId xmlns:a16="http://schemas.microsoft.com/office/drawing/2014/main" id="{D231E1E4-E1F9-3DBA-A581-D08CEED376E5}"/>
+                </a:ext>
+              </a:extLst>
+            </p:cNvPr>
+            <p:cNvSpPr txBox="1"/>
+            <p:nvPr/>
+          </p:nvSpPr>
+          <p:spPr>
+            <a:xfrm>
+              <a:off x="9376986" y="3997940"/>
+              <a:ext cx="425116" cy="338554"/>
+            </a:xfrm>
+            <a:prstGeom prst="rect">
+              <a:avLst/>
+            </a:prstGeom>
+            <a:solidFill>
+              <a:schemeClr val="accent6">
+                <a:lumMod val="50000"/>
+              </a:schemeClr>
+            </a:solidFill>
+          </p:spPr>
+          <p:txBody>
+            <a:bodyPr wrap="none" rtlCol="0">
+              <a:spAutoFit/>
+            </a:bodyPr>
+            <a:lstStyle/>
+            <a:p>
+              <a:r>
+                <a:rPr lang="ru-RU" sz="1600" dirty="0">
+                  <a:solidFill>
+                    <a:schemeClr val="bg1"/>
+                  </a:solidFill>
+                  <a:latin typeface="Cascadia Mono" panose="020B0609020000020004" pitchFamily="49" charset="0"/>
+                  <a:ea typeface="Cascadia Mono" panose="020B0609020000020004" pitchFamily="49" charset="0"/>
+                  <a:cs typeface="Cascadia Mono" panose="020B0609020000020004" pitchFamily="49" charset="0"/>
+                </a:rPr>
+                <a:t>01</a:t>
+              </a:r>
+            </a:p>
+          </p:txBody>
+        </p:sp>
+        <p:sp>
+          <p:nvSpPr>
+            <p:cNvPr id="271" name="TextBox 270">
+              <a:extLst>
+                <a:ext uri="{FF2B5EF4-FFF2-40B4-BE49-F238E27FC236}">
+                  <a16:creationId xmlns:a16="http://schemas.microsoft.com/office/drawing/2014/main" id="{F7CEF9FE-C40C-3805-776B-9A395B848753}"/>
+                </a:ext>
+              </a:extLst>
+            </p:cNvPr>
+            <p:cNvSpPr txBox="1"/>
+            <p:nvPr/>
+          </p:nvSpPr>
+          <p:spPr>
+            <a:xfrm>
+              <a:off x="9888491" y="3997940"/>
+              <a:ext cx="425116" cy="338554"/>
+            </a:xfrm>
+            <a:prstGeom prst="rect">
+              <a:avLst/>
+            </a:prstGeom>
+            <a:solidFill>
+              <a:schemeClr val="accent6">
+                <a:lumMod val="50000"/>
+              </a:schemeClr>
+            </a:solidFill>
+          </p:spPr>
+          <p:txBody>
+            <a:bodyPr wrap="none" rtlCol="0">
+              <a:spAutoFit/>
+            </a:bodyPr>
+            <a:lstStyle/>
+            <a:p>
+              <a:r>
+                <a:rPr lang="ru-RU" sz="1600" dirty="0">
+                  <a:solidFill>
+                    <a:schemeClr val="bg1"/>
+                  </a:solidFill>
+                  <a:latin typeface="Cascadia Mono" panose="020B0609020000020004" pitchFamily="49" charset="0"/>
+                  <a:ea typeface="Cascadia Mono" panose="020B0609020000020004" pitchFamily="49" charset="0"/>
+                  <a:cs typeface="Cascadia Mono" panose="020B0609020000020004" pitchFamily="49" charset="0"/>
+                </a:rPr>
+                <a:t>01</a:t>
+              </a:r>
+            </a:p>
+          </p:txBody>
+        </p:sp>
+        <p:sp>
+          <p:nvSpPr>
+            <p:cNvPr id="273" name="TextBox 272">
+              <a:extLst>
+                <a:ext uri="{FF2B5EF4-FFF2-40B4-BE49-F238E27FC236}">
+                  <a16:creationId xmlns:a16="http://schemas.microsoft.com/office/drawing/2014/main" id="{9B120CE9-952B-2136-7F4F-DFF37F4BF105}"/>
+                </a:ext>
+              </a:extLst>
+            </p:cNvPr>
+            <p:cNvSpPr txBox="1"/>
+            <p:nvPr/>
+          </p:nvSpPr>
+          <p:spPr>
+            <a:xfrm>
+              <a:off x="10399996" y="3997940"/>
+              <a:ext cx="425116" cy="338554"/>
+            </a:xfrm>
+            <a:prstGeom prst="rect">
+              <a:avLst/>
+            </a:prstGeom>
+            <a:solidFill>
+              <a:schemeClr val="accent6">
+                <a:lumMod val="50000"/>
+              </a:schemeClr>
+            </a:solidFill>
+          </p:spPr>
+          <p:txBody>
+            <a:bodyPr wrap="none" rtlCol="0">
+              <a:spAutoFit/>
+            </a:bodyPr>
+            <a:lstStyle/>
+            <a:p>
+              <a:r>
+                <a:rPr lang="ru-RU" sz="1600" dirty="0">
+                  <a:solidFill>
+                    <a:schemeClr val="bg1"/>
+                  </a:solidFill>
+                  <a:latin typeface="Cascadia Mono" panose="020B0609020000020004" pitchFamily="49" charset="0"/>
+                  <a:ea typeface="Cascadia Mono" panose="020B0609020000020004" pitchFamily="49" charset="0"/>
+                  <a:cs typeface="Cascadia Mono" panose="020B0609020000020004" pitchFamily="49" charset="0"/>
+                </a:rPr>
+                <a:t>01</a:t>
+              </a:r>
+            </a:p>
+          </p:txBody>
+        </p:sp>
+        <p:sp>
+          <p:nvSpPr>
+            <p:cNvPr id="275" name="TextBox 274">
+              <a:extLst>
+                <a:ext uri="{FF2B5EF4-FFF2-40B4-BE49-F238E27FC236}">
+                  <a16:creationId xmlns:a16="http://schemas.microsoft.com/office/drawing/2014/main" id="{5DD06FD5-3A04-63A8-6E0A-9800D1CF9BAE}"/>
+                </a:ext>
+              </a:extLst>
+            </p:cNvPr>
+            <p:cNvSpPr txBox="1"/>
+            <p:nvPr/>
+          </p:nvSpPr>
+          <p:spPr>
+            <a:xfrm>
+              <a:off x="10911501" y="3997940"/>
+              <a:ext cx="425116" cy="338554"/>
+            </a:xfrm>
+            <a:prstGeom prst="rect">
+              <a:avLst/>
+            </a:prstGeom>
+            <a:solidFill>
+              <a:schemeClr val="accent6">
+                <a:lumMod val="50000"/>
+              </a:schemeClr>
+            </a:solidFill>
+          </p:spPr>
+          <p:txBody>
+            <a:bodyPr wrap="none" rtlCol="0">
+              <a:spAutoFit/>
+            </a:bodyPr>
+            <a:lstStyle/>
+            <a:p>
+              <a:r>
+                <a:rPr lang="ru-RU" sz="1600" dirty="0">
+                  <a:solidFill>
+                    <a:schemeClr val="bg1"/>
+                  </a:solidFill>
+                  <a:latin typeface="Cascadia Mono" panose="020B0609020000020004" pitchFamily="49" charset="0"/>
+                  <a:ea typeface="Cascadia Mono" panose="020B0609020000020004" pitchFamily="49" charset="0"/>
+                  <a:cs typeface="Cascadia Mono" panose="020B0609020000020004" pitchFamily="49" charset="0"/>
+                </a:rPr>
+                <a:t>01</a:t>
+              </a:r>
+            </a:p>
+          </p:txBody>
+        </p:sp>
+        <p:sp>
+          <p:nvSpPr>
+            <p:cNvPr id="277" name="TextBox 276">
+              <a:extLst>
+                <a:ext uri="{FF2B5EF4-FFF2-40B4-BE49-F238E27FC236}">
+                  <a16:creationId xmlns:a16="http://schemas.microsoft.com/office/drawing/2014/main" id="{CA61ACA4-2091-AD26-075F-2273B622B7D6}"/>
+                </a:ext>
+              </a:extLst>
+            </p:cNvPr>
+            <p:cNvSpPr txBox="1"/>
+            <p:nvPr/>
+          </p:nvSpPr>
+          <p:spPr>
+            <a:xfrm>
+              <a:off x="6819461" y="4451455"/>
+              <a:ext cx="425116" cy="338554"/>
+            </a:xfrm>
+            <a:prstGeom prst="rect">
+              <a:avLst/>
+            </a:prstGeom>
+            <a:solidFill>
+              <a:schemeClr val="accent6">
+                <a:lumMod val="50000"/>
+              </a:schemeClr>
+            </a:solidFill>
+          </p:spPr>
+          <p:txBody>
+            <a:bodyPr wrap="none" rtlCol="0">
+              <a:spAutoFit/>
+            </a:bodyPr>
+            <a:lstStyle/>
+            <a:p>
+              <a:r>
+                <a:rPr lang="ru-RU" sz="1600" dirty="0">
+                  <a:solidFill>
+                    <a:schemeClr val="bg1"/>
+                  </a:solidFill>
+                  <a:latin typeface="Cascadia Mono" panose="020B0609020000020004" pitchFamily="49" charset="0"/>
+                  <a:ea typeface="Cascadia Mono" panose="020B0609020000020004" pitchFamily="49" charset="0"/>
+                  <a:cs typeface="Cascadia Mono" panose="020B0609020000020004" pitchFamily="49" charset="0"/>
+                </a:rPr>
+                <a:t>01</a:t>
+              </a:r>
+            </a:p>
+          </p:txBody>
+        </p:sp>
+        <p:sp>
+          <p:nvSpPr>
+            <p:cNvPr id="279" name="TextBox 278">
+              <a:extLst>
+                <a:ext uri="{FF2B5EF4-FFF2-40B4-BE49-F238E27FC236}">
+                  <a16:creationId xmlns:a16="http://schemas.microsoft.com/office/drawing/2014/main" id="{2EC97F3D-45CF-B15E-54C0-7F4E2ED24662}"/>
+                </a:ext>
+              </a:extLst>
+            </p:cNvPr>
+            <p:cNvSpPr txBox="1"/>
+            <p:nvPr/>
+          </p:nvSpPr>
+          <p:spPr>
+            <a:xfrm>
+              <a:off x="7330966" y="4451454"/>
+              <a:ext cx="425116" cy="338554"/>
+            </a:xfrm>
+            <a:prstGeom prst="rect">
+              <a:avLst/>
+            </a:prstGeom>
+            <a:solidFill>
+              <a:schemeClr val="accent6">
+                <a:lumMod val="50000"/>
+              </a:schemeClr>
+            </a:solidFill>
+          </p:spPr>
+          <p:txBody>
+            <a:bodyPr wrap="none" rtlCol="0">
+              <a:spAutoFit/>
+            </a:bodyPr>
+            <a:lstStyle/>
+            <a:p>
+              <a:r>
+                <a:rPr lang="ru-RU" sz="1600" dirty="0">
+                  <a:solidFill>
+                    <a:schemeClr val="bg1"/>
+                  </a:solidFill>
+                  <a:latin typeface="Cascadia Mono" panose="020B0609020000020004" pitchFamily="49" charset="0"/>
+                  <a:ea typeface="Cascadia Mono" panose="020B0609020000020004" pitchFamily="49" charset="0"/>
+                  <a:cs typeface="Cascadia Mono" panose="020B0609020000020004" pitchFamily="49" charset="0"/>
+                </a:rPr>
+                <a:t>01</a:t>
+              </a:r>
+            </a:p>
+          </p:txBody>
+        </p:sp>
+        <p:sp>
+          <p:nvSpPr>
+            <p:cNvPr id="281" name="TextBox 280">
+              <a:extLst>
+                <a:ext uri="{FF2B5EF4-FFF2-40B4-BE49-F238E27FC236}">
+                  <a16:creationId xmlns:a16="http://schemas.microsoft.com/office/drawing/2014/main" id="{35988C06-4305-C878-811B-0A38CFDD8A40}"/>
+                </a:ext>
+              </a:extLst>
+            </p:cNvPr>
+            <p:cNvSpPr txBox="1"/>
+            <p:nvPr/>
+          </p:nvSpPr>
+          <p:spPr>
+            <a:xfrm>
+              <a:off x="7842471" y="4451453"/>
+              <a:ext cx="425116" cy="338554"/>
+            </a:xfrm>
+            <a:prstGeom prst="rect">
+              <a:avLst/>
+            </a:prstGeom>
+            <a:solidFill>
+              <a:schemeClr val="accent6">
+                <a:lumMod val="50000"/>
+              </a:schemeClr>
+            </a:solidFill>
+          </p:spPr>
+          <p:txBody>
+            <a:bodyPr wrap="none" rtlCol="0">
+              <a:spAutoFit/>
+            </a:bodyPr>
+            <a:lstStyle/>
+            <a:p>
+              <a:r>
+                <a:rPr lang="ru-RU" sz="1600" dirty="0">
+                  <a:solidFill>
+                    <a:schemeClr val="bg1"/>
+                  </a:solidFill>
+                  <a:latin typeface="Cascadia Mono" panose="020B0609020000020004" pitchFamily="49" charset="0"/>
+                  <a:ea typeface="Cascadia Mono" panose="020B0609020000020004" pitchFamily="49" charset="0"/>
+                  <a:cs typeface="Cascadia Mono" panose="020B0609020000020004" pitchFamily="49" charset="0"/>
+                </a:rPr>
+                <a:t>01</a:t>
+              </a:r>
+            </a:p>
+          </p:txBody>
+        </p:sp>
+        <p:sp>
+          <p:nvSpPr>
+            <p:cNvPr id="283" name="TextBox 282">
+              <a:extLst>
+                <a:ext uri="{FF2B5EF4-FFF2-40B4-BE49-F238E27FC236}">
+                  <a16:creationId xmlns:a16="http://schemas.microsoft.com/office/drawing/2014/main" id="{3BFC9ED9-D8E0-B016-893A-B2BF0D46C391}"/>
+                </a:ext>
+              </a:extLst>
+            </p:cNvPr>
+            <p:cNvSpPr txBox="1"/>
+            <p:nvPr/>
+          </p:nvSpPr>
+          <p:spPr>
+            <a:xfrm>
+              <a:off x="8353976" y="4451452"/>
+              <a:ext cx="425116" cy="338554"/>
+            </a:xfrm>
+            <a:prstGeom prst="rect">
+              <a:avLst/>
+            </a:prstGeom>
+            <a:solidFill>
+              <a:schemeClr val="accent6">
+                <a:lumMod val="50000"/>
+              </a:schemeClr>
+            </a:solidFill>
+          </p:spPr>
+          <p:txBody>
+            <a:bodyPr wrap="none" rtlCol="0">
+              <a:spAutoFit/>
+            </a:bodyPr>
+            <a:lstStyle/>
+            <a:p>
+              <a:r>
+                <a:rPr lang="ru-RU" sz="1600" dirty="0">
+                  <a:solidFill>
+                    <a:schemeClr val="bg1"/>
+                  </a:solidFill>
+                  <a:latin typeface="Cascadia Mono" panose="020B0609020000020004" pitchFamily="49" charset="0"/>
+                  <a:ea typeface="Cascadia Mono" panose="020B0609020000020004" pitchFamily="49" charset="0"/>
+                  <a:cs typeface="Cascadia Mono" panose="020B0609020000020004" pitchFamily="49" charset="0"/>
+                </a:rPr>
+                <a:t>01</a:t>
+              </a:r>
+            </a:p>
+          </p:txBody>
+        </p:sp>
+        <p:sp>
+          <p:nvSpPr>
+            <p:cNvPr id="285" name="TextBox 284">
+              <a:extLst>
+                <a:ext uri="{FF2B5EF4-FFF2-40B4-BE49-F238E27FC236}">
+                  <a16:creationId xmlns:a16="http://schemas.microsoft.com/office/drawing/2014/main" id="{9A12D114-710E-4550-77F1-1179EC5FC9CC}"/>
+                </a:ext>
+              </a:extLst>
+            </p:cNvPr>
+            <p:cNvSpPr txBox="1"/>
+            <p:nvPr/>
+          </p:nvSpPr>
+          <p:spPr>
+            <a:xfrm>
+              <a:off x="8865481" y="4451451"/>
+              <a:ext cx="425116" cy="338554"/>
+            </a:xfrm>
+            <a:prstGeom prst="rect">
+              <a:avLst/>
+            </a:prstGeom>
+            <a:solidFill>
+              <a:schemeClr val="accent6">
+                <a:lumMod val="50000"/>
+              </a:schemeClr>
+            </a:solidFill>
+          </p:spPr>
+          <p:txBody>
+            <a:bodyPr wrap="none" rtlCol="0">
+              <a:spAutoFit/>
+            </a:bodyPr>
+            <a:lstStyle/>
+            <a:p>
+              <a:r>
+                <a:rPr lang="ru-RU" sz="1600" dirty="0">
+                  <a:solidFill>
+                    <a:schemeClr val="bg1"/>
+                  </a:solidFill>
+                  <a:latin typeface="Cascadia Mono" panose="020B0609020000020004" pitchFamily="49" charset="0"/>
+                  <a:ea typeface="Cascadia Mono" panose="020B0609020000020004" pitchFamily="49" charset="0"/>
+                  <a:cs typeface="Cascadia Mono" panose="020B0609020000020004" pitchFamily="49" charset="0"/>
+                </a:rPr>
+                <a:t>01</a:t>
+              </a:r>
+            </a:p>
+          </p:txBody>
+        </p:sp>
+        <p:sp>
+          <p:nvSpPr>
+            <p:cNvPr id="287" name="TextBox 286">
+              <a:extLst>
+                <a:ext uri="{FF2B5EF4-FFF2-40B4-BE49-F238E27FC236}">
+                  <a16:creationId xmlns:a16="http://schemas.microsoft.com/office/drawing/2014/main" id="{FFA4F110-666E-5A9F-A60C-E44464F6F8E5}"/>
+                </a:ext>
+              </a:extLst>
+            </p:cNvPr>
+            <p:cNvSpPr txBox="1"/>
+            <p:nvPr/>
+          </p:nvSpPr>
+          <p:spPr>
+            <a:xfrm>
+              <a:off x="9376986" y="4451451"/>
+              <a:ext cx="425116" cy="338554"/>
+            </a:xfrm>
+            <a:prstGeom prst="rect">
+              <a:avLst/>
+            </a:prstGeom>
+            <a:solidFill>
+              <a:schemeClr val="accent6">
+                <a:lumMod val="50000"/>
+              </a:schemeClr>
+            </a:solidFill>
+          </p:spPr>
+          <p:txBody>
+            <a:bodyPr wrap="none" rtlCol="0">
+              <a:spAutoFit/>
+            </a:bodyPr>
+            <a:lstStyle/>
+            <a:p>
+              <a:r>
+                <a:rPr lang="ru-RU" sz="1600" dirty="0">
+                  <a:solidFill>
+                    <a:schemeClr val="bg1"/>
+                  </a:solidFill>
+                  <a:latin typeface="Cascadia Mono" panose="020B0609020000020004" pitchFamily="49" charset="0"/>
+                  <a:ea typeface="Cascadia Mono" panose="020B0609020000020004" pitchFamily="49" charset="0"/>
+                  <a:cs typeface="Cascadia Mono" panose="020B0609020000020004" pitchFamily="49" charset="0"/>
+                </a:rPr>
+                <a:t>01</a:t>
+              </a:r>
+            </a:p>
+          </p:txBody>
+        </p:sp>
+        <p:sp>
+          <p:nvSpPr>
+            <p:cNvPr id="291" name="TextBox 290">
+              <a:extLst>
+                <a:ext uri="{FF2B5EF4-FFF2-40B4-BE49-F238E27FC236}">
+                  <a16:creationId xmlns:a16="http://schemas.microsoft.com/office/drawing/2014/main" id="{B8FD5B2D-7EA0-27BC-0F89-718272B65E32}"/>
+                </a:ext>
+              </a:extLst>
+            </p:cNvPr>
+            <p:cNvSpPr txBox="1"/>
+            <p:nvPr/>
+          </p:nvSpPr>
+          <p:spPr>
+            <a:xfrm>
+              <a:off x="9888491" y="4451451"/>
+              <a:ext cx="425116" cy="338554"/>
+            </a:xfrm>
+            <a:prstGeom prst="rect">
+              <a:avLst/>
+            </a:prstGeom>
+            <a:solidFill>
+              <a:schemeClr val="accent6">
+                <a:lumMod val="50000"/>
+              </a:schemeClr>
+            </a:solidFill>
+          </p:spPr>
+          <p:txBody>
+            <a:bodyPr wrap="none" rtlCol="0">
+              <a:spAutoFit/>
+            </a:bodyPr>
+            <a:lstStyle/>
+            <a:p>
+              <a:r>
+                <a:rPr lang="ru-RU" sz="1600" dirty="0">
+                  <a:solidFill>
+                    <a:schemeClr val="bg1"/>
+                  </a:solidFill>
+                  <a:latin typeface="Cascadia Mono" panose="020B0609020000020004" pitchFamily="49" charset="0"/>
+                  <a:ea typeface="Cascadia Mono" panose="020B0609020000020004" pitchFamily="49" charset="0"/>
+                  <a:cs typeface="Cascadia Mono" panose="020B0609020000020004" pitchFamily="49" charset="0"/>
+                </a:rPr>
+                <a:t>01</a:t>
+              </a:r>
+            </a:p>
+          </p:txBody>
+        </p:sp>
+        <p:sp>
+          <p:nvSpPr>
+            <p:cNvPr id="293" name="TextBox 292">
+              <a:extLst>
+                <a:ext uri="{FF2B5EF4-FFF2-40B4-BE49-F238E27FC236}">
+                  <a16:creationId xmlns:a16="http://schemas.microsoft.com/office/drawing/2014/main" id="{9D45581C-756C-F912-2A13-5B8E6C2AB844}"/>
+                </a:ext>
+              </a:extLst>
+            </p:cNvPr>
+            <p:cNvSpPr txBox="1"/>
+            <p:nvPr/>
+          </p:nvSpPr>
+          <p:spPr>
+            <a:xfrm>
+              <a:off x="10399996" y="4451451"/>
+              <a:ext cx="425116" cy="338554"/>
+            </a:xfrm>
+            <a:prstGeom prst="rect">
+              <a:avLst/>
+            </a:prstGeom>
+            <a:solidFill>
+              <a:schemeClr val="accent6">
+                <a:lumMod val="50000"/>
+              </a:schemeClr>
+            </a:solidFill>
+          </p:spPr>
+          <p:txBody>
+            <a:bodyPr wrap="none" rtlCol="0">
+              <a:spAutoFit/>
+            </a:bodyPr>
+            <a:lstStyle/>
+            <a:p>
+              <a:r>
+                <a:rPr lang="ru-RU" sz="1600" dirty="0">
+                  <a:solidFill>
+                    <a:schemeClr val="bg1"/>
+                  </a:solidFill>
+                  <a:latin typeface="Cascadia Mono" panose="020B0609020000020004" pitchFamily="49" charset="0"/>
+                  <a:ea typeface="Cascadia Mono" panose="020B0609020000020004" pitchFamily="49" charset="0"/>
+                  <a:cs typeface="Cascadia Mono" panose="020B0609020000020004" pitchFamily="49" charset="0"/>
+                </a:rPr>
+                <a:t>01</a:t>
+              </a:r>
+            </a:p>
+          </p:txBody>
+        </p:sp>
+        <p:sp>
+          <p:nvSpPr>
+            <p:cNvPr id="295" name="TextBox 294">
+              <a:extLst>
+                <a:ext uri="{FF2B5EF4-FFF2-40B4-BE49-F238E27FC236}">
+                  <a16:creationId xmlns:a16="http://schemas.microsoft.com/office/drawing/2014/main" id="{FF4F861B-05FA-2AE8-0679-30E0926372C9}"/>
+                </a:ext>
+              </a:extLst>
+            </p:cNvPr>
+            <p:cNvSpPr txBox="1"/>
+            <p:nvPr/>
+          </p:nvSpPr>
+          <p:spPr>
+            <a:xfrm>
+              <a:off x="10911501" y="4451451"/>
+              <a:ext cx="425116" cy="338554"/>
+            </a:xfrm>
+            <a:prstGeom prst="rect">
+              <a:avLst/>
+            </a:prstGeom>
+            <a:solidFill>
+              <a:schemeClr val="accent6">
+                <a:lumMod val="50000"/>
+              </a:schemeClr>
+            </a:solidFill>
+          </p:spPr>
+          <p:txBody>
+            <a:bodyPr wrap="none" rtlCol="0">
+              <a:spAutoFit/>
+            </a:bodyPr>
+            <a:lstStyle/>
+            <a:p>
+              <a:r>
+                <a:rPr lang="ru-RU" sz="1600" dirty="0">
+                  <a:solidFill>
+                    <a:schemeClr val="bg1"/>
+                  </a:solidFill>
+                  <a:latin typeface="Cascadia Mono" panose="020B0609020000020004" pitchFamily="49" charset="0"/>
+                  <a:ea typeface="Cascadia Mono" panose="020B0609020000020004" pitchFamily="49" charset="0"/>
+                  <a:cs typeface="Cascadia Mono" panose="020B0609020000020004" pitchFamily="49" charset="0"/>
+                </a:rPr>
+                <a:t>01</a:t>
+              </a:r>
+            </a:p>
+          </p:txBody>
+        </p:sp>
+        <p:sp>
+          <p:nvSpPr>
+            <p:cNvPr id="297" name="TextBox 296">
+              <a:extLst>
+                <a:ext uri="{FF2B5EF4-FFF2-40B4-BE49-F238E27FC236}">
+                  <a16:creationId xmlns:a16="http://schemas.microsoft.com/office/drawing/2014/main" id="{EAF516F2-4F6D-8EC0-FE55-9FFC799318A8}"/>
+                </a:ext>
+              </a:extLst>
+            </p:cNvPr>
+            <p:cNvSpPr txBox="1"/>
+            <p:nvPr/>
+          </p:nvSpPr>
+          <p:spPr>
+            <a:xfrm>
+              <a:off x="11423006" y="3997940"/>
+              <a:ext cx="425116" cy="338554"/>
+            </a:xfrm>
+            <a:prstGeom prst="rect">
+              <a:avLst/>
+            </a:prstGeom>
+            <a:solidFill>
+              <a:schemeClr val="accent6">
+                <a:lumMod val="50000"/>
+              </a:schemeClr>
+            </a:solidFill>
+          </p:spPr>
+          <p:txBody>
+            <a:bodyPr wrap="none" rtlCol="0">
+              <a:spAutoFit/>
+            </a:bodyPr>
+            <a:lstStyle/>
+            <a:p>
+              <a:r>
+                <a:rPr lang="ru-RU" sz="1600" dirty="0">
+                  <a:solidFill>
+                    <a:schemeClr val="bg1"/>
+                  </a:solidFill>
+                  <a:latin typeface="Cascadia Mono" panose="020B0609020000020004" pitchFamily="49" charset="0"/>
+                  <a:ea typeface="Cascadia Mono" panose="020B0609020000020004" pitchFamily="49" charset="0"/>
+                  <a:cs typeface="Cascadia Mono" panose="020B0609020000020004" pitchFamily="49" charset="0"/>
+                </a:rPr>
+                <a:t>01</a:t>
+              </a:r>
+            </a:p>
+          </p:txBody>
+        </p:sp>
+        <p:sp>
+          <p:nvSpPr>
+            <p:cNvPr id="299" name="TextBox 298">
+              <a:extLst>
+                <a:ext uri="{FF2B5EF4-FFF2-40B4-BE49-F238E27FC236}">
+                  <a16:creationId xmlns:a16="http://schemas.microsoft.com/office/drawing/2014/main" id="{D36EA37B-4E24-F92E-87F7-4B23118F8937}"/>
+                </a:ext>
+              </a:extLst>
+            </p:cNvPr>
+            <p:cNvSpPr txBox="1"/>
+            <p:nvPr/>
+          </p:nvSpPr>
+          <p:spPr>
+            <a:xfrm>
+              <a:off x="11423006" y="4451451"/>
+              <a:ext cx="425116" cy="338554"/>
+            </a:xfrm>
+            <a:prstGeom prst="rect">
+              <a:avLst/>
+            </a:prstGeom>
+            <a:solidFill>
+              <a:schemeClr val="accent6">
+                <a:lumMod val="50000"/>
+              </a:schemeClr>
+            </a:solidFill>
+          </p:spPr>
+          <p:txBody>
+            <a:bodyPr wrap="none" rtlCol="0">
+              <a:spAutoFit/>
+            </a:bodyPr>
+            <a:lstStyle/>
+            <a:p>
+              <a:r>
+                <a:rPr lang="ru-RU" sz="1600" dirty="0">
+                  <a:solidFill>
+                    <a:schemeClr val="bg1"/>
+                  </a:solidFill>
+                  <a:latin typeface="Cascadia Mono" panose="020B0609020000020004" pitchFamily="49" charset="0"/>
+                  <a:ea typeface="Cascadia Mono" panose="020B0609020000020004" pitchFamily="49" charset="0"/>
+                  <a:cs typeface="Cascadia Mono" panose="020B0609020000020004" pitchFamily="49" charset="0"/>
+                </a:rPr>
+                <a:t>01</a:t>
+              </a:r>
+            </a:p>
+          </p:txBody>
+        </p:sp>
+        <p:sp>
+          <p:nvSpPr>
+            <p:cNvPr id="341" name="TextBox 340">
+              <a:extLst>
+                <a:ext uri="{FF2B5EF4-FFF2-40B4-BE49-F238E27FC236}">
+                  <a16:creationId xmlns:a16="http://schemas.microsoft.com/office/drawing/2014/main" id="{9EBA56BA-FBFC-E5EB-46CC-59F238469462}"/>
+                </a:ext>
+              </a:extLst>
+            </p:cNvPr>
+            <p:cNvSpPr txBox="1"/>
+            <p:nvPr/>
+          </p:nvSpPr>
+          <p:spPr>
+            <a:xfrm>
+              <a:off x="6819461" y="4888442"/>
+              <a:ext cx="425116" cy="338554"/>
+            </a:xfrm>
+            <a:prstGeom prst="rect">
+              <a:avLst/>
+            </a:prstGeom>
+            <a:solidFill>
+              <a:schemeClr val="accent6">
+                <a:lumMod val="50000"/>
+              </a:schemeClr>
+            </a:solidFill>
+          </p:spPr>
+          <p:txBody>
+            <a:bodyPr wrap="none" rtlCol="0">
+              <a:spAutoFit/>
+            </a:bodyPr>
+            <a:lstStyle/>
+            <a:p>
+              <a:r>
+                <a:rPr lang="ru-RU" sz="1600" dirty="0">
+                  <a:solidFill>
+                    <a:schemeClr val="bg1"/>
+                  </a:solidFill>
+                  <a:latin typeface="Cascadia Mono" panose="020B0609020000020004" pitchFamily="49" charset="0"/>
+                  <a:ea typeface="Cascadia Mono" panose="020B0609020000020004" pitchFamily="49" charset="0"/>
+                  <a:cs typeface="Cascadia Mono" panose="020B0609020000020004" pitchFamily="49" charset="0"/>
+                </a:rPr>
+                <a:t>01</a:t>
+              </a:r>
+            </a:p>
+          </p:txBody>
+        </p:sp>
+        <p:sp>
+          <p:nvSpPr>
+            <p:cNvPr id="343" name="TextBox 342">
+              <a:extLst>
+                <a:ext uri="{FF2B5EF4-FFF2-40B4-BE49-F238E27FC236}">
+                  <a16:creationId xmlns:a16="http://schemas.microsoft.com/office/drawing/2014/main" id="{1E0F9F9A-F025-F497-E138-9068556AECC6}"/>
+                </a:ext>
+              </a:extLst>
+            </p:cNvPr>
+            <p:cNvSpPr txBox="1"/>
+            <p:nvPr/>
+          </p:nvSpPr>
+          <p:spPr>
+            <a:xfrm>
+              <a:off x="7330966" y="4888441"/>
+              <a:ext cx="425116" cy="338554"/>
+            </a:xfrm>
+            <a:prstGeom prst="rect">
+              <a:avLst/>
+            </a:prstGeom>
+            <a:solidFill>
+              <a:schemeClr val="accent6">
+                <a:lumMod val="50000"/>
+              </a:schemeClr>
+            </a:solidFill>
+          </p:spPr>
+          <p:txBody>
+            <a:bodyPr wrap="none" rtlCol="0">
+              <a:spAutoFit/>
+            </a:bodyPr>
+            <a:lstStyle/>
+            <a:p>
+              <a:r>
+                <a:rPr lang="ru-RU" sz="1600" dirty="0">
+                  <a:solidFill>
+                    <a:schemeClr val="bg1"/>
+                  </a:solidFill>
+                  <a:latin typeface="Cascadia Mono" panose="020B0609020000020004" pitchFamily="49" charset="0"/>
+                  <a:ea typeface="Cascadia Mono" panose="020B0609020000020004" pitchFamily="49" charset="0"/>
+                  <a:cs typeface="Cascadia Mono" panose="020B0609020000020004" pitchFamily="49" charset="0"/>
+                </a:rPr>
+                <a:t>01</a:t>
+              </a:r>
+            </a:p>
+          </p:txBody>
+        </p:sp>
+        <p:sp>
+          <p:nvSpPr>
+            <p:cNvPr id="345" name="TextBox 344">
+              <a:extLst>
+                <a:ext uri="{FF2B5EF4-FFF2-40B4-BE49-F238E27FC236}">
+                  <a16:creationId xmlns:a16="http://schemas.microsoft.com/office/drawing/2014/main" id="{E0E7AB77-50CF-BC7D-8AF5-D646F2933309}"/>
+                </a:ext>
+              </a:extLst>
+            </p:cNvPr>
+            <p:cNvSpPr txBox="1"/>
+            <p:nvPr/>
+          </p:nvSpPr>
+          <p:spPr>
+            <a:xfrm>
+              <a:off x="7842471" y="4888440"/>
+              <a:ext cx="425116" cy="338554"/>
+            </a:xfrm>
+            <a:prstGeom prst="rect">
+              <a:avLst/>
+            </a:prstGeom>
+            <a:solidFill>
+              <a:schemeClr val="accent6">
+                <a:lumMod val="50000"/>
+              </a:schemeClr>
+            </a:solidFill>
+          </p:spPr>
+          <p:txBody>
+            <a:bodyPr wrap="none" rtlCol="0">
+              <a:spAutoFit/>
+            </a:bodyPr>
+            <a:lstStyle/>
+            <a:p>
+              <a:r>
+                <a:rPr lang="ru-RU" sz="1600" dirty="0">
+                  <a:solidFill>
+                    <a:schemeClr val="bg1"/>
+                  </a:solidFill>
+                  <a:latin typeface="Cascadia Mono" panose="020B0609020000020004" pitchFamily="49" charset="0"/>
+                  <a:ea typeface="Cascadia Mono" panose="020B0609020000020004" pitchFamily="49" charset="0"/>
+                  <a:cs typeface="Cascadia Mono" panose="020B0609020000020004" pitchFamily="49" charset="0"/>
+                </a:rPr>
+                <a:t>01</a:t>
+              </a:r>
+            </a:p>
+          </p:txBody>
+        </p:sp>
+        <p:sp>
+          <p:nvSpPr>
+            <p:cNvPr id="347" name="TextBox 346">
+              <a:extLst>
+                <a:ext uri="{FF2B5EF4-FFF2-40B4-BE49-F238E27FC236}">
+                  <a16:creationId xmlns:a16="http://schemas.microsoft.com/office/drawing/2014/main" id="{4ED65345-4841-91A1-C2A2-C08632A13E86}"/>
+                </a:ext>
+              </a:extLst>
+            </p:cNvPr>
+            <p:cNvSpPr txBox="1"/>
+            <p:nvPr/>
+          </p:nvSpPr>
+          <p:spPr>
+            <a:xfrm>
+              <a:off x="8353976" y="4888439"/>
+              <a:ext cx="425116" cy="338554"/>
+            </a:xfrm>
+            <a:prstGeom prst="rect">
+              <a:avLst/>
+            </a:prstGeom>
+            <a:solidFill>
+              <a:schemeClr val="accent6">
+                <a:lumMod val="50000"/>
+              </a:schemeClr>
+            </a:solidFill>
+          </p:spPr>
+          <p:txBody>
+            <a:bodyPr wrap="none" rtlCol="0">
+              <a:spAutoFit/>
+            </a:bodyPr>
+            <a:lstStyle/>
+            <a:p>
+              <a:r>
+                <a:rPr lang="ru-RU" sz="1600" dirty="0">
+                  <a:solidFill>
+                    <a:schemeClr val="bg1"/>
+                  </a:solidFill>
+                  <a:latin typeface="Cascadia Mono" panose="020B0609020000020004" pitchFamily="49" charset="0"/>
+                  <a:ea typeface="Cascadia Mono" panose="020B0609020000020004" pitchFamily="49" charset="0"/>
+                  <a:cs typeface="Cascadia Mono" panose="020B0609020000020004" pitchFamily="49" charset="0"/>
+                </a:rPr>
+                <a:t>01</a:t>
+              </a:r>
+            </a:p>
+          </p:txBody>
+        </p:sp>
+        <p:sp>
+          <p:nvSpPr>
+            <p:cNvPr id="349" name="TextBox 348">
+              <a:extLst>
+                <a:ext uri="{FF2B5EF4-FFF2-40B4-BE49-F238E27FC236}">
+                  <a16:creationId xmlns:a16="http://schemas.microsoft.com/office/drawing/2014/main" id="{0B9F2D2E-BABD-4AE1-D14D-59E72717F3C3}"/>
+                </a:ext>
+              </a:extLst>
+            </p:cNvPr>
+            <p:cNvSpPr txBox="1"/>
+            <p:nvPr/>
+          </p:nvSpPr>
+          <p:spPr>
+            <a:xfrm>
+              <a:off x="8865481" y="4888438"/>
+              <a:ext cx="425116" cy="338554"/>
+            </a:xfrm>
+            <a:prstGeom prst="rect">
+              <a:avLst/>
+            </a:prstGeom>
+            <a:solidFill>
+              <a:schemeClr val="accent6">
+                <a:lumMod val="50000"/>
+              </a:schemeClr>
+            </a:solidFill>
+          </p:spPr>
+          <p:txBody>
+            <a:bodyPr wrap="none" rtlCol="0">
+              <a:spAutoFit/>
+            </a:bodyPr>
+            <a:lstStyle/>
+            <a:p>
+              <a:r>
+                <a:rPr lang="ru-RU" sz="1600" dirty="0">
+                  <a:solidFill>
+                    <a:schemeClr val="bg1"/>
+                  </a:solidFill>
+                  <a:latin typeface="Cascadia Mono" panose="020B0609020000020004" pitchFamily="49" charset="0"/>
+                  <a:ea typeface="Cascadia Mono" panose="020B0609020000020004" pitchFamily="49" charset="0"/>
+                  <a:cs typeface="Cascadia Mono" panose="020B0609020000020004" pitchFamily="49" charset="0"/>
+                </a:rPr>
+                <a:t>01</a:t>
+              </a:r>
+            </a:p>
+          </p:txBody>
+        </p:sp>
+        <p:sp>
+          <p:nvSpPr>
+            <p:cNvPr id="351" name="TextBox 350">
+              <a:extLst>
+                <a:ext uri="{FF2B5EF4-FFF2-40B4-BE49-F238E27FC236}">
+                  <a16:creationId xmlns:a16="http://schemas.microsoft.com/office/drawing/2014/main" id="{3C228C23-9ECA-6B52-7D70-6CF029185C5E}"/>
+                </a:ext>
+              </a:extLst>
+            </p:cNvPr>
+            <p:cNvSpPr txBox="1"/>
+            <p:nvPr/>
+          </p:nvSpPr>
+          <p:spPr>
+            <a:xfrm>
+              <a:off x="9376986" y="4888438"/>
+              <a:ext cx="425116" cy="338554"/>
+            </a:xfrm>
+            <a:prstGeom prst="rect">
+              <a:avLst/>
+            </a:prstGeom>
+            <a:solidFill>
+              <a:schemeClr val="accent6">
+                <a:lumMod val="50000"/>
+              </a:schemeClr>
+            </a:solidFill>
+          </p:spPr>
+          <p:txBody>
+            <a:bodyPr wrap="none" rtlCol="0">
+              <a:spAutoFit/>
+            </a:bodyPr>
+            <a:lstStyle/>
+            <a:p>
+              <a:r>
+                <a:rPr lang="ru-RU" sz="1600" dirty="0">
+                  <a:solidFill>
+                    <a:schemeClr val="bg1"/>
+                  </a:solidFill>
+                  <a:latin typeface="Cascadia Mono" panose="020B0609020000020004" pitchFamily="49" charset="0"/>
+                  <a:ea typeface="Cascadia Mono" panose="020B0609020000020004" pitchFamily="49" charset="0"/>
+                  <a:cs typeface="Cascadia Mono" panose="020B0609020000020004" pitchFamily="49" charset="0"/>
+                </a:rPr>
+                <a:t>01</a:t>
+              </a:r>
+            </a:p>
+          </p:txBody>
+        </p:sp>
+        <p:sp>
+          <p:nvSpPr>
+            <p:cNvPr id="353" name="TextBox 352">
+              <a:extLst>
+                <a:ext uri="{FF2B5EF4-FFF2-40B4-BE49-F238E27FC236}">
+                  <a16:creationId xmlns:a16="http://schemas.microsoft.com/office/drawing/2014/main" id="{3C363B13-9494-2FE7-C3C4-999E432D2667}"/>
+                </a:ext>
+              </a:extLst>
+            </p:cNvPr>
+            <p:cNvSpPr txBox="1"/>
+            <p:nvPr/>
+          </p:nvSpPr>
+          <p:spPr>
+            <a:xfrm>
+              <a:off x="9888491" y="4888438"/>
+              <a:ext cx="425116" cy="338554"/>
+            </a:xfrm>
+            <a:prstGeom prst="rect">
+              <a:avLst/>
+            </a:prstGeom>
+            <a:solidFill>
+              <a:schemeClr val="accent6">
+                <a:lumMod val="50000"/>
+              </a:schemeClr>
+            </a:solidFill>
+          </p:spPr>
+          <p:txBody>
+            <a:bodyPr wrap="none" rtlCol="0">
+              <a:spAutoFit/>
+            </a:bodyPr>
+            <a:lstStyle/>
+            <a:p>
+              <a:r>
+                <a:rPr lang="ru-RU" sz="1600" dirty="0">
+                  <a:solidFill>
+                    <a:schemeClr val="bg1"/>
+                  </a:solidFill>
+                  <a:latin typeface="Cascadia Mono" panose="020B0609020000020004" pitchFamily="49" charset="0"/>
+                  <a:ea typeface="Cascadia Mono" panose="020B0609020000020004" pitchFamily="49" charset="0"/>
+                  <a:cs typeface="Cascadia Mono" panose="020B0609020000020004" pitchFamily="49" charset="0"/>
+                </a:rPr>
+                <a:t>01</a:t>
+              </a:r>
+            </a:p>
+          </p:txBody>
+        </p:sp>
+        <p:sp>
+          <p:nvSpPr>
+            <p:cNvPr id="355" name="TextBox 354">
+              <a:extLst>
+                <a:ext uri="{FF2B5EF4-FFF2-40B4-BE49-F238E27FC236}">
+                  <a16:creationId xmlns:a16="http://schemas.microsoft.com/office/drawing/2014/main" id="{F9B705E1-0CD4-E5E1-1715-D8B2B8E323D8}"/>
+                </a:ext>
+              </a:extLst>
+            </p:cNvPr>
+            <p:cNvSpPr txBox="1"/>
+            <p:nvPr/>
+          </p:nvSpPr>
+          <p:spPr>
+            <a:xfrm>
+              <a:off x="10399996" y="4888438"/>
+              <a:ext cx="425116" cy="338554"/>
+            </a:xfrm>
+            <a:prstGeom prst="rect">
+              <a:avLst/>
+            </a:prstGeom>
+            <a:solidFill>
+              <a:schemeClr val="accent6">
+                <a:lumMod val="50000"/>
+              </a:schemeClr>
+            </a:solidFill>
+          </p:spPr>
+          <p:txBody>
+            <a:bodyPr wrap="none" rtlCol="0">
+              <a:spAutoFit/>
+            </a:bodyPr>
+            <a:lstStyle/>
+            <a:p>
+              <a:r>
+                <a:rPr lang="ru-RU" sz="1600" dirty="0">
+                  <a:solidFill>
+                    <a:schemeClr val="bg1"/>
+                  </a:solidFill>
+                  <a:latin typeface="Cascadia Mono" panose="020B0609020000020004" pitchFamily="49" charset="0"/>
+                  <a:ea typeface="Cascadia Mono" panose="020B0609020000020004" pitchFamily="49" charset="0"/>
+                  <a:cs typeface="Cascadia Mono" panose="020B0609020000020004" pitchFamily="49" charset="0"/>
+                </a:rPr>
+                <a:t>01</a:t>
+              </a:r>
+            </a:p>
+          </p:txBody>
+        </p:sp>
+        <p:sp>
+          <p:nvSpPr>
+            <p:cNvPr id="357" name="TextBox 356">
+              <a:extLst>
+                <a:ext uri="{FF2B5EF4-FFF2-40B4-BE49-F238E27FC236}">
+                  <a16:creationId xmlns:a16="http://schemas.microsoft.com/office/drawing/2014/main" id="{37B788DF-045F-318E-ACC2-03417702A4D4}"/>
+                </a:ext>
+              </a:extLst>
+            </p:cNvPr>
+            <p:cNvSpPr txBox="1"/>
+            <p:nvPr/>
+          </p:nvSpPr>
+          <p:spPr>
+            <a:xfrm>
+              <a:off x="10911501" y="4888438"/>
+              <a:ext cx="425116" cy="338554"/>
+            </a:xfrm>
+            <a:prstGeom prst="rect">
+              <a:avLst/>
+            </a:prstGeom>
+            <a:solidFill>
+              <a:schemeClr val="accent6">
+                <a:lumMod val="50000"/>
+              </a:schemeClr>
+            </a:solidFill>
+          </p:spPr>
+          <p:txBody>
+            <a:bodyPr wrap="none" rtlCol="0">
+              <a:spAutoFit/>
+            </a:bodyPr>
+            <a:lstStyle/>
+            <a:p>
+              <a:r>
+                <a:rPr lang="ru-RU" sz="1600" dirty="0">
+                  <a:solidFill>
+                    <a:schemeClr val="bg1"/>
+                  </a:solidFill>
+                  <a:latin typeface="Cascadia Mono" panose="020B0609020000020004" pitchFamily="49" charset="0"/>
+                  <a:ea typeface="Cascadia Mono" panose="020B0609020000020004" pitchFamily="49" charset="0"/>
+                  <a:cs typeface="Cascadia Mono" panose="020B0609020000020004" pitchFamily="49" charset="0"/>
+                </a:rPr>
+                <a:t>01</a:t>
+              </a:r>
+            </a:p>
+          </p:txBody>
+        </p:sp>
+        <p:sp>
+          <p:nvSpPr>
+            <p:cNvPr id="359" name="TextBox 358">
+              <a:extLst>
+                <a:ext uri="{FF2B5EF4-FFF2-40B4-BE49-F238E27FC236}">
+                  <a16:creationId xmlns:a16="http://schemas.microsoft.com/office/drawing/2014/main" id="{ACEF0BE3-9375-DE48-2371-4B36A0CE5AAC}"/>
+                </a:ext>
+              </a:extLst>
+            </p:cNvPr>
+            <p:cNvSpPr txBox="1"/>
+            <p:nvPr/>
+          </p:nvSpPr>
+          <p:spPr>
+            <a:xfrm>
+              <a:off x="6819461" y="5341953"/>
+              <a:ext cx="425116" cy="338554"/>
+            </a:xfrm>
+            <a:prstGeom prst="rect">
+              <a:avLst/>
+            </a:prstGeom>
+            <a:solidFill>
+              <a:schemeClr val="accent6">
+                <a:lumMod val="50000"/>
+              </a:schemeClr>
+            </a:solidFill>
+          </p:spPr>
+          <p:txBody>
+            <a:bodyPr wrap="none" rtlCol="0">
+              <a:spAutoFit/>
+            </a:bodyPr>
+            <a:lstStyle/>
+            <a:p>
+              <a:r>
+                <a:rPr lang="ru-RU" sz="1600" dirty="0">
+                  <a:solidFill>
+                    <a:schemeClr val="bg1"/>
+                  </a:solidFill>
+                  <a:latin typeface="Cascadia Mono" panose="020B0609020000020004" pitchFamily="49" charset="0"/>
+                  <a:ea typeface="Cascadia Mono" panose="020B0609020000020004" pitchFamily="49" charset="0"/>
+                  <a:cs typeface="Cascadia Mono" panose="020B0609020000020004" pitchFamily="49" charset="0"/>
+                </a:rPr>
+                <a:t>01</a:t>
+              </a:r>
+            </a:p>
+          </p:txBody>
+        </p:sp>
+        <p:sp>
+          <p:nvSpPr>
+            <p:cNvPr id="361" name="TextBox 360">
+              <a:extLst>
+                <a:ext uri="{FF2B5EF4-FFF2-40B4-BE49-F238E27FC236}">
+                  <a16:creationId xmlns:a16="http://schemas.microsoft.com/office/drawing/2014/main" id="{831B79DD-33C6-4495-8D1D-1E30ABC2701E}"/>
+                </a:ext>
+              </a:extLst>
+            </p:cNvPr>
+            <p:cNvSpPr txBox="1"/>
+            <p:nvPr/>
+          </p:nvSpPr>
+          <p:spPr>
+            <a:xfrm>
+              <a:off x="7330966" y="5341952"/>
+              <a:ext cx="425116" cy="338554"/>
+            </a:xfrm>
+            <a:prstGeom prst="rect">
+              <a:avLst/>
+            </a:prstGeom>
+            <a:solidFill>
+              <a:schemeClr val="accent6">
+                <a:lumMod val="50000"/>
+              </a:schemeClr>
+            </a:solidFill>
+          </p:spPr>
+          <p:txBody>
+            <a:bodyPr wrap="none" rtlCol="0">
+              <a:spAutoFit/>
+            </a:bodyPr>
+            <a:lstStyle/>
+            <a:p>
+              <a:r>
+                <a:rPr lang="ru-RU" sz="1600" dirty="0">
+                  <a:solidFill>
+                    <a:schemeClr val="bg1"/>
+                  </a:solidFill>
+                  <a:latin typeface="Cascadia Mono" panose="020B0609020000020004" pitchFamily="49" charset="0"/>
+                  <a:ea typeface="Cascadia Mono" panose="020B0609020000020004" pitchFamily="49" charset="0"/>
+                  <a:cs typeface="Cascadia Mono" panose="020B0609020000020004" pitchFamily="49" charset="0"/>
+                </a:rPr>
+                <a:t>01</a:t>
+              </a:r>
+            </a:p>
+          </p:txBody>
+        </p:sp>
+        <p:sp>
+          <p:nvSpPr>
+            <p:cNvPr id="363" name="TextBox 362">
+              <a:extLst>
+                <a:ext uri="{FF2B5EF4-FFF2-40B4-BE49-F238E27FC236}">
+                  <a16:creationId xmlns:a16="http://schemas.microsoft.com/office/drawing/2014/main" id="{B5A5A196-3A6B-D8C2-EED4-60ECB1CE5BC0}"/>
+                </a:ext>
+              </a:extLst>
+            </p:cNvPr>
+            <p:cNvSpPr txBox="1"/>
+            <p:nvPr/>
+          </p:nvSpPr>
+          <p:spPr>
+            <a:xfrm>
+              <a:off x="7842471" y="5341951"/>
+              <a:ext cx="425116" cy="338554"/>
+            </a:xfrm>
+            <a:prstGeom prst="rect">
+              <a:avLst/>
+            </a:prstGeom>
+            <a:solidFill>
+              <a:schemeClr val="accent6">
+                <a:lumMod val="50000"/>
+              </a:schemeClr>
+            </a:solidFill>
+          </p:spPr>
+          <p:txBody>
+            <a:bodyPr wrap="none" rtlCol="0">
+              <a:spAutoFit/>
+            </a:bodyPr>
+            <a:lstStyle/>
+            <a:p>
+              <a:r>
+                <a:rPr lang="ru-RU" sz="1600" dirty="0">
+                  <a:solidFill>
+                    <a:schemeClr val="bg1"/>
+                  </a:solidFill>
+                  <a:latin typeface="Cascadia Mono" panose="020B0609020000020004" pitchFamily="49" charset="0"/>
+                  <a:ea typeface="Cascadia Mono" panose="020B0609020000020004" pitchFamily="49" charset="0"/>
+                  <a:cs typeface="Cascadia Mono" panose="020B0609020000020004" pitchFamily="49" charset="0"/>
+                </a:rPr>
+                <a:t>01</a:t>
+              </a:r>
+            </a:p>
+          </p:txBody>
+        </p:sp>
+        <p:sp>
+          <p:nvSpPr>
+            <p:cNvPr id="365" name="TextBox 364">
+              <a:extLst>
+                <a:ext uri="{FF2B5EF4-FFF2-40B4-BE49-F238E27FC236}">
+                  <a16:creationId xmlns:a16="http://schemas.microsoft.com/office/drawing/2014/main" id="{4AF66F67-8F75-69E9-E231-4230133E6BC5}"/>
+                </a:ext>
+              </a:extLst>
+            </p:cNvPr>
+            <p:cNvSpPr txBox="1"/>
+            <p:nvPr/>
+          </p:nvSpPr>
+          <p:spPr>
+            <a:xfrm>
+              <a:off x="8353976" y="5341950"/>
+              <a:ext cx="425116" cy="338554"/>
+            </a:xfrm>
+            <a:prstGeom prst="rect">
+              <a:avLst/>
+            </a:prstGeom>
+            <a:solidFill>
+              <a:schemeClr val="accent6">
+                <a:lumMod val="50000"/>
+              </a:schemeClr>
+            </a:solidFill>
+          </p:spPr>
+          <p:txBody>
+            <a:bodyPr wrap="none" rtlCol="0">
+              <a:spAutoFit/>
+            </a:bodyPr>
+            <a:lstStyle/>
+            <a:p>
+              <a:r>
+                <a:rPr lang="ru-RU" sz="1600" dirty="0">
+                  <a:solidFill>
+                    <a:schemeClr val="bg1"/>
+                  </a:solidFill>
+                  <a:latin typeface="Cascadia Mono" panose="020B0609020000020004" pitchFamily="49" charset="0"/>
+                  <a:ea typeface="Cascadia Mono" panose="020B0609020000020004" pitchFamily="49" charset="0"/>
+                  <a:cs typeface="Cascadia Mono" panose="020B0609020000020004" pitchFamily="49" charset="0"/>
+                </a:rPr>
+                <a:t>01</a:t>
+              </a:r>
+            </a:p>
+          </p:txBody>
+        </p:sp>
+        <p:sp>
+          <p:nvSpPr>
+            <p:cNvPr id="367" name="TextBox 366">
+              <a:extLst>
+                <a:ext uri="{FF2B5EF4-FFF2-40B4-BE49-F238E27FC236}">
+                  <a16:creationId xmlns:a16="http://schemas.microsoft.com/office/drawing/2014/main" id="{E9D042A4-799C-5303-983D-50F36AB9A889}"/>
+                </a:ext>
+              </a:extLst>
+            </p:cNvPr>
+            <p:cNvSpPr txBox="1"/>
+            <p:nvPr/>
+          </p:nvSpPr>
+          <p:spPr>
+            <a:xfrm>
+              <a:off x="8865481" y="5341949"/>
+              <a:ext cx="425116" cy="338554"/>
+            </a:xfrm>
+            <a:prstGeom prst="rect">
+              <a:avLst/>
+            </a:prstGeom>
+            <a:solidFill>
+              <a:schemeClr val="accent6">
+                <a:lumMod val="50000"/>
+              </a:schemeClr>
+            </a:solidFill>
+          </p:spPr>
+          <p:txBody>
+            <a:bodyPr wrap="none" rtlCol="0">
+              <a:spAutoFit/>
+            </a:bodyPr>
+            <a:lstStyle/>
+            <a:p>
+              <a:r>
+                <a:rPr lang="ru-RU" sz="1600" dirty="0">
+                  <a:solidFill>
+                    <a:schemeClr val="bg1"/>
+                  </a:solidFill>
+                  <a:latin typeface="Cascadia Mono" panose="020B0609020000020004" pitchFamily="49" charset="0"/>
+                  <a:ea typeface="Cascadia Mono" panose="020B0609020000020004" pitchFamily="49" charset="0"/>
+                  <a:cs typeface="Cascadia Mono" panose="020B0609020000020004" pitchFamily="49" charset="0"/>
+                </a:rPr>
+                <a:t>01</a:t>
+              </a:r>
+            </a:p>
+          </p:txBody>
+        </p:sp>
+        <p:sp>
+          <p:nvSpPr>
+            <p:cNvPr id="369" name="TextBox 368">
+              <a:extLst>
+                <a:ext uri="{FF2B5EF4-FFF2-40B4-BE49-F238E27FC236}">
+                  <a16:creationId xmlns:a16="http://schemas.microsoft.com/office/drawing/2014/main" id="{4BB6A1E3-05A7-8D96-8FC8-47DC27A82863}"/>
+                </a:ext>
+              </a:extLst>
+            </p:cNvPr>
+            <p:cNvSpPr txBox="1"/>
+            <p:nvPr/>
+          </p:nvSpPr>
+          <p:spPr>
+            <a:xfrm>
+              <a:off x="9376986" y="5341949"/>
+              <a:ext cx="425116" cy="338554"/>
+            </a:xfrm>
+            <a:prstGeom prst="rect">
+              <a:avLst/>
+            </a:prstGeom>
+            <a:solidFill>
+              <a:schemeClr val="accent6">
+                <a:lumMod val="50000"/>
+              </a:schemeClr>
+            </a:solidFill>
+          </p:spPr>
+          <p:txBody>
+            <a:bodyPr wrap="none" rtlCol="0">
+              <a:spAutoFit/>
+            </a:bodyPr>
+            <a:lstStyle/>
+            <a:p>
+              <a:r>
+                <a:rPr lang="ru-RU" sz="1600" dirty="0">
+                  <a:solidFill>
+                    <a:schemeClr val="bg1"/>
+                  </a:solidFill>
+                  <a:latin typeface="Cascadia Mono" panose="020B0609020000020004" pitchFamily="49" charset="0"/>
+                  <a:ea typeface="Cascadia Mono" panose="020B0609020000020004" pitchFamily="49" charset="0"/>
+                  <a:cs typeface="Cascadia Mono" panose="020B0609020000020004" pitchFamily="49" charset="0"/>
+                </a:rPr>
+                <a:t>01</a:t>
+              </a:r>
+            </a:p>
+          </p:txBody>
+        </p:sp>
+        <p:sp>
+          <p:nvSpPr>
+            <p:cNvPr id="371" name="TextBox 370">
+              <a:extLst>
+                <a:ext uri="{FF2B5EF4-FFF2-40B4-BE49-F238E27FC236}">
+                  <a16:creationId xmlns:a16="http://schemas.microsoft.com/office/drawing/2014/main" id="{582DF377-E808-4B6B-E3E6-ED666CA083A1}"/>
+                </a:ext>
+              </a:extLst>
+            </p:cNvPr>
+            <p:cNvSpPr txBox="1"/>
+            <p:nvPr/>
+          </p:nvSpPr>
+          <p:spPr>
+            <a:xfrm>
+              <a:off x="9888491" y="5341949"/>
+              <a:ext cx="425116" cy="338554"/>
+            </a:xfrm>
+            <a:prstGeom prst="rect">
+              <a:avLst/>
+            </a:prstGeom>
+            <a:solidFill>
+              <a:schemeClr val="accent6">
+                <a:lumMod val="50000"/>
+              </a:schemeClr>
+            </a:solidFill>
+          </p:spPr>
+          <p:txBody>
+            <a:bodyPr wrap="none" rtlCol="0">
+              <a:spAutoFit/>
+            </a:bodyPr>
+            <a:lstStyle/>
+            <a:p>
+              <a:r>
+                <a:rPr lang="ru-RU" sz="1600" dirty="0">
+                  <a:solidFill>
+                    <a:schemeClr val="bg1"/>
+                  </a:solidFill>
+                  <a:latin typeface="Cascadia Mono" panose="020B0609020000020004" pitchFamily="49" charset="0"/>
+                  <a:ea typeface="Cascadia Mono" panose="020B0609020000020004" pitchFamily="49" charset="0"/>
+                  <a:cs typeface="Cascadia Mono" panose="020B0609020000020004" pitchFamily="49" charset="0"/>
+                </a:rPr>
+                <a:t>01</a:t>
+              </a:r>
+            </a:p>
+          </p:txBody>
+        </p:sp>
+        <p:sp>
+          <p:nvSpPr>
+            <p:cNvPr id="373" name="TextBox 372">
+              <a:extLst>
+                <a:ext uri="{FF2B5EF4-FFF2-40B4-BE49-F238E27FC236}">
+                  <a16:creationId xmlns:a16="http://schemas.microsoft.com/office/drawing/2014/main" id="{0EC75906-C883-0F3F-613F-524EF2B01FA5}"/>
+                </a:ext>
+              </a:extLst>
+            </p:cNvPr>
+            <p:cNvSpPr txBox="1"/>
+            <p:nvPr/>
+          </p:nvSpPr>
+          <p:spPr>
+            <a:xfrm>
+              <a:off x="10399996" y="5341949"/>
+              <a:ext cx="425116" cy="338554"/>
+            </a:xfrm>
+            <a:prstGeom prst="rect">
+              <a:avLst/>
+            </a:prstGeom>
+            <a:solidFill>
+              <a:schemeClr val="accent6">
+                <a:lumMod val="50000"/>
+              </a:schemeClr>
+            </a:solidFill>
+          </p:spPr>
+          <p:txBody>
+            <a:bodyPr wrap="none" rtlCol="0">
+              <a:spAutoFit/>
+            </a:bodyPr>
+            <a:lstStyle/>
+            <a:p>
+              <a:r>
+                <a:rPr lang="ru-RU" sz="1600" dirty="0">
+                  <a:solidFill>
+                    <a:schemeClr val="bg1"/>
+                  </a:solidFill>
+                  <a:latin typeface="Cascadia Mono" panose="020B0609020000020004" pitchFamily="49" charset="0"/>
+                  <a:ea typeface="Cascadia Mono" panose="020B0609020000020004" pitchFamily="49" charset="0"/>
+                  <a:cs typeface="Cascadia Mono" panose="020B0609020000020004" pitchFamily="49" charset="0"/>
+                </a:rPr>
+                <a:t>01</a:t>
+              </a:r>
+            </a:p>
+          </p:txBody>
+        </p:sp>
+        <p:sp>
+          <p:nvSpPr>
+            <p:cNvPr id="375" name="TextBox 374">
+              <a:extLst>
+                <a:ext uri="{FF2B5EF4-FFF2-40B4-BE49-F238E27FC236}">
+                  <a16:creationId xmlns:a16="http://schemas.microsoft.com/office/drawing/2014/main" id="{E873CFB4-2E0C-5F35-1FE7-FA6EC9C6F4B5}"/>
+                </a:ext>
+              </a:extLst>
+            </p:cNvPr>
+            <p:cNvSpPr txBox="1"/>
+            <p:nvPr/>
+          </p:nvSpPr>
+          <p:spPr>
+            <a:xfrm>
+              <a:off x="10911501" y="5341949"/>
+              <a:ext cx="425116" cy="338554"/>
+            </a:xfrm>
+            <a:prstGeom prst="rect">
+              <a:avLst/>
+            </a:prstGeom>
+            <a:solidFill>
+              <a:schemeClr val="accent6">
+                <a:lumMod val="50000"/>
+              </a:schemeClr>
+            </a:solidFill>
+          </p:spPr>
+          <p:txBody>
+            <a:bodyPr wrap="none" rtlCol="0">
+              <a:spAutoFit/>
+            </a:bodyPr>
+            <a:lstStyle/>
+            <a:p>
+              <a:r>
+                <a:rPr lang="ru-RU" sz="1600" dirty="0">
+                  <a:solidFill>
+                    <a:schemeClr val="bg1"/>
+                  </a:solidFill>
+                  <a:latin typeface="Cascadia Mono" panose="020B0609020000020004" pitchFamily="49" charset="0"/>
+                  <a:ea typeface="Cascadia Mono" panose="020B0609020000020004" pitchFamily="49" charset="0"/>
+                  <a:cs typeface="Cascadia Mono" panose="020B0609020000020004" pitchFamily="49" charset="0"/>
+                </a:rPr>
+                <a:t>01</a:t>
+              </a:r>
+            </a:p>
+          </p:txBody>
+        </p:sp>
+        <p:sp>
+          <p:nvSpPr>
+            <p:cNvPr id="377" name="TextBox 376">
+              <a:extLst>
+                <a:ext uri="{FF2B5EF4-FFF2-40B4-BE49-F238E27FC236}">
+                  <a16:creationId xmlns:a16="http://schemas.microsoft.com/office/drawing/2014/main" id="{16322E9E-62E1-DF44-9BE3-C45139EEC17A}"/>
+                </a:ext>
+              </a:extLst>
+            </p:cNvPr>
+            <p:cNvSpPr txBox="1"/>
+            <p:nvPr/>
+          </p:nvSpPr>
+          <p:spPr>
+            <a:xfrm>
+              <a:off x="11423006" y="4888438"/>
+              <a:ext cx="425116" cy="338554"/>
+            </a:xfrm>
+            <a:prstGeom prst="rect">
+              <a:avLst/>
+            </a:prstGeom>
+            <a:solidFill>
+              <a:schemeClr val="accent6">
+                <a:lumMod val="50000"/>
+              </a:schemeClr>
+            </a:solidFill>
+          </p:spPr>
+          <p:txBody>
+            <a:bodyPr wrap="none" rtlCol="0">
+              <a:spAutoFit/>
+            </a:bodyPr>
+            <a:lstStyle/>
+            <a:p>
+              <a:r>
+                <a:rPr lang="ru-RU" sz="1600" dirty="0">
+                  <a:solidFill>
+                    <a:schemeClr val="bg1"/>
+                  </a:solidFill>
+                  <a:latin typeface="Cascadia Mono" panose="020B0609020000020004" pitchFamily="49" charset="0"/>
+                  <a:ea typeface="Cascadia Mono" panose="020B0609020000020004" pitchFamily="49" charset="0"/>
+                  <a:cs typeface="Cascadia Mono" panose="020B0609020000020004" pitchFamily="49" charset="0"/>
+                </a:rPr>
+                <a:t>01</a:t>
+              </a:r>
+            </a:p>
+          </p:txBody>
+        </p:sp>
+        <p:sp>
+          <p:nvSpPr>
+            <p:cNvPr id="379" name="TextBox 378">
+              <a:extLst>
+                <a:ext uri="{FF2B5EF4-FFF2-40B4-BE49-F238E27FC236}">
+                  <a16:creationId xmlns:a16="http://schemas.microsoft.com/office/drawing/2014/main" id="{CBF3FEF7-8856-5C32-8906-3E5F9393DF86}"/>
+                </a:ext>
+              </a:extLst>
+            </p:cNvPr>
+            <p:cNvSpPr txBox="1"/>
+            <p:nvPr/>
+          </p:nvSpPr>
+          <p:spPr>
+            <a:xfrm>
+              <a:off x="11423006" y="5341949"/>
+              <a:ext cx="425116" cy="338554"/>
+            </a:xfrm>
+            <a:prstGeom prst="rect">
+              <a:avLst/>
+            </a:prstGeom>
+            <a:solidFill>
+              <a:schemeClr val="accent6">
+                <a:lumMod val="50000"/>
+              </a:schemeClr>
+            </a:solidFill>
+          </p:spPr>
+          <p:txBody>
+            <a:bodyPr wrap="none" rtlCol="0">
+              <a:spAutoFit/>
+            </a:bodyPr>
+            <a:lstStyle/>
+            <a:p>
+              <a:r>
+                <a:rPr lang="ru-RU" sz="1600" dirty="0">
+                  <a:solidFill>
+                    <a:schemeClr val="bg1"/>
+                  </a:solidFill>
+                  <a:latin typeface="Cascadia Mono" panose="020B0609020000020004" pitchFamily="49" charset="0"/>
+                  <a:ea typeface="Cascadia Mono" panose="020B0609020000020004" pitchFamily="49" charset="0"/>
+                  <a:cs typeface="Cascadia Mono" panose="020B0609020000020004" pitchFamily="49" charset="0"/>
+                </a:rPr>
+                <a:t>01</a:t>
+              </a:r>
+            </a:p>
+          </p:txBody>
+        </p:sp>
+        <p:sp>
+          <p:nvSpPr>
+            <p:cNvPr id="381" name="TextBox 380">
+              <a:extLst>
+                <a:ext uri="{FF2B5EF4-FFF2-40B4-BE49-F238E27FC236}">
+                  <a16:creationId xmlns:a16="http://schemas.microsoft.com/office/drawing/2014/main" id="{E2F11EBA-C8CE-82E4-D428-8D03C4B49524}"/>
+                </a:ext>
+              </a:extLst>
+            </p:cNvPr>
+            <p:cNvSpPr txBox="1"/>
+            <p:nvPr/>
+          </p:nvSpPr>
+          <p:spPr>
+            <a:xfrm>
+              <a:off x="6819461" y="5795464"/>
+              <a:ext cx="425116" cy="338554"/>
+            </a:xfrm>
+            <a:prstGeom prst="rect">
+              <a:avLst/>
+            </a:prstGeom>
+            <a:solidFill>
+              <a:schemeClr val="accent6">
+                <a:lumMod val="50000"/>
+              </a:schemeClr>
+            </a:solidFill>
+          </p:spPr>
+          <p:txBody>
+            <a:bodyPr wrap="none" rtlCol="0">
+              <a:spAutoFit/>
+            </a:bodyPr>
+            <a:lstStyle/>
+            <a:p>
+              <a:r>
+                <a:rPr lang="ru-RU" sz="1600" dirty="0">
+                  <a:solidFill>
+                    <a:schemeClr val="bg1"/>
+                  </a:solidFill>
+                  <a:latin typeface="Cascadia Mono" panose="020B0609020000020004" pitchFamily="49" charset="0"/>
+                  <a:ea typeface="Cascadia Mono" panose="020B0609020000020004" pitchFamily="49" charset="0"/>
+                  <a:cs typeface="Cascadia Mono" panose="020B0609020000020004" pitchFamily="49" charset="0"/>
+                </a:rPr>
+                <a:t>01</a:t>
+              </a:r>
+            </a:p>
+          </p:txBody>
+        </p:sp>
+        <p:sp>
+          <p:nvSpPr>
+            <p:cNvPr id="383" name="TextBox 382">
+              <a:extLst>
+                <a:ext uri="{FF2B5EF4-FFF2-40B4-BE49-F238E27FC236}">
+                  <a16:creationId xmlns:a16="http://schemas.microsoft.com/office/drawing/2014/main" id="{3C4899F2-56E0-170B-82D4-501F858AA3CC}"/>
+                </a:ext>
+              </a:extLst>
+            </p:cNvPr>
+            <p:cNvSpPr txBox="1"/>
+            <p:nvPr/>
+          </p:nvSpPr>
+          <p:spPr>
+            <a:xfrm>
+              <a:off x="7330966" y="5795463"/>
+              <a:ext cx="425116" cy="338554"/>
+            </a:xfrm>
+            <a:prstGeom prst="rect">
+              <a:avLst/>
+            </a:prstGeom>
+            <a:solidFill>
+              <a:schemeClr val="accent6">
+                <a:lumMod val="50000"/>
+              </a:schemeClr>
+            </a:solidFill>
+          </p:spPr>
+          <p:txBody>
+            <a:bodyPr wrap="none" rtlCol="0">
+              <a:spAutoFit/>
+            </a:bodyPr>
+            <a:lstStyle/>
+            <a:p>
+              <a:r>
+                <a:rPr lang="ru-RU" sz="1600" dirty="0">
+                  <a:solidFill>
+                    <a:schemeClr val="bg1"/>
+                  </a:solidFill>
+                  <a:latin typeface="Cascadia Mono" panose="020B0609020000020004" pitchFamily="49" charset="0"/>
+                  <a:ea typeface="Cascadia Mono" panose="020B0609020000020004" pitchFamily="49" charset="0"/>
+                  <a:cs typeface="Cascadia Mono" panose="020B0609020000020004" pitchFamily="49" charset="0"/>
+                </a:rPr>
+                <a:t>01</a:t>
+              </a:r>
+            </a:p>
+          </p:txBody>
+        </p:sp>
+        <p:sp>
+          <p:nvSpPr>
+            <p:cNvPr id="385" name="TextBox 384">
+              <a:extLst>
+                <a:ext uri="{FF2B5EF4-FFF2-40B4-BE49-F238E27FC236}">
+                  <a16:creationId xmlns:a16="http://schemas.microsoft.com/office/drawing/2014/main" id="{1B5A6594-6565-E222-E915-0B1411A8A2E2}"/>
+                </a:ext>
+              </a:extLst>
+            </p:cNvPr>
+            <p:cNvSpPr txBox="1"/>
+            <p:nvPr/>
+          </p:nvSpPr>
+          <p:spPr>
+            <a:xfrm>
+              <a:off x="7842471" y="5795462"/>
+              <a:ext cx="425116" cy="338554"/>
+            </a:xfrm>
+            <a:prstGeom prst="rect">
+              <a:avLst/>
+            </a:prstGeom>
+            <a:solidFill>
+              <a:schemeClr val="accent6">
+                <a:lumMod val="50000"/>
+              </a:schemeClr>
+            </a:solidFill>
+          </p:spPr>
+          <p:txBody>
+            <a:bodyPr wrap="none" rtlCol="0">
+              <a:spAutoFit/>
+            </a:bodyPr>
+            <a:lstStyle/>
+            <a:p>
+              <a:r>
+                <a:rPr lang="ru-RU" sz="1600" dirty="0">
+                  <a:solidFill>
+                    <a:schemeClr val="bg1"/>
+                  </a:solidFill>
+                  <a:latin typeface="Cascadia Mono" panose="020B0609020000020004" pitchFamily="49" charset="0"/>
+                  <a:ea typeface="Cascadia Mono" panose="020B0609020000020004" pitchFamily="49" charset="0"/>
+                  <a:cs typeface="Cascadia Mono" panose="020B0609020000020004" pitchFamily="49" charset="0"/>
+                </a:rPr>
+                <a:t>01</a:t>
+              </a:r>
+            </a:p>
+          </p:txBody>
+        </p:sp>
+        <p:sp>
+          <p:nvSpPr>
+            <p:cNvPr id="387" name="TextBox 386">
+              <a:extLst>
+                <a:ext uri="{FF2B5EF4-FFF2-40B4-BE49-F238E27FC236}">
+                  <a16:creationId xmlns:a16="http://schemas.microsoft.com/office/drawing/2014/main" id="{47F94549-B085-7B6D-4E58-8B0B6C27B68E}"/>
+                </a:ext>
+              </a:extLst>
+            </p:cNvPr>
+            <p:cNvSpPr txBox="1"/>
+            <p:nvPr/>
+          </p:nvSpPr>
+          <p:spPr>
+            <a:xfrm>
+              <a:off x="8353976" y="5795461"/>
+              <a:ext cx="425116" cy="338554"/>
+            </a:xfrm>
+            <a:prstGeom prst="rect">
+              <a:avLst/>
+            </a:prstGeom>
+            <a:solidFill>
+              <a:schemeClr val="accent6">
+                <a:lumMod val="50000"/>
+              </a:schemeClr>
+            </a:solidFill>
+          </p:spPr>
+          <p:txBody>
+            <a:bodyPr wrap="none" rtlCol="0">
+              <a:spAutoFit/>
+            </a:bodyPr>
+            <a:lstStyle/>
+            <a:p>
+              <a:r>
+                <a:rPr lang="ru-RU" sz="1600" dirty="0">
+                  <a:solidFill>
+                    <a:schemeClr val="bg1"/>
+                  </a:solidFill>
+                  <a:latin typeface="Cascadia Mono" panose="020B0609020000020004" pitchFamily="49" charset="0"/>
+                  <a:ea typeface="Cascadia Mono" panose="020B0609020000020004" pitchFamily="49" charset="0"/>
+                  <a:cs typeface="Cascadia Mono" panose="020B0609020000020004" pitchFamily="49" charset="0"/>
+                </a:rPr>
+                <a:t>01</a:t>
+              </a:r>
+            </a:p>
+          </p:txBody>
+        </p:sp>
+        <p:sp>
+          <p:nvSpPr>
+            <p:cNvPr id="389" name="TextBox 388">
+              <a:extLst>
+                <a:ext uri="{FF2B5EF4-FFF2-40B4-BE49-F238E27FC236}">
+                  <a16:creationId xmlns:a16="http://schemas.microsoft.com/office/drawing/2014/main" id="{E0CD927C-B6D1-9A0D-5F8F-8B6BE42B4860}"/>
+                </a:ext>
+              </a:extLst>
+            </p:cNvPr>
+            <p:cNvSpPr txBox="1"/>
+            <p:nvPr/>
+          </p:nvSpPr>
+          <p:spPr>
+            <a:xfrm>
+              <a:off x="8865481" y="5795460"/>
+              <a:ext cx="425116" cy="338554"/>
+            </a:xfrm>
+            <a:prstGeom prst="rect">
+              <a:avLst/>
+            </a:prstGeom>
+            <a:solidFill>
+              <a:schemeClr val="accent6">
+                <a:lumMod val="50000"/>
+              </a:schemeClr>
+            </a:solidFill>
+          </p:spPr>
+          <p:txBody>
+            <a:bodyPr wrap="none" rtlCol="0">
+              <a:spAutoFit/>
+            </a:bodyPr>
+            <a:lstStyle/>
+            <a:p>
+              <a:r>
+                <a:rPr lang="ru-RU" sz="1600" dirty="0">
+                  <a:solidFill>
+                    <a:schemeClr val="bg1"/>
+                  </a:solidFill>
+                  <a:latin typeface="Cascadia Mono" panose="020B0609020000020004" pitchFamily="49" charset="0"/>
+                  <a:ea typeface="Cascadia Mono" panose="020B0609020000020004" pitchFamily="49" charset="0"/>
+                  <a:cs typeface="Cascadia Mono" panose="020B0609020000020004" pitchFamily="49" charset="0"/>
+                </a:rPr>
+                <a:t>01</a:t>
+              </a:r>
+            </a:p>
+          </p:txBody>
+        </p:sp>
+        <p:sp>
+          <p:nvSpPr>
+            <p:cNvPr id="391" name="TextBox 390">
+              <a:extLst>
+                <a:ext uri="{FF2B5EF4-FFF2-40B4-BE49-F238E27FC236}">
+                  <a16:creationId xmlns:a16="http://schemas.microsoft.com/office/drawing/2014/main" id="{FEB59F50-49E7-BF30-6FF0-4D393FDED3F4}"/>
+                </a:ext>
+              </a:extLst>
+            </p:cNvPr>
+            <p:cNvSpPr txBox="1"/>
+            <p:nvPr/>
+          </p:nvSpPr>
+          <p:spPr>
+            <a:xfrm>
+              <a:off x="9376986" y="5795460"/>
+              <a:ext cx="425116" cy="338554"/>
+            </a:xfrm>
+            <a:prstGeom prst="rect">
+              <a:avLst/>
+            </a:prstGeom>
+            <a:solidFill>
+              <a:schemeClr val="accent6">
+                <a:lumMod val="50000"/>
+              </a:schemeClr>
+            </a:solidFill>
+          </p:spPr>
+          <p:txBody>
+            <a:bodyPr wrap="none" rtlCol="0">
+              <a:spAutoFit/>
+            </a:bodyPr>
+            <a:lstStyle/>
+            <a:p>
+              <a:r>
+                <a:rPr lang="ru-RU" sz="1600" dirty="0">
+                  <a:solidFill>
+                    <a:schemeClr val="bg1"/>
+                  </a:solidFill>
+                  <a:latin typeface="Cascadia Mono" panose="020B0609020000020004" pitchFamily="49" charset="0"/>
+                  <a:ea typeface="Cascadia Mono" panose="020B0609020000020004" pitchFamily="49" charset="0"/>
+                  <a:cs typeface="Cascadia Mono" panose="020B0609020000020004" pitchFamily="49" charset="0"/>
+                </a:rPr>
+                <a:t>01</a:t>
+              </a:r>
+            </a:p>
+          </p:txBody>
+        </p:sp>
+        <p:sp>
+          <p:nvSpPr>
+            <p:cNvPr id="393" name="TextBox 392">
+              <a:extLst>
+                <a:ext uri="{FF2B5EF4-FFF2-40B4-BE49-F238E27FC236}">
+                  <a16:creationId xmlns:a16="http://schemas.microsoft.com/office/drawing/2014/main" id="{1ED4C290-1CE3-6C27-F3AE-C6C84C335B52}"/>
+                </a:ext>
+              </a:extLst>
+            </p:cNvPr>
+            <p:cNvSpPr txBox="1"/>
+            <p:nvPr/>
+          </p:nvSpPr>
+          <p:spPr>
+            <a:xfrm>
+              <a:off x="9888491" y="5795460"/>
+              <a:ext cx="425116" cy="338554"/>
+            </a:xfrm>
+            <a:prstGeom prst="rect">
+              <a:avLst/>
+            </a:prstGeom>
+            <a:solidFill>
+              <a:schemeClr val="accent6">
+                <a:lumMod val="50000"/>
+              </a:schemeClr>
+            </a:solidFill>
+          </p:spPr>
+          <p:txBody>
+            <a:bodyPr wrap="none" rtlCol="0">
+              <a:spAutoFit/>
+            </a:bodyPr>
+            <a:lstStyle/>
+            <a:p>
+              <a:r>
+                <a:rPr lang="ru-RU" sz="1600" dirty="0">
+                  <a:solidFill>
+                    <a:schemeClr val="bg1"/>
+                  </a:solidFill>
+                  <a:latin typeface="Cascadia Mono" panose="020B0609020000020004" pitchFamily="49" charset="0"/>
+                  <a:ea typeface="Cascadia Mono" panose="020B0609020000020004" pitchFamily="49" charset="0"/>
+                  <a:cs typeface="Cascadia Mono" panose="020B0609020000020004" pitchFamily="49" charset="0"/>
+                </a:rPr>
+                <a:t>01</a:t>
+              </a:r>
+            </a:p>
+          </p:txBody>
+        </p:sp>
+        <p:sp>
+          <p:nvSpPr>
+            <p:cNvPr id="395" name="TextBox 394">
+              <a:extLst>
+                <a:ext uri="{FF2B5EF4-FFF2-40B4-BE49-F238E27FC236}">
+                  <a16:creationId xmlns:a16="http://schemas.microsoft.com/office/drawing/2014/main" id="{2E077102-F810-9052-8C9D-75AE6651EAB7}"/>
+                </a:ext>
+              </a:extLst>
+            </p:cNvPr>
+            <p:cNvSpPr txBox="1"/>
+            <p:nvPr/>
+          </p:nvSpPr>
+          <p:spPr>
+            <a:xfrm>
+              <a:off x="10399996" y="5795460"/>
+              <a:ext cx="425116" cy="338554"/>
+            </a:xfrm>
+            <a:prstGeom prst="rect">
+              <a:avLst/>
+            </a:prstGeom>
+            <a:solidFill>
+              <a:schemeClr val="accent6">
+                <a:lumMod val="50000"/>
+              </a:schemeClr>
+            </a:solidFill>
+          </p:spPr>
+          <p:txBody>
+            <a:bodyPr wrap="none" rtlCol="0">
+              <a:spAutoFit/>
+            </a:bodyPr>
+            <a:lstStyle/>
+            <a:p>
+              <a:r>
+                <a:rPr lang="ru-RU" sz="1600" dirty="0">
+                  <a:solidFill>
+                    <a:schemeClr val="bg1"/>
+                  </a:solidFill>
+                  <a:latin typeface="Cascadia Mono" panose="020B0609020000020004" pitchFamily="49" charset="0"/>
+                  <a:ea typeface="Cascadia Mono" panose="020B0609020000020004" pitchFamily="49" charset="0"/>
+                  <a:cs typeface="Cascadia Mono" panose="020B0609020000020004" pitchFamily="49" charset="0"/>
+                </a:rPr>
+                <a:t>01</a:t>
+              </a:r>
+            </a:p>
+          </p:txBody>
+        </p:sp>
+        <p:sp>
+          <p:nvSpPr>
+            <p:cNvPr id="397" name="TextBox 396">
+              <a:extLst>
+                <a:ext uri="{FF2B5EF4-FFF2-40B4-BE49-F238E27FC236}">
+                  <a16:creationId xmlns:a16="http://schemas.microsoft.com/office/drawing/2014/main" id="{F70933DC-4D91-9739-49E3-B9742939E129}"/>
+                </a:ext>
+              </a:extLst>
+            </p:cNvPr>
+            <p:cNvSpPr txBox="1"/>
+            <p:nvPr/>
+          </p:nvSpPr>
+          <p:spPr>
+            <a:xfrm>
+              <a:off x="10911501" y="5795460"/>
+              <a:ext cx="425116" cy="338554"/>
+            </a:xfrm>
+            <a:prstGeom prst="rect">
+              <a:avLst/>
+            </a:prstGeom>
+            <a:solidFill>
+              <a:schemeClr val="accent6">
+                <a:lumMod val="50000"/>
+              </a:schemeClr>
+            </a:solidFill>
+          </p:spPr>
+          <p:txBody>
+            <a:bodyPr wrap="none" rtlCol="0">
+              <a:spAutoFit/>
+            </a:bodyPr>
+            <a:lstStyle/>
+            <a:p>
+              <a:r>
+                <a:rPr lang="ru-RU" sz="1600" dirty="0">
+                  <a:solidFill>
+                    <a:schemeClr val="bg1"/>
+                  </a:solidFill>
+                  <a:latin typeface="Cascadia Mono" panose="020B0609020000020004" pitchFamily="49" charset="0"/>
+                  <a:ea typeface="Cascadia Mono" panose="020B0609020000020004" pitchFamily="49" charset="0"/>
+                  <a:cs typeface="Cascadia Mono" panose="020B0609020000020004" pitchFamily="49" charset="0"/>
+                </a:rPr>
+                <a:t>01</a:t>
+              </a:r>
+            </a:p>
+          </p:txBody>
+        </p:sp>
+        <p:sp>
+          <p:nvSpPr>
+            <p:cNvPr id="403" name="TextBox 402">
+              <a:extLst>
+                <a:ext uri="{FF2B5EF4-FFF2-40B4-BE49-F238E27FC236}">
+                  <a16:creationId xmlns:a16="http://schemas.microsoft.com/office/drawing/2014/main" id="{B6A1B902-0E17-C48C-C791-BB29A8EE6E88}"/>
+                </a:ext>
+              </a:extLst>
+            </p:cNvPr>
+            <p:cNvSpPr txBox="1"/>
+            <p:nvPr/>
+          </p:nvSpPr>
+          <p:spPr>
+            <a:xfrm>
+              <a:off x="7842471" y="6248973"/>
+              <a:ext cx="425116" cy="338554"/>
+            </a:xfrm>
+            <a:prstGeom prst="rect">
+              <a:avLst/>
+            </a:prstGeom>
+            <a:solidFill>
+              <a:schemeClr val="accent6">
+                <a:lumMod val="50000"/>
+              </a:schemeClr>
+            </a:solidFill>
+          </p:spPr>
+          <p:txBody>
+            <a:bodyPr wrap="none" rtlCol="0">
+              <a:spAutoFit/>
+            </a:bodyPr>
+            <a:lstStyle/>
+            <a:p>
+              <a:r>
+                <a:rPr lang="ru-RU" sz="1600" dirty="0">
+                  <a:solidFill>
+                    <a:schemeClr val="bg1"/>
+                  </a:solidFill>
+                  <a:latin typeface="Cascadia Mono" panose="020B0609020000020004" pitchFamily="49" charset="0"/>
+                  <a:ea typeface="Cascadia Mono" panose="020B0609020000020004" pitchFamily="49" charset="0"/>
+                  <a:cs typeface="Cascadia Mono" panose="020B0609020000020004" pitchFamily="49" charset="0"/>
+                </a:rPr>
+                <a:t>01</a:t>
+              </a:r>
+            </a:p>
+          </p:txBody>
+        </p:sp>
+        <p:sp>
+          <p:nvSpPr>
+            <p:cNvPr id="405" name="TextBox 404">
+              <a:extLst>
+                <a:ext uri="{FF2B5EF4-FFF2-40B4-BE49-F238E27FC236}">
+                  <a16:creationId xmlns:a16="http://schemas.microsoft.com/office/drawing/2014/main" id="{D9BA3EA1-E33A-A066-CF72-9574066C0035}"/>
+                </a:ext>
+              </a:extLst>
+            </p:cNvPr>
+            <p:cNvSpPr txBox="1"/>
+            <p:nvPr/>
+          </p:nvSpPr>
+          <p:spPr>
+            <a:xfrm>
+              <a:off x="8353976" y="6248972"/>
+              <a:ext cx="425116" cy="338554"/>
+            </a:xfrm>
+            <a:prstGeom prst="rect">
+              <a:avLst/>
+            </a:prstGeom>
+            <a:solidFill>
+              <a:schemeClr val="accent6">
+                <a:lumMod val="50000"/>
+              </a:schemeClr>
+            </a:solidFill>
+          </p:spPr>
+          <p:txBody>
+            <a:bodyPr wrap="none" rtlCol="0">
+              <a:spAutoFit/>
+            </a:bodyPr>
+            <a:lstStyle/>
+            <a:p>
+              <a:r>
+                <a:rPr lang="ru-RU" sz="1600" dirty="0">
+                  <a:solidFill>
+                    <a:schemeClr val="bg1"/>
+                  </a:solidFill>
+                  <a:latin typeface="Cascadia Mono" panose="020B0609020000020004" pitchFamily="49" charset="0"/>
+                  <a:ea typeface="Cascadia Mono" panose="020B0609020000020004" pitchFamily="49" charset="0"/>
+                  <a:cs typeface="Cascadia Mono" panose="020B0609020000020004" pitchFamily="49" charset="0"/>
+                </a:rPr>
+                <a:t>01</a:t>
+              </a:r>
+            </a:p>
+          </p:txBody>
+        </p:sp>
+        <p:sp>
+          <p:nvSpPr>
+            <p:cNvPr id="407" name="TextBox 406">
+              <a:extLst>
+                <a:ext uri="{FF2B5EF4-FFF2-40B4-BE49-F238E27FC236}">
+                  <a16:creationId xmlns:a16="http://schemas.microsoft.com/office/drawing/2014/main" id="{C9A4ACA8-BD75-6DBC-2E1F-EBE45179DB63}"/>
+                </a:ext>
+              </a:extLst>
+            </p:cNvPr>
+            <p:cNvSpPr txBox="1"/>
+            <p:nvPr/>
+          </p:nvSpPr>
+          <p:spPr>
+            <a:xfrm>
+              <a:off x="8865481" y="6248971"/>
+              <a:ext cx="425116" cy="338554"/>
+            </a:xfrm>
+            <a:prstGeom prst="rect">
+              <a:avLst/>
+            </a:prstGeom>
+            <a:solidFill>
+              <a:schemeClr val="accent6">
+                <a:lumMod val="50000"/>
+              </a:schemeClr>
+            </a:solidFill>
+          </p:spPr>
+          <p:txBody>
+            <a:bodyPr wrap="none" rtlCol="0">
+              <a:spAutoFit/>
+            </a:bodyPr>
+            <a:lstStyle/>
+            <a:p>
+              <a:r>
+                <a:rPr lang="ru-RU" sz="1600" dirty="0">
+                  <a:solidFill>
+                    <a:schemeClr val="bg1"/>
+                  </a:solidFill>
+                  <a:latin typeface="Cascadia Mono" panose="020B0609020000020004" pitchFamily="49" charset="0"/>
+                  <a:ea typeface="Cascadia Mono" panose="020B0609020000020004" pitchFamily="49" charset="0"/>
+                  <a:cs typeface="Cascadia Mono" panose="020B0609020000020004" pitchFamily="49" charset="0"/>
+                </a:rPr>
+                <a:t>01</a:t>
+              </a:r>
+            </a:p>
+          </p:txBody>
+        </p:sp>
+        <p:sp>
+          <p:nvSpPr>
+            <p:cNvPr id="409" name="TextBox 408">
+              <a:extLst>
+                <a:ext uri="{FF2B5EF4-FFF2-40B4-BE49-F238E27FC236}">
+                  <a16:creationId xmlns:a16="http://schemas.microsoft.com/office/drawing/2014/main" id="{F207AC69-4C2E-A92D-168A-B3B933835051}"/>
+                </a:ext>
+              </a:extLst>
+            </p:cNvPr>
+            <p:cNvSpPr txBox="1"/>
+            <p:nvPr/>
+          </p:nvSpPr>
+          <p:spPr>
+            <a:xfrm>
+              <a:off x="9376986" y="6248971"/>
+              <a:ext cx="425116" cy="338554"/>
+            </a:xfrm>
+            <a:prstGeom prst="rect">
+              <a:avLst/>
+            </a:prstGeom>
+            <a:solidFill>
+              <a:schemeClr val="accent6">
+                <a:lumMod val="50000"/>
+              </a:schemeClr>
+            </a:solidFill>
+          </p:spPr>
+          <p:txBody>
+            <a:bodyPr wrap="none" rtlCol="0">
+              <a:spAutoFit/>
+            </a:bodyPr>
+            <a:lstStyle/>
+            <a:p>
+              <a:r>
+                <a:rPr lang="ru-RU" sz="1600" dirty="0">
+                  <a:solidFill>
+                    <a:schemeClr val="bg1"/>
+                  </a:solidFill>
+                  <a:latin typeface="Cascadia Mono" panose="020B0609020000020004" pitchFamily="49" charset="0"/>
+                  <a:ea typeface="Cascadia Mono" panose="020B0609020000020004" pitchFamily="49" charset="0"/>
+                  <a:cs typeface="Cascadia Mono" panose="020B0609020000020004" pitchFamily="49" charset="0"/>
+                </a:rPr>
+                <a:t>01</a:t>
+              </a:r>
+            </a:p>
+          </p:txBody>
+        </p:sp>
+        <p:sp>
+          <p:nvSpPr>
+            <p:cNvPr id="411" name="TextBox 410">
+              <a:extLst>
+                <a:ext uri="{FF2B5EF4-FFF2-40B4-BE49-F238E27FC236}">
+                  <a16:creationId xmlns:a16="http://schemas.microsoft.com/office/drawing/2014/main" id="{10C14A5F-DC43-BBD7-A89E-34EF93F02F92}"/>
+                </a:ext>
+              </a:extLst>
+            </p:cNvPr>
+            <p:cNvSpPr txBox="1"/>
+            <p:nvPr/>
+          </p:nvSpPr>
+          <p:spPr>
+            <a:xfrm>
+              <a:off x="9888491" y="6248971"/>
+              <a:ext cx="425116" cy="338554"/>
+            </a:xfrm>
+            <a:prstGeom prst="rect">
+              <a:avLst/>
+            </a:prstGeom>
+            <a:solidFill>
+              <a:schemeClr val="accent6">
+                <a:lumMod val="50000"/>
+              </a:schemeClr>
+            </a:solidFill>
+          </p:spPr>
+          <p:txBody>
+            <a:bodyPr wrap="none" rtlCol="0">
+              <a:spAutoFit/>
+            </a:bodyPr>
+            <a:lstStyle/>
+            <a:p>
+              <a:r>
+                <a:rPr lang="ru-RU" sz="1600" dirty="0">
+                  <a:solidFill>
+                    <a:schemeClr val="bg1"/>
+                  </a:solidFill>
+                  <a:latin typeface="Cascadia Mono" panose="020B0609020000020004" pitchFamily="49" charset="0"/>
+                  <a:ea typeface="Cascadia Mono" panose="020B0609020000020004" pitchFamily="49" charset="0"/>
+                  <a:cs typeface="Cascadia Mono" panose="020B0609020000020004" pitchFamily="49" charset="0"/>
+                </a:rPr>
+                <a:t>01</a:t>
+              </a:r>
+            </a:p>
+          </p:txBody>
+        </p:sp>
+        <p:sp>
+          <p:nvSpPr>
+            <p:cNvPr id="413" name="TextBox 412">
+              <a:extLst>
+                <a:ext uri="{FF2B5EF4-FFF2-40B4-BE49-F238E27FC236}">
+                  <a16:creationId xmlns:a16="http://schemas.microsoft.com/office/drawing/2014/main" id="{81DA8E8E-E498-83ED-414E-113E525D8C3F}"/>
+                </a:ext>
+              </a:extLst>
+            </p:cNvPr>
+            <p:cNvSpPr txBox="1"/>
+            <p:nvPr/>
+          </p:nvSpPr>
+          <p:spPr>
+            <a:xfrm>
+              <a:off x="10399996" y="6248971"/>
+              <a:ext cx="425116" cy="338554"/>
+            </a:xfrm>
+            <a:prstGeom prst="rect">
+              <a:avLst/>
+            </a:prstGeom>
+            <a:solidFill>
+              <a:schemeClr val="accent6">
+                <a:lumMod val="50000"/>
+              </a:schemeClr>
+            </a:solidFill>
+          </p:spPr>
+          <p:txBody>
+            <a:bodyPr wrap="none" rtlCol="0">
+              <a:spAutoFit/>
+            </a:bodyPr>
+            <a:lstStyle/>
+            <a:p>
+              <a:r>
+                <a:rPr lang="ru-RU" sz="1600" dirty="0">
+                  <a:solidFill>
+                    <a:schemeClr val="bg1"/>
+                  </a:solidFill>
+                  <a:latin typeface="Cascadia Mono" panose="020B0609020000020004" pitchFamily="49" charset="0"/>
+                  <a:ea typeface="Cascadia Mono" panose="020B0609020000020004" pitchFamily="49" charset="0"/>
+                  <a:cs typeface="Cascadia Mono" panose="020B0609020000020004" pitchFamily="49" charset="0"/>
+                </a:rPr>
+                <a:t>01</a:t>
+              </a:r>
+            </a:p>
+          </p:txBody>
+        </p:sp>
+        <p:sp>
+          <p:nvSpPr>
+            <p:cNvPr id="417" name="TextBox 416">
+              <a:extLst>
+                <a:ext uri="{FF2B5EF4-FFF2-40B4-BE49-F238E27FC236}">
+                  <a16:creationId xmlns:a16="http://schemas.microsoft.com/office/drawing/2014/main" id="{397FCC0F-03F5-F9CC-A0A2-7B1A8CF3A07F}"/>
+                </a:ext>
+              </a:extLst>
+            </p:cNvPr>
+            <p:cNvSpPr txBox="1"/>
+            <p:nvPr/>
+          </p:nvSpPr>
+          <p:spPr>
+            <a:xfrm>
+              <a:off x="11423006" y="5795460"/>
+              <a:ext cx="425116" cy="338554"/>
+            </a:xfrm>
+            <a:prstGeom prst="rect">
+              <a:avLst/>
+            </a:prstGeom>
+            <a:solidFill>
+              <a:schemeClr val="accent6">
+                <a:lumMod val="50000"/>
+              </a:schemeClr>
+            </a:solidFill>
+          </p:spPr>
+          <p:txBody>
+            <a:bodyPr wrap="none" rtlCol="0">
+              <a:spAutoFit/>
+            </a:bodyPr>
+            <a:lstStyle/>
+            <a:p>
+              <a:r>
+                <a:rPr lang="ru-RU" sz="1600" dirty="0">
+                  <a:solidFill>
+                    <a:schemeClr val="bg1"/>
+                  </a:solidFill>
+                  <a:latin typeface="Cascadia Mono" panose="020B0609020000020004" pitchFamily="49" charset="0"/>
+                  <a:ea typeface="Cascadia Mono" panose="020B0609020000020004" pitchFamily="49" charset="0"/>
+                  <a:cs typeface="Cascadia Mono" panose="020B0609020000020004" pitchFamily="49" charset="0"/>
+                </a:rPr>
+                <a:t>01</a:t>
+              </a:r>
+            </a:p>
+          </p:txBody>
+        </p:sp>
+      </p:grpSp>
+      <p:sp>
+        <p:nvSpPr>
+          <p:cNvPr id="421" name="TextBox 420">
+            <a:extLst>
+              <a:ext uri="{FF2B5EF4-FFF2-40B4-BE49-F238E27FC236}">
+                <a16:creationId xmlns:a16="http://schemas.microsoft.com/office/drawing/2014/main" id="{740BCD8B-4E26-E435-C802-78FE17683E22}"/>
+              </a:ext>
+            </a:extLst>
+          </p:cNvPr>
+          <p:cNvSpPr txBox="1"/>
+          <p:nvPr/>
+        </p:nvSpPr>
+        <p:spPr>
+          <a:xfrm>
+            <a:off x="9180965" y="3827326"/>
+            <a:ext cx="1256306" cy="338554"/>
+          </a:xfrm>
+          <a:prstGeom prst="rect">
+            <a:avLst/>
+          </a:prstGeom>
+          <a:noFill/>
+        </p:spPr>
+        <p:txBody>
+          <a:bodyPr wrap="square">
+            <a:spAutoFit/>
+          </a:bodyPr>
+          <a:lstStyle/>
+          <a:p>
+            <a:r>
+              <a:rPr lang="en-US" sz="1600" dirty="0">
                 <a:solidFill>
                   <a:schemeClr val="bg1">
                     <a:lumMod val="85000"/>
@@ -7972,52 +10143,52 @@
                 <a:latin typeface="Cascadia Mono" panose="020B0609020000020004" pitchFamily="49" charset="0"/>
                 <a:ea typeface="Cascadia Mono" panose="020B0609020000020004" pitchFamily="49" charset="0"/>
                 <a:cs typeface="Cascadia Mono" panose="020B0609020000020004" pitchFamily="49" charset="0"/>
-              </a:endParaRPr>
-            </a:p>
-          </p:txBody>
-        </p:sp>
-        <p:sp>
-          <p:nvSpPr>
-            <p:cNvPr id="238" name="TextBox 237">
-              <a:extLst>
-                <a:ext uri="{FF2B5EF4-FFF2-40B4-BE49-F238E27FC236}">
-                  <a16:creationId xmlns:a16="http://schemas.microsoft.com/office/drawing/2014/main" id="{DBC1DA25-8B6E-CC30-3235-2224CB89E98D}"/>
-                </a:ext>
-              </a:extLst>
-            </p:cNvPr>
-            <p:cNvSpPr txBox="1"/>
-            <p:nvPr/>
-          </p:nvSpPr>
-          <p:spPr>
-            <a:xfrm>
-              <a:off x="4920458" y="1617436"/>
-              <a:ext cx="2468946" cy="338554"/>
-            </a:xfrm>
-            <a:prstGeom prst="rect">
-              <a:avLst/>
-            </a:prstGeom>
-            <a:noFill/>
-          </p:spPr>
-          <p:txBody>
-            <a:bodyPr wrap="none" rtlCol="0">
-              <a:spAutoFit/>
-            </a:bodyPr>
-            <a:lstStyle/>
-            <a:p>
-              <a:r>
-                <a:rPr lang="en-US" sz="1600" dirty="0">
-                  <a:solidFill>
-                    <a:schemeClr val="bg1">
-                      <a:lumMod val="85000"/>
-                    </a:schemeClr>
-                  </a:solidFill>
-                  <a:latin typeface="Cascadia Mono" panose="020B0609020000020004" pitchFamily="49" charset="0"/>
-                  <a:ea typeface="Cascadia Mono" panose="020B0609020000020004" pitchFamily="49" charset="0"/>
-                  <a:cs typeface="Cascadia Mono" panose="020B0609020000020004" pitchFamily="49" charset="0"/>
-                </a:rPr>
-                <a:t>Contactor 2: Closed</a:t>
-              </a:r>
-              <a:endParaRPr lang="ru-RU" sz="1600" dirty="0">
+              </a:rPr>
+              <a:t>Vmax: 20V </a:t>
+            </a:r>
+            <a:endParaRPr lang="ru-RU" sz="1600" dirty="0">
+              <a:solidFill>
+                <a:schemeClr val="bg1">
+                  <a:lumMod val="85000"/>
+                </a:schemeClr>
+              </a:solidFill>
+              <a:latin typeface="Cascadia Mono" panose="020B0609020000020004" pitchFamily="49" charset="0"/>
+              <a:ea typeface="Cascadia Mono" panose="020B0609020000020004" pitchFamily="49" charset="0"/>
+              <a:cs typeface="Cascadia Mono" panose="020B0609020000020004" pitchFamily="49" charset="0"/>
+            </a:endParaRPr>
+          </a:p>
+        </p:txBody>
+      </p:sp>
+      <p:sp>
+        <p:nvSpPr>
+          <p:cNvPr id="423" name="TextBox 422">
+            <a:extLst>
+              <a:ext uri="{FF2B5EF4-FFF2-40B4-BE49-F238E27FC236}">
+                <a16:creationId xmlns:a16="http://schemas.microsoft.com/office/drawing/2014/main" id="{D1B415F3-76E4-E2D2-7C75-009A1B739A18}"/>
+              </a:ext>
+            </a:extLst>
+          </p:cNvPr>
+          <p:cNvSpPr txBox="1"/>
+          <p:nvPr/>
+        </p:nvSpPr>
+        <p:spPr>
+          <a:xfrm>
+            <a:off x="10437271" y="3827326"/>
+            <a:ext cx="1256306" cy="338554"/>
+          </a:xfrm>
+          <a:prstGeom prst="rect">
+            <a:avLst/>
+          </a:prstGeom>
+          <a:noFill/>
+        </p:spPr>
+        <p:txBody>
+          <a:bodyPr wrap="square">
+            <a:spAutoFit/>
+          </a:bodyPr>
+          <a:lstStyle/>
+          <a:p>
+            <a:r>
+              <a:rPr lang="en-US" sz="1600" dirty="0" err="1">
                 <a:solidFill>
                   <a:schemeClr val="bg1">
                     <a:lumMod val="85000"/>
@@ -8026,179 +10197,11 @@
                 <a:latin typeface="Cascadia Mono" panose="020B0609020000020004" pitchFamily="49" charset="0"/>
                 <a:ea typeface="Cascadia Mono" panose="020B0609020000020004" pitchFamily="49" charset="0"/>
                 <a:cs typeface="Cascadia Mono" panose="020B0609020000020004" pitchFamily="49" charset="0"/>
-              </a:endParaRPr>
-            </a:p>
-          </p:txBody>
-        </p:sp>
-      </p:grpSp>
-      <p:grpSp>
-        <p:nvGrpSpPr>
-          <p:cNvPr id="239" name="Группа 238">
-            <a:extLst>
-              <a:ext uri="{FF2B5EF4-FFF2-40B4-BE49-F238E27FC236}">
-                <a16:creationId xmlns:a16="http://schemas.microsoft.com/office/drawing/2014/main" id="{1C89B8E1-EE37-2147-784C-2F2F97668B87}"/>
-              </a:ext>
-            </a:extLst>
-          </p:cNvPr>
-          <p:cNvGrpSpPr/>
-          <p:nvPr/>
-        </p:nvGrpSpPr>
-        <p:grpSpPr>
-          <a:xfrm>
-            <a:off x="228943" y="4031251"/>
-            <a:ext cx="2968436" cy="1690459"/>
-            <a:chOff x="476052" y="3334900"/>
-            <a:chExt cx="1685266" cy="1690459"/>
-          </a:xfrm>
-        </p:grpSpPr>
-        <p:sp>
-          <p:nvSpPr>
-            <p:cNvPr id="240" name="Прямоугольник: скругленные углы 239">
-              <a:extLst>
-                <a:ext uri="{FF2B5EF4-FFF2-40B4-BE49-F238E27FC236}">
-                  <a16:creationId xmlns:a16="http://schemas.microsoft.com/office/drawing/2014/main" id="{06178126-2360-F8A7-796D-7A5F77FA9114}"/>
-                </a:ext>
-              </a:extLst>
-            </p:cNvPr>
-            <p:cNvSpPr/>
-            <p:nvPr/>
-          </p:nvSpPr>
-          <p:spPr>
-            <a:xfrm>
-              <a:off x="476052" y="3334900"/>
-              <a:ext cx="1685266" cy="1690459"/>
-            </a:xfrm>
-            <a:prstGeom prst="roundRect">
-              <a:avLst>
-                <a:gd name="adj" fmla="val 7999"/>
-              </a:avLst>
-            </a:prstGeom>
-            <a:noFill/>
-            <a:ln w="19050">
-              <a:solidFill>
-                <a:schemeClr val="accent3">
-                  <a:lumMod val="75000"/>
-                </a:schemeClr>
-              </a:solidFill>
-            </a:ln>
-          </p:spPr>
-          <p:style>
-            <a:lnRef idx="2">
-              <a:schemeClr val="accent1">
-                <a:shade val="15000"/>
-              </a:schemeClr>
-            </a:lnRef>
-            <a:fillRef idx="1">
-              <a:schemeClr val="accent1"/>
-            </a:fillRef>
-            <a:effectRef idx="0">
-              <a:schemeClr val="accent1"/>
-            </a:effectRef>
-            <a:fontRef idx="minor">
-              <a:schemeClr val="lt1"/>
-            </a:fontRef>
-          </p:style>
-          <p:txBody>
-            <a:bodyPr rtlCol="0" anchor="ctr"/>
-            <a:lstStyle/>
-            <a:p>
-              <a:pPr algn="ctr"/>
-              <a:endParaRPr lang="ru-RU"/>
-            </a:p>
-          </p:txBody>
-        </p:sp>
-        <p:sp>
-          <p:nvSpPr>
-            <p:cNvPr id="243" name="TextBox 242">
-              <a:extLst>
-                <a:ext uri="{FF2B5EF4-FFF2-40B4-BE49-F238E27FC236}">
-                  <a16:creationId xmlns:a16="http://schemas.microsoft.com/office/drawing/2014/main" id="{8C944384-5076-4583-109E-CB9A58AE02C2}"/>
-                </a:ext>
-              </a:extLst>
-            </p:cNvPr>
-            <p:cNvSpPr txBox="1"/>
-            <p:nvPr/>
-          </p:nvSpPr>
-          <p:spPr>
-            <a:xfrm>
-              <a:off x="541640" y="3457817"/>
-              <a:ext cx="1127346" cy="338554"/>
-            </a:xfrm>
-            <a:prstGeom prst="rect">
-              <a:avLst/>
-            </a:prstGeom>
-            <a:noFill/>
-          </p:spPr>
-          <p:txBody>
-            <a:bodyPr wrap="none" rtlCol="0">
-              <a:spAutoFit/>
-            </a:bodyPr>
-            <a:lstStyle/>
-            <a:p>
-              <a:r>
-                <a:rPr lang="en-US" sz="1600" dirty="0">
-                  <a:solidFill>
-                    <a:schemeClr val="bg1"/>
-                  </a:solidFill>
-                  <a:latin typeface="Cascadia Mono" panose="020B0609020000020004" pitchFamily="49" charset="0"/>
-                  <a:ea typeface="Cascadia Mono" panose="020B0609020000020004" pitchFamily="49" charset="0"/>
-                  <a:cs typeface="Cascadia Mono" panose="020B0609020000020004" pitchFamily="49" charset="0"/>
-                </a:rPr>
-                <a:t>Active issues</a:t>
-              </a:r>
-              <a:endParaRPr lang="ru-RU" sz="1600" dirty="0">
-                <a:solidFill>
-                  <a:schemeClr val="bg1"/>
-                </a:solidFill>
-                <a:latin typeface="Cascadia Mono" panose="020B0609020000020004" pitchFamily="49" charset="0"/>
-                <a:ea typeface="Cascadia Mono" panose="020B0609020000020004" pitchFamily="49" charset="0"/>
-                <a:cs typeface="Cascadia Mono" panose="020B0609020000020004" pitchFamily="49" charset="0"/>
-              </a:endParaRPr>
-            </a:p>
-          </p:txBody>
-        </p:sp>
-        <p:sp>
-          <p:nvSpPr>
-            <p:cNvPr id="244" name="TextBox 243">
-              <a:extLst>
-                <a:ext uri="{FF2B5EF4-FFF2-40B4-BE49-F238E27FC236}">
-                  <a16:creationId xmlns:a16="http://schemas.microsoft.com/office/drawing/2014/main" id="{41910B05-5EE9-F1EE-55EA-5B09D36702FD}"/>
-                </a:ext>
-              </a:extLst>
-            </p:cNvPr>
-            <p:cNvSpPr txBox="1"/>
-            <p:nvPr/>
-          </p:nvSpPr>
-          <p:spPr>
-            <a:xfrm>
-              <a:off x="541640" y="3889974"/>
-              <a:ext cx="1401691" cy="338554"/>
-            </a:xfrm>
-            <a:prstGeom prst="rect">
-              <a:avLst/>
-            </a:prstGeom>
-            <a:noFill/>
-          </p:spPr>
-          <p:txBody>
-            <a:bodyPr wrap="none" rtlCol="0">
-              <a:spAutoFit/>
-            </a:bodyPr>
-            <a:lstStyle/>
-            <a:p>
-              <a:r>
-                <a:rPr lang="en-US" sz="1600" dirty="0">
-                  <a:solidFill>
-                    <a:schemeClr val="bg1">
-                      <a:lumMod val="85000"/>
-                    </a:schemeClr>
-                  </a:solidFill>
-                  <a:latin typeface="Cascadia Mono" panose="020B0609020000020004" pitchFamily="49" charset="0"/>
-                  <a:ea typeface="Cascadia Mono" panose="020B0609020000020004" pitchFamily="49" charset="0"/>
-                  <a:cs typeface="Cascadia Mono" panose="020B0609020000020004" pitchFamily="49" charset="0"/>
-                </a:rPr>
-                <a:t>Cell 1 undervoltage</a:t>
-              </a:r>
-              <a:endParaRPr lang="ru-RU" sz="1600" dirty="0">
+              </a:rPr>
+              <a:t>Vmin</a:t>
+            </a:r>
+            <a:r>
+              <a:rPr lang="en-US" sz="1600" dirty="0">
                 <a:solidFill>
                   <a:schemeClr val="bg1">
                     <a:lumMod val="85000"/>
@@ -8207,52 +10210,52 @@
                 <a:latin typeface="Cascadia Mono" panose="020B0609020000020004" pitchFamily="49" charset="0"/>
                 <a:ea typeface="Cascadia Mono" panose="020B0609020000020004" pitchFamily="49" charset="0"/>
                 <a:cs typeface="Cascadia Mono" panose="020B0609020000020004" pitchFamily="49" charset="0"/>
-              </a:endParaRPr>
-            </a:p>
-          </p:txBody>
-        </p:sp>
-        <p:sp>
-          <p:nvSpPr>
-            <p:cNvPr id="247" name="TextBox 246">
-              <a:extLst>
-                <a:ext uri="{FF2B5EF4-FFF2-40B4-BE49-F238E27FC236}">
-                  <a16:creationId xmlns:a16="http://schemas.microsoft.com/office/drawing/2014/main" id="{4DB82A25-EF6D-8B52-2D92-3B6CC6A981A3}"/>
-                </a:ext>
-              </a:extLst>
-            </p:cNvPr>
-            <p:cNvSpPr txBox="1"/>
-            <p:nvPr/>
-          </p:nvSpPr>
-          <p:spPr>
-            <a:xfrm>
-              <a:off x="541640" y="4228528"/>
-              <a:ext cx="1265180" cy="338554"/>
-            </a:xfrm>
-            <a:prstGeom prst="rect">
-              <a:avLst/>
-            </a:prstGeom>
-            <a:noFill/>
-          </p:spPr>
-          <p:txBody>
-            <a:bodyPr wrap="none" rtlCol="0">
-              <a:spAutoFit/>
-            </a:bodyPr>
-            <a:lstStyle/>
-            <a:p>
-              <a:r>
-                <a:rPr lang="en-US" sz="1600" dirty="0">
-                  <a:solidFill>
-                    <a:schemeClr val="bg1">
-                      <a:lumMod val="85000"/>
-                    </a:schemeClr>
-                  </a:solidFill>
-                  <a:latin typeface="Cascadia Mono" panose="020B0609020000020004" pitchFamily="49" charset="0"/>
-                  <a:ea typeface="Cascadia Mono" panose="020B0609020000020004" pitchFamily="49" charset="0"/>
-                  <a:cs typeface="Cascadia Mono" panose="020B0609020000020004" pitchFamily="49" charset="0"/>
-                </a:rPr>
-                <a:t>Cell 3 overheated</a:t>
-              </a:r>
-              <a:endParaRPr lang="ru-RU" sz="1600" dirty="0">
+              </a:rPr>
+              <a:t>: 10V </a:t>
+            </a:r>
+            <a:endParaRPr lang="ru-RU" sz="1600" dirty="0">
+              <a:solidFill>
+                <a:schemeClr val="bg1">
+                  <a:lumMod val="85000"/>
+                </a:schemeClr>
+              </a:solidFill>
+              <a:latin typeface="Cascadia Mono" panose="020B0609020000020004" pitchFamily="49" charset="0"/>
+              <a:ea typeface="Cascadia Mono" panose="020B0609020000020004" pitchFamily="49" charset="0"/>
+              <a:cs typeface="Cascadia Mono" panose="020B0609020000020004" pitchFamily="49" charset="0"/>
+            </a:endParaRPr>
+          </a:p>
+        </p:txBody>
+      </p:sp>
+      <p:sp>
+        <p:nvSpPr>
+          <p:cNvPr id="430" name="TextBox 429">
+            <a:extLst>
+              <a:ext uri="{FF2B5EF4-FFF2-40B4-BE49-F238E27FC236}">
+                <a16:creationId xmlns:a16="http://schemas.microsoft.com/office/drawing/2014/main" id="{B3811540-A8BF-0B5E-D07F-AB0621EBAF09}"/>
+              </a:ext>
+            </a:extLst>
+          </p:cNvPr>
+          <p:cNvSpPr txBox="1"/>
+          <p:nvPr/>
+        </p:nvSpPr>
+        <p:spPr>
+          <a:xfrm>
+            <a:off x="8367279" y="1563042"/>
+            <a:ext cx="1266693" cy="338554"/>
+          </a:xfrm>
+          <a:prstGeom prst="rect">
+            <a:avLst/>
+          </a:prstGeom>
+          <a:noFill/>
+        </p:spPr>
+        <p:txBody>
+          <a:bodyPr wrap="none" rtlCol="0">
+            <a:spAutoFit/>
+          </a:bodyPr>
+          <a:lstStyle/>
+          <a:p>
+            <a:r>
+              <a:rPr lang="en-US" sz="1600" dirty="0">
                 <a:solidFill>
                   <a:schemeClr val="bg1">
                     <a:lumMod val="85000"/>
@@ -8261,304 +10264,490 @@
                 <a:latin typeface="Cascadia Mono" panose="020B0609020000020004" pitchFamily="49" charset="0"/>
                 <a:ea typeface="Cascadia Mono" panose="020B0609020000020004" pitchFamily="49" charset="0"/>
                 <a:cs typeface="Cascadia Mono" panose="020B0609020000020004" pitchFamily="49" charset="0"/>
-              </a:endParaRPr>
-            </a:p>
-          </p:txBody>
-        </p:sp>
-        <p:sp>
-          <p:nvSpPr>
-            <p:cNvPr id="250" name="TextBox 249">
-              <a:extLst>
-                <a:ext uri="{FF2B5EF4-FFF2-40B4-BE49-F238E27FC236}">
-                  <a16:creationId xmlns:a16="http://schemas.microsoft.com/office/drawing/2014/main" id="{96746839-028C-E549-254C-7431A211223A}"/>
-                </a:ext>
-              </a:extLst>
-            </p:cNvPr>
-            <p:cNvSpPr txBox="1"/>
-            <p:nvPr/>
-          </p:nvSpPr>
-          <p:spPr>
-            <a:xfrm>
-              <a:off x="541640" y="4567082"/>
-              <a:ext cx="1128670" cy="338554"/>
-            </a:xfrm>
-            <a:prstGeom prst="rect">
-              <a:avLst/>
-            </a:prstGeom>
-            <a:noFill/>
-          </p:spPr>
-          <p:txBody>
-            <a:bodyPr wrap="none" rtlCol="0">
-              <a:spAutoFit/>
-            </a:bodyPr>
-            <a:lstStyle/>
-            <a:p>
-              <a:r>
-                <a:rPr lang="en-US" sz="1600" dirty="0">
-                  <a:solidFill>
-                    <a:schemeClr val="bg1">
-                      <a:lumMod val="85000"/>
-                    </a:schemeClr>
-                  </a:solidFill>
-                  <a:latin typeface="Cascadia Mono" panose="020B0609020000020004" pitchFamily="49" charset="0"/>
-                  <a:ea typeface="Cascadia Mono" panose="020B0609020000020004" pitchFamily="49" charset="0"/>
-                  <a:cs typeface="Cascadia Mono" panose="020B0609020000020004" pitchFamily="49" charset="0"/>
-                </a:rPr>
-                <a:t>Converter error</a:t>
-              </a:r>
-              <a:endParaRPr lang="ru-RU" sz="1600" dirty="0">
-                <a:solidFill>
-                  <a:schemeClr val="bg1">
-                    <a:lumMod val="85000"/>
-                  </a:schemeClr>
-                </a:solidFill>
-                <a:latin typeface="Cascadia Mono" panose="020B0609020000020004" pitchFamily="49" charset="0"/>
-                <a:ea typeface="Cascadia Mono" panose="020B0609020000020004" pitchFamily="49" charset="0"/>
-                <a:cs typeface="Cascadia Mono" panose="020B0609020000020004" pitchFamily="49" charset="0"/>
-              </a:endParaRPr>
-            </a:p>
-          </p:txBody>
-        </p:sp>
-      </p:grpSp>
-      <p:grpSp>
-        <p:nvGrpSpPr>
-          <p:cNvPr id="256" name="Группа 255">
+              </a:rPr>
+              <a:t>Bus: 800V</a:t>
+            </a:r>
+            <a:endParaRPr lang="ru-RU" sz="1600" dirty="0">
+              <a:solidFill>
+                <a:schemeClr val="bg1">
+                  <a:lumMod val="85000"/>
+                </a:schemeClr>
+              </a:solidFill>
+              <a:latin typeface="Cascadia Mono" panose="020B0609020000020004" pitchFamily="49" charset="0"/>
+              <a:ea typeface="Cascadia Mono" panose="020B0609020000020004" pitchFamily="49" charset="0"/>
+              <a:cs typeface="Cascadia Mono" panose="020B0609020000020004" pitchFamily="49" charset="0"/>
+            </a:endParaRPr>
+          </a:p>
+        </p:txBody>
+      </p:sp>
+      <p:sp>
+        <p:nvSpPr>
+          <p:cNvPr id="432" name="TextBox 431">
             <a:extLst>
               <a:ext uri="{FF2B5EF4-FFF2-40B4-BE49-F238E27FC236}">
-                <a16:creationId xmlns:a16="http://schemas.microsoft.com/office/drawing/2014/main" id="{1C899F73-6D7B-018A-3AF9-74B594917270}"/>
+                <a16:creationId xmlns:a16="http://schemas.microsoft.com/office/drawing/2014/main" id="{79ECB932-359B-7DFC-16D0-CBAF1F8B0634}"/>
               </a:ext>
             </a:extLst>
           </p:cNvPr>
-          <p:cNvGrpSpPr/>
+          <p:cNvSpPr txBox="1"/>
           <p:nvPr/>
-        </p:nvGrpSpPr>
-        <p:grpSpPr>
+        </p:nvSpPr>
+        <p:spPr>
           <a:xfrm>
-            <a:off x="8994621" y="3452345"/>
-            <a:ext cx="2968436" cy="1225562"/>
-            <a:chOff x="4824550" y="848663"/>
-            <a:chExt cx="2968436" cy="1225562"/>
+            <a:off x="5729150" y="3827326"/>
+            <a:ext cx="1687763" cy="338554"/>
           </a:xfrm>
-        </p:grpSpPr>
-        <p:sp>
-          <p:nvSpPr>
-            <p:cNvPr id="257" name="Прямоугольник: скругленные углы 256">
-              <a:extLst>
-                <a:ext uri="{FF2B5EF4-FFF2-40B4-BE49-F238E27FC236}">
-                  <a16:creationId xmlns:a16="http://schemas.microsoft.com/office/drawing/2014/main" id="{9D20AB01-6939-BA93-BE90-795CE98E264B}"/>
-                </a:ext>
-              </a:extLst>
-            </p:cNvPr>
-            <p:cNvSpPr/>
-            <p:nvPr/>
-          </p:nvSpPr>
-          <p:spPr>
-            <a:xfrm>
-              <a:off x="4824550" y="848663"/>
-              <a:ext cx="2968436" cy="1225562"/>
-            </a:xfrm>
-            <a:prstGeom prst="roundRect">
-              <a:avLst>
-                <a:gd name="adj" fmla="val 7999"/>
-              </a:avLst>
-            </a:prstGeom>
-            <a:noFill/>
-            <a:ln w="19050">
-              <a:solidFill>
-                <a:schemeClr val="accent3">
-                  <a:lumMod val="75000"/>
-                </a:schemeClr>
-              </a:solidFill>
-            </a:ln>
-          </p:spPr>
-          <p:style>
-            <a:lnRef idx="2">
-              <a:schemeClr val="accent1">
-                <a:shade val="15000"/>
-              </a:schemeClr>
-            </a:lnRef>
-            <a:fillRef idx="1">
-              <a:schemeClr val="accent1"/>
-            </a:fillRef>
-            <a:effectRef idx="0">
-              <a:schemeClr val="accent1"/>
-            </a:effectRef>
-            <a:fontRef idx="minor">
-              <a:schemeClr val="lt1"/>
-            </a:fontRef>
-          </p:style>
-          <p:txBody>
-            <a:bodyPr rtlCol="0" anchor="ctr"/>
-            <a:lstStyle/>
-            <a:p>
-              <a:pPr algn="ctr"/>
-              <a:endParaRPr lang="ru-RU"/>
-            </a:p>
-          </p:txBody>
-        </p:sp>
-        <p:sp>
-          <p:nvSpPr>
-            <p:cNvPr id="258" name="TextBox 257">
-              <a:extLst>
-                <a:ext uri="{FF2B5EF4-FFF2-40B4-BE49-F238E27FC236}">
-                  <a16:creationId xmlns:a16="http://schemas.microsoft.com/office/drawing/2014/main" id="{7672330D-298F-368E-1DA1-51F5F58FA00F}"/>
-                </a:ext>
-              </a:extLst>
-            </p:cNvPr>
-            <p:cNvSpPr txBox="1"/>
-            <p:nvPr/>
-          </p:nvSpPr>
-          <p:spPr>
-            <a:xfrm>
-              <a:off x="4920458" y="937492"/>
-              <a:ext cx="1266693" cy="338554"/>
-            </a:xfrm>
-            <a:prstGeom prst="rect">
-              <a:avLst/>
-            </a:prstGeom>
-            <a:noFill/>
-          </p:spPr>
-          <p:txBody>
-            <a:bodyPr wrap="none" rtlCol="0">
-              <a:spAutoFit/>
-            </a:bodyPr>
-            <a:lstStyle/>
-            <a:p>
-              <a:r>
-                <a:rPr lang="en-US" sz="1600" dirty="0">
-                  <a:solidFill>
-                    <a:schemeClr val="bg1"/>
-                  </a:solidFill>
-                  <a:latin typeface="Cascadia Mono" panose="020B0609020000020004" pitchFamily="49" charset="0"/>
-                  <a:ea typeface="Cascadia Mono" panose="020B0609020000020004" pitchFamily="49" charset="0"/>
-                  <a:cs typeface="Cascadia Mono" panose="020B0609020000020004" pitchFamily="49" charset="0"/>
-                </a:rPr>
-                <a:t>Isolation</a:t>
-              </a:r>
-              <a:endParaRPr lang="ru-RU" sz="1600" dirty="0">
+          <a:prstGeom prst="rect">
+            <a:avLst/>
+          </a:prstGeom>
+          <a:noFill/>
+        </p:spPr>
+        <p:txBody>
+          <a:bodyPr wrap="square" rtlCol="0">
+            <a:spAutoFit/>
+          </a:bodyPr>
+          <a:lstStyle/>
+          <a:p>
+            <a:r>
+              <a:rPr lang="en-US" sz="1600" dirty="0">
                 <a:solidFill>
                   <a:schemeClr val="bg1"/>
                 </a:solidFill>
                 <a:latin typeface="Cascadia Mono" panose="020B0609020000020004" pitchFamily="49" charset="0"/>
                 <a:ea typeface="Cascadia Mono" panose="020B0609020000020004" pitchFamily="49" charset="0"/>
                 <a:cs typeface="Cascadia Mono" panose="020B0609020000020004" pitchFamily="49" charset="0"/>
-              </a:endParaRPr>
-            </a:p>
-          </p:txBody>
-        </p:sp>
-        <p:sp>
-          <p:nvSpPr>
-            <p:cNvPr id="259" name="TextBox 258">
-              <a:extLst>
-                <a:ext uri="{FF2B5EF4-FFF2-40B4-BE49-F238E27FC236}">
-                  <a16:creationId xmlns:a16="http://schemas.microsoft.com/office/drawing/2014/main" id="{A2BC51F3-1349-51C2-8D2C-4588BF828CCE}"/>
-                </a:ext>
-              </a:extLst>
-            </p:cNvPr>
-            <p:cNvSpPr txBox="1"/>
-            <p:nvPr/>
-          </p:nvSpPr>
-          <p:spPr>
-            <a:xfrm>
-              <a:off x="4920458" y="1278882"/>
-              <a:ext cx="2468946" cy="338554"/>
-            </a:xfrm>
-            <a:prstGeom prst="rect">
-              <a:avLst/>
-            </a:prstGeom>
-            <a:noFill/>
-          </p:spPr>
-          <p:txBody>
-            <a:bodyPr wrap="none" rtlCol="0">
-              <a:spAutoFit/>
-            </a:bodyPr>
-            <a:lstStyle/>
-            <a:p>
-              <a:r>
-                <a:rPr lang="en-US" sz="1600" dirty="0">
-                  <a:solidFill>
-                    <a:schemeClr val="bg1">
-                      <a:lumMod val="85000"/>
-                    </a:schemeClr>
-                  </a:solidFill>
-                  <a:latin typeface="Cascadia Mono" panose="020B0609020000020004" pitchFamily="49" charset="0"/>
-                  <a:ea typeface="Cascadia Mono" panose="020B0609020000020004" pitchFamily="49" charset="0"/>
-                  <a:cs typeface="Cascadia Mono" panose="020B0609020000020004" pitchFamily="49" charset="0"/>
-                </a:rPr>
-                <a:t>Resistance+: 500MOm</a:t>
-              </a:r>
-              <a:endParaRPr lang="ru-RU" sz="1600" dirty="0">
-                <a:solidFill>
-                  <a:schemeClr val="bg1">
-                    <a:lumMod val="85000"/>
-                  </a:schemeClr>
-                </a:solidFill>
-                <a:latin typeface="Cascadia Mono" panose="020B0609020000020004" pitchFamily="49" charset="0"/>
-                <a:ea typeface="Cascadia Mono" panose="020B0609020000020004" pitchFamily="49" charset="0"/>
-                <a:cs typeface="Cascadia Mono" panose="020B0609020000020004" pitchFamily="49" charset="0"/>
-              </a:endParaRPr>
-            </a:p>
-          </p:txBody>
-        </p:sp>
-        <p:sp>
-          <p:nvSpPr>
-            <p:cNvPr id="260" name="TextBox 259">
-              <a:extLst>
-                <a:ext uri="{FF2B5EF4-FFF2-40B4-BE49-F238E27FC236}">
-                  <a16:creationId xmlns:a16="http://schemas.microsoft.com/office/drawing/2014/main" id="{AEA994AF-73B7-4FC4-8548-28A1C531BC9F}"/>
-                </a:ext>
-              </a:extLst>
-            </p:cNvPr>
-            <p:cNvSpPr txBox="1"/>
-            <p:nvPr/>
-          </p:nvSpPr>
-          <p:spPr>
-            <a:xfrm>
-              <a:off x="4920458" y="1617436"/>
-              <a:ext cx="2468946" cy="338554"/>
-            </a:xfrm>
-            <a:prstGeom prst="rect">
-              <a:avLst/>
-            </a:prstGeom>
-            <a:noFill/>
-          </p:spPr>
-          <p:txBody>
-            <a:bodyPr wrap="none" rtlCol="0">
-              <a:spAutoFit/>
-            </a:bodyPr>
-            <a:lstStyle/>
-            <a:p>
-              <a:r>
-                <a:rPr lang="en-US" sz="1600" dirty="0">
-                  <a:solidFill>
-                    <a:schemeClr val="bg1">
-                      <a:lumMod val="85000"/>
-                    </a:schemeClr>
-                  </a:solidFill>
-                  <a:latin typeface="Cascadia Mono" panose="020B0609020000020004" pitchFamily="49" charset="0"/>
-                  <a:ea typeface="Cascadia Mono" panose="020B0609020000020004" pitchFamily="49" charset="0"/>
-                  <a:cs typeface="Cascadia Mono" panose="020B0609020000020004" pitchFamily="49" charset="0"/>
-                </a:rPr>
-                <a:t>Resistance-: 500MOm</a:t>
-              </a:r>
-              <a:endParaRPr lang="ru-RU" sz="1600" dirty="0">
-                <a:solidFill>
-                  <a:schemeClr val="bg1">
-                    <a:lumMod val="85000"/>
-                  </a:schemeClr>
-                </a:solidFill>
-                <a:latin typeface="Cascadia Mono" panose="020B0609020000020004" pitchFamily="49" charset="0"/>
-                <a:ea typeface="Cascadia Mono" panose="020B0609020000020004" pitchFamily="49" charset="0"/>
-                <a:cs typeface="Cascadia Mono" panose="020B0609020000020004" pitchFamily="49" charset="0"/>
-              </a:endParaRPr>
-            </a:p>
-          </p:txBody>
-        </p:sp>
-      </p:grpSp>
+              </a:rPr>
+              <a:t>Voltage map:</a:t>
+            </a:r>
+            <a:endParaRPr lang="ru-RU" sz="1600" dirty="0">
+              <a:solidFill>
+                <a:schemeClr val="bg1"/>
+              </a:solidFill>
+              <a:latin typeface="Cascadia Mono" panose="020B0609020000020004" pitchFamily="49" charset="0"/>
+              <a:ea typeface="Cascadia Mono" panose="020B0609020000020004" pitchFamily="49" charset="0"/>
+              <a:cs typeface="Cascadia Mono" panose="020B0609020000020004" pitchFamily="49" charset="0"/>
+            </a:endParaRPr>
+          </a:p>
+        </p:txBody>
+      </p:sp>
     </p:spTree>
     <p:extLst>
       <p:ext uri="{BB962C8B-B14F-4D97-AF65-F5344CB8AC3E}">
         <p14:creationId xmlns:p14="http://schemas.microsoft.com/office/powerpoint/2010/main" val="2324975741"/>
+      </p:ext>
+    </p:extLst>
+  </p:cSld>
+  <p:clrMapOvr>
+    <a:masterClrMapping/>
+  </p:clrMapOvr>
+</p:sld>
+</file>
+
+<file path=ppt/slides/slide2.xml><?xml version="1.0" encoding="utf-8"?>
+<p:sld xmlns:a="http://schemas.openxmlformats.org/drawingml/2006/main" xmlns:r="http://schemas.openxmlformats.org/officeDocument/2006/relationships" xmlns:p="http://schemas.openxmlformats.org/presentationml/2006/main">
+  <p:cSld>
+    <p:bg>
+      <p:bgPr>
+        <a:solidFill>
+          <a:srgbClr val="161519"/>
+        </a:solidFill>
+        <a:effectLst/>
+      </p:bgPr>
+    </p:bg>
+    <p:spTree>
+      <p:nvGrpSpPr>
+        <p:cNvPr id="1" name="">
+          <a:extLst>
+            <a:ext uri="{FF2B5EF4-FFF2-40B4-BE49-F238E27FC236}">
+              <a16:creationId xmlns:a16="http://schemas.microsoft.com/office/drawing/2014/main" id="{7DF39E04-2F59-E770-DBC1-FE3D3E60306F}"/>
+            </a:ext>
+          </a:extLst>
+        </p:cNvPr>
+        <p:cNvGrpSpPr/>
+        <p:nvPr/>
+      </p:nvGrpSpPr>
+      <p:grpSpPr>
+        <a:xfrm>
+          <a:off x="0" y="0"/>
+          <a:ext cx="0" cy="0"/>
+          <a:chOff x="0" y="0"/>
+          <a:chExt cx="0" cy="0"/>
+        </a:xfrm>
+      </p:grpSpPr>
+      <p:graphicFrame>
+        <p:nvGraphicFramePr>
+          <p:cNvPr id="7" name="Таблица 6">
+            <a:extLst>
+              <a:ext uri="{FF2B5EF4-FFF2-40B4-BE49-F238E27FC236}">
+                <a16:creationId xmlns:a16="http://schemas.microsoft.com/office/drawing/2014/main" id="{DC02C858-ADAC-30B1-240C-1ADF61550C11}"/>
+              </a:ext>
+            </a:extLst>
+          </p:cNvPr>
+          <p:cNvGraphicFramePr>
+            <a:graphicFrameLocks noGrp="1"/>
+          </p:cNvGraphicFramePr>
+          <p:nvPr>
+            <p:extLst>
+              <p:ext uri="{D42A27DB-BD31-4B8C-83A1-F6EECF244321}">
+                <p14:modId xmlns:p14="http://schemas.microsoft.com/office/powerpoint/2010/main" val="1976209554"/>
+              </p:ext>
+            </p:extLst>
+          </p:nvPr>
+        </p:nvGraphicFramePr>
+        <p:xfrm>
+          <a:off x="0" y="0"/>
+          <a:ext cx="12190761" cy="6858000"/>
+        </p:xfrm>
+        <a:graphic>
+          <a:graphicData uri="http://schemas.openxmlformats.org/drawingml/2006/table">
+            <a:tbl>
+              <a:tblPr firstRow="1" bandRow="1">
+                <a:tableStyleId>{8799B23B-EC83-4686-B30A-512413B5E67A}</a:tableStyleId>
+              </a:tblPr>
+              <a:tblGrid>
+                <a:gridCol w="4063587">
+                  <a:extLst>
+                    <a:ext uri="{9D8B030D-6E8A-4147-A177-3AD203B41FA5}">
+                      <a16:colId xmlns:a16="http://schemas.microsoft.com/office/drawing/2014/main" val="3337215936"/>
+                    </a:ext>
+                  </a:extLst>
+                </a:gridCol>
+                <a:gridCol w="2709058">
+                  <a:extLst>
+                    <a:ext uri="{9D8B030D-6E8A-4147-A177-3AD203B41FA5}">
+                      <a16:colId xmlns:a16="http://schemas.microsoft.com/office/drawing/2014/main" val="781963266"/>
+                    </a:ext>
+                  </a:extLst>
+                </a:gridCol>
+                <a:gridCol w="2709058">
+                  <a:extLst>
+                    <a:ext uri="{9D8B030D-6E8A-4147-A177-3AD203B41FA5}">
+                      <a16:colId xmlns:a16="http://schemas.microsoft.com/office/drawing/2014/main" val="3617920241"/>
+                    </a:ext>
+                  </a:extLst>
+                </a:gridCol>
+                <a:gridCol w="2709058">
+                  <a:extLst>
+                    <a:ext uri="{9D8B030D-6E8A-4147-A177-3AD203B41FA5}">
+                      <a16:colId xmlns:a16="http://schemas.microsoft.com/office/drawing/2014/main" val="1189521644"/>
+                    </a:ext>
+                  </a:extLst>
+                </a:gridCol>
+              </a:tblGrid>
+              <a:tr h="762000">
+                <a:tc>
+                  <a:txBody>
+                    <a:bodyPr/>
+                    <a:lstStyle/>
+                    <a:p>
+                      <a:endParaRPr lang="ru-RU" dirty="0"/>
+                    </a:p>
+                  </a:txBody>
+                  <a:tcPr>
+                    <a:noFill/>
+                  </a:tcPr>
+                </a:tc>
+                <a:tc rowSpan="2">
+                  <a:txBody>
+                    <a:bodyPr/>
+                    <a:lstStyle/>
+                    <a:p>
+                      <a:endParaRPr lang="ru-RU" dirty="0"/>
+                    </a:p>
+                  </a:txBody>
+                  <a:tcPr>
+                    <a:noFill/>
+                  </a:tcPr>
+                </a:tc>
+                <a:tc rowSpan="2">
+                  <a:txBody>
+                    <a:bodyPr/>
+                    <a:lstStyle/>
+                    <a:p>
+                      <a:endParaRPr lang="ru-RU" dirty="0"/>
+                    </a:p>
+                  </a:txBody>
+                  <a:tcPr>
+                    <a:noFill/>
+                  </a:tcPr>
+                </a:tc>
+                <a:tc rowSpan="2">
+                  <a:txBody>
+                    <a:bodyPr/>
+                    <a:lstStyle/>
+                    <a:p>
+                      <a:endParaRPr lang="ru-RU" dirty="0"/>
+                    </a:p>
+                  </a:txBody>
+                  <a:tcPr/>
+                </a:tc>
+                <a:extLst>
+                  <a:ext uri="{0D108BD9-81ED-4DB2-BD59-A6C34878D82A}">
+                    <a16:rowId xmlns:a16="http://schemas.microsoft.com/office/drawing/2014/main" val="3423004245"/>
+                  </a:ext>
+                </a:extLst>
+              </a:tr>
+              <a:tr h="1524000">
+                <a:tc>
+                  <a:txBody>
+                    <a:bodyPr/>
+                    <a:lstStyle/>
+                    <a:p>
+                      <a:endParaRPr lang="ru-RU" dirty="0"/>
+                    </a:p>
+                  </a:txBody>
+                  <a:tcPr>
+                    <a:noFill/>
+                  </a:tcPr>
+                </a:tc>
+                <a:tc vMerge="1">
+                  <a:txBody>
+                    <a:bodyPr/>
+                    <a:lstStyle/>
+                    <a:p>
+                      <a:endParaRPr lang="ru-RU" dirty="0"/>
+                    </a:p>
+                  </a:txBody>
+                  <a:tcPr>
+                    <a:noFill/>
+                  </a:tcPr>
+                </a:tc>
+                <a:tc vMerge="1">
+                  <a:txBody>
+                    <a:bodyPr/>
+                    <a:lstStyle/>
+                    <a:p>
+                      <a:endParaRPr lang="ru-RU" dirty="0"/>
+                    </a:p>
+                  </a:txBody>
+                  <a:tcPr>
+                    <a:noFill/>
+                  </a:tcPr>
+                </a:tc>
+                <a:tc vMerge="1">
+                  <a:txBody>
+                    <a:bodyPr/>
+                    <a:lstStyle/>
+                    <a:p>
+                      <a:endParaRPr lang="ru-RU" dirty="0"/>
+                    </a:p>
+                  </a:txBody>
+                  <a:tcPr>
+                    <a:noFill/>
+                  </a:tcPr>
+                </a:tc>
+                <a:extLst>
+                  <a:ext uri="{0D108BD9-81ED-4DB2-BD59-A6C34878D82A}">
+                    <a16:rowId xmlns:a16="http://schemas.microsoft.com/office/drawing/2014/main" val="1983591143"/>
+                  </a:ext>
+                </a:extLst>
+              </a:tr>
+              <a:tr h="762000">
+                <a:tc rowSpan="3">
+                  <a:txBody>
+                    <a:bodyPr/>
+                    <a:lstStyle/>
+                    <a:p>
+                      <a:endParaRPr lang="ru-RU" dirty="0"/>
+                    </a:p>
+                  </a:txBody>
+                  <a:tcPr>
+                    <a:noFill/>
+                  </a:tcPr>
+                </a:tc>
+                <a:tc gridSpan="3">
+                  <a:txBody>
+                    <a:bodyPr/>
+                    <a:lstStyle/>
+                    <a:p>
+                      <a:endParaRPr lang="ru-RU" dirty="0"/>
+                    </a:p>
+                  </a:txBody>
+                  <a:tcPr>
+                    <a:noFill/>
+                  </a:tcPr>
+                </a:tc>
+                <a:tc hMerge="1">
+                  <a:txBody>
+                    <a:bodyPr/>
+                    <a:lstStyle/>
+                    <a:p>
+                      <a:endParaRPr lang="ru-RU"/>
+                    </a:p>
+                  </a:txBody>
+                  <a:tcPr/>
+                </a:tc>
+                <a:tc hMerge="1">
+                  <a:txBody>
+                    <a:bodyPr/>
+                    <a:lstStyle/>
+                    <a:p>
+                      <a:endParaRPr lang="ru-RU"/>
+                    </a:p>
+                  </a:txBody>
+                  <a:tcPr/>
+                </a:tc>
+                <a:extLst>
+                  <a:ext uri="{0D108BD9-81ED-4DB2-BD59-A6C34878D82A}">
+                    <a16:rowId xmlns:a16="http://schemas.microsoft.com/office/drawing/2014/main" val="2491708108"/>
+                  </a:ext>
+                </a:extLst>
+              </a:tr>
+              <a:tr h="762000">
+                <a:tc vMerge="1">
+                  <a:txBody>
+                    <a:bodyPr/>
+                    <a:lstStyle/>
+                    <a:p>
+                      <a:endParaRPr lang="ru-RU"/>
+                    </a:p>
+                  </a:txBody>
+                  <a:tcPr/>
+                </a:tc>
+                <a:tc gridSpan="3">
+                  <a:txBody>
+                    <a:bodyPr/>
+                    <a:lstStyle/>
+                    <a:p>
+                      <a:endParaRPr lang="ru-RU" dirty="0"/>
+                    </a:p>
+                  </a:txBody>
+                  <a:tcPr>
+                    <a:noFill/>
+                  </a:tcPr>
+                </a:tc>
+                <a:tc hMerge="1">
+                  <a:txBody>
+                    <a:bodyPr/>
+                    <a:lstStyle/>
+                    <a:p>
+                      <a:endParaRPr lang="ru-RU"/>
+                    </a:p>
+                  </a:txBody>
+                  <a:tcPr/>
+                </a:tc>
+                <a:tc hMerge="1">
+                  <a:txBody>
+                    <a:bodyPr/>
+                    <a:lstStyle/>
+                    <a:p>
+                      <a:endParaRPr lang="ru-RU"/>
+                    </a:p>
+                  </a:txBody>
+                  <a:tcPr/>
+                </a:tc>
+                <a:extLst>
+                  <a:ext uri="{0D108BD9-81ED-4DB2-BD59-A6C34878D82A}">
+                    <a16:rowId xmlns:a16="http://schemas.microsoft.com/office/drawing/2014/main" val="3564122695"/>
+                  </a:ext>
+                </a:extLst>
+              </a:tr>
+              <a:tr h="2286000">
+                <a:tc vMerge="1">
+                  <a:txBody>
+                    <a:bodyPr/>
+                    <a:lstStyle/>
+                    <a:p>
+                      <a:endParaRPr lang="ru-RU"/>
+                    </a:p>
+                  </a:txBody>
+                  <a:tcPr/>
+                </a:tc>
+                <a:tc rowSpan="2" gridSpan="3">
+                  <a:txBody>
+                    <a:bodyPr/>
+                    <a:lstStyle/>
+                    <a:p>
+                      <a:endParaRPr lang="ru-RU" dirty="0"/>
+                    </a:p>
+                  </a:txBody>
+                  <a:tcPr>
+                    <a:noFill/>
+                  </a:tcPr>
+                </a:tc>
+                <a:tc rowSpan="2" hMerge="1">
+                  <a:txBody>
+                    <a:bodyPr/>
+                    <a:lstStyle/>
+                    <a:p>
+                      <a:endParaRPr lang="ru-RU"/>
+                    </a:p>
+                  </a:txBody>
+                  <a:tcPr/>
+                </a:tc>
+                <a:tc rowSpan="2" hMerge="1">
+                  <a:txBody>
+                    <a:bodyPr/>
+                    <a:lstStyle/>
+                    <a:p>
+                      <a:endParaRPr lang="ru-RU"/>
+                    </a:p>
+                  </a:txBody>
+                  <a:tcPr/>
+                </a:tc>
+                <a:extLst>
+                  <a:ext uri="{0D108BD9-81ED-4DB2-BD59-A6C34878D82A}">
+                    <a16:rowId xmlns:a16="http://schemas.microsoft.com/office/drawing/2014/main" val="1377022261"/>
+                  </a:ext>
+                </a:extLst>
+              </a:tr>
+              <a:tr h="762000">
+                <a:tc>
+                  <a:txBody>
+                    <a:bodyPr/>
+                    <a:lstStyle/>
+                    <a:p>
+                      <a:endParaRPr lang="ru-RU" dirty="0"/>
+                    </a:p>
+                  </a:txBody>
+                  <a:tcPr>
+                    <a:noFill/>
+                  </a:tcPr>
+                </a:tc>
+                <a:tc gridSpan="3" vMerge="1">
+                  <a:txBody>
+                    <a:bodyPr/>
+                    <a:lstStyle/>
+                    <a:p>
+                      <a:endParaRPr lang="ru-RU"/>
+                    </a:p>
+                  </a:txBody>
+                  <a:tcPr/>
+                </a:tc>
+                <a:tc hMerge="1" vMerge="1">
+                  <a:txBody>
+                    <a:bodyPr/>
+                    <a:lstStyle/>
+                    <a:p>
+                      <a:endParaRPr lang="ru-RU"/>
+                    </a:p>
+                  </a:txBody>
+                  <a:tcPr/>
+                </a:tc>
+                <a:tc hMerge="1" vMerge="1">
+                  <a:txBody>
+                    <a:bodyPr/>
+                    <a:lstStyle/>
+                    <a:p>
+                      <a:endParaRPr lang="ru-RU"/>
+                    </a:p>
+                  </a:txBody>
+                  <a:tcPr/>
+                </a:tc>
+                <a:extLst>
+                  <a:ext uri="{0D108BD9-81ED-4DB2-BD59-A6C34878D82A}">
+                    <a16:rowId xmlns:a16="http://schemas.microsoft.com/office/drawing/2014/main" val="1841564714"/>
+                  </a:ext>
+                </a:extLst>
+              </a:tr>
+            </a:tbl>
+          </a:graphicData>
+        </a:graphic>
+      </p:graphicFrame>
+    </p:spTree>
+    <p:extLst>
+      <p:ext uri="{BB962C8B-B14F-4D97-AF65-F5344CB8AC3E}">
+        <p14:creationId xmlns:p14="http://schemas.microsoft.com/office/powerpoint/2010/main" val="550947563"/>
       </p:ext>
     </p:extLst>
   </p:cSld>

--- a/screen.pptx
+++ b/screen.pptx
@@ -260,7 +260,7 @@
           <a:p>
             <a:fld id="{F2AE2E2B-653B-4E97-8FB5-068137AA788A}" type="datetimeFigureOut">
               <a:rPr lang="ru-RU" smtClean="0"/>
-              <a:t>16.09.2026</a:t>
+              <a:t>17.09.2026</a:t>
             </a:fld>
             <a:endParaRPr lang="ru-RU"/>
           </a:p>
@@ -458,7 +458,7 @@
           <a:p>
             <a:fld id="{F2AE2E2B-653B-4E97-8FB5-068137AA788A}" type="datetimeFigureOut">
               <a:rPr lang="ru-RU" smtClean="0"/>
-              <a:t>16.09.2026</a:t>
+              <a:t>17.09.2026</a:t>
             </a:fld>
             <a:endParaRPr lang="ru-RU"/>
           </a:p>
@@ -666,7 +666,7 @@
           <a:p>
             <a:fld id="{F2AE2E2B-653B-4E97-8FB5-068137AA788A}" type="datetimeFigureOut">
               <a:rPr lang="ru-RU" smtClean="0"/>
-              <a:t>16.09.2026</a:t>
+              <a:t>17.09.2026</a:t>
             </a:fld>
             <a:endParaRPr lang="ru-RU"/>
           </a:p>
@@ -864,7 +864,7 @@
           <a:p>
             <a:fld id="{F2AE2E2B-653B-4E97-8FB5-068137AA788A}" type="datetimeFigureOut">
               <a:rPr lang="ru-RU" smtClean="0"/>
-              <a:t>16.09.2026</a:t>
+              <a:t>17.09.2026</a:t>
             </a:fld>
             <a:endParaRPr lang="ru-RU"/>
           </a:p>
@@ -1139,7 +1139,7 @@
           <a:p>
             <a:fld id="{F2AE2E2B-653B-4E97-8FB5-068137AA788A}" type="datetimeFigureOut">
               <a:rPr lang="ru-RU" smtClean="0"/>
-              <a:t>16.09.2026</a:t>
+              <a:t>17.09.2026</a:t>
             </a:fld>
             <a:endParaRPr lang="ru-RU"/>
           </a:p>
@@ -1404,7 +1404,7 @@
           <a:p>
             <a:fld id="{F2AE2E2B-653B-4E97-8FB5-068137AA788A}" type="datetimeFigureOut">
               <a:rPr lang="ru-RU" smtClean="0"/>
-              <a:t>16.09.2026</a:t>
+              <a:t>17.09.2026</a:t>
             </a:fld>
             <a:endParaRPr lang="ru-RU"/>
           </a:p>
@@ -1816,7 +1816,7 @@
           <a:p>
             <a:fld id="{F2AE2E2B-653B-4E97-8FB5-068137AA788A}" type="datetimeFigureOut">
               <a:rPr lang="ru-RU" smtClean="0"/>
-              <a:t>16.09.2026</a:t>
+              <a:t>17.09.2026</a:t>
             </a:fld>
             <a:endParaRPr lang="ru-RU"/>
           </a:p>
@@ -1957,7 +1957,7 @@
           <a:p>
             <a:fld id="{F2AE2E2B-653B-4E97-8FB5-068137AA788A}" type="datetimeFigureOut">
               <a:rPr lang="ru-RU" smtClean="0"/>
-              <a:t>16.09.2026</a:t>
+              <a:t>17.09.2026</a:t>
             </a:fld>
             <a:endParaRPr lang="ru-RU"/>
           </a:p>
@@ -2070,7 +2070,7 @@
           <a:p>
             <a:fld id="{F2AE2E2B-653B-4E97-8FB5-068137AA788A}" type="datetimeFigureOut">
               <a:rPr lang="ru-RU" smtClean="0"/>
-              <a:t>16.09.2026</a:t>
+              <a:t>17.09.2026</a:t>
             </a:fld>
             <a:endParaRPr lang="ru-RU"/>
           </a:p>
@@ -2381,7 +2381,7 @@
           <a:p>
             <a:fld id="{F2AE2E2B-653B-4E97-8FB5-068137AA788A}" type="datetimeFigureOut">
               <a:rPr lang="ru-RU" smtClean="0"/>
-              <a:t>16.09.2026</a:t>
+              <a:t>17.09.2026</a:t>
             </a:fld>
             <a:endParaRPr lang="ru-RU"/>
           </a:p>
@@ -2669,7 +2669,7 @@
           <a:p>
             <a:fld id="{F2AE2E2B-653B-4E97-8FB5-068137AA788A}" type="datetimeFigureOut">
               <a:rPr lang="ru-RU" smtClean="0"/>
-              <a:t>16.09.2026</a:t>
+              <a:t>17.09.2026</a:t>
             </a:fld>
             <a:endParaRPr lang="ru-RU"/>
           </a:p>
@@ -2910,7 +2910,7 @@
           <a:p>
             <a:fld id="{F2AE2E2B-653B-4E97-8FB5-068137AA788A}" type="datetimeFigureOut">
               <a:rPr lang="ru-RU" smtClean="0"/>
-              <a:t>16.09.2026</a:t>
+              <a:t>17.09.2026</a:t>
             </a:fld>
             <a:endParaRPr lang="ru-RU"/>
           </a:p>
@@ -3316,7 +3316,7 @@
     <p:bg>
       <p:bgPr>
         <a:solidFill>
-          <a:srgbClr val="161519"/>
+          <a:srgbClr val="0C0C0E"/>
         </a:solidFill>
         <a:effectLst/>
       </p:bgPr>
@@ -4312,7 +4312,7 @@
         </p:nvGrpSpPr>
         <p:grpSpPr>
           <a:xfrm>
-            <a:off x="3113531" y="844884"/>
+            <a:off x="3140894" y="847836"/>
             <a:ext cx="2170921" cy="1015662"/>
             <a:chOff x="1787320" y="5101202"/>
             <a:chExt cx="2170921" cy="1015662"/>
@@ -4470,7 +4470,8 @@
               </a:prstGeom>
               <a:solidFill>
                 <a:schemeClr val="accent4">
-                  <a:lumMod val="50000"/>
+                  <a:lumMod val="60000"/>
+                  <a:lumOff val="40000"/>
                 </a:schemeClr>
               </a:solidFill>
               <a:ln>
@@ -4524,7 +4525,8 @@
               </a:prstGeom>
               <a:solidFill>
                 <a:schemeClr val="accent4">
-                  <a:lumMod val="75000"/>
+                  <a:lumMod val="60000"/>
+                  <a:lumOff val="40000"/>
                 </a:schemeClr>
               </a:solidFill>
               <a:ln>
@@ -4814,7 +4816,8 @@
               </a:prstGeom>
               <a:solidFill>
                 <a:schemeClr val="accent4">
-                  <a:lumMod val="50000"/>
+                  <a:lumMod val="60000"/>
+                  <a:lumOff val="40000"/>
                 </a:schemeClr>
               </a:solidFill>
               <a:ln>
@@ -4868,7 +4871,8 @@
               </a:prstGeom>
               <a:solidFill>
                 <a:schemeClr val="accent4">
-                  <a:lumMod val="75000"/>
+                  <a:lumMod val="60000"/>
+                  <a:lumOff val="40000"/>
                 </a:schemeClr>
               </a:solidFill>
               <a:ln>
@@ -5048,7 +5052,7 @@
               </a:prstGeom>
               <a:solidFill>
                 <a:schemeClr val="accent2">
-                  <a:lumMod val="50000"/>
+                  <a:lumMod val="75000"/>
                 </a:schemeClr>
               </a:solidFill>
               <a:ln>
@@ -5156,8 +5160,7 @@
               </a:prstGeom>
               <a:solidFill>
                 <a:schemeClr val="accent2">
-                  <a:lumMod val="60000"/>
-                  <a:lumOff val="40000"/>
+                  <a:lumMod val="75000"/>
                 </a:schemeClr>
               </a:solidFill>
               <a:ln>
@@ -5211,8 +5214,7 @@
               </a:prstGeom>
               <a:solidFill>
                 <a:schemeClr val="accent2">
-                  <a:lumMod val="40000"/>
-                  <a:lumOff val="60000"/>
+                  <a:lumMod val="75000"/>
                 </a:schemeClr>
               </a:solidFill>
               <a:ln>
@@ -5266,8 +5268,7 @@
               </a:prstGeom>
               <a:solidFill>
                 <a:schemeClr val="accent2">
-                  <a:lumMod val="20000"/>
-                  <a:lumOff val="80000"/>
+                  <a:lumMod val="75000"/>
                 </a:schemeClr>
               </a:solidFill>
               <a:ln>
@@ -5557,9 +5558,7 @@
             <a:noFill/>
             <a:ln w="19050">
               <a:solidFill>
-                <a:schemeClr val="accent3">
-                  <a:lumMod val="75000"/>
-                </a:schemeClr>
+                <a:srgbClr val="7C7C7C"/>
               </a:solidFill>
             </a:ln>
           </p:spPr>
@@ -6401,8 +6400,8 @@
         </p:nvSpPr>
         <p:spPr>
           <a:xfrm>
-            <a:off x="5603341" y="487959"/>
-            <a:ext cx="1266693" cy="338554"/>
+            <a:off x="5635148" y="847836"/>
+            <a:ext cx="2949846" cy="338554"/>
           </a:xfrm>
           <a:prstGeom prst="rect">
             <a:avLst/>
@@ -6426,63 +6425,31 @@
               </a:rPr>
               <a:t>Converter</a:t>
             </a:r>
-            <a:endParaRPr lang="ru-RU" sz="1600" dirty="0">
-              <a:solidFill>
-                <a:schemeClr val="bg1"/>
-              </a:solidFill>
-              <a:latin typeface="Cascadia Mono" panose="020B0609020000020004" pitchFamily="49" charset="0"/>
-              <a:ea typeface="Cascadia Mono" panose="020B0609020000020004" pitchFamily="49" charset="0"/>
-              <a:cs typeface="Cascadia Mono" panose="020B0609020000020004" pitchFamily="49" charset="0"/>
-            </a:endParaRPr>
-          </a:p>
-        </p:txBody>
-      </p:sp>
-      <p:sp>
-        <p:nvSpPr>
-          <p:cNvPr id="118" name="TextBox 117">
-            <a:extLst>
-              <a:ext uri="{FF2B5EF4-FFF2-40B4-BE49-F238E27FC236}">
-                <a16:creationId xmlns:a16="http://schemas.microsoft.com/office/drawing/2014/main" id="{EACBCD6F-3CF3-5BF9-9D1E-364ED45A771F}"/>
-              </a:ext>
-            </a:extLst>
-          </p:cNvPr>
-          <p:cNvSpPr txBox="1"/>
-          <p:nvPr/>
-        </p:nvSpPr>
-        <p:spPr>
-          <a:xfrm>
-            <a:off x="5603341" y="843524"/>
-            <a:ext cx="1773217" cy="338554"/>
-          </a:xfrm>
-          <a:prstGeom prst="rect">
-            <a:avLst/>
-          </a:prstGeom>
-          <a:noFill/>
-        </p:spPr>
-        <p:txBody>
-          <a:bodyPr wrap="square" rtlCol="0">
-            <a:spAutoFit/>
-          </a:bodyPr>
-          <a:lstStyle/>
-          <a:p>
             <a:r>
-              <a:rPr lang="en-US" sz="1600" dirty="0">
+              <a:rPr lang="ru-RU" sz="1600" dirty="0">
                 <a:solidFill>
-                  <a:schemeClr val="bg1">
-                    <a:lumMod val="85000"/>
-                  </a:schemeClr>
+                  <a:schemeClr val="bg1"/>
                 </a:solidFill>
                 <a:latin typeface="Cascadia Mono" panose="020B0609020000020004" pitchFamily="49" charset="0"/>
                 <a:ea typeface="Cascadia Mono" panose="020B0609020000020004" pitchFamily="49" charset="0"/>
                 <a:cs typeface="Cascadia Mono" panose="020B0609020000020004" pitchFamily="49" charset="0"/>
               </a:rPr>
-              <a:t>Mode: Charge </a:t>
+              <a:t> </a:t>
+            </a:r>
+            <a:r>
+              <a:rPr lang="en-US" sz="1600" dirty="0">
+                <a:solidFill>
+                  <a:schemeClr val="bg1"/>
+                </a:solidFill>
+                <a:latin typeface="Cascadia Mono" panose="020B0609020000020004" pitchFamily="49" charset="0"/>
+                <a:ea typeface="Cascadia Mono" panose="020B0609020000020004" pitchFamily="49" charset="0"/>
+                <a:cs typeface="Cascadia Mono" panose="020B0609020000020004" pitchFamily="49" charset="0"/>
+              </a:rPr>
+              <a:t>mode: No data</a:t>
             </a:r>
             <a:endParaRPr lang="ru-RU" sz="1600" dirty="0">
               <a:solidFill>
-                <a:schemeClr val="bg1">
-                  <a:lumMod val="85000"/>
-                </a:schemeClr>
+                <a:schemeClr val="bg1"/>
               </a:solidFill>
               <a:latin typeface="Cascadia Mono" panose="020B0609020000020004" pitchFamily="49" charset="0"/>
               <a:ea typeface="Cascadia Mono" panose="020B0609020000020004" pitchFamily="49" charset="0"/>
@@ -7212,302 +7179,6 @@
           </p:txBody>
         </p:sp>
       </p:grpSp>
-      <p:sp>
-        <p:nvSpPr>
-          <p:cNvPr id="237" name="TextBox 236">
-            <a:extLst>
-              <a:ext uri="{FF2B5EF4-FFF2-40B4-BE49-F238E27FC236}">
-                <a16:creationId xmlns:a16="http://schemas.microsoft.com/office/drawing/2014/main" id="{8B60AF02-1EC8-A58F-ADF7-272673B873EE}"/>
-              </a:ext>
-            </a:extLst>
-          </p:cNvPr>
-          <p:cNvSpPr txBox="1"/>
-          <p:nvPr/>
-        </p:nvSpPr>
-        <p:spPr>
-          <a:xfrm>
-            <a:off x="10365143" y="597303"/>
-            <a:ext cx="1627369" cy="584775"/>
-          </a:xfrm>
-          <a:prstGeom prst="rect">
-            <a:avLst/>
-          </a:prstGeom>
-          <a:noFill/>
-        </p:spPr>
-        <p:txBody>
-          <a:bodyPr wrap="none" rtlCol="0">
-            <a:spAutoFit/>
-          </a:bodyPr>
-          <a:lstStyle/>
-          <a:p>
-            <a:r>
-              <a:rPr lang="en-US" sz="1600" dirty="0">
-                <a:solidFill>
-                  <a:schemeClr val="bg1">
-                    <a:lumMod val="85000"/>
-                  </a:schemeClr>
-                </a:solidFill>
-                <a:latin typeface="Cascadia Mono" panose="020B0609020000020004" pitchFamily="49" charset="0"/>
-                <a:ea typeface="Cascadia Mono" panose="020B0609020000020004" pitchFamily="49" charset="0"/>
-                <a:cs typeface="Cascadia Mono" panose="020B0609020000020004" pitchFamily="49" charset="0"/>
-              </a:rPr>
-              <a:t>Contactor 1:</a:t>
-            </a:r>
-          </a:p>
-          <a:p>
-            <a:r>
-              <a:rPr lang="en-US" sz="1600" dirty="0">
-                <a:solidFill>
-                  <a:schemeClr val="bg1">
-                    <a:lumMod val="85000"/>
-                  </a:schemeClr>
-                </a:solidFill>
-                <a:latin typeface="Cascadia Mono" panose="020B0609020000020004" pitchFamily="49" charset="0"/>
-                <a:ea typeface="Cascadia Mono" panose="020B0609020000020004" pitchFamily="49" charset="0"/>
-                <a:cs typeface="Cascadia Mono" panose="020B0609020000020004" pitchFamily="49" charset="0"/>
-              </a:rPr>
-              <a:t>Closed</a:t>
-            </a:r>
-            <a:endParaRPr lang="ru-RU" sz="1600" dirty="0">
-              <a:solidFill>
-                <a:schemeClr val="bg1">
-                  <a:lumMod val="85000"/>
-                </a:schemeClr>
-              </a:solidFill>
-              <a:latin typeface="Cascadia Mono" panose="020B0609020000020004" pitchFamily="49" charset="0"/>
-              <a:ea typeface="Cascadia Mono" panose="020B0609020000020004" pitchFamily="49" charset="0"/>
-              <a:cs typeface="Cascadia Mono" panose="020B0609020000020004" pitchFamily="49" charset="0"/>
-            </a:endParaRPr>
-          </a:p>
-        </p:txBody>
-      </p:sp>
-      <p:sp>
-        <p:nvSpPr>
-          <p:cNvPr id="238" name="TextBox 237">
-            <a:extLst>
-              <a:ext uri="{FF2B5EF4-FFF2-40B4-BE49-F238E27FC236}">
-                <a16:creationId xmlns:a16="http://schemas.microsoft.com/office/drawing/2014/main" id="{DBC1DA25-8B6E-CC30-3235-2224CB89E98D}"/>
-              </a:ext>
-            </a:extLst>
-          </p:cNvPr>
-          <p:cNvSpPr txBox="1"/>
-          <p:nvPr/>
-        </p:nvSpPr>
-        <p:spPr>
-          <a:xfrm>
-            <a:off x="10365143" y="1270654"/>
-            <a:ext cx="1627369" cy="584775"/>
-          </a:xfrm>
-          <a:prstGeom prst="rect">
-            <a:avLst/>
-          </a:prstGeom>
-          <a:noFill/>
-        </p:spPr>
-        <p:txBody>
-          <a:bodyPr wrap="none" rtlCol="0">
-            <a:spAutoFit/>
-          </a:bodyPr>
-          <a:lstStyle/>
-          <a:p>
-            <a:r>
-              <a:rPr lang="en-US" sz="1600" dirty="0">
-                <a:solidFill>
-                  <a:schemeClr val="bg1">
-                    <a:lumMod val="85000"/>
-                  </a:schemeClr>
-                </a:solidFill>
-                <a:latin typeface="Cascadia Mono" panose="020B0609020000020004" pitchFamily="49" charset="0"/>
-                <a:ea typeface="Cascadia Mono" panose="020B0609020000020004" pitchFamily="49" charset="0"/>
-                <a:cs typeface="Cascadia Mono" panose="020B0609020000020004" pitchFamily="49" charset="0"/>
-              </a:rPr>
-              <a:t>Contactor 2:</a:t>
-            </a:r>
-          </a:p>
-          <a:p>
-            <a:r>
-              <a:rPr lang="en-US" sz="1600" dirty="0">
-                <a:solidFill>
-                  <a:schemeClr val="bg1">
-                    <a:lumMod val="85000"/>
-                  </a:schemeClr>
-                </a:solidFill>
-                <a:latin typeface="Cascadia Mono" panose="020B0609020000020004" pitchFamily="49" charset="0"/>
-                <a:ea typeface="Cascadia Mono" panose="020B0609020000020004" pitchFamily="49" charset="0"/>
-                <a:cs typeface="Cascadia Mono" panose="020B0609020000020004" pitchFamily="49" charset="0"/>
-              </a:rPr>
-              <a:t>Closed</a:t>
-            </a:r>
-            <a:endParaRPr lang="ru-RU" sz="1600" dirty="0">
-              <a:solidFill>
-                <a:schemeClr val="bg1">
-                  <a:lumMod val="85000"/>
-                </a:schemeClr>
-              </a:solidFill>
-              <a:latin typeface="Cascadia Mono" panose="020B0609020000020004" pitchFamily="49" charset="0"/>
-              <a:ea typeface="Cascadia Mono" panose="020B0609020000020004" pitchFamily="49" charset="0"/>
-              <a:cs typeface="Cascadia Mono" panose="020B0609020000020004" pitchFamily="49" charset="0"/>
-            </a:endParaRPr>
-          </a:p>
-        </p:txBody>
-      </p:sp>
-      <p:sp>
-        <p:nvSpPr>
-          <p:cNvPr id="258" name="TextBox 257">
-            <a:extLst>
-              <a:ext uri="{FF2B5EF4-FFF2-40B4-BE49-F238E27FC236}">
-                <a16:creationId xmlns:a16="http://schemas.microsoft.com/office/drawing/2014/main" id="{7672330D-298F-368E-1DA1-51F5F58FA00F}"/>
-              </a:ext>
-            </a:extLst>
-          </p:cNvPr>
-          <p:cNvSpPr txBox="1"/>
-          <p:nvPr/>
-        </p:nvSpPr>
-        <p:spPr>
-          <a:xfrm>
-            <a:off x="8367487" y="547380"/>
-            <a:ext cx="1266693" cy="338554"/>
-          </a:xfrm>
-          <a:prstGeom prst="rect">
-            <a:avLst/>
-          </a:prstGeom>
-          <a:noFill/>
-        </p:spPr>
-        <p:txBody>
-          <a:bodyPr wrap="none" rtlCol="0">
-            <a:spAutoFit/>
-          </a:bodyPr>
-          <a:lstStyle/>
-          <a:p>
-            <a:r>
-              <a:rPr lang="en-US" sz="1600" dirty="0">
-                <a:solidFill>
-                  <a:schemeClr val="bg1"/>
-                </a:solidFill>
-                <a:latin typeface="Cascadia Mono" panose="020B0609020000020004" pitchFamily="49" charset="0"/>
-                <a:ea typeface="Cascadia Mono" panose="020B0609020000020004" pitchFamily="49" charset="0"/>
-                <a:cs typeface="Cascadia Mono" panose="020B0609020000020004" pitchFamily="49" charset="0"/>
-              </a:rPr>
-              <a:t>Isolation</a:t>
-            </a:r>
-            <a:endParaRPr lang="ru-RU" sz="1600" dirty="0">
-              <a:solidFill>
-                <a:schemeClr val="bg1"/>
-              </a:solidFill>
-              <a:latin typeface="Cascadia Mono" panose="020B0609020000020004" pitchFamily="49" charset="0"/>
-              <a:ea typeface="Cascadia Mono" panose="020B0609020000020004" pitchFamily="49" charset="0"/>
-              <a:cs typeface="Cascadia Mono" panose="020B0609020000020004" pitchFamily="49" charset="0"/>
-            </a:endParaRPr>
-          </a:p>
-        </p:txBody>
-      </p:sp>
-      <p:sp>
-        <p:nvSpPr>
-          <p:cNvPr id="259" name="TextBox 258">
-            <a:extLst>
-              <a:ext uri="{FF2B5EF4-FFF2-40B4-BE49-F238E27FC236}">
-                <a16:creationId xmlns:a16="http://schemas.microsoft.com/office/drawing/2014/main" id="{A2BC51F3-1349-51C2-8D2C-4588BF828CCE}"/>
-              </a:ext>
-            </a:extLst>
-          </p:cNvPr>
-          <p:cNvSpPr txBox="1"/>
-          <p:nvPr/>
-        </p:nvSpPr>
-        <p:spPr>
-          <a:xfrm>
-            <a:off x="8367487" y="888770"/>
-            <a:ext cx="1627369" cy="338554"/>
-          </a:xfrm>
-          <a:prstGeom prst="rect">
-            <a:avLst/>
-          </a:prstGeom>
-          <a:noFill/>
-        </p:spPr>
-        <p:txBody>
-          <a:bodyPr wrap="none" rtlCol="0">
-            <a:spAutoFit/>
-          </a:bodyPr>
-          <a:lstStyle/>
-          <a:p>
-            <a:r>
-              <a:rPr lang="en-US" sz="1600" dirty="0">
-                <a:solidFill>
-                  <a:schemeClr val="bg1">
-                    <a:lumMod val="85000"/>
-                  </a:schemeClr>
-                </a:solidFill>
-                <a:latin typeface="Cascadia Mono" panose="020B0609020000020004" pitchFamily="49" charset="0"/>
-                <a:ea typeface="Cascadia Mono" panose="020B0609020000020004" pitchFamily="49" charset="0"/>
-                <a:cs typeface="Cascadia Mono" panose="020B0609020000020004" pitchFamily="49" charset="0"/>
-              </a:rPr>
-              <a:t>Res+: 500MOm</a:t>
-            </a:r>
-            <a:endParaRPr lang="ru-RU" sz="1600" dirty="0">
-              <a:solidFill>
-                <a:schemeClr val="bg1">
-                  <a:lumMod val="85000"/>
-                </a:schemeClr>
-              </a:solidFill>
-              <a:latin typeface="Cascadia Mono" panose="020B0609020000020004" pitchFamily="49" charset="0"/>
-              <a:ea typeface="Cascadia Mono" panose="020B0609020000020004" pitchFamily="49" charset="0"/>
-              <a:cs typeface="Cascadia Mono" panose="020B0609020000020004" pitchFamily="49" charset="0"/>
-            </a:endParaRPr>
-          </a:p>
-        </p:txBody>
-      </p:sp>
-      <p:sp>
-        <p:nvSpPr>
-          <p:cNvPr id="260" name="TextBox 259">
-            <a:extLst>
-              <a:ext uri="{FF2B5EF4-FFF2-40B4-BE49-F238E27FC236}">
-                <a16:creationId xmlns:a16="http://schemas.microsoft.com/office/drawing/2014/main" id="{AEA994AF-73B7-4FC4-8548-28A1C531BC9F}"/>
-              </a:ext>
-            </a:extLst>
-          </p:cNvPr>
-          <p:cNvSpPr txBox="1"/>
-          <p:nvPr/>
-        </p:nvSpPr>
-        <p:spPr>
-          <a:xfrm>
-            <a:off x="8367487" y="1227324"/>
-            <a:ext cx="1627369" cy="338554"/>
-          </a:xfrm>
-          <a:prstGeom prst="rect">
-            <a:avLst/>
-          </a:prstGeom>
-          <a:noFill/>
-        </p:spPr>
-        <p:txBody>
-          <a:bodyPr wrap="none" rtlCol="0">
-            <a:spAutoFit/>
-          </a:bodyPr>
-          <a:lstStyle/>
-          <a:p>
-            <a:r>
-              <a:rPr lang="en-US" sz="1600" dirty="0">
-                <a:solidFill>
-                  <a:schemeClr val="bg1">
-                    <a:lumMod val="85000"/>
-                  </a:schemeClr>
-                </a:solidFill>
-                <a:latin typeface="Cascadia Mono" panose="020B0609020000020004" pitchFamily="49" charset="0"/>
-                <a:ea typeface="Cascadia Mono" panose="020B0609020000020004" pitchFamily="49" charset="0"/>
-                <a:cs typeface="Cascadia Mono" panose="020B0609020000020004" pitchFamily="49" charset="0"/>
-              </a:rPr>
-              <a:t>Res-: 500MOm</a:t>
-            </a:r>
-            <a:endParaRPr lang="ru-RU" sz="1600" dirty="0">
-              <a:solidFill>
-                <a:schemeClr val="bg1">
-                  <a:lumMod val="85000"/>
-                </a:schemeClr>
-              </a:solidFill>
-              <a:latin typeface="Cascadia Mono" panose="020B0609020000020004" pitchFamily="49" charset="0"/>
-              <a:ea typeface="Cascadia Mono" panose="020B0609020000020004" pitchFamily="49" charset="0"/>
-              <a:cs typeface="Cascadia Mono" panose="020B0609020000020004" pitchFamily="49" charset="0"/>
-            </a:endParaRPr>
-          </a:p>
-        </p:txBody>
-      </p:sp>
       <p:grpSp>
         <p:nvGrpSpPr>
           <p:cNvPr id="428" name="Группа 427">
@@ -10228,60 +9899,6 @@
       </p:sp>
       <p:sp>
         <p:nvSpPr>
-          <p:cNvPr id="430" name="TextBox 429">
-            <a:extLst>
-              <a:ext uri="{FF2B5EF4-FFF2-40B4-BE49-F238E27FC236}">
-                <a16:creationId xmlns:a16="http://schemas.microsoft.com/office/drawing/2014/main" id="{B3811540-A8BF-0B5E-D07F-AB0621EBAF09}"/>
-              </a:ext>
-            </a:extLst>
-          </p:cNvPr>
-          <p:cNvSpPr txBox="1"/>
-          <p:nvPr/>
-        </p:nvSpPr>
-        <p:spPr>
-          <a:xfrm>
-            <a:off x="8367279" y="1563042"/>
-            <a:ext cx="1266693" cy="338554"/>
-          </a:xfrm>
-          <a:prstGeom prst="rect">
-            <a:avLst/>
-          </a:prstGeom>
-          <a:noFill/>
-        </p:spPr>
-        <p:txBody>
-          <a:bodyPr wrap="none" rtlCol="0">
-            <a:spAutoFit/>
-          </a:bodyPr>
-          <a:lstStyle/>
-          <a:p>
-            <a:r>
-              <a:rPr lang="en-US" sz="1600" dirty="0">
-                <a:solidFill>
-                  <a:schemeClr val="bg1">
-                    <a:lumMod val="85000"/>
-                  </a:schemeClr>
-                </a:solidFill>
-                <a:latin typeface="Cascadia Mono" panose="020B0609020000020004" pitchFamily="49" charset="0"/>
-                <a:ea typeface="Cascadia Mono" panose="020B0609020000020004" pitchFamily="49" charset="0"/>
-                <a:cs typeface="Cascadia Mono" panose="020B0609020000020004" pitchFamily="49" charset="0"/>
-              </a:rPr>
-              <a:t>Bus: 800V</a:t>
-            </a:r>
-            <a:endParaRPr lang="ru-RU" sz="1600" dirty="0">
-              <a:solidFill>
-                <a:schemeClr val="bg1">
-                  <a:lumMod val="85000"/>
-                </a:schemeClr>
-              </a:solidFill>
-              <a:latin typeface="Cascadia Mono" panose="020B0609020000020004" pitchFamily="49" charset="0"/>
-              <a:ea typeface="Cascadia Mono" panose="020B0609020000020004" pitchFamily="49" charset="0"/>
-              <a:cs typeface="Cascadia Mono" panose="020B0609020000020004" pitchFamily="49" charset="0"/>
-            </a:endParaRPr>
-          </a:p>
-        </p:txBody>
-      </p:sp>
-      <p:sp>
-        <p:nvSpPr>
           <p:cNvPr id="432" name="TextBox 431">
             <a:extLst>
               <a:ext uri="{FF2B5EF4-FFF2-40B4-BE49-F238E27FC236}">
@@ -10744,6 +10361,2749 @@
           </a:graphicData>
         </a:graphic>
       </p:graphicFrame>
+      <p:sp>
+        <p:nvSpPr>
+          <p:cNvPr id="2" name="TextBox 1">
+            <a:extLst>
+              <a:ext uri="{FF2B5EF4-FFF2-40B4-BE49-F238E27FC236}">
+                <a16:creationId xmlns:a16="http://schemas.microsoft.com/office/drawing/2014/main" id="{062A6D24-D0F1-AEAC-7D68-2FC904332CAD}"/>
+              </a:ext>
+            </a:extLst>
+          </p:cNvPr>
+          <p:cNvSpPr txBox="1"/>
+          <p:nvPr/>
+        </p:nvSpPr>
+        <p:spPr>
+          <a:xfrm>
+            <a:off x="586957" y="426813"/>
+            <a:ext cx="1988045" cy="338554"/>
+          </a:xfrm>
+          <a:prstGeom prst="rect">
+            <a:avLst/>
+          </a:prstGeom>
+          <a:noFill/>
+        </p:spPr>
+        <p:txBody>
+          <a:bodyPr wrap="none" rtlCol="0">
+            <a:spAutoFit/>
+          </a:bodyPr>
+          <a:lstStyle/>
+          <a:p>
+            <a:r>
+              <a:rPr lang="en-US" sz="1600" dirty="0">
+                <a:solidFill>
+                  <a:schemeClr val="bg1"/>
+                </a:solidFill>
+                <a:latin typeface="Cascadia Mono" panose="020B0609020000020004" pitchFamily="49" charset="0"/>
+                <a:ea typeface="Cascadia Mono" panose="020B0609020000020004" pitchFamily="49" charset="0"/>
+                <a:cs typeface="Cascadia Mono" panose="020B0609020000020004" pitchFamily="49" charset="0"/>
+              </a:rPr>
+              <a:t>CAN-BUS 2 250KB</a:t>
+            </a:r>
+            <a:endParaRPr lang="ru-RU" sz="1600" dirty="0">
+              <a:solidFill>
+                <a:schemeClr val="bg1"/>
+              </a:solidFill>
+              <a:latin typeface="Cascadia Mono" panose="020B0609020000020004" pitchFamily="49" charset="0"/>
+              <a:ea typeface="Cascadia Mono" panose="020B0609020000020004" pitchFamily="49" charset="0"/>
+              <a:cs typeface="Cascadia Mono" panose="020B0609020000020004" pitchFamily="49" charset="0"/>
+            </a:endParaRPr>
+          </a:p>
+        </p:txBody>
+      </p:sp>
+      <p:sp>
+        <p:nvSpPr>
+          <p:cNvPr id="3" name="TextBox 2">
+            <a:extLst>
+              <a:ext uri="{FF2B5EF4-FFF2-40B4-BE49-F238E27FC236}">
+                <a16:creationId xmlns:a16="http://schemas.microsoft.com/office/drawing/2014/main" id="{2852C0D7-3060-16C7-3E76-761986546077}"/>
+              </a:ext>
+            </a:extLst>
+          </p:cNvPr>
+          <p:cNvSpPr txBox="1"/>
+          <p:nvPr/>
+        </p:nvSpPr>
+        <p:spPr>
+          <a:xfrm>
+            <a:off x="586957" y="765367"/>
+            <a:ext cx="2294218" cy="400110"/>
+          </a:xfrm>
+          <a:prstGeom prst="rect">
+            <a:avLst/>
+          </a:prstGeom>
+          <a:noFill/>
+        </p:spPr>
+        <p:txBody>
+          <a:bodyPr wrap="none" rtlCol="0">
+            <a:spAutoFit/>
+          </a:bodyPr>
+          <a:lstStyle/>
+          <a:p>
+            <a:r>
+              <a:rPr lang="en-US" sz="2000" dirty="0">
+                <a:solidFill>
+                  <a:schemeClr val="bg1"/>
+                </a:solidFill>
+                <a:latin typeface="Cascadia Mono" panose="020B0609020000020004" pitchFamily="49" charset="0"/>
+                <a:ea typeface="Cascadia Mono" panose="020B0609020000020004" pitchFamily="49" charset="0"/>
+                <a:cs typeface="Cascadia Mono" panose="020B0609020000020004" pitchFamily="49" charset="0"/>
+              </a:rPr>
+              <a:t>EC None errors</a:t>
+            </a:r>
+            <a:endParaRPr lang="ru-RU" sz="2000" dirty="0">
+              <a:solidFill>
+                <a:schemeClr val="bg1"/>
+              </a:solidFill>
+              <a:latin typeface="Cascadia Mono" panose="020B0609020000020004" pitchFamily="49" charset="0"/>
+              <a:ea typeface="Cascadia Mono" panose="020B0609020000020004" pitchFamily="49" charset="0"/>
+              <a:cs typeface="Cascadia Mono" panose="020B0609020000020004" pitchFamily="49" charset="0"/>
+            </a:endParaRPr>
+          </a:p>
+        </p:txBody>
+      </p:sp>
+      <p:sp>
+        <p:nvSpPr>
+          <p:cNvPr id="4" name="Овал 3">
+            <a:extLst>
+              <a:ext uri="{FF2B5EF4-FFF2-40B4-BE49-F238E27FC236}">
+                <a16:creationId xmlns:a16="http://schemas.microsoft.com/office/drawing/2014/main" id="{94C0B465-C942-F667-705E-21B696E6817D}"/>
+              </a:ext>
+            </a:extLst>
+          </p:cNvPr>
+          <p:cNvSpPr/>
+          <p:nvPr/>
+        </p:nvSpPr>
+        <p:spPr>
+          <a:xfrm>
+            <a:off x="311814" y="865061"/>
+            <a:ext cx="180000" cy="180000"/>
+          </a:xfrm>
+          <a:prstGeom prst="ellipse">
+            <a:avLst/>
+          </a:prstGeom>
+          <a:solidFill>
+            <a:schemeClr val="accent6">
+              <a:lumMod val="50000"/>
+            </a:schemeClr>
+          </a:solidFill>
+          <a:ln>
+            <a:noFill/>
+          </a:ln>
+        </p:spPr>
+        <p:style>
+          <a:lnRef idx="2">
+            <a:schemeClr val="accent1">
+              <a:shade val="15000"/>
+            </a:schemeClr>
+          </a:lnRef>
+          <a:fillRef idx="1">
+            <a:schemeClr val="accent1"/>
+          </a:fillRef>
+          <a:effectRef idx="0">
+            <a:schemeClr val="accent1"/>
+          </a:effectRef>
+          <a:fontRef idx="minor">
+            <a:schemeClr val="lt1"/>
+          </a:fontRef>
+        </p:style>
+        <p:txBody>
+          <a:bodyPr rtlCol="0" anchor="ctr"/>
+          <a:lstStyle/>
+          <a:p>
+            <a:pPr algn="ctr"/>
+            <a:endParaRPr lang="ru-RU"/>
+          </a:p>
+        </p:txBody>
+      </p:sp>
+      <p:grpSp>
+        <p:nvGrpSpPr>
+          <p:cNvPr id="5" name="Группа 4">
+            <a:extLst>
+              <a:ext uri="{FF2B5EF4-FFF2-40B4-BE49-F238E27FC236}">
+                <a16:creationId xmlns:a16="http://schemas.microsoft.com/office/drawing/2014/main" id="{E5E92F9D-3632-1A54-B3C2-C9E41134ED0D}"/>
+              </a:ext>
+            </a:extLst>
+          </p:cNvPr>
+          <p:cNvGrpSpPr/>
+          <p:nvPr/>
+        </p:nvGrpSpPr>
+        <p:grpSpPr>
+          <a:xfrm>
+            <a:off x="593206" y="1193150"/>
+            <a:ext cx="2220031" cy="677108"/>
+            <a:chOff x="1613042" y="4339696"/>
+            <a:chExt cx="2220031" cy="677108"/>
+          </a:xfrm>
+        </p:grpSpPr>
+        <p:sp>
+          <p:nvSpPr>
+            <p:cNvPr id="6" name="TextBox 5">
+              <a:extLst>
+                <a:ext uri="{FF2B5EF4-FFF2-40B4-BE49-F238E27FC236}">
+                  <a16:creationId xmlns:a16="http://schemas.microsoft.com/office/drawing/2014/main" id="{628C8F94-F4F0-3FD5-0E80-6F067940B477}"/>
+                </a:ext>
+              </a:extLst>
+            </p:cNvPr>
+            <p:cNvSpPr txBox="1"/>
+            <p:nvPr/>
+          </p:nvSpPr>
+          <p:spPr>
+            <a:xfrm>
+              <a:off x="1613042" y="4339696"/>
+              <a:ext cx="545342" cy="338554"/>
+            </a:xfrm>
+            <a:prstGeom prst="rect">
+              <a:avLst/>
+            </a:prstGeom>
+            <a:noFill/>
+          </p:spPr>
+          <p:txBody>
+            <a:bodyPr wrap="none" rtlCol="0">
+              <a:spAutoFit/>
+            </a:bodyPr>
+            <a:lstStyle/>
+            <a:p>
+              <a:r>
+                <a:rPr lang="en-US" sz="1600" dirty="0">
+                  <a:solidFill>
+                    <a:schemeClr val="bg1"/>
+                  </a:solidFill>
+                  <a:latin typeface="Cascadia Mono" panose="020B0609020000020004" pitchFamily="49" charset="0"/>
+                  <a:ea typeface="Cascadia Mono" panose="020B0609020000020004" pitchFamily="49" charset="0"/>
+                  <a:cs typeface="Cascadia Mono" panose="020B0609020000020004" pitchFamily="49" charset="0"/>
+                </a:rPr>
+                <a:t>SoC</a:t>
+              </a:r>
+              <a:endParaRPr lang="ru-RU" sz="1600" dirty="0">
+                <a:solidFill>
+                  <a:schemeClr val="bg1"/>
+                </a:solidFill>
+                <a:latin typeface="Cascadia Mono" panose="020B0609020000020004" pitchFamily="49" charset="0"/>
+                <a:ea typeface="Cascadia Mono" panose="020B0609020000020004" pitchFamily="49" charset="0"/>
+                <a:cs typeface="Cascadia Mono" panose="020B0609020000020004" pitchFamily="49" charset="0"/>
+              </a:endParaRPr>
+            </a:p>
+          </p:txBody>
+        </p:sp>
+        <p:grpSp>
+          <p:nvGrpSpPr>
+            <p:cNvPr id="8" name="Группа 7">
+              <a:extLst>
+                <a:ext uri="{FF2B5EF4-FFF2-40B4-BE49-F238E27FC236}">
+                  <a16:creationId xmlns:a16="http://schemas.microsoft.com/office/drawing/2014/main" id="{596CAD52-F2F4-AE92-C945-6443FE0FE512}"/>
+                </a:ext>
+              </a:extLst>
+            </p:cNvPr>
+            <p:cNvGrpSpPr/>
+            <p:nvPr/>
+          </p:nvGrpSpPr>
+          <p:grpSpPr>
+            <a:xfrm>
+              <a:off x="2167931" y="4762648"/>
+              <a:ext cx="1119800" cy="180000"/>
+              <a:chOff x="7544886" y="2447301"/>
+              <a:chExt cx="1119800" cy="180000"/>
+            </a:xfrm>
+          </p:grpSpPr>
+          <p:sp>
+            <p:nvSpPr>
+              <p:cNvPr id="18" name="Прямоугольник 17">
+                <a:extLst>
+                  <a:ext uri="{FF2B5EF4-FFF2-40B4-BE49-F238E27FC236}">
+                    <a16:creationId xmlns:a16="http://schemas.microsoft.com/office/drawing/2014/main" id="{57E0A402-0DA0-E2B5-87F3-87FED2BE0E4F}"/>
+                  </a:ext>
+                </a:extLst>
+              </p:cNvPr>
+              <p:cNvSpPr/>
+              <p:nvPr/>
+            </p:nvSpPr>
+            <p:spPr>
+              <a:xfrm>
+                <a:off x="7544886" y="2447301"/>
+                <a:ext cx="180000" cy="180000"/>
+              </a:xfrm>
+              <a:prstGeom prst="rect">
+                <a:avLst/>
+              </a:prstGeom>
+              <a:solidFill>
+                <a:schemeClr val="accent6">
+                  <a:lumMod val="50000"/>
+                </a:schemeClr>
+              </a:solidFill>
+              <a:ln>
+                <a:noFill/>
+              </a:ln>
+            </p:spPr>
+            <p:style>
+              <a:lnRef idx="2">
+                <a:schemeClr val="accent1">
+                  <a:shade val="15000"/>
+                </a:schemeClr>
+              </a:lnRef>
+              <a:fillRef idx="1">
+                <a:schemeClr val="accent1"/>
+              </a:fillRef>
+              <a:effectRef idx="0">
+                <a:schemeClr val="accent1"/>
+              </a:effectRef>
+              <a:fontRef idx="minor">
+                <a:schemeClr val="lt1"/>
+              </a:fontRef>
+            </p:style>
+            <p:txBody>
+              <a:bodyPr rtlCol="0" anchor="ctr"/>
+              <a:lstStyle/>
+              <a:p>
+                <a:pPr algn="ctr"/>
+                <a:endParaRPr lang="ru-RU"/>
+              </a:p>
+            </p:txBody>
+          </p:sp>
+          <p:sp>
+            <p:nvSpPr>
+              <p:cNvPr id="19" name="Прямоугольник 18">
+                <a:extLst>
+                  <a:ext uri="{FF2B5EF4-FFF2-40B4-BE49-F238E27FC236}">
+                    <a16:creationId xmlns:a16="http://schemas.microsoft.com/office/drawing/2014/main" id="{21F60B49-8522-AE47-1B81-7CC09C9706F5}"/>
+                  </a:ext>
+                </a:extLst>
+              </p:cNvPr>
+              <p:cNvSpPr/>
+              <p:nvPr/>
+            </p:nvSpPr>
+            <p:spPr>
+              <a:xfrm>
+                <a:off x="7779836" y="2447301"/>
+                <a:ext cx="180000" cy="180000"/>
+              </a:xfrm>
+              <a:prstGeom prst="rect">
+                <a:avLst/>
+              </a:prstGeom>
+              <a:solidFill>
+                <a:schemeClr val="accent6">
+                  <a:lumMod val="75000"/>
+                </a:schemeClr>
+              </a:solidFill>
+              <a:ln>
+                <a:noFill/>
+              </a:ln>
+            </p:spPr>
+            <p:style>
+              <a:lnRef idx="2">
+                <a:schemeClr val="accent1">
+                  <a:shade val="15000"/>
+                </a:schemeClr>
+              </a:lnRef>
+              <a:fillRef idx="1">
+                <a:schemeClr val="accent1"/>
+              </a:fillRef>
+              <a:effectRef idx="0">
+                <a:schemeClr val="accent1"/>
+              </a:effectRef>
+              <a:fontRef idx="minor">
+                <a:schemeClr val="lt1"/>
+              </a:fontRef>
+            </p:style>
+            <p:txBody>
+              <a:bodyPr rtlCol="0" anchor="ctr"/>
+              <a:lstStyle/>
+              <a:p>
+                <a:pPr algn="ctr"/>
+                <a:endParaRPr lang="ru-RU" dirty="0"/>
+              </a:p>
+            </p:txBody>
+          </p:sp>
+          <p:sp>
+            <p:nvSpPr>
+              <p:cNvPr id="20" name="Прямоугольник 19">
+                <a:extLst>
+                  <a:ext uri="{FF2B5EF4-FFF2-40B4-BE49-F238E27FC236}">
+                    <a16:creationId xmlns:a16="http://schemas.microsoft.com/office/drawing/2014/main" id="{F0C7A493-5AB0-0D6C-4685-8915A8EA16C5}"/>
+                  </a:ext>
+                </a:extLst>
+              </p:cNvPr>
+              <p:cNvSpPr/>
+              <p:nvPr/>
+            </p:nvSpPr>
+            <p:spPr>
+              <a:xfrm>
+                <a:off x="8014786" y="2447301"/>
+                <a:ext cx="180000" cy="180000"/>
+              </a:xfrm>
+              <a:prstGeom prst="rect">
+                <a:avLst/>
+              </a:prstGeom>
+              <a:solidFill>
+                <a:schemeClr val="accent6">
+                  <a:lumMod val="60000"/>
+                  <a:lumOff val="40000"/>
+                </a:schemeClr>
+              </a:solidFill>
+              <a:ln>
+                <a:noFill/>
+              </a:ln>
+            </p:spPr>
+            <p:style>
+              <a:lnRef idx="2">
+                <a:schemeClr val="accent1">
+                  <a:shade val="15000"/>
+                </a:schemeClr>
+              </a:lnRef>
+              <a:fillRef idx="1">
+                <a:schemeClr val="accent1"/>
+              </a:fillRef>
+              <a:effectRef idx="0">
+                <a:schemeClr val="accent1"/>
+              </a:effectRef>
+              <a:fontRef idx="minor">
+                <a:schemeClr val="lt1"/>
+              </a:fontRef>
+            </p:style>
+            <p:txBody>
+              <a:bodyPr rtlCol="0" anchor="ctr"/>
+              <a:lstStyle/>
+              <a:p>
+                <a:pPr algn="ctr"/>
+                <a:endParaRPr lang="ru-RU"/>
+              </a:p>
+            </p:txBody>
+          </p:sp>
+          <p:sp>
+            <p:nvSpPr>
+              <p:cNvPr id="21" name="Прямоугольник 20">
+                <a:extLst>
+                  <a:ext uri="{FF2B5EF4-FFF2-40B4-BE49-F238E27FC236}">
+                    <a16:creationId xmlns:a16="http://schemas.microsoft.com/office/drawing/2014/main" id="{3531D68F-AFDE-8030-FDC1-16925B813B30}"/>
+                  </a:ext>
+                </a:extLst>
+              </p:cNvPr>
+              <p:cNvSpPr/>
+              <p:nvPr/>
+            </p:nvSpPr>
+            <p:spPr>
+              <a:xfrm>
+                <a:off x="8249736" y="2447301"/>
+                <a:ext cx="180000" cy="180000"/>
+              </a:xfrm>
+              <a:prstGeom prst="rect">
+                <a:avLst/>
+              </a:prstGeom>
+              <a:solidFill>
+                <a:schemeClr val="accent6">
+                  <a:lumMod val="40000"/>
+                  <a:lumOff val="60000"/>
+                </a:schemeClr>
+              </a:solidFill>
+              <a:ln>
+                <a:noFill/>
+              </a:ln>
+            </p:spPr>
+            <p:style>
+              <a:lnRef idx="2">
+                <a:schemeClr val="accent1">
+                  <a:shade val="15000"/>
+                </a:schemeClr>
+              </a:lnRef>
+              <a:fillRef idx="1">
+                <a:schemeClr val="accent1"/>
+              </a:fillRef>
+              <a:effectRef idx="0">
+                <a:schemeClr val="accent1"/>
+              </a:effectRef>
+              <a:fontRef idx="minor">
+                <a:schemeClr val="lt1"/>
+              </a:fontRef>
+            </p:style>
+            <p:txBody>
+              <a:bodyPr rtlCol="0" anchor="ctr"/>
+              <a:lstStyle/>
+              <a:p>
+                <a:pPr algn="ctr"/>
+                <a:endParaRPr lang="ru-RU" dirty="0"/>
+              </a:p>
+            </p:txBody>
+          </p:sp>
+          <p:sp>
+            <p:nvSpPr>
+              <p:cNvPr id="22" name="Прямоугольник 21">
+                <a:extLst>
+                  <a:ext uri="{FF2B5EF4-FFF2-40B4-BE49-F238E27FC236}">
+                    <a16:creationId xmlns:a16="http://schemas.microsoft.com/office/drawing/2014/main" id="{009625EA-CF3D-7E88-8BC3-9192B51EE1DA}"/>
+                  </a:ext>
+                </a:extLst>
+              </p:cNvPr>
+              <p:cNvSpPr/>
+              <p:nvPr/>
+            </p:nvSpPr>
+            <p:spPr>
+              <a:xfrm>
+                <a:off x="8484686" y="2447301"/>
+                <a:ext cx="180000" cy="180000"/>
+              </a:xfrm>
+              <a:prstGeom prst="rect">
+                <a:avLst/>
+              </a:prstGeom>
+              <a:solidFill>
+                <a:schemeClr val="accent6">
+                  <a:lumMod val="20000"/>
+                  <a:lumOff val="80000"/>
+                </a:schemeClr>
+              </a:solidFill>
+              <a:ln>
+                <a:noFill/>
+              </a:ln>
+            </p:spPr>
+            <p:style>
+              <a:lnRef idx="2">
+                <a:schemeClr val="accent1">
+                  <a:shade val="15000"/>
+                </a:schemeClr>
+              </a:lnRef>
+              <a:fillRef idx="1">
+                <a:schemeClr val="accent1"/>
+              </a:fillRef>
+              <a:effectRef idx="0">
+                <a:schemeClr val="accent1"/>
+              </a:effectRef>
+              <a:fontRef idx="minor">
+                <a:schemeClr val="lt1"/>
+              </a:fontRef>
+            </p:style>
+            <p:txBody>
+              <a:bodyPr rtlCol="0" anchor="ctr"/>
+              <a:lstStyle/>
+              <a:p>
+                <a:pPr algn="ctr"/>
+                <a:endParaRPr lang="ru-RU" dirty="0"/>
+              </a:p>
+            </p:txBody>
+          </p:sp>
+        </p:grpSp>
+        <p:sp>
+          <p:nvSpPr>
+            <p:cNvPr id="9" name="TextBox 8">
+              <a:extLst>
+                <a:ext uri="{FF2B5EF4-FFF2-40B4-BE49-F238E27FC236}">
+                  <a16:creationId xmlns:a16="http://schemas.microsoft.com/office/drawing/2014/main" id="{0B68073F-68F5-B735-1E9B-869AC319B302}"/>
+                </a:ext>
+              </a:extLst>
+            </p:cNvPr>
+            <p:cNvSpPr txBox="1"/>
+            <p:nvPr/>
+          </p:nvSpPr>
+          <p:spPr>
+            <a:xfrm>
+              <a:off x="1613042" y="4678250"/>
+              <a:ext cx="545342" cy="338554"/>
+            </a:xfrm>
+            <a:prstGeom prst="rect">
+              <a:avLst/>
+            </a:prstGeom>
+            <a:noFill/>
+          </p:spPr>
+          <p:txBody>
+            <a:bodyPr wrap="none" rtlCol="0">
+              <a:spAutoFit/>
+            </a:bodyPr>
+            <a:lstStyle/>
+            <a:p>
+              <a:r>
+                <a:rPr lang="en-US" sz="1600" dirty="0">
+                  <a:solidFill>
+                    <a:schemeClr val="bg1"/>
+                  </a:solidFill>
+                  <a:latin typeface="Cascadia Mono" panose="020B0609020000020004" pitchFamily="49" charset="0"/>
+                  <a:ea typeface="Cascadia Mono" panose="020B0609020000020004" pitchFamily="49" charset="0"/>
+                  <a:cs typeface="Cascadia Mono" panose="020B0609020000020004" pitchFamily="49" charset="0"/>
+                </a:rPr>
+                <a:t>SoH</a:t>
+              </a:r>
+              <a:endParaRPr lang="ru-RU" sz="1600" dirty="0">
+                <a:solidFill>
+                  <a:schemeClr val="bg1"/>
+                </a:solidFill>
+                <a:latin typeface="Cascadia Mono" panose="020B0609020000020004" pitchFamily="49" charset="0"/>
+                <a:ea typeface="Cascadia Mono" panose="020B0609020000020004" pitchFamily="49" charset="0"/>
+                <a:cs typeface="Cascadia Mono" panose="020B0609020000020004" pitchFamily="49" charset="0"/>
+              </a:endParaRPr>
+            </a:p>
+          </p:txBody>
+        </p:sp>
+        <p:sp>
+          <p:nvSpPr>
+            <p:cNvPr id="10" name="TextBox 9">
+              <a:extLst>
+                <a:ext uri="{FF2B5EF4-FFF2-40B4-BE49-F238E27FC236}">
+                  <a16:creationId xmlns:a16="http://schemas.microsoft.com/office/drawing/2014/main" id="{332E009F-2B10-D293-ADF9-20DC5DC4856E}"/>
+                </a:ext>
+              </a:extLst>
+            </p:cNvPr>
+            <p:cNvSpPr txBox="1"/>
+            <p:nvPr/>
+          </p:nvSpPr>
+          <p:spPr>
+            <a:xfrm>
+              <a:off x="3287731" y="4339696"/>
+              <a:ext cx="545342" cy="338554"/>
+            </a:xfrm>
+            <a:prstGeom prst="rect">
+              <a:avLst/>
+            </a:prstGeom>
+            <a:noFill/>
+          </p:spPr>
+          <p:txBody>
+            <a:bodyPr wrap="none" rtlCol="0">
+              <a:spAutoFit/>
+            </a:bodyPr>
+            <a:lstStyle/>
+            <a:p>
+              <a:r>
+                <a:rPr lang="en-US" sz="1600" dirty="0">
+                  <a:solidFill>
+                    <a:schemeClr val="bg1"/>
+                  </a:solidFill>
+                  <a:latin typeface="Cascadia Mono" panose="020B0609020000020004" pitchFamily="49" charset="0"/>
+                  <a:ea typeface="Cascadia Mono" panose="020B0609020000020004" pitchFamily="49" charset="0"/>
+                  <a:cs typeface="Cascadia Mono" panose="020B0609020000020004" pitchFamily="49" charset="0"/>
+                </a:rPr>
+                <a:t>58%</a:t>
+              </a:r>
+              <a:endParaRPr lang="ru-RU" sz="1600" dirty="0">
+                <a:solidFill>
+                  <a:schemeClr val="bg1"/>
+                </a:solidFill>
+                <a:latin typeface="Cascadia Mono" panose="020B0609020000020004" pitchFamily="49" charset="0"/>
+                <a:ea typeface="Cascadia Mono" panose="020B0609020000020004" pitchFamily="49" charset="0"/>
+                <a:cs typeface="Cascadia Mono" panose="020B0609020000020004" pitchFamily="49" charset="0"/>
+              </a:endParaRPr>
+            </a:p>
+          </p:txBody>
+        </p:sp>
+        <p:sp>
+          <p:nvSpPr>
+            <p:cNvPr id="11" name="TextBox 10">
+              <a:extLst>
+                <a:ext uri="{FF2B5EF4-FFF2-40B4-BE49-F238E27FC236}">
+                  <a16:creationId xmlns:a16="http://schemas.microsoft.com/office/drawing/2014/main" id="{8865CC83-53E1-4BA7-8D02-495AA9881A9B}"/>
+                </a:ext>
+              </a:extLst>
+            </p:cNvPr>
+            <p:cNvSpPr txBox="1"/>
+            <p:nvPr/>
+          </p:nvSpPr>
+          <p:spPr>
+            <a:xfrm>
+              <a:off x="3287731" y="4678250"/>
+              <a:ext cx="545342" cy="338554"/>
+            </a:xfrm>
+            <a:prstGeom prst="rect">
+              <a:avLst/>
+            </a:prstGeom>
+            <a:noFill/>
+          </p:spPr>
+          <p:txBody>
+            <a:bodyPr wrap="none" rtlCol="0">
+              <a:spAutoFit/>
+            </a:bodyPr>
+            <a:lstStyle/>
+            <a:p>
+              <a:r>
+                <a:rPr lang="en-US" sz="1600" dirty="0">
+                  <a:solidFill>
+                    <a:schemeClr val="bg1"/>
+                  </a:solidFill>
+                  <a:latin typeface="Cascadia Mono" panose="020B0609020000020004" pitchFamily="49" charset="0"/>
+                  <a:ea typeface="Cascadia Mono" panose="020B0609020000020004" pitchFamily="49" charset="0"/>
+                  <a:cs typeface="Cascadia Mono" panose="020B0609020000020004" pitchFamily="49" charset="0"/>
+                </a:rPr>
+                <a:t>96%</a:t>
+              </a:r>
+              <a:endParaRPr lang="ru-RU" sz="1600" dirty="0">
+                <a:solidFill>
+                  <a:schemeClr val="bg1"/>
+                </a:solidFill>
+                <a:latin typeface="Cascadia Mono" panose="020B0609020000020004" pitchFamily="49" charset="0"/>
+                <a:ea typeface="Cascadia Mono" panose="020B0609020000020004" pitchFamily="49" charset="0"/>
+                <a:cs typeface="Cascadia Mono" panose="020B0609020000020004" pitchFamily="49" charset="0"/>
+              </a:endParaRPr>
+            </a:p>
+          </p:txBody>
+        </p:sp>
+        <p:grpSp>
+          <p:nvGrpSpPr>
+            <p:cNvPr id="12" name="Группа 11">
+              <a:extLst>
+                <a:ext uri="{FF2B5EF4-FFF2-40B4-BE49-F238E27FC236}">
+                  <a16:creationId xmlns:a16="http://schemas.microsoft.com/office/drawing/2014/main" id="{9C96F1A7-A322-C4D0-78DD-F9EAC2AE2C02}"/>
+                </a:ext>
+              </a:extLst>
+            </p:cNvPr>
+            <p:cNvGrpSpPr/>
+            <p:nvPr/>
+          </p:nvGrpSpPr>
+          <p:grpSpPr>
+            <a:xfrm>
+              <a:off x="2167931" y="4424094"/>
+              <a:ext cx="1119800" cy="180000"/>
+              <a:chOff x="2167931" y="4424094"/>
+              <a:chExt cx="1119800" cy="180000"/>
+            </a:xfrm>
+          </p:grpSpPr>
+          <p:sp>
+            <p:nvSpPr>
+              <p:cNvPr id="13" name="Прямоугольник 12">
+                <a:extLst>
+                  <a:ext uri="{FF2B5EF4-FFF2-40B4-BE49-F238E27FC236}">
+                    <a16:creationId xmlns:a16="http://schemas.microsoft.com/office/drawing/2014/main" id="{F38F3569-F422-0E1D-3A6B-5566B2867F5E}"/>
+                  </a:ext>
+                </a:extLst>
+              </p:cNvPr>
+              <p:cNvSpPr/>
+              <p:nvPr/>
+            </p:nvSpPr>
+            <p:spPr>
+              <a:xfrm>
+                <a:off x="2167931" y="4424094"/>
+                <a:ext cx="180000" cy="180000"/>
+              </a:xfrm>
+              <a:prstGeom prst="rect">
+                <a:avLst/>
+              </a:prstGeom>
+              <a:solidFill>
+                <a:schemeClr val="accent4">
+                  <a:lumMod val="50000"/>
+                </a:schemeClr>
+              </a:solidFill>
+              <a:ln>
+                <a:noFill/>
+              </a:ln>
+            </p:spPr>
+            <p:style>
+              <a:lnRef idx="2">
+                <a:schemeClr val="accent1">
+                  <a:shade val="15000"/>
+                </a:schemeClr>
+              </a:lnRef>
+              <a:fillRef idx="1">
+                <a:schemeClr val="accent1"/>
+              </a:fillRef>
+              <a:effectRef idx="0">
+                <a:schemeClr val="accent1"/>
+              </a:effectRef>
+              <a:fontRef idx="minor">
+                <a:schemeClr val="lt1"/>
+              </a:fontRef>
+            </p:style>
+            <p:txBody>
+              <a:bodyPr rtlCol="0" anchor="ctr"/>
+              <a:lstStyle/>
+              <a:p>
+                <a:pPr algn="ctr"/>
+                <a:endParaRPr lang="ru-RU"/>
+              </a:p>
+            </p:txBody>
+          </p:sp>
+          <p:sp>
+            <p:nvSpPr>
+              <p:cNvPr id="14" name="Прямоугольник 13">
+                <a:extLst>
+                  <a:ext uri="{FF2B5EF4-FFF2-40B4-BE49-F238E27FC236}">
+                    <a16:creationId xmlns:a16="http://schemas.microsoft.com/office/drawing/2014/main" id="{A1FF58A5-11E0-C9DB-6B6B-594BE49B8F3E}"/>
+                  </a:ext>
+                </a:extLst>
+              </p:cNvPr>
+              <p:cNvSpPr/>
+              <p:nvPr/>
+            </p:nvSpPr>
+            <p:spPr>
+              <a:xfrm>
+                <a:off x="2402881" y="4424094"/>
+                <a:ext cx="180000" cy="180000"/>
+              </a:xfrm>
+              <a:prstGeom prst="rect">
+                <a:avLst/>
+              </a:prstGeom>
+              <a:solidFill>
+                <a:schemeClr val="accent4">
+                  <a:lumMod val="75000"/>
+                </a:schemeClr>
+              </a:solidFill>
+              <a:ln>
+                <a:noFill/>
+              </a:ln>
+            </p:spPr>
+            <p:style>
+              <a:lnRef idx="2">
+                <a:schemeClr val="accent1">
+                  <a:shade val="15000"/>
+                </a:schemeClr>
+              </a:lnRef>
+              <a:fillRef idx="1">
+                <a:schemeClr val="accent1"/>
+              </a:fillRef>
+              <a:effectRef idx="0">
+                <a:schemeClr val="accent1"/>
+              </a:effectRef>
+              <a:fontRef idx="minor">
+                <a:schemeClr val="lt1"/>
+              </a:fontRef>
+            </p:style>
+            <p:txBody>
+              <a:bodyPr rtlCol="0" anchor="ctr"/>
+              <a:lstStyle/>
+              <a:p>
+                <a:pPr algn="ctr"/>
+                <a:endParaRPr lang="ru-RU"/>
+              </a:p>
+            </p:txBody>
+          </p:sp>
+          <p:sp>
+            <p:nvSpPr>
+              <p:cNvPr id="15" name="Прямоугольник 14">
+                <a:extLst>
+                  <a:ext uri="{FF2B5EF4-FFF2-40B4-BE49-F238E27FC236}">
+                    <a16:creationId xmlns:a16="http://schemas.microsoft.com/office/drawing/2014/main" id="{51B1EAC5-F174-4609-BD36-0E13475C79A2}"/>
+                  </a:ext>
+                </a:extLst>
+              </p:cNvPr>
+              <p:cNvSpPr/>
+              <p:nvPr/>
+            </p:nvSpPr>
+            <p:spPr>
+              <a:xfrm>
+                <a:off x="2637831" y="4424094"/>
+                <a:ext cx="180000" cy="180000"/>
+              </a:xfrm>
+              <a:prstGeom prst="rect">
+                <a:avLst/>
+              </a:prstGeom>
+              <a:solidFill>
+                <a:schemeClr val="accent4">
+                  <a:lumMod val="60000"/>
+                  <a:lumOff val="40000"/>
+                </a:schemeClr>
+              </a:solidFill>
+              <a:ln>
+                <a:noFill/>
+              </a:ln>
+            </p:spPr>
+            <p:style>
+              <a:lnRef idx="2">
+                <a:schemeClr val="accent1">
+                  <a:shade val="15000"/>
+                </a:schemeClr>
+              </a:lnRef>
+              <a:fillRef idx="1">
+                <a:schemeClr val="accent1"/>
+              </a:fillRef>
+              <a:effectRef idx="0">
+                <a:schemeClr val="accent1"/>
+              </a:effectRef>
+              <a:fontRef idx="minor">
+                <a:schemeClr val="lt1"/>
+              </a:fontRef>
+            </p:style>
+            <p:txBody>
+              <a:bodyPr rtlCol="0" anchor="ctr"/>
+              <a:lstStyle/>
+              <a:p>
+                <a:pPr algn="ctr"/>
+                <a:endParaRPr lang="ru-RU"/>
+              </a:p>
+            </p:txBody>
+          </p:sp>
+          <p:sp>
+            <p:nvSpPr>
+              <p:cNvPr id="16" name="Прямоугольник 15">
+                <a:extLst>
+                  <a:ext uri="{FF2B5EF4-FFF2-40B4-BE49-F238E27FC236}">
+                    <a16:creationId xmlns:a16="http://schemas.microsoft.com/office/drawing/2014/main" id="{0FA65F70-9508-F5AF-4377-A5FACDC93649}"/>
+                  </a:ext>
+                </a:extLst>
+              </p:cNvPr>
+              <p:cNvSpPr/>
+              <p:nvPr/>
+            </p:nvSpPr>
+            <p:spPr>
+              <a:xfrm>
+                <a:off x="2872781" y="4424094"/>
+                <a:ext cx="180000" cy="180000"/>
+              </a:xfrm>
+              <a:prstGeom prst="rect">
+                <a:avLst/>
+              </a:prstGeom>
+              <a:solidFill>
+                <a:schemeClr val="tx1">
+                  <a:lumMod val="75000"/>
+                  <a:lumOff val="25000"/>
+                </a:schemeClr>
+              </a:solidFill>
+              <a:ln>
+                <a:noFill/>
+              </a:ln>
+            </p:spPr>
+            <p:style>
+              <a:lnRef idx="2">
+                <a:schemeClr val="accent1">
+                  <a:shade val="15000"/>
+                </a:schemeClr>
+              </a:lnRef>
+              <a:fillRef idx="1">
+                <a:schemeClr val="accent1"/>
+              </a:fillRef>
+              <a:effectRef idx="0">
+                <a:schemeClr val="accent1"/>
+              </a:effectRef>
+              <a:fontRef idx="minor">
+                <a:schemeClr val="lt1"/>
+              </a:fontRef>
+            </p:style>
+            <p:txBody>
+              <a:bodyPr rtlCol="0" anchor="ctr"/>
+              <a:lstStyle/>
+              <a:p>
+                <a:pPr algn="ctr"/>
+                <a:endParaRPr lang="ru-RU"/>
+              </a:p>
+            </p:txBody>
+          </p:sp>
+          <p:sp>
+            <p:nvSpPr>
+              <p:cNvPr id="17" name="Прямоугольник 16">
+                <a:extLst>
+                  <a:ext uri="{FF2B5EF4-FFF2-40B4-BE49-F238E27FC236}">
+                    <a16:creationId xmlns:a16="http://schemas.microsoft.com/office/drawing/2014/main" id="{F0B4D286-6EEA-B871-89F5-CDF3C9F3CA20}"/>
+                  </a:ext>
+                </a:extLst>
+              </p:cNvPr>
+              <p:cNvSpPr/>
+              <p:nvPr/>
+            </p:nvSpPr>
+            <p:spPr>
+              <a:xfrm>
+                <a:off x="3107731" y="4424094"/>
+                <a:ext cx="180000" cy="180000"/>
+              </a:xfrm>
+              <a:prstGeom prst="rect">
+                <a:avLst/>
+              </a:prstGeom>
+              <a:solidFill>
+                <a:schemeClr val="tx1">
+                  <a:lumMod val="75000"/>
+                  <a:lumOff val="25000"/>
+                </a:schemeClr>
+              </a:solidFill>
+              <a:ln>
+                <a:noFill/>
+              </a:ln>
+            </p:spPr>
+            <p:style>
+              <a:lnRef idx="2">
+                <a:schemeClr val="accent1">
+                  <a:shade val="15000"/>
+                </a:schemeClr>
+              </a:lnRef>
+              <a:fillRef idx="1">
+                <a:schemeClr val="accent1"/>
+              </a:fillRef>
+              <a:effectRef idx="0">
+                <a:schemeClr val="accent1"/>
+              </a:effectRef>
+              <a:fontRef idx="minor">
+                <a:schemeClr val="lt1"/>
+              </a:fontRef>
+            </p:style>
+            <p:txBody>
+              <a:bodyPr rtlCol="0" anchor="ctr"/>
+              <a:lstStyle/>
+              <a:p>
+                <a:pPr algn="ctr"/>
+                <a:endParaRPr lang="ru-RU"/>
+              </a:p>
+            </p:txBody>
+          </p:sp>
+        </p:grpSp>
+      </p:grpSp>
+      <p:grpSp>
+        <p:nvGrpSpPr>
+          <p:cNvPr id="23" name="Группа 22">
+            <a:extLst>
+              <a:ext uri="{FF2B5EF4-FFF2-40B4-BE49-F238E27FC236}">
+                <a16:creationId xmlns:a16="http://schemas.microsoft.com/office/drawing/2014/main" id="{C3AFA775-8464-FCEA-B533-DC548E42904A}"/>
+              </a:ext>
+            </a:extLst>
+          </p:cNvPr>
+          <p:cNvGrpSpPr/>
+          <p:nvPr/>
+        </p:nvGrpSpPr>
+        <p:grpSpPr>
+          <a:xfrm>
+            <a:off x="3113531" y="844884"/>
+            <a:ext cx="2170921" cy="1015662"/>
+            <a:chOff x="1787320" y="5101202"/>
+            <a:chExt cx="2170921" cy="1015662"/>
+          </a:xfrm>
+        </p:grpSpPr>
+        <p:grpSp>
+          <p:nvGrpSpPr>
+            <p:cNvPr id="24" name="Группа 23">
+              <a:extLst>
+                <a:ext uri="{FF2B5EF4-FFF2-40B4-BE49-F238E27FC236}">
+                  <a16:creationId xmlns:a16="http://schemas.microsoft.com/office/drawing/2014/main" id="{DC94F686-D6EC-5F4B-58EC-BFCEF0C257ED}"/>
+                </a:ext>
+              </a:extLst>
+            </p:cNvPr>
+            <p:cNvGrpSpPr/>
+            <p:nvPr/>
+          </p:nvGrpSpPr>
+          <p:grpSpPr>
+            <a:xfrm>
+              <a:off x="2172874" y="5185600"/>
+              <a:ext cx="1120613" cy="180000"/>
+              <a:chOff x="2172874" y="5185600"/>
+              <a:chExt cx="1120613" cy="180000"/>
+            </a:xfrm>
+          </p:grpSpPr>
+          <p:sp>
+            <p:nvSpPr>
+              <p:cNvPr id="43" name="Прямоугольник 42">
+                <a:extLst>
+                  <a:ext uri="{FF2B5EF4-FFF2-40B4-BE49-F238E27FC236}">
+                    <a16:creationId xmlns:a16="http://schemas.microsoft.com/office/drawing/2014/main" id="{B4EF7E7C-3007-38A1-963B-737904784446}"/>
+                  </a:ext>
+                </a:extLst>
+              </p:cNvPr>
+              <p:cNvSpPr/>
+              <p:nvPr/>
+            </p:nvSpPr>
+            <p:spPr>
+              <a:xfrm>
+                <a:off x="2878537" y="5185600"/>
+                <a:ext cx="180000" cy="180000"/>
+              </a:xfrm>
+              <a:prstGeom prst="rect">
+                <a:avLst/>
+              </a:prstGeom>
+              <a:solidFill>
+                <a:schemeClr val="tx1">
+                  <a:lumMod val="75000"/>
+                  <a:lumOff val="25000"/>
+                </a:schemeClr>
+              </a:solidFill>
+              <a:ln>
+                <a:noFill/>
+              </a:ln>
+            </p:spPr>
+            <p:style>
+              <a:lnRef idx="2">
+                <a:schemeClr val="accent1">
+                  <a:shade val="15000"/>
+                </a:schemeClr>
+              </a:lnRef>
+              <a:fillRef idx="1">
+                <a:schemeClr val="accent1"/>
+              </a:fillRef>
+              <a:effectRef idx="0">
+                <a:schemeClr val="accent1"/>
+              </a:effectRef>
+              <a:fontRef idx="minor">
+                <a:schemeClr val="lt1"/>
+              </a:fontRef>
+            </p:style>
+            <p:txBody>
+              <a:bodyPr rtlCol="0" anchor="ctr"/>
+              <a:lstStyle/>
+              <a:p>
+                <a:pPr algn="ctr"/>
+                <a:endParaRPr lang="ru-RU"/>
+              </a:p>
+            </p:txBody>
+          </p:sp>
+          <p:sp>
+            <p:nvSpPr>
+              <p:cNvPr id="44" name="Прямоугольник 43">
+                <a:extLst>
+                  <a:ext uri="{FF2B5EF4-FFF2-40B4-BE49-F238E27FC236}">
+                    <a16:creationId xmlns:a16="http://schemas.microsoft.com/office/drawing/2014/main" id="{2B0BB437-6303-DC8C-AE78-CDE0BD836396}"/>
+                  </a:ext>
+                </a:extLst>
+              </p:cNvPr>
+              <p:cNvSpPr/>
+              <p:nvPr/>
+            </p:nvSpPr>
+            <p:spPr>
+              <a:xfrm>
+                <a:off x="3113487" y="5185600"/>
+                <a:ext cx="180000" cy="180000"/>
+              </a:xfrm>
+              <a:prstGeom prst="rect">
+                <a:avLst/>
+              </a:prstGeom>
+              <a:solidFill>
+                <a:schemeClr val="tx1">
+                  <a:lumMod val="75000"/>
+                  <a:lumOff val="25000"/>
+                </a:schemeClr>
+              </a:solidFill>
+              <a:ln>
+                <a:noFill/>
+              </a:ln>
+            </p:spPr>
+            <p:style>
+              <a:lnRef idx="2">
+                <a:schemeClr val="accent1">
+                  <a:shade val="15000"/>
+                </a:schemeClr>
+              </a:lnRef>
+              <a:fillRef idx="1">
+                <a:schemeClr val="accent1"/>
+              </a:fillRef>
+              <a:effectRef idx="0">
+                <a:schemeClr val="accent1"/>
+              </a:effectRef>
+              <a:fontRef idx="minor">
+                <a:schemeClr val="lt1"/>
+              </a:fontRef>
+            </p:style>
+            <p:txBody>
+              <a:bodyPr rtlCol="0" anchor="ctr"/>
+              <a:lstStyle/>
+              <a:p>
+                <a:pPr algn="ctr"/>
+                <a:endParaRPr lang="ru-RU"/>
+              </a:p>
+            </p:txBody>
+          </p:sp>
+          <p:sp>
+            <p:nvSpPr>
+              <p:cNvPr id="45" name="Прямоугольник 44">
+                <a:extLst>
+                  <a:ext uri="{FF2B5EF4-FFF2-40B4-BE49-F238E27FC236}">
+                    <a16:creationId xmlns:a16="http://schemas.microsoft.com/office/drawing/2014/main" id="{07032DF2-F9C4-B7F4-6EE1-3B6484131522}"/>
+                  </a:ext>
+                </a:extLst>
+              </p:cNvPr>
+              <p:cNvSpPr/>
+              <p:nvPr/>
+            </p:nvSpPr>
+            <p:spPr>
+              <a:xfrm>
+                <a:off x="2172874" y="5185600"/>
+                <a:ext cx="180000" cy="180000"/>
+              </a:xfrm>
+              <a:prstGeom prst="rect">
+                <a:avLst/>
+              </a:prstGeom>
+              <a:solidFill>
+                <a:schemeClr val="accent4">
+                  <a:lumMod val="50000"/>
+                </a:schemeClr>
+              </a:solidFill>
+              <a:ln>
+                <a:noFill/>
+              </a:ln>
+            </p:spPr>
+            <p:style>
+              <a:lnRef idx="2">
+                <a:schemeClr val="accent1">
+                  <a:shade val="15000"/>
+                </a:schemeClr>
+              </a:lnRef>
+              <a:fillRef idx="1">
+                <a:schemeClr val="accent1"/>
+              </a:fillRef>
+              <a:effectRef idx="0">
+                <a:schemeClr val="accent1"/>
+              </a:effectRef>
+              <a:fontRef idx="minor">
+                <a:schemeClr val="lt1"/>
+              </a:fontRef>
+            </p:style>
+            <p:txBody>
+              <a:bodyPr rtlCol="0" anchor="ctr"/>
+              <a:lstStyle/>
+              <a:p>
+                <a:pPr algn="ctr"/>
+                <a:endParaRPr lang="ru-RU"/>
+              </a:p>
+            </p:txBody>
+          </p:sp>
+          <p:sp>
+            <p:nvSpPr>
+              <p:cNvPr id="46" name="Прямоугольник 45">
+                <a:extLst>
+                  <a:ext uri="{FF2B5EF4-FFF2-40B4-BE49-F238E27FC236}">
+                    <a16:creationId xmlns:a16="http://schemas.microsoft.com/office/drawing/2014/main" id="{54647A70-E422-CD5F-4EF3-38E3F8567C1C}"/>
+                  </a:ext>
+                </a:extLst>
+              </p:cNvPr>
+              <p:cNvSpPr/>
+              <p:nvPr/>
+            </p:nvSpPr>
+            <p:spPr>
+              <a:xfrm>
+                <a:off x="2407824" y="5185600"/>
+                <a:ext cx="180000" cy="180000"/>
+              </a:xfrm>
+              <a:prstGeom prst="rect">
+                <a:avLst/>
+              </a:prstGeom>
+              <a:solidFill>
+                <a:schemeClr val="accent4">
+                  <a:lumMod val="75000"/>
+                </a:schemeClr>
+              </a:solidFill>
+              <a:ln>
+                <a:noFill/>
+              </a:ln>
+            </p:spPr>
+            <p:style>
+              <a:lnRef idx="2">
+                <a:schemeClr val="accent1">
+                  <a:shade val="15000"/>
+                </a:schemeClr>
+              </a:lnRef>
+              <a:fillRef idx="1">
+                <a:schemeClr val="accent1"/>
+              </a:fillRef>
+              <a:effectRef idx="0">
+                <a:schemeClr val="accent1"/>
+              </a:effectRef>
+              <a:fontRef idx="minor">
+                <a:schemeClr val="lt1"/>
+              </a:fontRef>
+            </p:style>
+            <p:txBody>
+              <a:bodyPr rtlCol="0" anchor="ctr"/>
+              <a:lstStyle/>
+              <a:p>
+                <a:pPr algn="ctr"/>
+                <a:endParaRPr lang="ru-RU"/>
+              </a:p>
+            </p:txBody>
+          </p:sp>
+          <p:sp>
+            <p:nvSpPr>
+              <p:cNvPr id="47" name="Прямоугольник 46">
+                <a:extLst>
+                  <a:ext uri="{FF2B5EF4-FFF2-40B4-BE49-F238E27FC236}">
+                    <a16:creationId xmlns:a16="http://schemas.microsoft.com/office/drawing/2014/main" id="{3C6DFED7-FBED-B76B-19C6-47BE110F5EEF}"/>
+                  </a:ext>
+                </a:extLst>
+              </p:cNvPr>
+              <p:cNvSpPr/>
+              <p:nvPr/>
+            </p:nvSpPr>
+            <p:spPr>
+              <a:xfrm>
+                <a:off x="2642774" y="5185600"/>
+                <a:ext cx="180000" cy="180000"/>
+              </a:xfrm>
+              <a:prstGeom prst="rect">
+                <a:avLst/>
+              </a:prstGeom>
+              <a:solidFill>
+                <a:schemeClr val="accent4">
+                  <a:lumMod val="60000"/>
+                  <a:lumOff val="40000"/>
+                </a:schemeClr>
+              </a:solidFill>
+              <a:ln>
+                <a:noFill/>
+              </a:ln>
+            </p:spPr>
+            <p:style>
+              <a:lnRef idx="2">
+                <a:schemeClr val="accent1">
+                  <a:shade val="15000"/>
+                </a:schemeClr>
+              </a:lnRef>
+              <a:fillRef idx="1">
+                <a:schemeClr val="accent1"/>
+              </a:fillRef>
+              <a:effectRef idx="0">
+                <a:schemeClr val="accent1"/>
+              </a:effectRef>
+              <a:fontRef idx="minor">
+                <a:schemeClr val="lt1"/>
+              </a:fontRef>
+            </p:style>
+            <p:txBody>
+              <a:bodyPr rtlCol="0" anchor="ctr"/>
+              <a:lstStyle/>
+              <a:p>
+                <a:pPr algn="ctr"/>
+                <a:endParaRPr lang="ru-RU"/>
+              </a:p>
+            </p:txBody>
+          </p:sp>
+        </p:grpSp>
+        <p:sp>
+          <p:nvSpPr>
+            <p:cNvPr id="25" name="TextBox 24">
+              <a:extLst>
+                <a:ext uri="{FF2B5EF4-FFF2-40B4-BE49-F238E27FC236}">
+                  <a16:creationId xmlns:a16="http://schemas.microsoft.com/office/drawing/2014/main" id="{54CEF997-E9B7-ABB5-2CD2-F81127946DDA}"/>
+                </a:ext>
+              </a:extLst>
+            </p:cNvPr>
+            <p:cNvSpPr txBox="1"/>
+            <p:nvPr/>
+          </p:nvSpPr>
+          <p:spPr>
+            <a:xfrm>
+              <a:off x="1787320" y="5101202"/>
+              <a:ext cx="304892" cy="338554"/>
+            </a:xfrm>
+            <a:prstGeom prst="rect">
+              <a:avLst/>
+            </a:prstGeom>
+            <a:noFill/>
+          </p:spPr>
+          <p:txBody>
+            <a:bodyPr wrap="none" rtlCol="0">
+              <a:spAutoFit/>
+            </a:bodyPr>
+            <a:lstStyle/>
+            <a:p>
+              <a:r>
+                <a:rPr lang="en-US" sz="1600" dirty="0">
+                  <a:solidFill>
+                    <a:schemeClr val="bg1"/>
+                  </a:solidFill>
+                  <a:latin typeface="Cascadia Mono" panose="020B0609020000020004" pitchFamily="49" charset="0"/>
+                  <a:ea typeface="Cascadia Mono" panose="020B0609020000020004" pitchFamily="49" charset="0"/>
+                  <a:cs typeface="Cascadia Mono" panose="020B0609020000020004" pitchFamily="49" charset="0"/>
+                </a:rPr>
+                <a:t>U</a:t>
+              </a:r>
+              <a:endParaRPr lang="ru-RU" sz="1600" dirty="0">
+                <a:solidFill>
+                  <a:schemeClr val="bg1"/>
+                </a:solidFill>
+                <a:latin typeface="Cascadia Mono" panose="020B0609020000020004" pitchFamily="49" charset="0"/>
+                <a:ea typeface="Cascadia Mono" panose="020B0609020000020004" pitchFamily="49" charset="0"/>
+                <a:cs typeface="Cascadia Mono" panose="020B0609020000020004" pitchFamily="49" charset="0"/>
+              </a:endParaRPr>
+            </a:p>
+          </p:txBody>
+        </p:sp>
+        <p:grpSp>
+          <p:nvGrpSpPr>
+            <p:cNvPr id="26" name="Группа 25">
+              <a:extLst>
+                <a:ext uri="{FF2B5EF4-FFF2-40B4-BE49-F238E27FC236}">
+                  <a16:creationId xmlns:a16="http://schemas.microsoft.com/office/drawing/2014/main" id="{794FFBD9-9ECC-298C-0C28-F2D83FDA2BDA}"/>
+                </a:ext>
+              </a:extLst>
+            </p:cNvPr>
+            <p:cNvGrpSpPr/>
+            <p:nvPr/>
+          </p:nvGrpSpPr>
+          <p:grpSpPr>
+            <a:xfrm>
+              <a:off x="2172874" y="5518552"/>
+              <a:ext cx="1114857" cy="185602"/>
+              <a:chOff x="2172874" y="5518552"/>
+              <a:chExt cx="1114857" cy="185602"/>
+            </a:xfrm>
+          </p:grpSpPr>
+          <p:sp>
+            <p:nvSpPr>
+              <p:cNvPr id="38" name="Прямоугольник 37">
+                <a:extLst>
+                  <a:ext uri="{FF2B5EF4-FFF2-40B4-BE49-F238E27FC236}">
+                    <a16:creationId xmlns:a16="http://schemas.microsoft.com/office/drawing/2014/main" id="{55D3C48A-E361-2330-A51A-E3AE4B034317}"/>
+                  </a:ext>
+                </a:extLst>
+              </p:cNvPr>
+              <p:cNvSpPr/>
+              <p:nvPr/>
+            </p:nvSpPr>
+            <p:spPr>
+              <a:xfrm>
+                <a:off x="2872781" y="5518552"/>
+                <a:ext cx="180000" cy="180000"/>
+              </a:xfrm>
+              <a:prstGeom prst="rect">
+                <a:avLst/>
+              </a:prstGeom>
+              <a:solidFill>
+                <a:schemeClr val="tx1">
+                  <a:lumMod val="75000"/>
+                  <a:lumOff val="25000"/>
+                </a:schemeClr>
+              </a:solidFill>
+              <a:ln>
+                <a:noFill/>
+              </a:ln>
+            </p:spPr>
+            <p:style>
+              <a:lnRef idx="2">
+                <a:schemeClr val="accent1">
+                  <a:shade val="15000"/>
+                </a:schemeClr>
+              </a:lnRef>
+              <a:fillRef idx="1">
+                <a:schemeClr val="accent1"/>
+              </a:fillRef>
+              <a:effectRef idx="0">
+                <a:schemeClr val="accent1"/>
+              </a:effectRef>
+              <a:fontRef idx="minor">
+                <a:schemeClr val="lt1"/>
+              </a:fontRef>
+            </p:style>
+            <p:txBody>
+              <a:bodyPr rtlCol="0" anchor="ctr"/>
+              <a:lstStyle/>
+              <a:p>
+                <a:pPr algn="ctr"/>
+                <a:endParaRPr lang="ru-RU"/>
+              </a:p>
+            </p:txBody>
+          </p:sp>
+          <p:sp>
+            <p:nvSpPr>
+              <p:cNvPr id="39" name="Прямоугольник 38">
+                <a:extLst>
+                  <a:ext uri="{FF2B5EF4-FFF2-40B4-BE49-F238E27FC236}">
+                    <a16:creationId xmlns:a16="http://schemas.microsoft.com/office/drawing/2014/main" id="{11AE072C-5641-64D6-C4AD-274249347E34}"/>
+                  </a:ext>
+                </a:extLst>
+              </p:cNvPr>
+              <p:cNvSpPr/>
+              <p:nvPr/>
+            </p:nvSpPr>
+            <p:spPr>
+              <a:xfrm>
+                <a:off x="3107731" y="5518552"/>
+                <a:ext cx="180000" cy="180000"/>
+              </a:xfrm>
+              <a:prstGeom prst="rect">
+                <a:avLst/>
+              </a:prstGeom>
+              <a:solidFill>
+                <a:schemeClr val="tx1">
+                  <a:lumMod val="75000"/>
+                  <a:lumOff val="25000"/>
+                </a:schemeClr>
+              </a:solidFill>
+              <a:ln>
+                <a:noFill/>
+              </a:ln>
+            </p:spPr>
+            <p:style>
+              <a:lnRef idx="2">
+                <a:schemeClr val="accent1">
+                  <a:shade val="15000"/>
+                </a:schemeClr>
+              </a:lnRef>
+              <a:fillRef idx="1">
+                <a:schemeClr val="accent1"/>
+              </a:fillRef>
+              <a:effectRef idx="0">
+                <a:schemeClr val="accent1"/>
+              </a:effectRef>
+              <a:fontRef idx="minor">
+                <a:schemeClr val="lt1"/>
+              </a:fontRef>
+            </p:style>
+            <p:txBody>
+              <a:bodyPr rtlCol="0" anchor="ctr"/>
+              <a:lstStyle/>
+              <a:p>
+                <a:pPr algn="ctr"/>
+                <a:endParaRPr lang="ru-RU"/>
+              </a:p>
+            </p:txBody>
+          </p:sp>
+          <p:sp>
+            <p:nvSpPr>
+              <p:cNvPr id="40" name="Прямоугольник 39">
+                <a:extLst>
+                  <a:ext uri="{FF2B5EF4-FFF2-40B4-BE49-F238E27FC236}">
+                    <a16:creationId xmlns:a16="http://schemas.microsoft.com/office/drawing/2014/main" id="{C6A7B3C1-9E51-F11E-77E6-C4481D65F731}"/>
+                  </a:ext>
+                </a:extLst>
+              </p:cNvPr>
+              <p:cNvSpPr/>
+              <p:nvPr/>
+            </p:nvSpPr>
+            <p:spPr>
+              <a:xfrm>
+                <a:off x="2172874" y="5524154"/>
+                <a:ext cx="180000" cy="180000"/>
+              </a:xfrm>
+              <a:prstGeom prst="rect">
+                <a:avLst/>
+              </a:prstGeom>
+              <a:solidFill>
+                <a:schemeClr val="accent4">
+                  <a:lumMod val="50000"/>
+                </a:schemeClr>
+              </a:solidFill>
+              <a:ln>
+                <a:noFill/>
+              </a:ln>
+            </p:spPr>
+            <p:style>
+              <a:lnRef idx="2">
+                <a:schemeClr val="accent1">
+                  <a:shade val="15000"/>
+                </a:schemeClr>
+              </a:lnRef>
+              <a:fillRef idx="1">
+                <a:schemeClr val="accent1"/>
+              </a:fillRef>
+              <a:effectRef idx="0">
+                <a:schemeClr val="accent1"/>
+              </a:effectRef>
+              <a:fontRef idx="minor">
+                <a:schemeClr val="lt1"/>
+              </a:fontRef>
+            </p:style>
+            <p:txBody>
+              <a:bodyPr rtlCol="0" anchor="ctr"/>
+              <a:lstStyle/>
+              <a:p>
+                <a:pPr algn="ctr"/>
+                <a:endParaRPr lang="ru-RU"/>
+              </a:p>
+            </p:txBody>
+          </p:sp>
+          <p:sp>
+            <p:nvSpPr>
+              <p:cNvPr id="41" name="Прямоугольник 40">
+                <a:extLst>
+                  <a:ext uri="{FF2B5EF4-FFF2-40B4-BE49-F238E27FC236}">
+                    <a16:creationId xmlns:a16="http://schemas.microsoft.com/office/drawing/2014/main" id="{878DED23-F727-49F0-1B52-04B38F20AB1C}"/>
+                  </a:ext>
+                </a:extLst>
+              </p:cNvPr>
+              <p:cNvSpPr/>
+              <p:nvPr/>
+            </p:nvSpPr>
+            <p:spPr>
+              <a:xfrm>
+                <a:off x="2407824" y="5524154"/>
+                <a:ext cx="180000" cy="180000"/>
+              </a:xfrm>
+              <a:prstGeom prst="rect">
+                <a:avLst/>
+              </a:prstGeom>
+              <a:solidFill>
+                <a:schemeClr val="accent4">
+                  <a:lumMod val="75000"/>
+                </a:schemeClr>
+              </a:solidFill>
+              <a:ln>
+                <a:noFill/>
+              </a:ln>
+            </p:spPr>
+            <p:style>
+              <a:lnRef idx="2">
+                <a:schemeClr val="accent1">
+                  <a:shade val="15000"/>
+                </a:schemeClr>
+              </a:lnRef>
+              <a:fillRef idx="1">
+                <a:schemeClr val="accent1"/>
+              </a:fillRef>
+              <a:effectRef idx="0">
+                <a:schemeClr val="accent1"/>
+              </a:effectRef>
+              <a:fontRef idx="minor">
+                <a:schemeClr val="lt1"/>
+              </a:fontRef>
+            </p:style>
+            <p:txBody>
+              <a:bodyPr rtlCol="0" anchor="ctr"/>
+              <a:lstStyle/>
+              <a:p>
+                <a:pPr algn="ctr"/>
+                <a:endParaRPr lang="ru-RU"/>
+              </a:p>
+            </p:txBody>
+          </p:sp>
+          <p:sp>
+            <p:nvSpPr>
+              <p:cNvPr id="42" name="Прямоугольник 41">
+                <a:extLst>
+                  <a:ext uri="{FF2B5EF4-FFF2-40B4-BE49-F238E27FC236}">
+                    <a16:creationId xmlns:a16="http://schemas.microsoft.com/office/drawing/2014/main" id="{570F3D5D-C034-E0DD-7963-A7058B29F33C}"/>
+                  </a:ext>
+                </a:extLst>
+              </p:cNvPr>
+              <p:cNvSpPr/>
+              <p:nvPr/>
+            </p:nvSpPr>
+            <p:spPr>
+              <a:xfrm>
+                <a:off x="2642774" y="5524154"/>
+                <a:ext cx="180000" cy="180000"/>
+              </a:xfrm>
+              <a:prstGeom prst="rect">
+                <a:avLst/>
+              </a:prstGeom>
+              <a:solidFill>
+                <a:schemeClr val="accent4">
+                  <a:lumMod val="60000"/>
+                  <a:lumOff val="40000"/>
+                </a:schemeClr>
+              </a:solidFill>
+              <a:ln>
+                <a:noFill/>
+              </a:ln>
+            </p:spPr>
+            <p:style>
+              <a:lnRef idx="2">
+                <a:schemeClr val="accent1">
+                  <a:shade val="15000"/>
+                </a:schemeClr>
+              </a:lnRef>
+              <a:fillRef idx="1">
+                <a:schemeClr val="accent1"/>
+              </a:fillRef>
+              <a:effectRef idx="0">
+                <a:schemeClr val="accent1"/>
+              </a:effectRef>
+              <a:fontRef idx="minor">
+                <a:schemeClr val="lt1"/>
+              </a:fontRef>
+            </p:style>
+            <p:txBody>
+              <a:bodyPr rtlCol="0" anchor="ctr"/>
+              <a:lstStyle/>
+              <a:p>
+                <a:pPr algn="ctr"/>
+                <a:endParaRPr lang="ru-RU"/>
+              </a:p>
+            </p:txBody>
+          </p:sp>
+        </p:grpSp>
+        <p:sp>
+          <p:nvSpPr>
+            <p:cNvPr id="27" name="TextBox 26">
+              <a:extLst>
+                <a:ext uri="{FF2B5EF4-FFF2-40B4-BE49-F238E27FC236}">
+                  <a16:creationId xmlns:a16="http://schemas.microsoft.com/office/drawing/2014/main" id="{77139A60-D773-10B8-35F6-89607B535F4D}"/>
+                </a:ext>
+              </a:extLst>
+            </p:cNvPr>
+            <p:cNvSpPr txBox="1"/>
+            <p:nvPr/>
+          </p:nvSpPr>
+          <p:spPr>
+            <a:xfrm>
+              <a:off x="1787320" y="5439756"/>
+              <a:ext cx="304892" cy="338554"/>
+            </a:xfrm>
+            <a:prstGeom prst="rect">
+              <a:avLst/>
+            </a:prstGeom>
+            <a:noFill/>
+          </p:spPr>
+          <p:txBody>
+            <a:bodyPr wrap="none" rtlCol="0">
+              <a:spAutoFit/>
+            </a:bodyPr>
+            <a:lstStyle/>
+            <a:p>
+              <a:r>
+                <a:rPr lang="en-US" sz="1600" dirty="0">
+                  <a:solidFill>
+                    <a:schemeClr val="bg1"/>
+                  </a:solidFill>
+                  <a:latin typeface="Cascadia Mono" panose="020B0609020000020004" pitchFamily="49" charset="0"/>
+                  <a:ea typeface="Cascadia Mono" panose="020B0609020000020004" pitchFamily="49" charset="0"/>
+                  <a:cs typeface="Cascadia Mono" panose="020B0609020000020004" pitchFamily="49" charset="0"/>
+                </a:rPr>
+                <a:t>I</a:t>
+              </a:r>
+              <a:endParaRPr lang="ru-RU" sz="1600" dirty="0">
+                <a:solidFill>
+                  <a:schemeClr val="bg1"/>
+                </a:solidFill>
+                <a:latin typeface="Cascadia Mono" panose="020B0609020000020004" pitchFamily="49" charset="0"/>
+                <a:ea typeface="Cascadia Mono" panose="020B0609020000020004" pitchFamily="49" charset="0"/>
+                <a:cs typeface="Cascadia Mono" panose="020B0609020000020004" pitchFamily="49" charset="0"/>
+              </a:endParaRPr>
+            </a:p>
+          </p:txBody>
+        </p:sp>
+        <p:grpSp>
+          <p:nvGrpSpPr>
+            <p:cNvPr id="28" name="Группа 27">
+              <a:extLst>
+                <a:ext uri="{FF2B5EF4-FFF2-40B4-BE49-F238E27FC236}">
+                  <a16:creationId xmlns:a16="http://schemas.microsoft.com/office/drawing/2014/main" id="{E82FBD72-79AA-330C-459D-D6B675B8CCAC}"/>
+                </a:ext>
+              </a:extLst>
+            </p:cNvPr>
+            <p:cNvGrpSpPr/>
+            <p:nvPr/>
+          </p:nvGrpSpPr>
+          <p:grpSpPr>
+            <a:xfrm>
+              <a:off x="2172874" y="5862708"/>
+              <a:ext cx="1119800" cy="180000"/>
+              <a:chOff x="7544886" y="2447301"/>
+              <a:chExt cx="1119800" cy="180000"/>
+            </a:xfrm>
+          </p:grpSpPr>
+          <p:sp>
+            <p:nvSpPr>
+              <p:cNvPr id="33" name="Прямоугольник 32">
+                <a:extLst>
+                  <a:ext uri="{FF2B5EF4-FFF2-40B4-BE49-F238E27FC236}">
+                    <a16:creationId xmlns:a16="http://schemas.microsoft.com/office/drawing/2014/main" id="{C3380984-D2D4-151F-4CC1-A3909A6E1BFB}"/>
+                  </a:ext>
+                </a:extLst>
+              </p:cNvPr>
+              <p:cNvSpPr/>
+              <p:nvPr/>
+            </p:nvSpPr>
+            <p:spPr>
+              <a:xfrm>
+                <a:off x="7544886" y="2447301"/>
+                <a:ext cx="180000" cy="180000"/>
+              </a:xfrm>
+              <a:prstGeom prst="rect">
+                <a:avLst/>
+              </a:prstGeom>
+              <a:solidFill>
+                <a:schemeClr val="accent2">
+                  <a:lumMod val="50000"/>
+                </a:schemeClr>
+              </a:solidFill>
+              <a:ln>
+                <a:noFill/>
+              </a:ln>
+            </p:spPr>
+            <p:style>
+              <a:lnRef idx="2">
+                <a:schemeClr val="accent1">
+                  <a:shade val="15000"/>
+                </a:schemeClr>
+              </a:lnRef>
+              <a:fillRef idx="1">
+                <a:schemeClr val="accent1"/>
+              </a:fillRef>
+              <a:effectRef idx="0">
+                <a:schemeClr val="accent1"/>
+              </a:effectRef>
+              <a:fontRef idx="minor">
+                <a:schemeClr val="lt1"/>
+              </a:fontRef>
+            </p:style>
+            <p:txBody>
+              <a:bodyPr rtlCol="0" anchor="ctr"/>
+              <a:lstStyle/>
+              <a:p>
+                <a:pPr algn="ctr"/>
+                <a:endParaRPr lang="ru-RU"/>
+              </a:p>
+            </p:txBody>
+          </p:sp>
+          <p:sp>
+            <p:nvSpPr>
+              <p:cNvPr id="34" name="Прямоугольник 33">
+                <a:extLst>
+                  <a:ext uri="{FF2B5EF4-FFF2-40B4-BE49-F238E27FC236}">
+                    <a16:creationId xmlns:a16="http://schemas.microsoft.com/office/drawing/2014/main" id="{75912A2F-680E-5023-FA76-18219562F5F3}"/>
+                  </a:ext>
+                </a:extLst>
+              </p:cNvPr>
+              <p:cNvSpPr/>
+              <p:nvPr/>
+            </p:nvSpPr>
+            <p:spPr>
+              <a:xfrm>
+                <a:off x="7779836" y="2447301"/>
+                <a:ext cx="180000" cy="180000"/>
+              </a:xfrm>
+              <a:prstGeom prst="rect">
+                <a:avLst/>
+              </a:prstGeom>
+              <a:solidFill>
+                <a:schemeClr val="accent2">
+                  <a:lumMod val="75000"/>
+                </a:schemeClr>
+              </a:solidFill>
+              <a:ln>
+                <a:noFill/>
+              </a:ln>
+            </p:spPr>
+            <p:style>
+              <a:lnRef idx="2">
+                <a:schemeClr val="accent1">
+                  <a:shade val="15000"/>
+                </a:schemeClr>
+              </a:lnRef>
+              <a:fillRef idx="1">
+                <a:schemeClr val="accent1"/>
+              </a:fillRef>
+              <a:effectRef idx="0">
+                <a:schemeClr val="accent1"/>
+              </a:effectRef>
+              <a:fontRef idx="minor">
+                <a:schemeClr val="lt1"/>
+              </a:fontRef>
+            </p:style>
+            <p:txBody>
+              <a:bodyPr rtlCol="0" anchor="ctr"/>
+              <a:lstStyle/>
+              <a:p>
+                <a:pPr algn="ctr"/>
+                <a:endParaRPr lang="ru-RU"/>
+              </a:p>
+            </p:txBody>
+          </p:sp>
+          <p:sp>
+            <p:nvSpPr>
+              <p:cNvPr id="35" name="Прямоугольник 34">
+                <a:extLst>
+                  <a:ext uri="{FF2B5EF4-FFF2-40B4-BE49-F238E27FC236}">
+                    <a16:creationId xmlns:a16="http://schemas.microsoft.com/office/drawing/2014/main" id="{EA7B5EFB-4721-ECBD-F7D1-95B5007D01FC}"/>
+                  </a:ext>
+                </a:extLst>
+              </p:cNvPr>
+              <p:cNvSpPr/>
+              <p:nvPr/>
+            </p:nvSpPr>
+            <p:spPr>
+              <a:xfrm>
+                <a:off x="8014786" y="2447301"/>
+                <a:ext cx="180000" cy="180000"/>
+              </a:xfrm>
+              <a:prstGeom prst="rect">
+                <a:avLst/>
+              </a:prstGeom>
+              <a:solidFill>
+                <a:schemeClr val="accent2">
+                  <a:lumMod val="60000"/>
+                  <a:lumOff val="40000"/>
+                </a:schemeClr>
+              </a:solidFill>
+              <a:ln>
+                <a:noFill/>
+              </a:ln>
+            </p:spPr>
+            <p:style>
+              <a:lnRef idx="2">
+                <a:schemeClr val="accent1">
+                  <a:shade val="15000"/>
+                </a:schemeClr>
+              </a:lnRef>
+              <a:fillRef idx="1">
+                <a:schemeClr val="accent1"/>
+              </a:fillRef>
+              <a:effectRef idx="0">
+                <a:schemeClr val="accent1"/>
+              </a:effectRef>
+              <a:fontRef idx="minor">
+                <a:schemeClr val="lt1"/>
+              </a:fontRef>
+            </p:style>
+            <p:txBody>
+              <a:bodyPr rtlCol="0" anchor="ctr"/>
+              <a:lstStyle/>
+              <a:p>
+                <a:pPr algn="ctr"/>
+                <a:endParaRPr lang="ru-RU"/>
+              </a:p>
+            </p:txBody>
+          </p:sp>
+          <p:sp>
+            <p:nvSpPr>
+              <p:cNvPr id="36" name="Прямоугольник 35">
+                <a:extLst>
+                  <a:ext uri="{FF2B5EF4-FFF2-40B4-BE49-F238E27FC236}">
+                    <a16:creationId xmlns:a16="http://schemas.microsoft.com/office/drawing/2014/main" id="{BA8DF19A-ADF0-4F18-8BB6-6C8682EB968C}"/>
+                  </a:ext>
+                </a:extLst>
+              </p:cNvPr>
+              <p:cNvSpPr/>
+              <p:nvPr/>
+            </p:nvSpPr>
+            <p:spPr>
+              <a:xfrm>
+                <a:off x="8249736" y="2447301"/>
+                <a:ext cx="180000" cy="180000"/>
+              </a:xfrm>
+              <a:prstGeom prst="rect">
+                <a:avLst/>
+              </a:prstGeom>
+              <a:solidFill>
+                <a:schemeClr val="accent2">
+                  <a:lumMod val="40000"/>
+                  <a:lumOff val="60000"/>
+                </a:schemeClr>
+              </a:solidFill>
+              <a:ln>
+                <a:noFill/>
+              </a:ln>
+            </p:spPr>
+            <p:style>
+              <a:lnRef idx="2">
+                <a:schemeClr val="accent1">
+                  <a:shade val="15000"/>
+                </a:schemeClr>
+              </a:lnRef>
+              <a:fillRef idx="1">
+                <a:schemeClr val="accent1"/>
+              </a:fillRef>
+              <a:effectRef idx="0">
+                <a:schemeClr val="accent1"/>
+              </a:effectRef>
+              <a:fontRef idx="minor">
+                <a:schemeClr val="lt1"/>
+              </a:fontRef>
+            </p:style>
+            <p:txBody>
+              <a:bodyPr rtlCol="0" anchor="ctr"/>
+              <a:lstStyle/>
+              <a:p>
+                <a:pPr algn="ctr"/>
+                <a:endParaRPr lang="ru-RU"/>
+              </a:p>
+            </p:txBody>
+          </p:sp>
+          <p:sp>
+            <p:nvSpPr>
+              <p:cNvPr id="37" name="Прямоугольник 36">
+                <a:extLst>
+                  <a:ext uri="{FF2B5EF4-FFF2-40B4-BE49-F238E27FC236}">
+                    <a16:creationId xmlns:a16="http://schemas.microsoft.com/office/drawing/2014/main" id="{711E2975-9EE3-217B-98B5-317C4DCD9C6D}"/>
+                  </a:ext>
+                </a:extLst>
+              </p:cNvPr>
+              <p:cNvSpPr/>
+              <p:nvPr/>
+            </p:nvSpPr>
+            <p:spPr>
+              <a:xfrm>
+                <a:off x="8484686" y="2447301"/>
+                <a:ext cx="180000" cy="180000"/>
+              </a:xfrm>
+              <a:prstGeom prst="rect">
+                <a:avLst/>
+              </a:prstGeom>
+              <a:solidFill>
+                <a:schemeClr val="accent2">
+                  <a:lumMod val="20000"/>
+                  <a:lumOff val="80000"/>
+                </a:schemeClr>
+              </a:solidFill>
+              <a:ln>
+                <a:noFill/>
+              </a:ln>
+            </p:spPr>
+            <p:style>
+              <a:lnRef idx="2">
+                <a:schemeClr val="accent1">
+                  <a:shade val="15000"/>
+                </a:schemeClr>
+              </a:lnRef>
+              <a:fillRef idx="1">
+                <a:schemeClr val="accent1"/>
+              </a:fillRef>
+              <a:effectRef idx="0">
+                <a:schemeClr val="accent1"/>
+              </a:effectRef>
+              <a:fontRef idx="minor">
+                <a:schemeClr val="lt1"/>
+              </a:fontRef>
+            </p:style>
+            <p:txBody>
+              <a:bodyPr rtlCol="0" anchor="ctr"/>
+              <a:lstStyle/>
+              <a:p>
+                <a:pPr algn="ctr"/>
+                <a:endParaRPr lang="ru-RU" dirty="0"/>
+              </a:p>
+            </p:txBody>
+          </p:sp>
+        </p:grpSp>
+        <p:sp>
+          <p:nvSpPr>
+            <p:cNvPr id="29" name="TextBox 28">
+              <a:extLst>
+                <a:ext uri="{FF2B5EF4-FFF2-40B4-BE49-F238E27FC236}">
+                  <a16:creationId xmlns:a16="http://schemas.microsoft.com/office/drawing/2014/main" id="{4A678F07-6C02-589B-FEFE-7ED71FEEE545}"/>
+                </a:ext>
+              </a:extLst>
+            </p:cNvPr>
+            <p:cNvSpPr txBox="1"/>
+            <p:nvPr/>
+          </p:nvSpPr>
+          <p:spPr>
+            <a:xfrm>
+              <a:off x="1787320" y="5778310"/>
+              <a:ext cx="304892" cy="338554"/>
+            </a:xfrm>
+            <a:prstGeom prst="rect">
+              <a:avLst/>
+            </a:prstGeom>
+            <a:noFill/>
+          </p:spPr>
+          <p:txBody>
+            <a:bodyPr wrap="none" rtlCol="0">
+              <a:spAutoFit/>
+            </a:bodyPr>
+            <a:lstStyle/>
+            <a:p>
+              <a:r>
+                <a:rPr lang="en-US" sz="1600" dirty="0">
+                  <a:solidFill>
+                    <a:schemeClr val="bg1"/>
+                  </a:solidFill>
+                  <a:latin typeface="Cascadia Mono" panose="020B0609020000020004" pitchFamily="49" charset="0"/>
+                  <a:ea typeface="Cascadia Mono" panose="020B0609020000020004" pitchFamily="49" charset="0"/>
+                  <a:cs typeface="Cascadia Mono" panose="020B0609020000020004" pitchFamily="49" charset="0"/>
+                </a:rPr>
+                <a:t>T</a:t>
+              </a:r>
+              <a:endParaRPr lang="ru-RU" sz="1600" dirty="0">
+                <a:solidFill>
+                  <a:schemeClr val="bg1"/>
+                </a:solidFill>
+                <a:latin typeface="Cascadia Mono" panose="020B0609020000020004" pitchFamily="49" charset="0"/>
+                <a:ea typeface="Cascadia Mono" panose="020B0609020000020004" pitchFamily="49" charset="0"/>
+                <a:cs typeface="Cascadia Mono" panose="020B0609020000020004" pitchFamily="49" charset="0"/>
+              </a:endParaRPr>
+            </a:p>
+          </p:txBody>
+        </p:sp>
+        <p:sp>
+          <p:nvSpPr>
+            <p:cNvPr id="30" name="TextBox 29">
+              <a:extLst>
+                <a:ext uri="{FF2B5EF4-FFF2-40B4-BE49-F238E27FC236}">
+                  <a16:creationId xmlns:a16="http://schemas.microsoft.com/office/drawing/2014/main" id="{93DE412F-6AF0-E26C-81FC-2E897BE8A4A0}"/>
+                </a:ext>
+              </a:extLst>
+            </p:cNvPr>
+            <p:cNvSpPr txBox="1"/>
+            <p:nvPr/>
+          </p:nvSpPr>
+          <p:spPr>
+            <a:xfrm>
+              <a:off x="3292674" y="5101202"/>
+              <a:ext cx="665567" cy="338554"/>
+            </a:xfrm>
+            <a:prstGeom prst="rect">
+              <a:avLst/>
+            </a:prstGeom>
+            <a:noFill/>
+          </p:spPr>
+          <p:txBody>
+            <a:bodyPr wrap="none" rtlCol="0">
+              <a:spAutoFit/>
+            </a:bodyPr>
+            <a:lstStyle/>
+            <a:p>
+              <a:r>
+                <a:rPr lang="en-US" sz="1600" dirty="0">
+                  <a:solidFill>
+                    <a:schemeClr val="bg1"/>
+                  </a:solidFill>
+                  <a:latin typeface="Cascadia Mono" panose="020B0609020000020004" pitchFamily="49" charset="0"/>
+                  <a:ea typeface="Cascadia Mono" panose="020B0609020000020004" pitchFamily="49" charset="0"/>
+                  <a:cs typeface="Cascadia Mono" panose="020B0609020000020004" pitchFamily="49" charset="0"/>
+                </a:rPr>
+                <a:t>700V</a:t>
+              </a:r>
+              <a:endParaRPr lang="ru-RU" sz="1600" dirty="0">
+                <a:solidFill>
+                  <a:schemeClr val="bg1"/>
+                </a:solidFill>
+                <a:latin typeface="Cascadia Mono" panose="020B0609020000020004" pitchFamily="49" charset="0"/>
+                <a:ea typeface="Cascadia Mono" panose="020B0609020000020004" pitchFamily="49" charset="0"/>
+                <a:cs typeface="Cascadia Mono" panose="020B0609020000020004" pitchFamily="49" charset="0"/>
+              </a:endParaRPr>
+            </a:p>
+          </p:txBody>
+        </p:sp>
+        <p:sp>
+          <p:nvSpPr>
+            <p:cNvPr id="31" name="TextBox 30">
+              <a:extLst>
+                <a:ext uri="{FF2B5EF4-FFF2-40B4-BE49-F238E27FC236}">
+                  <a16:creationId xmlns:a16="http://schemas.microsoft.com/office/drawing/2014/main" id="{EAC2D62E-65EA-C173-F0C2-AE1D2B50428C}"/>
+                </a:ext>
+              </a:extLst>
+            </p:cNvPr>
+            <p:cNvSpPr txBox="1"/>
+            <p:nvPr/>
+          </p:nvSpPr>
+          <p:spPr>
+            <a:xfrm>
+              <a:off x="3292674" y="5439756"/>
+              <a:ext cx="665567" cy="338554"/>
+            </a:xfrm>
+            <a:prstGeom prst="rect">
+              <a:avLst/>
+            </a:prstGeom>
+            <a:noFill/>
+          </p:spPr>
+          <p:txBody>
+            <a:bodyPr wrap="none" rtlCol="0">
+              <a:spAutoFit/>
+            </a:bodyPr>
+            <a:lstStyle/>
+            <a:p>
+              <a:r>
+                <a:rPr lang="en-US" sz="1600" dirty="0">
+                  <a:solidFill>
+                    <a:schemeClr val="bg1"/>
+                  </a:solidFill>
+                  <a:latin typeface="Cascadia Mono" panose="020B0609020000020004" pitchFamily="49" charset="0"/>
+                  <a:ea typeface="Cascadia Mono" panose="020B0609020000020004" pitchFamily="49" charset="0"/>
+                  <a:cs typeface="Cascadia Mono" panose="020B0609020000020004" pitchFamily="49" charset="0"/>
+                </a:rPr>
+                <a:t>500A</a:t>
+              </a:r>
+              <a:endParaRPr lang="ru-RU" sz="1600" dirty="0">
+                <a:solidFill>
+                  <a:schemeClr val="bg1"/>
+                </a:solidFill>
+                <a:latin typeface="Cascadia Mono" panose="020B0609020000020004" pitchFamily="49" charset="0"/>
+                <a:ea typeface="Cascadia Mono" panose="020B0609020000020004" pitchFamily="49" charset="0"/>
+                <a:cs typeface="Cascadia Mono" panose="020B0609020000020004" pitchFamily="49" charset="0"/>
+              </a:endParaRPr>
+            </a:p>
+          </p:txBody>
+        </p:sp>
+        <p:sp>
+          <p:nvSpPr>
+            <p:cNvPr id="32" name="TextBox 31">
+              <a:extLst>
+                <a:ext uri="{FF2B5EF4-FFF2-40B4-BE49-F238E27FC236}">
+                  <a16:creationId xmlns:a16="http://schemas.microsoft.com/office/drawing/2014/main" id="{312E8D78-F557-FD53-0BB7-CA63B22AA952}"/>
+                </a:ext>
+              </a:extLst>
+            </p:cNvPr>
+            <p:cNvSpPr txBox="1"/>
+            <p:nvPr/>
+          </p:nvSpPr>
+          <p:spPr>
+            <a:xfrm>
+              <a:off x="3292674" y="5778310"/>
+              <a:ext cx="545342" cy="338554"/>
+            </a:xfrm>
+            <a:prstGeom prst="rect">
+              <a:avLst/>
+            </a:prstGeom>
+            <a:noFill/>
+          </p:spPr>
+          <p:txBody>
+            <a:bodyPr wrap="none" rtlCol="0">
+              <a:spAutoFit/>
+            </a:bodyPr>
+            <a:lstStyle/>
+            <a:p>
+              <a:r>
+                <a:rPr lang="ru-RU" sz="1600" dirty="0">
+                  <a:solidFill>
+                    <a:schemeClr val="bg1"/>
+                  </a:solidFill>
+                  <a:latin typeface="Cascadia Mono" panose="020B0609020000020004" pitchFamily="49" charset="0"/>
+                  <a:ea typeface="Cascadia Mono" panose="020B0609020000020004" pitchFamily="49" charset="0"/>
+                  <a:cs typeface="Cascadia Mono" panose="020B0609020000020004" pitchFamily="49" charset="0"/>
+                </a:rPr>
+                <a:t>7</a:t>
+              </a:r>
+              <a:r>
+                <a:rPr lang="en-US" sz="1600" dirty="0">
+                  <a:solidFill>
+                    <a:schemeClr val="bg1"/>
+                  </a:solidFill>
+                  <a:latin typeface="Cascadia Mono" panose="020B0609020000020004" pitchFamily="49" charset="0"/>
+                  <a:ea typeface="Cascadia Mono" panose="020B0609020000020004" pitchFamily="49" charset="0"/>
+                  <a:cs typeface="Cascadia Mono" panose="020B0609020000020004" pitchFamily="49" charset="0"/>
+                </a:rPr>
+                <a:t>0C</a:t>
+              </a:r>
+              <a:endParaRPr lang="ru-RU" sz="1600" dirty="0">
+                <a:solidFill>
+                  <a:schemeClr val="bg1"/>
+                </a:solidFill>
+                <a:latin typeface="Cascadia Mono" panose="020B0609020000020004" pitchFamily="49" charset="0"/>
+                <a:ea typeface="Cascadia Mono" panose="020B0609020000020004" pitchFamily="49" charset="0"/>
+                <a:cs typeface="Cascadia Mono" panose="020B0609020000020004" pitchFamily="49" charset="0"/>
+              </a:endParaRPr>
+            </a:p>
+          </p:txBody>
+        </p:sp>
+      </p:grpSp>
+      <p:sp>
+        <p:nvSpPr>
+          <p:cNvPr id="48" name="TextBox 47">
+            <a:extLst>
+              <a:ext uri="{FF2B5EF4-FFF2-40B4-BE49-F238E27FC236}">
+                <a16:creationId xmlns:a16="http://schemas.microsoft.com/office/drawing/2014/main" id="{AA318682-7EE6-78F4-B5F2-B9E3AF8A3DF9}"/>
+              </a:ext>
+            </a:extLst>
+          </p:cNvPr>
+          <p:cNvSpPr txBox="1"/>
+          <p:nvPr/>
+        </p:nvSpPr>
+        <p:spPr>
+          <a:xfrm>
+            <a:off x="9509327" y="551104"/>
+            <a:ext cx="1266693" cy="338554"/>
+          </a:xfrm>
+          <a:prstGeom prst="rect">
+            <a:avLst/>
+          </a:prstGeom>
+          <a:noFill/>
+        </p:spPr>
+        <p:txBody>
+          <a:bodyPr wrap="none" rtlCol="0">
+            <a:spAutoFit/>
+          </a:bodyPr>
+          <a:lstStyle/>
+          <a:p>
+            <a:r>
+              <a:rPr lang="en-US" sz="1600" dirty="0">
+                <a:solidFill>
+                  <a:schemeClr val="bg1"/>
+                </a:solidFill>
+                <a:latin typeface="Cascadia Mono" panose="020B0609020000020004" pitchFamily="49" charset="0"/>
+                <a:ea typeface="Cascadia Mono" panose="020B0609020000020004" pitchFamily="49" charset="0"/>
+                <a:cs typeface="Cascadia Mono" panose="020B0609020000020004" pitchFamily="49" charset="0"/>
+              </a:rPr>
+              <a:t>Converter</a:t>
+            </a:r>
+            <a:endParaRPr lang="ru-RU" sz="1600" dirty="0">
+              <a:solidFill>
+                <a:schemeClr val="bg1"/>
+              </a:solidFill>
+              <a:latin typeface="Cascadia Mono" panose="020B0609020000020004" pitchFamily="49" charset="0"/>
+              <a:ea typeface="Cascadia Mono" panose="020B0609020000020004" pitchFamily="49" charset="0"/>
+              <a:cs typeface="Cascadia Mono" panose="020B0609020000020004" pitchFamily="49" charset="0"/>
+            </a:endParaRPr>
+          </a:p>
+        </p:txBody>
+      </p:sp>
+      <p:sp>
+        <p:nvSpPr>
+          <p:cNvPr id="49" name="TextBox 48">
+            <a:extLst>
+              <a:ext uri="{FF2B5EF4-FFF2-40B4-BE49-F238E27FC236}">
+                <a16:creationId xmlns:a16="http://schemas.microsoft.com/office/drawing/2014/main" id="{D11BB100-94E9-638A-4145-4DBBD3AFA298}"/>
+              </a:ext>
+            </a:extLst>
+          </p:cNvPr>
+          <p:cNvSpPr txBox="1"/>
+          <p:nvPr/>
+        </p:nvSpPr>
+        <p:spPr>
+          <a:xfrm>
+            <a:off x="9509327" y="906669"/>
+            <a:ext cx="1773217" cy="338554"/>
+          </a:xfrm>
+          <a:prstGeom prst="rect">
+            <a:avLst/>
+          </a:prstGeom>
+          <a:noFill/>
+        </p:spPr>
+        <p:txBody>
+          <a:bodyPr wrap="square" rtlCol="0">
+            <a:spAutoFit/>
+          </a:bodyPr>
+          <a:lstStyle/>
+          <a:p>
+            <a:r>
+              <a:rPr lang="en-US" sz="1600" dirty="0">
+                <a:solidFill>
+                  <a:schemeClr val="bg1">
+                    <a:lumMod val="85000"/>
+                  </a:schemeClr>
+                </a:solidFill>
+                <a:latin typeface="Cascadia Mono" panose="020B0609020000020004" pitchFamily="49" charset="0"/>
+                <a:ea typeface="Cascadia Mono" panose="020B0609020000020004" pitchFamily="49" charset="0"/>
+                <a:cs typeface="Cascadia Mono" panose="020B0609020000020004" pitchFamily="49" charset="0"/>
+              </a:rPr>
+              <a:t>Mode: Charge </a:t>
+            </a:r>
+            <a:endParaRPr lang="ru-RU" sz="1600" dirty="0">
+              <a:solidFill>
+                <a:schemeClr val="bg1">
+                  <a:lumMod val="85000"/>
+                </a:schemeClr>
+              </a:solidFill>
+              <a:latin typeface="Cascadia Mono" panose="020B0609020000020004" pitchFamily="49" charset="0"/>
+              <a:ea typeface="Cascadia Mono" panose="020B0609020000020004" pitchFamily="49" charset="0"/>
+              <a:cs typeface="Cascadia Mono" panose="020B0609020000020004" pitchFamily="49" charset="0"/>
+            </a:endParaRPr>
+          </a:p>
+        </p:txBody>
+      </p:sp>
+      <p:sp>
+        <p:nvSpPr>
+          <p:cNvPr id="50" name="TextBox 49">
+            <a:extLst>
+              <a:ext uri="{FF2B5EF4-FFF2-40B4-BE49-F238E27FC236}">
+                <a16:creationId xmlns:a16="http://schemas.microsoft.com/office/drawing/2014/main" id="{EE2E9823-C943-F108-F092-CA8B93D05E62}"/>
+              </a:ext>
+            </a:extLst>
+          </p:cNvPr>
+          <p:cNvSpPr txBox="1"/>
+          <p:nvPr/>
+        </p:nvSpPr>
+        <p:spPr>
+          <a:xfrm>
+            <a:off x="9509327" y="1262234"/>
+            <a:ext cx="1146468" cy="338554"/>
+          </a:xfrm>
+          <a:prstGeom prst="rect">
+            <a:avLst/>
+          </a:prstGeom>
+          <a:noFill/>
+        </p:spPr>
+        <p:txBody>
+          <a:bodyPr wrap="none" rtlCol="0">
+            <a:spAutoFit/>
+          </a:bodyPr>
+          <a:lstStyle/>
+          <a:p>
+            <a:r>
+              <a:rPr lang="en-US" sz="1600" dirty="0">
+                <a:solidFill>
+                  <a:schemeClr val="bg1">
+                    <a:lumMod val="85000"/>
+                  </a:schemeClr>
+                </a:solidFill>
+                <a:latin typeface="Cascadia Mono" panose="020B0609020000020004" pitchFamily="49" charset="0"/>
+                <a:ea typeface="Cascadia Mono" panose="020B0609020000020004" pitchFamily="49" charset="0"/>
+                <a:cs typeface="Cascadia Mono" panose="020B0609020000020004" pitchFamily="49" charset="0"/>
+              </a:rPr>
+              <a:t>U1: 700V</a:t>
+            </a:r>
+            <a:endParaRPr lang="ru-RU" sz="1600" dirty="0">
+              <a:solidFill>
+                <a:schemeClr val="bg1">
+                  <a:lumMod val="85000"/>
+                </a:schemeClr>
+              </a:solidFill>
+              <a:latin typeface="Cascadia Mono" panose="020B0609020000020004" pitchFamily="49" charset="0"/>
+              <a:ea typeface="Cascadia Mono" panose="020B0609020000020004" pitchFamily="49" charset="0"/>
+              <a:cs typeface="Cascadia Mono" panose="020B0609020000020004" pitchFamily="49" charset="0"/>
+            </a:endParaRPr>
+          </a:p>
+        </p:txBody>
+      </p:sp>
+      <p:sp>
+        <p:nvSpPr>
+          <p:cNvPr id="51" name="TextBox 50">
+            <a:extLst>
+              <a:ext uri="{FF2B5EF4-FFF2-40B4-BE49-F238E27FC236}">
+                <a16:creationId xmlns:a16="http://schemas.microsoft.com/office/drawing/2014/main" id="{9C6FD039-5A8C-213D-D3D0-C0A51A27B932}"/>
+              </a:ext>
+            </a:extLst>
+          </p:cNvPr>
+          <p:cNvSpPr txBox="1"/>
+          <p:nvPr/>
+        </p:nvSpPr>
+        <p:spPr>
+          <a:xfrm>
+            <a:off x="11071427" y="1262234"/>
+            <a:ext cx="1146468" cy="338554"/>
+          </a:xfrm>
+          <a:prstGeom prst="rect">
+            <a:avLst/>
+          </a:prstGeom>
+          <a:noFill/>
+        </p:spPr>
+        <p:txBody>
+          <a:bodyPr wrap="none" rtlCol="0">
+            <a:spAutoFit/>
+          </a:bodyPr>
+          <a:lstStyle/>
+          <a:p>
+            <a:r>
+              <a:rPr lang="en-US" sz="1600" dirty="0">
+                <a:solidFill>
+                  <a:schemeClr val="bg1">
+                    <a:lumMod val="85000"/>
+                  </a:schemeClr>
+                </a:solidFill>
+                <a:latin typeface="Cascadia Mono" panose="020B0609020000020004" pitchFamily="49" charset="0"/>
+                <a:ea typeface="Cascadia Mono" panose="020B0609020000020004" pitchFamily="49" charset="0"/>
+                <a:cs typeface="Cascadia Mono" panose="020B0609020000020004" pitchFamily="49" charset="0"/>
+              </a:rPr>
+              <a:t>U2: 600V</a:t>
+            </a:r>
+            <a:endParaRPr lang="ru-RU" sz="1600" dirty="0">
+              <a:solidFill>
+                <a:schemeClr val="bg1">
+                  <a:lumMod val="85000"/>
+                </a:schemeClr>
+              </a:solidFill>
+              <a:latin typeface="Cascadia Mono" panose="020B0609020000020004" pitchFamily="49" charset="0"/>
+              <a:ea typeface="Cascadia Mono" panose="020B0609020000020004" pitchFamily="49" charset="0"/>
+              <a:cs typeface="Cascadia Mono" panose="020B0609020000020004" pitchFamily="49" charset="0"/>
+            </a:endParaRPr>
+          </a:p>
+        </p:txBody>
+      </p:sp>
+      <p:sp>
+        <p:nvSpPr>
+          <p:cNvPr id="52" name="TextBox 51">
+            <a:extLst>
+              <a:ext uri="{FF2B5EF4-FFF2-40B4-BE49-F238E27FC236}">
+                <a16:creationId xmlns:a16="http://schemas.microsoft.com/office/drawing/2014/main" id="{BB9A0255-5DEC-39A7-1DD9-281F802A25E5}"/>
+              </a:ext>
+            </a:extLst>
+          </p:cNvPr>
+          <p:cNvSpPr txBox="1"/>
+          <p:nvPr/>
+        </p:nvSpPr>
+        <p:spPr>
+          <a:xfrm>
+            <a:off x="10711165" y="1262234"/>
+            <a:ext cx="304892" cy="338554"/>
+          </a:xfrm>
+          <a:prstGeom prst="rect">
+            <a:avLst/>
+          </a:prstGeom>
+          <a:noFill/>
+        </p:spPr>
+        <p:txBody>
+          <a:bodyPr wrap="none" rtlCol="0">
+            <a:spAutoFit/>
+          </a:bodyPr>
+          <a:lstStyle/>
+          <a:p>
+            <a:r>
+              <a:rPr lang="en-US" sz="1600" dirty="0">
+                <a:solidFill>
+                  <a:schemeClr val="bg1">
+                    <a:lumMod val="85000"/>
+                  </a:schemeClr>
+                </a:solidFill>
+                <a:latin typeface="Cascadia Mono" panose="020B0609020000020004" pitchFamily="49" charset="0"/>
+                <a:ea typeface="Cascadia Mono" panose="020B0609020000020004" pitchFamily="49" charset="0"/>
+                <a:cs typeface="Cascadia Mono" panose="020B0609020000020004" pitchFamily="49" charset="0"/>
+              </a:rPr>
+              <a:t>&gt;</a:t>
+            </a:r>
+            <a:endParaRPr lang="ru-RU" sz="1600" dirty="0">
+              <a:solidFill>
+                <a:schemeClr val="bg1">
+                  <a:lumMod val="85000"/>
+                </a:schemeClr>
+              </a:solidFill>
+              <a:latin typeface="Cascadia Mono" panose="020B0609020000020004" pitchFamily="49" charset="0"/>
+              <a:ea typeface="Cascadia Mono" panose="020B0609020000020004" pitchFamily="49" charset="0"/>
+              <a:cs typeface="Cascadia Mono" panose="020B0609020000020004" pitchFamily="49" charset="0"/>
+            </a:endParaRPr>
+          </a:p>
+        </p:txBody>
+      </p:sp>
+      <p:sp>
+        <p:nvSpPr>
+          <p:cNvPr id="53" name="TextBox 52">
+            <a:extLst>
+              <a:ext uri="{FF2B5EF4-FFF2-40B4-BE49-F238E27FC236}">
+                <a16:creationId xmlns:a16="http://schemas.microsoft.com/office/drawing/2014/main" id="{BD5D29F1-E626-3A1D-A378-DC9FFDFECC32}"/>
+              </a:ext>
+            </a:extLst>
+          </p:cNvPr>
+          <p:cNvSpPr txBox="1"/>
+          <p:nvPr/>
+        </p:nvSpPr>
+        <p:spPr>
+          <a:xfrm>
+            <a:off x="9509327" y="1626187"/>
+            <a:ext cx="1146468" cy="338554"/>
+          </a:xfrm>
+          <a:prstGeom prst="rect">
+            <a:avLst/>
+          </a:prstGeom>
+          <a:noFill/>
+        </p:spPr>
+        <p:txBody>
+          <a:bodyPr wrap="none" rtlCol="0">
+            <a:spAutoFit/>
+          </a:bodyPr>
+          <a:lstStyle/>
+          <a:p>
+            <a:r>
+              <a:rPr lang="en-US" sz="1600" dirty="0">
+                <a:solidFill>
+                  <a:schemeClr val="bg1">
+                    <a:lumMod val="85000"/>
+                  </a:schemeClr>
+                </a:solidFill>
+                <a:latin typeface="Cascadia Mono" panose="020B0609020000020004" pitchFamily="49" charset="0"/>
+                <a:ea typeface="Cascadia Mono" panose="020B0609020000020004" pitchFamily="49" charset="0"/>
+                <a:cs typeface="Cascadia Mono" panose="020B0609020000020004" pitchFamily="49" charset="0"/>
+              </a:rPr>
+              <a:t>I1: 700A</a:t>
+            </a:r>
+            <a:endParaRPr lang="ru-RU" sz="1600" dirty="0">
+              <a:solidFill>
+                <a:schemeClr val="bg1">
+                  <a:lumMod val="85000"/>
+                </a:schemeClr>
+              </a:solidFill>
+              <a:latin typeface="Cascadia Mono" panose="020B0609020000020004" pitchFamily="49" charset="0"/>
+              <a:ea typeface="Cascadia Mono" panose="020B0609020000020004" pitchFamily="49" charset="0"/>
+              <a:cs typeface="Cascadia Mono" panose="020B0609020000020004" pitchFamily="49" charset="0"/>
+            </a:endParaRPr>
+          </a:p>
+        </p:txBody>
+      </p:sp>
+      <p:sp>
+        <p:nvSpPr>
+          <p:cNvPr id="54" name="TextBox 53">
+            <a:extLst>
+              <a:ext uri="{FF2B5EF4-FFF2-40B4-BE49-F238E27FC236}">
+                <a16:creationId xmlns:a16="http://schemas.microsoft.com/office/drawing/2014/main" id="{BD3A276A-A142-D636-A765-D585FF6F908D}"/>
+              </a:ext>
+            </a:extLst>
+          </p:cNvPr>
+          <p:cNvSpPr txBox="1"/>
+          <p:nvPr/>
+        </p:nvSpPr>
+        <p:spPr>
+          <a:xfrm>
+            <a:off x="11071427" y="1626187"/>
+            <a:ext cx="1146468" cy="338554"/>
+          </a:xfrm>
+          <a:prstGeom prst="rect">
+            <a:avLst/>
+          </a:prstGeom>
+          <a:noFill/>
+        </p:spPr>
+        <p:txBody>
+          <a:bodyPr wrap="none" rtlCol="0">
+            <a:spAutoFit/>
+          </a:bodyPr>
+          <a:lstStyle/>
+          <a:p>
+            <a:r>
+              <a:rPr lang="en-US" sz="1600" dirty="0">
+                <a:solidFill>
+                  <a:schemeClr val="bg1">
+                    <a:lumMod val="85000"/>
+                  </a:schemeClr>
+                </a:solidFill>
+                <a:latin typeface="Cascadia Mono" panose="020B0609020000020004" pitchFamily="49" charset="0"/>
+                <a:ea typeface="Cascadia Mono" panose="020B0609020000020004" pitchFamily="49" charset="0"/>
+                <a:cs typeface="Cascadia Mono" panose="020B0609020000020004" pitchFamily="49" charset="0"/>
+              </a:rPr>
+              <a:t>I2: 600A</a:t>
+            </a:r>
+            <a:endParaRPr lang="ru-RU" sz="1600" dirty="0">
+              <a:solidFill>
+                <a:schemeClr val="bg1">
+                  <a:lumMod val="85000"/>
+                </a:schemeClr>
+              </a:solidFill>
+              <a:latin typeface="Cascadia Mono" panose="020B0609020000020004" pitchFamily="49" charset="0"/>
+              <a:ea typeface="Cascadia Mono" panose="020B0609020000020004" pitchFamily="49" charset="0"/>
+              <a:cs typeface="Cascadia Mono" panose="020B0609020000020004" pitchFamily="49" charset="0"/>
+            </a:endParaRPr>
+          </a:p>
+        </p:txBody>
+      </p:sp>
+      <p:sp>
+        <p:nvSpPr>
+          <p:cNvPr id="55" name="TextBox 54">
+            <a:extLst>
+              <a:ext uri="{FF2B5EF4-FFF2-40B4-BE49-F238E27FC236}">
+                <a16:creationId xmlns:a16="http://schemas.microsoft.com/office/drawing/2014/main" id="{776C49C7-B8DA-959D-20F0-536D802430ED}"/>
+              </a:ext>
+            </a:extLst>
+          </p:cNvPr>
+          <p:cNvSpPr txBox="1"/>
+          <p:nvPr/>
+        </p:nvSpPr>
+        <p:spPr>
+          <a:xfrm>
+            <a:off x="10646311" y="1626187"/>
+            <a:ext cx="425116" cy="338554"/>
+          </a:xfrm>
+          <a:prstGeom prst="rect">
+            <a:avLst/>
+          </a:prstGeom>
+          <a:noFill/>
+        </p:spPr>
+        <p:txBody>
+          <a:bodyPr wrap="none" rtlCol="0">
+            <a:spAutoFit/>
+          </a:bodyPr>
+          <a:lstStyle/>
+          <a:p>
+            <a:r>
+              <a:rPr lang="en-US" sz="1600" dirty="0">
+                <a:solidFill>
+                  <a:schemeClr val="bg1">
+                    <a:lumMod val="85000"/>
+                  </a:schemeClr>
+                </a:solidFill>
+                <a:latin typeface="Cascadia Mono" panose="020B0609020000020004" pitchFamily="49" charset="0"/>
+                <a:ea typeface="Cascadia Mono" panose="020B0609020000020004" pitchFamily="49" charset="0"/>
+                <a:cs typeface="Cascadia Mono" panose="020B0609020000020004" pitchFamily="49" charset="0"/>
+              </a:rPr>
+              <a:t>-&gt;</a:t>
+            </a:r>
+            <a:endParaRPr lang="ru-RU" sz="1600" dirty="0">
+              <a:solidFill>
+                <a:schemeClr val="bg1">
+                  <a:lumMod val="85000"/>
+                </a:schemeClr>
+              </a:solidFill>
+              <a:latin typeface="Cascadia Mono" panose="020B0609020000020004" pitchFamily="49" charset="0"/>
+              <a:ea typeface="Cascadia Mono" panose="020B0609020000020004" pitchFamily="49" charset="0"/>
+              <a:cs typeface="Cascadia Mono" panose="020B0609020000020004" pitchFamily="49" charset="0"/>
+            </a:endParaRPr>
+          </a:p>
+        </p:txBody>
+      </p:sp>
+      <p:sp>
+        <p:nvSpPr>
+          <p:cNvPr id="56" name="TextBox 55">
+            <a:extLst>
+              <a:ext uri="{FF2B5EF4-FFF2-40B4-BE49-F238E27FC236}">
+                <a16:creationId xmlns:a16="http://schemas.microsoft.com/office/drawing/2014/main" id="{051B6BA1-798D-14DF-BDB1-9D1A6086EB86}"/>
+              </a:ext>
+            </a:extLst>
+          </p:cNvPr>
+          <p:cNvSpPr txBox="1"/>
+          <p:nvPr/>
+        </p:nvSpPr>
+        <p:spPr>
+          <a:xfrm>
+            <a:off x="8820287" y="4777418"/>
+            <a:ext cx="1627369" cy="584775"/>
+          </a:xfrm>
+          <a:prstGeom prst="rect">
+            <a:avLst/>
+          </a:prstGeom>
+          <a:noFill/>
+        </p:spPr>
+        <p:txBody>
+          <a:bodyPr wrap="none" rtlCol="0">
+            <a:spAutoFit/>
+          </a:bodyPr>
+          <a:lstStyle/>
+          <a:p>
+            <a:r>
+              <a:rPr lang="en-US" sz="1600" dirty="0">
+                <a:solidFill>
+                  <a:schemeClr val="bg1">
+                    <a:lumMod val="85000"/>
+                  </a:schemeClr>
+                </a:solidFill>
+                <a:latin typeface="Cascadia Mono" panose="020B0609020000020004" pitchFamily="49" charset="0"/>
+                <a:ea typeface="Cascadia Mono" panose="020B0609020000020004" pitchFamily="49" charset="0"/>
+                <a:cs typeface="Cascadia Mono" panose="020B0609020000020004" pitchFamily="49" charset="0"/>
+              </a:rPr>
+              <a:t>Contactor 1:</a:t>
+            </a:r>
+          </a:p>
+          <a:p>
+            <a:r>
+              <a:rPr lang="en-US" sz="1600" dirty="0">
+                <a:solidFill>
+                  <a:schemeClr val="bg1">
+                    <a:lumMod val="85000"/>
+                  </a:schemeClr>
+                </a:solidFill>
+                <a:latin typeface="Cascadia Mono" panose="020B0609020000020004" pitchFamily="49" charset="0"/>
+                <a:ea typeface="Cascadia Mono" panose="020B0609020000020004" pitchFamily="49" charset="0"/>
+                <a:cs typeface="Cascadia Mono" panose="020B0609020000020004" pitchFamily="49" charset="0"/>
+              </a:rPr>
+              <a:t>Closed</a:t>
+            </a:r>
+            <a:endParaRPr lang="ru-RU" sz="1600" dirty="0">
+              <a:solidFill>
+                <a:schemeClr val="bg1">
+                  <a:lumMod val="85000"/>
+                </a:schemeClr>
+              </a:solidFill>
+              <a:latin typeface="Cascadia Mono" panose="020B0609020000020004" pitchFamily="49" charset="0"/>
+              <a:ea typeface="Cascadia Mono" panose="020B0609020000020004" pitchFamily="49" charset="0"/>
+              <a:cs typeface="Cascadia Mono" panose="020B0609020000020004" pitchFamily="49" charset="0"/>
+            </a:endParaRPr>
+          </a:p>
+        </p:txBody>
+      </p:sp>
+      <p:sp>
+        <p:nvSpPr>
+          <p:cNvPr id="57" name="TextBox 56">
+            <a:extLst>
+              <a:ext uri="{FF2B5EF4-FFF2-40B4-BE49-F238E27FC236}">
+                <a16:creationId xmlns:a16="http://schemas.microsoft.com/office/drawing/2014/main" id="{83A753D6-A4F3-56B7-C8AE-4CEF3FE0F526}"/>
+              </a:ext>
+            </a:extLst>
+          </p:cNvPr>
+          <p:cNvSpPr txBox="1"/>
+          <p:nvPr/>
+        </p:nvSpPr>
+        <p:spPr>
+          <a:xfrm>
+            <a:off x="8820287" y="5450769"/>
+            <a:ext cx="1627369" cy="584775"/>
+          </a:xfrm>
+          <a:prstGeom prst="rect">
+            <a:avLst/>
+          </a:prstGeom>
+          <a:noFill/>
+        </p:spPr>
+        <p:txBody>
+          <a:bodyPr wrap="none" rtlCol="0">
+            <a:spAutoFit/>
+          </a:bodyPr>
+          <a:lstStyle/>
+          <a:p>
+            <a:r>
+              <a:rPr lang="en-US" sz="1600" dirty="0">
+                <a:solidFill>
+                  <a:schemeClr val="bg1">
+                    <a:lumMod val="85000"/>
+                  </a:schemeClr>
+                </a:solidFill>
+                <a:latin typeface="Cascadia Mono" panose="020B0609020000020004" pitchFamily="49" charset="0"/>
+                <a:ea typeface="Cascadia Mono" panose="020B0609020000020004" pitchFamily="49" charset="0"/>
+                <a:cs typeface="Cascadia Mono" panose="020B0609020000020004" pitchFamily="49" charset="0"/>
+              </a:rPr>
+              <a:t>Contactor 2:</a:t>
+            </a:r>
+          </a:p>
+          <a:p>
+            <a:r>
+              <a:rPr lang="en-US" sz="1600" dirty="0">
+                <a:solidFill>
+                  <a:schemeClr val="bg1">
+                    <a:lumMod val="85000"/>
+                  </a:schemeClr>
+                </a:solidFill>
+                <a:latin typeface="Cascadia Mono" panose="020B0609020000020004" pitchFamily="49" charset="0"/>
+                <a:ea typeface="Cascadia Mono" panose="020B0609020000020004" pitchFamily="49" charset="0"/>
+                <a:cs typeface="Cascadia Mono" panose="020B0609020000020004" pitchFamily="49" charset="0"/>
+              </a:rPr>
+              <a:t>Closed</a:t>
+            </a:r>
+            <a:endParaRPr lang="ru-RU" sz="1600" dirty="0">
+              <a:solidFill>
+                <a:schemeClr val="bg1">
+                  <a:lumMod val="85000"/>
+                </a:schemeClr>
+              </a:solidFill>
+              <a:latin typeface="Cascadia Mono" panose="020B0609020000020004" pitchFamily="49" charset="0"/>
+              <a:ea typeface="Cascadia Mono" panose="020B0609020000020004" pitchFamily="49" charset="0"/>
+              <a:cs typeface="Cascadia Mono" panose="020B0609020000020004" pitchFamily="49" charset="0"/>
+            </a:endParaRPr>
+          </a:p>
+        </p:txBody>
+      </p:sp>
     </p:spTree>
     <p:extLst>
       <p:ext uri="{BB962C8B-B14F-4D97-AF65-F5344CB8AC3E}">
